--- a/computer/database/database.pptx
+++ b/computer/database/database.pptx
@@ -5,7 +5,7 @@
     <p:sldMasterId id="2147483648" r:id="rId1"/>
   </p:sldMasterIdLst>
   <p:notesMasterIdLst>
-    <p:notesMasterId r:id="rId7"/>
+    <p:notesMasterId r:id="rId14"/>
   </p:notesMasterIdLst>
   <p:sldIdLst>
     <p:sldId id="256" r:id="rId2"/>
@@ -13,6 +13,13 @@
     <p:sldId id="258" r:id="rId4"/>
     <p:sldId id="259" r:id="rId5"/>
     <p:sldId id="260" r:id="rId6"/>
+    <p:sldId id="261" r:id="rId7"/>
+    <p:sldId id="262" r:id="rId8"/>
+    <p:sldId id="263" r:id="rId9"/>
+    <p:sldId id="264" r:id="rId10"/>
+    <p:sldId id="265" r:id="rId11"/>
+    <p:sldId id="266" r:id="rId12"/>
+    <p:sldId id="267" r:id="rId13"/>
   </p:sldIdLst>
   <p:sldSz cx="12192000" cy="6858000"/>
   <p:notesSz cx="6858000" cy="9144000"/>
@@ -201,7 +208,7 @@
           <a:p>
             <a:fld id="{4B34EB50-FBFF-D34A-A715-7643877794B6}" type="datetimeFigureOut">
               <a:rPr kumimoji="1" lang="zh-CN" altLang="en-US" smtClean="0"/>
-              <a:t>2025/12/13</a:t>
+              <a:t>2026/7/6</a:t>
             </a:fld>
             <a:endParaRPr kumimoji="1" lang="zh-CN" altLang="en-US"/>
           </a:p>
@@ -783,7 +790,7 @@
           <a:p>
             <a:fld id="{CC815592-B1F7-8B46-801D-F591E835BC0C}" type="datetimeFigureOut">
               <a:rPr kumimoji="1" lang="zh-CN" altLang="en-US" smtClean="0"/>
-              <a:t>2025/12/13</a:t>
+              <a:t>2026/7/6</a:t>
             </a:fld>
             <a:endParaRPr kumimoji="1" lang="zh-CN" altLang="en-US"/>
           </a:p>
@@ -981,7 +988,7 @@
           <a:p>
             <a:fld id="{CC815592-B1F7-8B46-801D-F591E835BC0C}" type="datetimeFigureOut">
               <a:rPr kumimoji="1" lang="zh-CN" altLang="en-US" smtClean="0"/>
-              <a:t>2025/12/13</a:t>
+              <a:t>2026/7/7</a:t>
             </a:fld>
             <a:endParaRPr kumimoji="1" lang="zh-CN" altLang="en-US"/>
           </a:p>
@@ -1189,7 +1196,7 @@
           <a:p>
             <a:fld id="{CC815592-B1F7-8B46-801D-F591E835BC0C}" type="datetimeFigureOut">
               <a:rPr kumimoji="1" lang="zh-CN" altLang="en-US" smtClean="0"/>
-              <a:t>2025/12/13</a:t>
+              <a:t>2026/7/7</a:t>
             </a:fld>
             <a:endParaRPr kumimoji="1" lang="zh-CN" altLang="en-US"/>
           </a:p>
@@ -1387,7 +1394,7 @@
           <a:p>
             <a:fld id="{CC815592-B1F7-8B46-801D-F591E835BC0C}" type="datetimeFigureOut">
               <a:rPr kumimoji="1" lang="zh-CN" altLang="en-US" smtClean="0"/>
-              <a:t>2025/12/13</a:t>
+              <a:t>2026/7/6</a:t>
             </a:fld>
             <a:endParaRPr kumimoji="1" lang="zh-CN" altLang="en-US"/>
           </a:p>
@@ -1662,7 +1669,7 @@
           <a:p>
             <a:fld id="{CC815592-B1F7-8B46-801D-F591E835BC0C}" type="datetimeFigureOut">
               <a:rPr kumimoji="1" lang="zh-CN" altLang="en-US" smtClean="0"/>
-              <a:t>2025/12/13</a:t>
+              <a:t>2026/7/7</a:t>
             </a:fld>
             <a:endParaRPr kumimoji="1" lang="zh-CN" altLang="en-US"/>
           </a:p>
@@ -1927,7 +1934,7 @@
           <a:p>
             <a:fld id="{CC815592-B1F7-8B46-801D-F591E835BC0C}" type="datetimeFigureOut">
               <a:rPr kumimoji="1" lang="zh-CN" altLang="en-US" smtClean="0"/>
-              <a:t>2025/12/13</a:t>
+              <a:t>2026/7/7</a:t>
             </a:fld>
             <a:endParaRPr kumimoji="1" lang="zh-CN" altLang="en-US"/>
           </a:p>
@@ -2339,7 +2346,7 @@
           <a:p>
             <a:fld id="{CC815592-B1F7-8B46-801D-F591E835BC0C}" type="datetimeFigureOut">
               <a:rPr kumimoji="1" lang="zh-CN" altLang="en-US" smtClean="0"/>
-              <a:t>2025/12/13</a:t>
+              <a:t>2026/7/7</a:t>
             </a:fld>
             <a:endParaRPr kumimoji="1" lang="zh-CN" altLang="en-US"/>
           </a:p>
@@ -2480,7 +2487,7 @@
           <a:p>
             <a:fld id="{CC815592-B1F7-8B46-801D-F591E835BC0C}" type="datetimeFigureOut">
               <a:rPr kumimoji="1" lang="zh-CN" altLang="en-US" smtClean="0"/>
-              <a:t>2025/12/13</a:t>
+              <a:t>2026/7/7</a:t>
             </a:fld>
             <a:endParaRPr kumimoji="1" lang="zh-CN" altLang="en-US"/>
           </a:p>
@@ -2593,7 +2600,7 @@
           <a:p>
             <a:fld id="{CC815592-B1F7-8B46-801D-F591E835BC0C}" type="datetimeFigureOut">
               <a:rPr kumimoji="1" lang="zh-CN" altLang="en-US" smtClean="0"/>
-              <a:t>2025/12/13</a:t>
+              <a:t>2026/7/7</a:t>
             </a:fld>
             <a:endParaRPr kumimoji="1" lang="zh-CN" altLang="en-US"/>
           </a:p>
@@ -2904,7 +2911,7 @@
           <a:p>
             <a:fld id="{CC815592-B1F7-8B46-801D-F591E835BC0C}" type="datetimeFigureOut">
               <a:rPr kumimoji="1" lang="zh-CN" altLang="en-US" smtClean="0"/>
-              <a:t>2025/12/13</a:t>
+              <a:t>2026/7/7</a:t>
             </a:fld>
             <a:endParaRPr kumimoji="1" lang="zh-CN" altLang="en-US"/>
           </a:p>
@@ -3192,7 +3199,7 @@
           <a:p>
             <a:fld id="{CC815592-B1F7-8B46-801D-F591E835BC0C}" type="datetimeFigureOut">
               <a:rPr kumimoji="1" lang="zh-CN" altLang="en-US" smtClean="0"/>
-              <a:t>2025/12/13</a:t>
+              <a:t>2026/7/7</a:t>
             </a:fld>
             <a:endParaRPr kumimoji="1" lang="zh-CN" altLang="en-US"/>
           </a:p>
@@ -3433,7 +3440,7 @@
           <a:p>
             <a:fld id="{CC815592-B1F7-8B46-801D-F591E835BC0C}" type="datetimeFigureOut">
               <a:rPr kumimoji="1" lang="zh-CN" altLang="en-US" smtClean="0"/>
-              <a:t>2025/12/13</a:t>
+              <a:t>2026/7/6</a:t>
             </a:fld>
             <a:endParaRPr kumimoji="1" lang="zh-CN" altLang="en-US"/>
           </a:p>
@@ -20877,6 +20884,114 @@
     <p:extLst>
       <p:ext uri="{BB962C8B-B14F-4D97-AF65-F5344CB8AC3E}">
         <p14:creationId xmlns:p14="http://schemas.microsoft.com/office/powerpoint/2010/main" val="3977137623"/>
+      </p:ext>
+    </p:extLst>
+  </p:cSld>
+  <p:clrMapOvr>
+    <a:masterClrMapping/>
+  </p:clrMapOvr>
+</p:sld>
+</file>
+
+<file path=ppt/slides/slide10.xml><?xml version="1.0" encoding="utf-8"?>
+<p:sld xmlns:a="http://schemas.openxmlformats.org/drawingml/2006/main" xmlns:r="http://schemas.openxmlformats.org/officeDocument/2006/relationships" xmlns:p="http://schemas.openxmlformats.org/presentationml/2006/main">
+  <p:cSld>
+    <p:spTree>
+      <p:nvGrpSpPr>
+        <p:cNvPr id="1" name="">
+          <a:extLst>
+            <a:ext uri="{FF2B5EF4-FFF2-40B4-BE49-F238E27FC236}">
+              <a16:creationId xmlns:a16="http://schemas.microsoft.com/office/drawing/2014/main" id="{414B79CD-6271-6862-9087-9BECBF12180B}"/>
+            </a:ext>
+          </a:extLst>
+        </p:cNvPr>
+        <p:cNvGrpSpPr/>
+        <p:nvPr/>
+      </p:nvGrpSpPr>
+      <p:grpSpPr>
+        <a:xfrm>
+          <a:off x="0" y="0"/>
+          <a:ext cx="0" cy="0"/>
+          <a:chOff x="0" y="0"/>
+          <a:chExt cx="0" cy="0"/>
+        </a:xfrm>
+      </p:grpSpPr>
+    </p:spTree>
+    <p:extLst>
+      <p:ext uri="{BB962C8B-B14F-4D97-AF65-F5344CB8AC3E}">
+        <p14:creationId xmlns:p14="http://schemas.microsoft.com/office/powerpoint/2010/main" val="4112531508"/>
+      </p:ext>
+    </p:extLst>
+  </p:cSld>
+  <p:clrMapOvr>
+    <a:masterClrMapping/>
+  </p:clrMapOvr>
+</p:sld>
+</file>
+
+<file path=ppt/slides/slide11.xml><?xml version="1.0" encoding="utf-8"?>
+<p:sld xmlns:a="http://schemas.openxmlformats.org/drawingml/2006/main" xmlns:r="http://schemas.openxmlformats.org/officeDocument/2006/relationships" xmlns:p="http://schemas.openxmlformats.org/presentationml/2006/main">
+  <p:cSld>
+    <p:spTree>
+      <p:nvGrpSpPr>
+        <p:cNvPr id="1" name="">
+          <a:extLst>
+            <a:ext uri="{FF2B5EF4-FFF2-40B4-BE49-F238E27FC236}">
+              <a16:creationId xmlns:a16="http://schemas.microsoft.com/office/drawing/2014/main" id="{E542D565-7CAE-55D0-B81F-CDF72A31DA10}"/>
+            </a:ext>
+          </a:extLst>
+        </p:cNvPr>
+        <p:cNvGrpSpPr/>
+        <p:nvPr/>
+      </p:nvGrpSpPr>
+      <p:grpSpPr>
+        <a:xfrm>
+          <a:off x="0" y="0"/>
+          <a:ext cx="0" cy="0"/>
+          <a:chOff x="0" y="0"/>
+          <a:chExt cx="0" cy="0"/>
+        </a:xfrm>
+      </p:grpSpPr>
+    </p:spTree>
+    <p:extLst>
+      <p:ext uri="{BB962C8B-B14F-4D97-AF65-F5344CB8AC3E}">
+        <p14:creationId xmlns:p14="http://schemas.microsoft.com/office/powerpoint/2010/main" val="409819478"/>
+      </p:ext>
+    </p:extLst>
+  </p:cSld>
+  <p:clrMapOvr>
+    <a:masterClrMapping/>
+  </p:clrMapOvr>
+</p:sld>
+</file>
+
+<file path=ppt/slides/slide12.xml><?xml version="1.0" encoding="utf-8"?>
+<p:sld xmlns:a="http://schemas.openxmlformats.org/drawingml/2006/main" xmlns:r="http://schemas.openxmlformats.org/officeDocument/2006/relationships" xmlns:p="http://schemas.openxmlformats.org/presentationml/2006/main">
+  <p:cSld>
+    <p:spTree>
+      <p:nvGrpSpPr>
+        <p:cNvPr id="1" name="">
+          <a:extLst>
+            <a:ext uri="{FF2B5EF4-FFF2-40B4-BE49-F238E27FC236}">
+              <a16:creationId xmlns:a16="http://schemas.microsoft.com/office/drawing/2014/main" id="{5A98673C-C266-F13A-C010-A5A00CE6218F}"/>
+            </a:ext>
+          </a:extLst>
+        </p:cNvPr>
+        <p:cNvGrpSpPr/>
+        <p:nvPr/>
+      </p:nvGrpSpPr>
+      <p:grpSpPr>
+        <a:xfrm>
+          <a:off x="0" y="0"/>
+          <a:ext cx="0" cy="0"/>
+          <a:chOff x="0" y="0"/>
+          <a:chExt cx="0" cy="0"/>
+        </a:xfrm>
+      </p:grpSpPr>
+    </p:spTree>
+    <p:extLst>
+      <p:ext uri="{BB962C8B-B14F-4D97-AF65-F5344CB8AC3E}">
+        <p14:creationId xmlns:p14="http://schemas.microsoft.com/office/powerpoint/2010/main" val="3831532876"/>
       </p:ext>
     </p:extLst>
   </p:cSld>
@@ -24952,10 +25067,8681 @@
           <a:chExt cx="0" cy="0"/>
         </a:xfrm>
       </p:grpSpPr>
+      <p:graphicFrame>
+        <p:nvGraphicFramePr>
+          <p:cNvPr id="2" name="表格 1">
+            <a:extLst>
+              <a:ext uri="{FF2B5EF4-FFF2-40B4-BE49-F238E27FC236}">
+                <a16:creationId xmlns:a16="http://schemas.microsoft.com/office/drawing/2014/main" id="{A8B99615-D514-3431-9E2C-B7B5BE475551}"/>
+              </a:ext>
+            </a:extLst>
+          </p:cNvPr>
+          <p:cNvGraphicFramePr>
+            <a:graphicFrameLocks noGrp="1"/>
+          </p:cNvGraphicFramePr>
+          <p:nvPr>
+            <p:extLst>
+              <p:ext uri="{D42A27DB-BD31-4B8C-83A1-F6EECF244321}">
+                <p14:modId xmlns:p14="http://schemas.microsoft.com/office/powerpoint/2010/main" val="2005150751"/>
+              </p:ext>
+            </p:extLst>
+          </p:nvPr>
+        </p:nvGraphicFramePr>
+        <p:xfrm>
+          <a:off x="469418" y="854652"/>
+          <a:ext cx="896395" cy="3785408"/>
+        </p:xfrm>
+        <a:graphic>
+          <a:graphicData uri="http://schemas.openxmlformats.org/drawingml/2006/table">
+            <a:tbl>
+              <a:tblPr firstRow="1" bandRow="1">
+                <a:tableStyleId>{69012ECD-51FC-41F1-AA8D-1B2483CD663E}</a:tableStyleId>
+              </a:tblPr>
+              <a:tblGrid>
+                <a:gridCol w="896395">
+                  <a:extLst>
+                    <a:ext uri="{9D8B030D-6E8A-4147-A177-3AD203B41FA5}">
+                      <a16:colId xmlns:a16="http://schemas.microsoft.com/office/drawing/2014/main" val="358739297"/>
+                    </a:ext>
+                  </a:extLst>
+                </a:gridCol>
+              </a:tblGrid>
+              <a:tr h="473176">
+                <a:tc>
+                  <a:txBody>
+                    <a:bodyPr/>
+                    <a:lstStyle/>
+                    <a:p>
+                      <a:r>
+                        <a:rPr lang="zh-CN" altLang="en-US" b="0" dirty="0">
+                          <a:solidFill>
+                            <a:schemeClr val="tx1"/>
+                          </a:solidFill>
+                        </a:rPr>
+                        <a:t>记录</a:t>
+                      </a:r>
+                      <a:r>
+                        <a:rPr lang="en-US" altLang="zh-CN" b="0" dirty="0">
+                          <a:solidFill>
+                            <a:schemeClr val="tx1"/>
+                          </a:solidFill>
+                        </a:rPr>
+                        <a:t>1</a:t>
+                      </a:r>
+                      <a:endParaRPr lang="zh-CN" altLang="en-US" b="0" dirty="0">
+                        <a:solidFill>
+                          <a:schemeClr val="tx1"/>
+                        </a:solidFill>
+                      </a:endParaRPr>
+                    </a:p>
+                  </a:txBody>
+                  <a:tcPr>
+                    <a:solidFill>
+                      <a:schemeClr val="bg1"/>
+                    </a:solidFill>
+                  </a:tcPr>
+                </a:tc>
+                <a:extLst>
+                  <a:ext uri="{0D108BD9-81ED-4DB2-BD59-A6C34878D82A}">
+                    <a16:rowId xmlns:a16="http://schemas.microsoft.com/office/drawing/2014/main" val="1730944333"/>
+                  </a:ext>
+                </a:extLst>
+              </a:tr>
+              <a:tr h="473176">
+                <a:tc>
+                  <a:txBody>
+                    <a:bodyPr/>
+                    <a:lstStyle/>
+                    <a:p>
+                      <a:r>
+                        <a:rPr lang="zh-CN" altLang="en-US" dirty="0"/>
+                        <a:t>记录</a:t>
+                      </a:r>
+                      <a:r>
+                        <a:rPr lang="en-US" altLang="zh-CN" dirty="0"/>
+                        <a:t>4</a:t>
+                      </a:r>
+                      <a:endParaRPr lang="zh-CN" altLang="en-US" dirty="0"/>
+                    </a:p>
+                  </a:txBody>
+                  <a:tcPr/>
+                </a:tc>
+                <a:extLst>
+                  <a:ext uri="{0D108BD9-81ED-4DB2-BD59-A6C34878D82A}">
+                    <a16:rowId xmlns:a16="http://schemas.microsoft.com/office/drawing/2014/main" val="1969263788"/>
+                  </a:ext>
+                </a:extLst>
+              </a:tr>
+              <a:tr h="473176">
+                <a:tc>
+                  <a:txBody>
+                    <a:bodyPr/>
+                    <a:lstStyle/>
+                    <a:p>
+                      <a:r>
+                        <a:rPr lang="zh-CN" altLang="en-US" dirty="0"/>
+                        <a:t>记录</a:t>
+                      </a:r>
+                      <a:r>
+                        <a:rPr lang="en-US" altLang="zh-CN" dirty="0"/>
+                        <a:t>2</a:t>
+                      </a:r>
+                      <a:endParaRPr lang="zh-CN" altLang="en-US" dirty="0"/>
+                    </a:p>
+                  </a:txBody>
+                  <a:tcPr/>
+                </a:tc>
+                <a:extLst>
+                  <a:ext uri="{0D108BD9-81ED-4DB2-BD59-A6C34878D82A}">
+                    <a16:rowId xmlns:a16="http://schemas.microsoft.com/office/drawing/2014/main" val="4059512138"/>
+                  </a:ext>
+                </a:extLst>
+              </a:tr>
+              <a:tr h="473176">
+                <a:tc>
+                  <a:txBody>
+                    <a:bodyPr/>
+                    <a:lstStyle/>
+                    <a:p>
+                      <a:r>
+                        <a:rPr lang="zh-CN" altLang="en-US" dirty="0">
+                          <a:solidFill>
+                            <a:schemeClr val="bg1"/>
+                          </a:solidFill>
+                        </a:rPr>
+                        <a:t>被删除</a:t>
+                      </a:r>
+                    </a:p>
+                  </a:txBody>
+                  <a:tcPr>
+                    <a:solidFill>
+                      <a:schemeClr val="tx1"/>
+                    </a:solidFill>
+                  </a:tcPr>
+                </a:tc>
+                <a:extLst>
+                  <a:ext uri="{0D108BD9-81ED-4DB2-BD59-A6C34878D82A}">
+                    <a16:rowId xmlns:a16="http://schemas.microsoft.com/office/drawing/2014/main" val="1159541786"/>
+                  </a:ext>
+                </a:extLst>
+              </a:tr>
+              <a:tr h="473176">
+                <a:tc>
+                  <a:txBody>
+                    <a:bodyPr/>
+                    <a:lstStyle/>
+                    <a:p>
+                      <a:r>
+                        <a:rPr lang="zh-CN" altLang="en-US" dirty="0"/>
+                        <a:t>记录</a:t>
+                      </a:r>
+                      <a:r>
+                        <a:rPr lang="en-US" altLang="zh-CN" dirty="0"/>
+                        <a:t>7</a:t>
+                      </a:r>
+                      <a:endParaRPr lang="zh-CN" altLang="en-US" dirty="0"/>
+                    </a:p>
+                  </a:txBody>
+                  <a:tcPr/>
+                </a:tc>
+                <a:extLst>
+                  <a:ext uri="{0D108BD9-81ED-4DB2-BD59-A6C34878D82A}">
+                    <a16:rowId xmlns:a16="http://schemas.microsoft.com/office/drawing/2014/main" val="2440897012"/>
+                  </a:ext>
+                </a:extLst>
+              </a:tr>
+              <a:tr h="473176">
+                <a:tc>
+                  <a:txBody>
+                    <a:bodyPr/>
+                    <a:lstStyle/>
+                    <a:p>
+                      <a:r>
+                        <a:rPr lang="zh-CN" altLang="en-US" dirty="0"/>
+                        <a:t>记录</a:t>
+                      </a:r>
+                      <a:r>
+                        <a:rPr lang="en-US" altLang="zh-CN" dirty="0"/>
+                        <a:t>5</a:t>
+                      </a:r>
+                      <a:endParaRPr lang="zh-CN" altLang="en-US" dirty="0"/>
+                    </a:p>
+                  </a:txBody>
+                  <a:tcPr/>
+                </a:tc>
+                <a:extLst>
+                  <a:ext uri="{0D108BD9-81ED-4DB2-BD59-A6C34878D82A}">
+                    <a16:rowId xmlns:a16="http://schemas.microsoft.com/office/drawing/2014/main" val="484434794"/>
+                  </a:ext>
+                </a:extLst>
+              </a:tr>
+              <a:tr h="473176">
+                <a:tc>
+                  <a:txBody>
+                    <a:bodyPr/>
+                    <a:lstStyle/>
+                    <a:p>
+                      <a:r>
+                        <a:rPr lang="zh-CN" altLang="en-US" dirty="0">
+                          <a:solidFill>
+                            <a:schemeClr val="bg1"/>
+                          </a:solidFill>
+                        </a:rPr>
+                        <a:t>被删除</a:t>
+                      </a:r>
+                    </a:p>
+                  </a:txBody>
+                  <a:tcPr>
+                    <a:solidFill>
+                      <a:schemeClr val="tx1"/>
+                    </a:solidFill>
+                  </a:tcPr>
+                </a:tc>
+                <a:extLst>
+                  <a:ext uri="{0D108BD9-81ED-4DB2-BD59-A6C34878D82A}">
+                    <a16:rowId xmlns:a16="http://schemas.microsoft.com/office/drawing/2014/main" val="3683910222"/>
+                  </a:ext>
+                </a:extLst>
+              </a:tr>
+              <a:tr h="473176">
+                <a:tc>
+                  <a:txBody>
+                    <a:bodyPr/>
+                    <a:lstStyle/>
+                    <a:p>
+                      <a:r>
+                        <a:rPr lang="zh-CN" altLang="en-US" dirty="0"/>
+                        <a:t>记录</a:t>
+                      </a:r>
+                      <a:r>
+                        <a:rPr lang="en-US" altLang="zh-CN" dirty="0"/>
+                        <a:t>6</a:t>
+                      </a:r>
+                      <a:endParaRPr lang="zh-CN" altLang="en-US" dirty="0"/>
+                    </a:p>
+                  </a:txBody>
+                  <a:tcPr/>
+                </a:tc>
+                <a:extLst>
+                  <a:ext uri="{0D108BD9-81ED-4DB2-BD59-A6C34878D82A}">
+                    <a16:rowId xmlns:a16="http://schemas.microsoft.com/office/drawing/2014/main" val="1540745664"/>
+                  </a:ext>
+                </a:extLst>
+              </a:tr>
+            </a:tbl>
+          </a:graphicData>
+        </a:graphic>
+      </p:graphicFrame>
+      <p:graphicFrame>
+        <p:nvGraphicFramePr>
+          <p:cNvPr id="3" name="表格 2">
+            <a:extLst>
+              <a:ext uri="{FF2B5EF4-FFF2-40B4-BE49-F238E27FC236}">
+                <a16:creationId xmlns:a16="http://schemas.microsoft.com/office/drawing/2014/main" id="{5DFA6B61-71DD-4A70-86BC-B64B5F12E3DE}"/>
+              </a:ext>
+            </a:extLst>
+          </p:cNvPr>
+          <p:cNvGraphicFramePr>
+            <a:graphicFrameLocks noGrp="1"/>
+          </p:cNvGraphicFramePr>
+          <p:nvPr>
+            <p:extLst>
+              <p:ext uri="{D42A27DB-BD31-4B8C-83A1-F6EECF244321}">
+                <p14:modId xmlns:p14="http://schemas.microsoft.com/office/powerpoint/2010/main" val="383979524"/>
+              </p:ext>
+            </p:extLst>
+          </p:nvPr>
+        </p:nvGraphicFramePr>
+        <p:xfrm>
+          <a:off x="2032000" y="854649"/>
+          <a:ext cx="896395" cy="3785409"/>
+        </p:xfrm>
+        <a:graphic>
+          <a:graphicData uri="http://schemas.openxmlformats.org/drawingml/2006/table">
+            <a:tbl>
+              <a:tblPr firstRow="1" bandRow="1">
+                <a:tableStyleId>{69012ECD-51FC-41F1-AA8D-1B2483CD663E}</a:tableStyleId>
+              </a:tblPr>
+              <a:tblGrid>
+                <a:gridCol w="896395">
+                  <a:extLst>
+                    <a:ext uri="{9D8B030D-6E8A-4147-A177-3AD203B41FA5}">
+                      <a16:colId xmlns:a16="http://schemas.microsoft.com/office/drawing/2014/main" val="1219010009"/>
+                    </a:ext>
+                  </a:extLst>
+                </a:gridCol>
+              </a:tblGrid>
+              <a:tr h="420601">
+                <a:tc>
+                  <a:txBody>
+                    <a:bodyPr/>
+                    <a:lstStyle/>
+                    <a:p>
+                      <a:r>
+                        <a:rPr lang="zh-CN" altLang="en-US" b="0" dirty="0">
+                          <a:solidFill>
+                            <a:schemeClr val="tx1"/>
+                          </a:solidFill>
+                        </a:rPr>
+                        <a:t>记录</a:t>
+                      </a:r>
+                      <a:r>
+                        <a:rPr lang="en-US" altLang="zh-CN" b="0" dirty="0">
+                          <a:solidFill>
+                            <a:schemeClr val="tx1"/>
+                          </a:solidFill>
+                        </a:rPr>
+                        <a:t>1</a:t>
+                      </a:r>
+                      <a:endParaRPr lang="zh-CN" altLang="en-US" b="0" dirty="0">
+                        <a:solidFill>
+                          <a:schemeClr val="tx1"/>
+                        </a:solidFill>
+                      </a:endParaRPr>
+                    </a:p>
+                  </a:txBody>
+                  <a:tcPr>
+                    <a:solidFill>
+                      <a:schemeClr val="bg1"/>
+                    </a:solidFill>
+                  </a:tcPr>
+                </a:tc>
+                <a:extLst>
+                  <a:ext uri="{0D108BD9-81ED-4DB2-BD59-A6C34878D82A}">
+                    <a16:rowId xmlns:a16="http://schemas.microsoft.com/office/drawing/2014/main" val="270129489"/>
+                  </a:ext>
+                </a:extLst>
+              </a:tr>
+              <a:tr h="420601">
+                <a:tc>
+                  <a:txBody>
+                    <a:bodyPr/>
+                    <a:lstStyle/>
+                    <a:p>
+                      <a:r>
+                        <a:rPr lang="zh-CN" altLang="en-US" dirty="0"/>
+                        <a:t>记录</a:t>
+                      </a:r>
+                      <a:r>
+                        <a:rPr lang="en-US" altLang="zh-CN" dirty="0"/>
+                        <a:t>2</a:t>
+                      </a:r>
+                      <a:endParaRPr lang="zh-CN" altLang="en-US" dirty="0"/>
+                    </a:p>
+                  </a:txBody>
+                  <a:tcPr/>
+                </a:tc>
+                <a:extLst>
+                  <a:ext uri="{0D108BD9-81ED-4DB2-BD59-A6C34878D82A}">
+                    <a16:rowId xmlns:a16="http://schemas.microsoft.com/office/drawing/2014/main" val="1696516838"/>
+                  </a:ext>
+                </a:extLst>
+              </a:tr>
+              <a:tr h="420601">
+                <a:tc>
+                  <a:txBody>
+                    <a:bodyPr/>
+                    <a:lstStyle/>
+                    <a:p>
+                      <a:r>
+                        <a:rPr lang="zh-CN" altLang="en-US" dirty="0"/>
+                        <a:t>记录</a:t>
+                      </a:r>
+                      <a:r>
+                        <a:rPr lang="en-US" altLang="zh-CN" dirty="0"/>
+                        <a:t>4</a:t>
+                      </a:r>
+                      <a:endParaRPr lang="zh-CN" altLang="en-US" dirty="0"/>
+                    </a:p>
+                  </a:txBody>
+                  <a:tcPr/>
+                </a:tc>
+                <a:extLst>
+                  <a:ext uri="{0D108BD9-81ED-4DB2-BD59-A6C34878D82A}">
+                    <a16:rowId xmlns:a16="http://schemas.microsoft.com/office/drawing/2014/main" val="4027148465"/>
+                  </a:ext>
+                </a:extLst>
+              </a:tr>
+              <a:tr h="420601">
+                <a:tc>
+                  <a:txBody>
+                    <a:bodyPr/>
+                    <a:lstStyle/>
+                    <a:p>
+                      <a:r>
+                        <a:rPr lang="zh-CN" altLang="en-US" dirty="0"/>
+                        <a:t>记录</a:t>
+                      </a:r>
+                      <a:r>
+                        <a:rPr lang="en-US" altLang="zh-CN" dirty="0"/>
+                        <a:t>5</a:t>
+                      </a:r>
+                      <a:endParaRPr lang="zh-CN" altLang="en-US" dirty="0"/>
+                    </a:p>
+                  </a:txBody>
+                  <a:tcPr/>
+                </a:tc>
+                <a:extLst>
+                  <a:ext uri="{0D108BD9-81ED-4DB2-BD59-A6C34878D82A}">
+                    <a16:rowId xmlns:a16="http://schemas.microsoft.com/office/drawing/2014/main" val="2255964010"/>
+                  </a:ext>
+                </a:extLst>
+              </a:tr>
+              <a:tr h="420601">
+                <a:tc>
+                  <a:txBody>
+                    <a:bodyPr/>
+                    <a:lstStyle/>
+                    <a:p>
+                      <a:r>
+                        <a:rPr lang="zh-CN" altLang="en-US" dirty="0"/>
+                        <a:t>记录</a:t>
+                      </a:r>
+                      <a:r>
+                        <a:rPr lang="en-US" altLang="zh-CN" dirty="0"/>
+                        <a:t>6</a:t>
+                      </a:r>
+                      <a:endParaRPr lang="zh-CN" altLang="en-US" dirty="0"/>
+                    </a:p>
+                  </a:txBody>
+                  <a:tcPr/>
+                </a:tc>
+                <a:extLst>
+                  <a:ext uri="{0D108BD9-81ED-4DB2-BD59-A6C34878D82A}">
+                    <a16:rowId xmlns:a16="http://schemas.microsoft.com/office/drawing/2014/main" val="1726355392"/>
+                  </a:ext>
+                </a:extLst>
+              </a:tr>
+              <a:tr h="420601">
+                <a:tc>
+                  <a:txBody>
+                    <a:bodyPr/>
+                    <a:lstStyle/>
+                    <a:p>
+                      <a:r>
+                        <a:rPr lang="zh-CN" altLang="en-US" dirty="0"/>
+                        <a:t>记录</a:t>
+                      </a:r>
+                      <a:r>
+                        <a:rPr lang="en-US" altLang="zh-CN" dirty="0"/>
+                        <a:t>7</a:t>
+                      </a:r>
+                      <a:endParaRPr lang="zh-CN" altLang="en-US" dirty="0"/>
+                    </a:p>
+                  </a:txBody>
+                  <a:tcPr/>
+                </a:tc>
+                <a:extLst>
+                  <a:ext uri="{0D108BD9-81ED-4DB2-BD59-A6C34878D82A}">
+                    <a16:rowId xmlns:a16="http://schemas.microsoft.com/office/drawing/2014/main" val="4013003641"/>
+                  </a:ext>
+                </a:extLst>
+              </a:tr>
+              <a:tr h="420601">
+                <a:tc>
+                  <a:txBody>
+                    <a:bodyPr/>
+                    <a:lstStyle/>
+                    <a:p>
+                      <a:endParaRPr lang="zh-CN" altLang="en-US" dirty="0"/>
+                    </a:p>
+                  </a:txBody>
+                  <a:tcPr/>
+                </a:tc>
+                <a:extLst>
+                  <a:ext uri="{0D108BD9-81ED-4DB2-BD59-A6C34878D82A}">
+                    <a16:rowId xmlns:a16="http://schemas.microsoft.com/office/drawing/2014/main" val="1984670129"/>
+                  </a:ext>
+                </a:extLst>
+              </a:tr>
+              <a:tr h="420601">
+                <a:tc>
+                  <a:txBody>
+                    <a:bodyPr/>
+                    <a:lstStyle/>
+                    <a:p>
+                      <a:endParaRPr lang="zh-CN" altLang="en-US" dirty="0"/>
+                    </a:p>
+                  </a:txBody>
+                  <a:tcPr/>
+                </a:tc>
+                <a:extLst>
+                  <a:ext uri="{0D108BD9-81ED-4DB2-BD59-A6C34878D82A}">
+                    <a16:rowId xmlns:a16="http://schemas.microsoft.com/office/drawing/2014/main" val="222107509"/>
+                  </a:ext>
+                </a:extLst>
+              </a:tr>
+              <a:tr h="420601">
+                <a:tc>
+                  <a:txBody>
+                    <a:bodyPr/>
+                    <a:lstStyle/>
+                    <a:p>
+                      <a:endParaRPr lang="zh-CN" altLang="en-US" dirty="0"/>
+                    </a:p>
+                  </a:txBody>
+                  <a:tcPr/>
+                </a:tc>
+                <a:extLst>
+                  <a:ext uri="{0D108BD9-81ED-4DB2-BD59-A6C34878D82A}">
+                    <a16:rowId xmlns:a16="http://schemas.microsoft.com/office/drawing/2014/main" val="3898841583"/>
+                  </a:ext>
+                </a:extLst>
+              </a:tr>
+            </a:tbl>
+          </a:graphicData>
+        </a:graphic>
+      </p:graphicFrame>
+      <p:graphicFrame>
+        <p:nvGraphicFramePr>
+          <p:cNvPr id="4" name="表格 3">
+            <a:extLst>
+              <a:ext uri="{FF2B5EF4-FFF2-40B4-BE49-F238E27FC236}">
+                <a16:creationId xmlns:a16="http://schemas.microsoft.com/office/drawing/2014/main" id="{2E26D799-6E05-58EB-1571-D34408B976AE}"/>
+              </a:ext>
+            </a:extLst>
+          </p:cNvPr>
+          <p:cNvGraphicFramePr>
+            <a:graphicFrameLocks noGrp="1"/>
+          </p:cNvGraphicFramePr>
+          <p:nvPr>
+            <p:extLst>
+              <p:ext uri="{D42A27DB-BD31-4B8C-83A1-F6EECF244321}">
+                <p14:modId xmlns:p14="http://schemas.microsoft.com/office/powerpoint/2010/main" val="4256632404"/>
+              </p:ext>
+            </p:extLst>
+          </p:nvPr>
+        </p:nvGraphicFramePr>
+        <p:xfrm>
+          <a:off x="3916382" y="854649"/>
+          <a:ext cx="896395" cy="3785409"/>
+        </p:xfrm>
+        <a:graphic>
+          <a:graphicData uri="http://schemas.openxmlformats.org/drawingml/2006/table">
+            <a:tbl>
+              <a:tblPr firstRow="1" bandRow="1">
+                <a:tableStyleId>{69012ECD-51FC-41F1-AA8D-1B2483CD663E}</a:tableStyleId>
+              </a:tblPr>
+              <a:tblGrid>
+                <a:gridCol w="896395">
+                  <a:extLst>
+                    <a:ext uri="{9D8B030D-6E8A-4147-A177-3AD203B41FA5}">
+                      <a16:colId xmlns:a16="http://schemas.microsoft.com/office/drawing/2014/main" val="1219010009"/>
+                    </a:ext>
+                  </a:extLst>
+                </a:gridCol>
+              </a:tblGrid>
+              <a:tr h="420601">
+                <a:tc>
+                  <a:txBody>
+                    <a:bodyPr/>
+                    <a:lstStyle/>
+                    <a:p>
+                      <a:r>
+                        <a:rPr lang="en-US" altLang="zh-CN" b="0" dirty="0">
+                          <a:solidFill>
+                            <a:schemeClr val="tx1"/>
+                          </a:solidFill>
+                        </a:rPr>
+                        <a:t>Hash 1</a:t>
+                      </a:r>
+                      <a:endParaRPr lang="zh-CN" altLang="en-US" b="0" dirty="0">
+                        <a:solidFill>
+                          <a:schemeClr val="tx1"/>
+                        </a:solidFill>
+                      </a:endParaRPr>
+                    </a:p>
+                  </a:txBody>
+                  <a:tcPr>
+                    <a:solidFill>
+                      <a:schemeClr val="bg1"/>
+                    </a:solidFill>
+                  </a:tcPr>
+                </a:tc>
+                <a:extLst>
+                  <a:ext uri="{0D108BD9-81ED-4DB2-BD59-A6C34878D82A}">
+                    <a16:rowId xmlns:a16="http://schemas.microsoft.com/office/drawing/2014/main" val="270129489"/>
+                  </a:ext>
+                </a:extLst>
+              </a:tr>
+              <a:tr h="420601">
+                <a:tc>
+                  <a:txBody>
+                    <a:bodyPr/>
+                    <a:lstStyle/>
+                    <a:p>
+                      <a:r>
+                        <a:rPr lang="en-US" altLang="zh-CN" b="0" dirty="0">
+                          <a:solidFill>
+                            <a:schemeClr val="tx1"/>
+                          </a:solidFill>
+                        </a:rPr>
+                        <a:t>Hash 2</a:t>
+                      </a:r>
+                      <a:endParaRPr lang="zh-CN" altLang="en-US" dirty="0"/>
+                    </a:p>
+                  </a:txBody>
+                  <a:tcPr/>
+                </a:tc>
+                <a:extLst>
+                  <a:ext uri="{0D108BD9-81ED-4DB2-BD59-A6C34878D82A}">
+                    <a16:rowId xmlns:a16="http://schemas.microsoft.com/office/drawing/2014/main" val="1696516838"/>
+                  </a:ext>
+                </a:extLst>
+              </a:tr>
+              <a:tr h="420601">
+                <a:tc>
+                  <a:txBody>
+                    <a:bodyPr/>
+                    <a:lstStyle/>
+                    <a:p>
+                      <a:r>
+                        <a:rPr lang="en-US" altLang="zh-CN" b="0" dirty="0">
+                          <a:solidFill>
+                            <a:schemeClr val="tx1"/>
+                          </a:solidFill>
+                        </a:rPr>
+                        <a:t>Hash 3</a:t>
+                      </a:r>
+                      <a:endParaRPr lang="zh-CN" altLang="en-US" dirty="0"/>
+                    </a:p>
+                  </a:txBody>
+                  <a:tcPr/>
+                </a:tc>
+                <a:extLst>
+                  <a:ext uri="{0D108BD9-81ED-4DB2-BD59-A6C34878D82A}">
+                    <a16:rowId xmlns:a16="http://schemas.microsoft.com/office/drawing/2014/main" val="4027148465"/>
+                  </a:ext>
+                </a:extLst>
+              </a:tr>
+              <a:tr h="420601">
+                <a:tc>
+                  <a:txBody>
+                    <a:bodyPr/>
+                    <a:lstStyle/>
+                    <a:p>
+                      <a:r>
+                        <a:rPr lang="en-US" altLang="zh-CN" b="0" dirty="0">
+                          <a:solidFill>
+                            <a:schemeClr val="tx1"/>
+                          </a:solidFill>
+                        </a:rPr>
+                        <a:t>Hash 4</a:t>
+                      </a:r>
+                      <a:endParaRPr lang="zh-CN" altLang="en-US" dirty="0"/>
+                    </a:p>
+                  </a:txBody>
+                  <a:tcPr/>
+                </a:tc>
+                <a:extLst>
+                  <a:ext uri="{0D108BD9-81ED-4DB2-BD59-A6C34878D82A}">
+                    <a16:rowId xmlns:a16="http://schemas.microsoft.com/office/drawing/2014/main" val="2255964010"/>
+                  </a:ext>
+                </a:extLst>
+              </a:tr>
+              <a:tr h="420601">
+                <a:tc>
+                  <a:txBody>
+                    <a:bodyPr/>
+                    <a:lstStyle/>
+                    <a:p>
+                      <a:r>
+                        <a:rPr lang="en-US" altLang="zh-CN" b="0" dirty="0">
+                          <a:solidFill>
+                            <a:schemeClr val="tx1"/>
+                          </a:solidFill>
+                        </a:rPr>
+                        <a:t>Hash 5</a:t>
+                      </a:r>
+                      <a:endParaRPr lang="zh-CN" altLang="en-US" dirty="0"/>
+                    </a:p>
+                  </a:txBody>
+                  <a:tcPr/>
+                </a:tc>
+                <a:extLst>
+                  <a:ext uri="{0D108BD9-81ED-4DB2-BD59-A6C34878D82A}">
+                    <a16:rowId xmlns:a16="http://schemas.microsoft.com/office/drawing/2014/main" val="1726355392"/>
+                  </a:ext>
+                </a:extLst>
+              </a:tr>
+              <a:tr h="420601">
+                <a:tc>
+                  <a:txBody>
+                    <a:bodyPr/>
+                    <a:lstStyle/>
+                    <a:p>
+                      <a:r>
+                        <a:rPr lang="en-US" altLang="zh-CN" b="0" dirty="0">
+                          <a:solidFill>
+                            <a:schemeClr val="tx1"/>
+                          </a:solidFill>
+                        </a:rPr>
+                        <a:t>Hash 6</a:t>
+                      </a:r>
+                      <a:endParaRPr lang="zh-CN" altLang="en-US" dirty="0"/>
+                    </a:p>
+                  </a:txBody>
+                  <a:tcPr/>
+                </a:tc>
+                <a:extLst>
+                  <a:ext uri="{0D108BD9-81ED-4DB2-BD59-A6C34878D82A}">
+                    <a16:rowId xmlns:a16="http://schemas.microsoft.com/office/drawing/2014/main" val="4013003641"/>
+                  </a:ext>
+                </a:extLst>
+              </a:tr>
+              <a:tr h="420601">
+                <a:tc>
+                  <a:txBody>
+                    <a:bodyPr/>
+                    <a:lstStyle/>
+                    <a:p>
+                      <a:r>
+                        <a:rPr lang="en-US" altLang="zh-CN" dirty="0"/>
+                        <a:t>…</a:t>
+                      </a:r>
+                      <a:endParaRPr lang="zh-CN" altLang="en-US" dirty="0"/>
+                    </a:p>
+                  </a:txBody>
+                  <a:tcPr/>
+                </a:tc>
+                <a:extLst>
+                  <a:ext uri="{0D108BD9-81ED-4DB2-BD59-A6C34878D82A}">
+                    <a16:rowId xmlns:a16="http://schemas.microsoft.com/office/drawing/2014/main" val="1984670129"/>
+                  </a:ext>
+                </a:extLst>
+              </a:tr>
+              <a:tr h="420601">
+                <a:tc>
+                  <a:txBody>
+                    <a:bodyPr/>
+                    <a:lstStyle/>
+                    <a:p>
+                      <a:r>
+                        <a:rPr lang="en-US" altLang="zh-CN" dirty="0"/>
+                        <a:t>…</a:t>
+                      </a:r>
+                      <a:endParaRPr lang="zh-CN" altLang="en-US" dirty="0"/>
+                    </a:p>
+                  </a:txBody>
+                  <a:tcPr/>
+                </a:tc>
+                <a:extLst>
+                  <a:ext uri="{0D108BD9-81ED-4DB2-BD59-A6C34878D82A}">
+                    <a16:rowId xmlns:a16="http://schemas.microsoft.com/office/drawing/2014/main" val="222107509"/>
+                  </a:ext>
+                </a:extLst>
+              </a:tr>
+              <a:tr h="420601">
+                <a:tc>
+                  <a:txBody>
+                    <a:bodyPr/>
+                    <a:lstStyle/>
+                    <a:p>
+                      <a:r>
+                        <a:rPr lang="en-US" altLang="zh-CN" dirty="0"/>
+                        <a:t>Hash n</a:t>
+                      </a:r>
+                      <a:endParaRPr lang="zh-CN" altLang="en-US" dirty="0"/>
+                    </a:p>
+                  </a:txBody>
+                  <a:tcPr/>
+                </a:tc>
+                <a:extLst>
+                  <a:ext uri="{0D108BD9-81ED-4DB2-BD59-A6C34878D82A}">
+                    <a16:rowId xmlns:a16="http://schemas.microsoft.com/office/drawing/2014/main" val="3898841583"/>
+                  </a:ext>
+                </a:extLst>
+              </a:tr>
+            </a:tbl>
+          </a:graphicData>
+        </a:graphic>
+      </p:graphicFrame>
+      <p:sp>
+        <p:nvSpPr>
+          <p:cNvPr id="5" name="磁盘 4">
+            <a:extLst>
+              <a:ext uri="{FF2B5EF4-FFF2-40B4-BE49-F238E27FC236}">
+                <a16:creationId xmlns:a16="http://schemas.microsoft.com/office/drawing/2014/main" id="{58EC14FF-3FCF-BD00-6C56-760684C07A84}"/>
+              </a:ext>
+            </a:extLst>
+          </p:cNvPr>
+          <p:cNvSpPr/>
+          <p:nvPr/>
+        </p:nvSpPr>
+        <p:spPr>
+          <a:xfrm>
+            <a:off x="5325035" y="1473798"/>
+            <a:ext cx="2721685" cy="2861534"/>
+          </a:xfrm>
+          <a:prstGeom prst="flowChartMagneticDisk">
+            <a:avLst/>
+          </a:prstGeom>
+        </p:spPr>
+        <p:style>
+          <a:lnRef idx="2">
+            <a:schemeClr val="accent6"/>
+          </a:lnRef>
+          <a:fillRef idx="1">
+            <a:schemeClr val="lt1"/>
+          </a:fillRef>
+          <a:effectRef idx="0">
+            <a:schemeClr val="accent6"/>
+          </a:effectRef>
+          <a:fontRef idx="minor">
+            <a:schemeClr val="dk1"/>
+          </a:fontRef>
+        </p:style>
+        <p:txBody>
+          <a:bodyPr rtlCol="0" anchor="ctr"/>
+          <a:lstStyle/>
+          <a:p>
+            <a:pPr algn="ctr"/>
+            <a:endParaRPr kumimoji="1" lang="zh-CN" altLang="en-US"/>
+          </a:p>
+        </p:txBody>
+      </p:sp>
+      <p:sp>
+        <p:nvSpPr>
+          <p:cNvPr id="6" name="矩形 5">
+            <a:extLst>
+              <a:ext uri="{FF2B5EF4-FFF2-40B4-BE49-F238E27FC236}">
+                <a16:creationId xmlns:a16="http://schemas.microsoft.com/office/drawing/2014/main" id="{CD7D22F9-0F81-30B0-75CC-8492B19F63A3}"/>
+              </a:ext>
+            </a:extLst>
+          </p:cNvPr>
+          <p:cNvSpPr/>
+          <p:nvPr/>
+        </p:nvSpPr>
+        <p:spPr>
+          <a:xfrm>
+            <a:off x="5536602" y="2452743"/>
+            <a:ext cx="692076" cy="301215"/>
+          </a:xfrm>
+          <a:prstGeom prst="rect">
+            <a:avLst/>
+          </a:prstGeom>
+        </p:spPr>
+        <p:style>
+          <a:lnRef idx="2">
+            <a:schemeClr val="accent1">
+              <a:shade val="15000"/>
+            </a:schemeClr>
+          </a:lnRef>
+          <a:fillRef idx="1">
+            <a:schemeClr val="accent1"/>
+          </a:fillRef>
+          <a:effectRef idx="0">
+            <a:schemeClr val="accent1"/>
+          </a:effectRef>
+          <a:fontRef idx="minor">
+            <a:schemeClr val="lt1"/>
+          </a:fontRef>
+        </p:style>
+        <p:txBody>
+          <a:bodyPr rtlCol="0" anchor="ctr"/>
+          <a:lstStyle/>
+          <a:p>
+            <a:pPr algn="ctr"/>
+            <a:endParaRPr kumimoji="1" lang="zh-CN" altLang="en-US"/>
+          </a:p>
+        </p:txBody>
+      </p:sp>
+      <p:sp>
+        <p:nvSpPr>
+          <p:cNvPr id="7" name="矩形 6">
+            <a:extLst>
+              <a:ext uri="{FF2B5EF4-FFF2-40B4-BE49-F238E27FC236}">
+                <a16:creationId xmlns:a16="http://schemas.microsoft.com/office/drawing/2014/main" id="{A953434C-EB15-FD0F-7AC7-A6119496CFB2}"/>
+              </a:ext>
+            </a:extLst>
+          </p:cNvPr>
+          <p:cNvSpPr/>
+          <p:nvPr/>
+        </p:nvSpPr>
+        <p:spPr>
+          <a:xfrm>
+            <a:off x="6339839" y="2452743"/>
+            <a:ext cx="692076" cy="301215"/>
+          </a:xfrm>
+          <a:prstGeom prst="rect">
+            <a:avLst/>
+          </a:prstGeom>
+        </p:spPr>
+        <p:style>
+          <a:lnRef idx="2">
+            <a:schemeClr val="accent1">
+              <a:shade val="15000"/>
+            </a:schemeClr>
+          </a:lnRef>
+          <a:fillRef idx="1">
+            <a:schemeClr val="accent1"/>
+          </a:fillRef>
+          <a:effectRef idx="0">
+            <a:schemeClr val="accent1"/>
+          </a:effectRef>
+          <a:fontRef idx="minor">
+            <a:schemeClr val="lt1"/>
+          </a:fontRef>
+        </p:style>
+        <p:txBody>
+          <a:bodyPr rtlCol="0" anchor="ctr"/>
+          <a:lstStyle/>
+          <a:p>
+            <a:pPr algn="ctr"/>
+            <a:endParaRPr kumimoji="1" lang="zh-CN" altLang="en-US"/>
+          </a:p>
+        </p:txBody>
+      </p:sp>
+      <p:sp>
+        <p:nvSpPr>
+          <p:cNvPr id="8" name="矩形 7">
+            <a:extLst>
+              <a:ext uri="{FF2B5EF4-FFF2-40B4-BE49-F238E27FC236}">
+                <a16:creationId xmlns:a16="http://schemas.microsoft.com/office/drawing/2014/main" id="{FA1E8B3F-C76F-4212-0FF4-69899DFCFC5D}"/>
+              </a:ext>
+            </a:extLst>
+          </p:cNvPr>
+          <p:cNvSpPr/>
+          <p:nvPr/>
+        </p:nvSpPr>
+        <p:spPr>
+          <a:xfrm>
+            <a:off x="7143076" y="2446138"/>
+            <a:ext cx="692076" cy="301215"/>
+          </a:xfrm>
+          <a:prstGeom prst="rect">
+            <a:avLst/>
+          </a:prstGeom>
+        </p:spPr>
+        <p:style>
+          <a:lnRef idx="2">
+            <a:schemeClr val="accent1">
+              <a:shade val="15000"/>
+            </a:schemeClr>
+          </a:lnRef>
+          <a:fillRef idx="1">
+            <a:schemeClr val="accent1"/>
+          </a:fillRef>
+          <a:effectRef idx="0">
+            <a:schemeClr val="accent1"/>
+          </a:effectRef>
+          <a:fontRef idx="minor">
+            <a:schemeClr val="lt1"/>
+          </a:fontRef>
+        </p:style>
+        <p:txBody>
+          <a:bodyPr rtlCol="0" anchor="ctr"/>
+          <a:lstStyle/>
+          <a:p>
+            <a:pPr algn="ctr"/>
+            <a:endParaRPr kumimoji="1" lang="zh-CN" altLang="en-US"/>
+          </a:p>
+        </p:txBody>
+      </p:sp>
+      <p:sp>
+        <p:nvSpPr>
+          <p:cNvPr id="9" name="矩形 8">
+            <a:extLst>
+              <a:ext uri="{FF2B5EF4-FFF2-40B4-BE49-F238E27FC236}">
+                <a16:creationId xmlns:a16="http://schemas.microsoft.com/office/drawing/2014/main" id="{7C723603-86CF-70B2-1C4A-BA5C27051206}"/>
+              </a:ext>
+            </a:extLst>
+          </p:cNvPr>
+          <p:cNvSpPr/>
+          <p:nvPr/>
+        </p:nvSpPr>
+        <p:spPr>
+          <a:xfrm>
+            <a:off x="5550945" y="2825109"/>
+            <a:ext cx="692076" cy="301215"/>
+          </a:xfrm>
+          <a:prstGeom prst="rect">
+            <a:avLst/>
+          </a:prstGeom>
+        </p:spPr>
+        <p:style>
+          <a:lnRef idx="2">
+            <a:schemeClr val="accent1">
+              <a:shade val="15000"/>
+            </a:schemeClr>
+          </a:lnRef>
+          <a:fillRef idx="1">
+            <a:schemeClr val="accent1"/>
+          </a:fillRef>
+          <a:effectRef idx="0">
+            <a:schemeClr val="accent1"/>
+          </a:effectRef>
+          <a:fontRef idx="minor">
+            <a:schemeClr val="lt1"/>
+          </a:fontRef>
+        </p:style>
+        <p:txBody>
+          <a:bodyPr rtlCol="0" anchor="ctr"/>
+          <a:lstStyle/>
+          <a:p>
+            <a:pPr algn="ctr"/>
+            <a:endParaRPr kumimoji="1" lang="zh-CN" altLang="en-US"/>
+          </a:p>
+        </p:txBody>
+      </p:sp>
+      <p:sp>
+        <p:nvSpPr>
+          <p:cNvPr id="10" name="矩形 9">
+            <a:extLst>
+              <a:ext uri="{FF2B5EF4-FFF2-40B4-BE49-F238E27FC236}">
+                <a16:creationId xmlns:a16="http://schemas.microsoft.com/office/drawing/2014/main" id="{0C23F6CB-2A42-E0A5-A287-98781067A753}"/>
+              </a:ext>
+            </a:extLst>
+          </p:cNvPr>
+          <p:cNvSpPr/>
+          <p:nvPr/>
+        </p:nvSpPr>
+        <p:spPr>
+          <a:xfrm>
+            <a:off x="6354182" y="2825109"/>
+            <a:ext cx="692076" cy="301215"/>
+          </a:xfrm>
+          <a:prstGeom prst="rect">
+            <a:avLst/>
+          </a:prstGeom>
+        </p:spPr>
+        <p:style>
+          <a:lnRef idx="2">
+            <a:schemeClr val="accent1">
+              <a:shade val="15000"/>
+            </a:schemeClr>
+          </a:lnRef>
+          <a:fillRef idx="1">
+            <a:schemeClr val="accent1"/>
+          </a:fillRef>
+          <a:effectRef idx="0">
+            <a:schemeClr val="accent1"/>
+          </a:effectRef>
+          <a:fontRef idx="minor">
+            <a:schemeClr val="lt1"/>
+          </a:fontRef>
+        </p:style>
+        <p:txBody>
+          <a:bodyPr rtlCol="0" anchor="ctr"/>
+          <a:lstStyle/>
+          <a:p>
+            <a:pPr algn="ctr"/>
+            <a:endParaRPr kumimoji="1" lang="zh-CN" altLang="en-US"/>
+          </a:p>
+        </p:txBody>
+      </p:sp>
+      <p:sp>
+        <p:nvSpPr>
+          <p:cNvPr id="11" name="矩形 10">
+            <a:extLst>
+              <a:ext uri="{FF2B5EF4-FFF2-40B4-BE49-F238E27FC236}">
+                <a16:creationId xmlns:a16="http://schemas.microsoft.com/office/drawing/2014/main" id="{79BD1E25-3496-4AC7-A70B-49BEAA43AD35}"/>
+              </a:ext>
+            </a:extLst>
+          </p:cNvPr>
+          <p:cNvSpPr/>
+          <p:nvPr/>
+        </p:nvSpPr>
+        <p:spPr>
+          <a:xfrm>
+            <a:off x="7157419" y="2818504"/>
+            <a:ext cx="692076" cy="301215"/>
+          </a:xfrm>
+          <a:prstGeom prst="rect">
+            <a:avLst/>
+          </a:prstGeom>
+        </p:spPr>
+        <p:style>
+          <a:lnRef idx="2">
+            <a:schemeClr val="accent1">
+              <a:shade val="15000"/>
+            </a:schemeClr>
+          </a:lnRef>
+          <a:fillRef idx="1">
+            <a:schemeClr val="accent1"/>
+          </a:fillRef>
+          <a:effectRef idx="0">
+            <a:schemeClr val="accent1"/>
+          </a:effectRef>
+          <a:fontRef idx="minor">
+            <a:schemeClr val="lt1"/>
+          </a:fontRef>
+        </p:style>
+        <p:txBody>
+          <a:bodyPr rtlCol="0" anchor="ctr"/>
+          <a:lstStyle/>
+          <a:p>
+            <a:pPr algn="ctr"/>
+            <a:endParaRPr kumimoji="1" lang="zh-CN" altLang="en-US"/>
+          </a:p>
+        </p:txBody>
+      </p:sp>
+      <p:sp>
+        <p:nvSpPr>
+          <p:cNvPr id="12" name="矩形 11">
+            <a:extLst>
+              <a:ext uri="{FF2B5EF4-FFF2-40B4-BE49-F238E27FC236}">
+                <a16:creationId xmlns:a16="http://schemas.microsoft.com/office/drawing/2014/main" id="{5432A1D0-7CD4-0A13-0E7B-3CAFD08F70A2}"/>
+              </a:ext>
+            </a:extLst>
+          </p:cNvPr>
+          <p:cNvSpPr/>
+          <p:nvPr/>
+        </p:nvSpPr>
+        <p:spPr>
+          <a:xfrm>
+            <a:off x="5550945" y="3575690"/>
+            <a:ext cx="692076" cy="301215"/>
+          </a:xfrm>
+          <a:prstGeom prst="rect">
+            <a:avLst/>
+          </a:prstGeom>
+        </p:spPr>
+        <p:style>
+          <a:lnRef idx="2">
+            <a:schemeClr val="accent1">
+              <a:shade val="15000"/>
+            </a:schemeClr>
+          </a:lnRef>
+          <a:fillRef idx="1">
+            <a:schemeClr val="accent1"/>
+          </a:fillRef>
+          <a:effectRef idx="0">
+            <a:schemeClr val="accent1"/>
+          </a:effectRef>
+          <a:fontRef idx="minor">
+            <a:schemeClr val="lt1"/>
+          </a:fontRef>
+        </p:style>
+        <p:txBody>
+          <a:bodyPr rtlCol="0" anchor="ctr"/>
+          <a:lstStyle/>
+          <a:p>
+            <a:pPr algn="ctr"/>
+            <a:endParaRPr kumimoji="1" lang="zh-CN" altLang="en-US"/>
+          </a:p>
+        </p:txBody>
+      </p:sp>
+      <p:sp>
+        <p:nvSpPr>
+          <p:cNvPr id="13" name="矩形 12">
+            <a:extLst>
+              <a:ext uri="{FF2B5EF4-FFF2-40B4-BE49-F238E27FC236}">
+                <a16:creationId xmlns:a16="http://schemas.microsoft.com/office/drawing/2014/main" id="{EEC288EB-5AF5-3882-E7FA-1C4BCA9649BD}"/>
+              </a:ext>
+            </a:extLst>
+          </p:cNvPr>
+          <p:cNvSpPr/>
+          <p:nvPr/>
+        </p:nvSpPr>
+        <p:spPr>
+          <a:xfrm>
+            <a:off x="6354182" y="3575690"/>
+            <a:ext cx="692076" cy="301215"/>
+          </a:xfrm>
+          <a:prstGeom prst="rect">
+            <a:avLst/>
+          </a:prstGeom>
+        </p:spPr>
+        <p:style>
+          <a:lnRef idx="2">
+            <a:schemeClr val="accent1">
+              <a:shade val="15000"/>
+            </a:schemeClr>
+          </a:lnRef>
+          <a:fillRef idx="1">
+            <a:schemeClr val="accent1"/>
+          </a:fillRef>
+          <a:effectRef idx="0">
+            <a:schemeClr val="accent1"/>
+          </a:effectRef>
+          <a:fontRef idx="minor">
+            <a:schemeClr val="lt1"/>
+          </a:fontRef>
+        </p:style>
+        <p:txBody>
+          <a:bodyPr rtlCol="0" anchor="ctr"/>
+          <a:lstStyle/>
+          <a:p>
+            <a:pPr algn="ctr"/>
+            <a:endParaRPr kumimoji="1" lang="zh-CN" altLang="en-US"/>
+          </a:p>
+        </p:txBody>
+      </p:sp>
+      <p:sp>
+        <p:nvSpPr>
+          <p:cNvPr id="14" name="矩形 13">
+            <a:extLst>
+              <a:ext uri="{FF2B5EF4-FFF2-40B4-BE49-F238E27FC236}">
+                <a16:creationId xmlns:a16="http://schemas.microsoft.com/office/drawing/2014/main" id="{5723E2D8-EEB2-5167-89E3-B979293D2001}"/>
+              </a:ext>
+            </a:extLst>
+          </p:cNvPr>
+          <p:cNvSpPr/>
+          <p:nvPr/>
+        </p:nvSpPr>
+        <p:spPr>
+          <a:xfrm>
+            <a:off x="7157419" y="3569085"/>
+            <a:ext cx="692076" cy="301215"/>
+          </a:xfrm>
+          <a:prstGeom prst="rect">
+            <a:avLst/>
+          </a:prstGeom>
+        </p:spPr>
+        <p:style>
+          <a:lnRef idx="2">
+            <a:schemeClr val="accent1">
+              <a:shade val="15000"/>
+            </a:schemeClr>
+          </a:lnRef>
+          <a:fillRef idx="1">
+            <a:schemeClr val="accent1"/>
+          </a:fillRef>
+          <a:effectRef idx="0">
+            <a:schemeClr val="accent1"/>
+          </a:effectRef>
+          <a:fontRef idx="minor">
+            <a:schemeClr val="lt1"/>
+          </a:fontRef>
+        </p:style>
+        <p:txBody>
+          <a:bodyPr rtlCol="0" anchor="ctr"/>
+          <a:lstStyle/>
+          <a:p>
+            <a:pPr algn="ctr"/>
+            <a:endParaRPr kumimoji="1" lang="zh-CN" altLang="en-US"/>
+          </a:p>
+        </p:txBody>
+      </p:sp>
+      <p:cxnSp>
+        <p:nvCxnSpPr>
+          <p:cNvPr id="16" name="曲线连接符 15">
+            <a:extLst>
+              <a:ext uri="{FF2B5EF4-FFF2-40B4-BE49-F238E27FC236}">
+                <a16:creationId xmlns:a16="http://schemas.microsoft.com/office/drawing/2014/main" id="{738B85F9-BC64-85CE-F5B6-A761471F6D28}"/>
+              </a:ext>
+            </a:extLst>
+          </p:cNvPr>
+          <p:cNvCxnSpPr/>
+          <p:nvPr/>
+        </p:nvCxnSpPr>
+        <p:spPr>
+          <a:xfrm rot="16200000" flipH="1">
+            <a:off x="4604251" y="1295048"/>
+            <a:ext cx="1359616" cy="942564"/>
+          </a:xfrm>
+          <a:prstGeom prst="curvedConnector3">
+            <a:avLst/>
+          </a:prstGeom>
+          <a:ln>
+            <a:tailEnd type="triangle"/>
+          </a:ln>
+        </p:spPr>
+        <p:style>
+          <a:lnRef idx="1">
+            <a:schemeClr val="accent1"/>
+          </a:lnRef>
+          <a:fillRef idx="0">
+            <a:schemeClr val="accent1"/>
+          </a:fillRef>
+          <a:effectRef idx="0">
+            <a:schemeClr val="accent1"/>
+          </a:effectRef>
+          <a:fontRef idx="minor">
+            <a:schemeClr val="tx1"/>
+          </a:fontRef>
+        </p:style>
+      </p:cxnSp>
+      <p:cxnSp>
+        <p:nvCxnSpPr>
+          <p:cNvPr id="19" name="曲线连接符 18">
+            <a:extLst>
+              <a:ext uri="{FF2B5EF4-FFF2-40B4-BE49-F238E27FC236}">
+                <a16:creationId xmlns:a16="http://schemas.microsoft.com/office/drawing/2014/main" id="{EA5B7A18-3E6A-163A-A9B0-6F8CF7FBCE91}"/>
+              </a:ext>
+            </a:extLst>
+          </p:cNvPr>
+          <p:cNvCxnSpPr>
+            <a:endCxn id="12" idx="1"/>
+          </p:cNvCxnSpPr>
+          <p:nvPr/>
+        </p:nvCxnSpPr>
+        <p:spPr>
+          <a:xfrm rot="16200000" flipH="1">
+            <a:off x="4695691" y="2871044"/>
+            <a:ext cx="972340" cy="738168"/>
+          </a:xfrm>
+          <a:prstGeom prst="curvedConnector2">
+            <a:avLst/>
+          </a:prstGeom>
+          <a:ln>
+            <a:tailEnd type="triangle"/>
+          </a:ln>
+        </p:spPr>
+        <p:style>
+          <a:lnRef idx="1">
+            <a:schemeClr val="accent1"/>
+          </a:lnRef>
+          <a:fillRef idx="0">
+            <a:schemeClr val="accent1"/>
+          </a:fillRef>
+          <a:effectRef idx="0">
+            <a:schemeClr val="accent1"/>
+          </a:effectRef>
+          <a:fontRef idx="minor">
+            <a:schemeClr val="tx1"/>
+          </a:fontRef>
+        </p:style>
+      </p:cxnSp>
+      <p:cxnSp>
+        <p:nvCxnSpPr>
+          <p:cNvPr id="21" name="曲线连接符 20">
+            <a:extLst>
+              <a:ext uri="{FF2B5EF4-FFF2-40B4-BE49-F238E27FC236}">
+                <a16:creationId xmlns:a16="http://schemas.microsoft.com/office/drawing/2014/main" id="{63FB4433-FAA9-073C-96E2-42696A5C6358}"/>
+              </a:ext>
+            </a:extLst>
+          </p:cNvPr>
+          <p:cNvCxnSpPr>
+            <a:endCxn id="9" idx="1"/>
+          </p:cNvCxnSpPr>
+          <p:nvPr/>
+        </p:nvCxnSpPr>
+        <p:spPr>
+          <a:xfrm rot="16200000" flipH="1">
+            <a:off x="4430902" y="1855673"/>
+            <a:ext cx="1501919" cy="738168"/>
+          </a:xfrm>
+          <a:prstGeom prst="curvedConnector2">
+            <a:avLst/>
+          </a:prstGeom>
+          <a:ln>
+            <a:tailEnd type="triangle"/>
+          </a:ln>
+        </p:spPr>
+        <p:style>
+          <a:lnRef idx="1">
+            <a:schemeClr val="accent1"/>
+          </a:lnRef>
+          <a:fillRef idx="0">
+            <a:schemeClr val="accent1"/>
+          </a:fillRef>
+          <a:effectRef idx="0">
+            <a:schemeClr val="accent1"/>
+          </a:effectRef>
+          <a:fontRef idx="minor">
+            <a:schemeClr val="tx1"/>
+          </a:fontRef>
+        </p:style>
+      </p:cxnSp>
+      <p:sp>
+        <p:nvSpPr>
+          <p:cNvPr id="22" name="文本框 21">
+            <a:extLst>
+              <a:ext uri="{FF2B5EF4-FFF2-40B4-BE49-F238E27FC236}">
+                <a16:creationId xmlns:a16="http://schemas.microsoft.com/office/drawing/2014/main" id="{A61FB54F-219A-26AE-C8DC-D5557BCD8AF9}"/>
+              </a:ext>
+            </a:extLst>
+          </p:cNvPr>
+          <p:cNvSpPr txBox="1"/>
+          <p:nvPr/>
+        </p:nvSpPr>
+        <p:spPr>
+          <a:xfrm>
+            <a:off x="363617" y="311972"/>
+            <a:ext cx="1107996" cy="369332"/>
+          </a:xfrm>
+          <a:prstGeom prst="rect">
+            <a:avLst/>
+          </a:prstGeom>
+          <a:noFill/>
+        </p:spPr>
+        <p:txBody>
+          <a:bodyPr wrap="none" rtlCol="0">
+            <a:spAutoFit/>
+          </a:bodyPr>
+          <a:lstStyle/>
+          <a:p>
+            <a:r>
+              <a:rPr kumimoji="1" lang="zh-CN" altLang="en-US" dirty="0"/>
+              <a:t>无序记录</a:t>
+            </a:r>
+          </a:p>
+        </p:txBody>
+      </p:sp>
+      <p:sp>
+        <p:nvSpPr>
+          <p:cNvPr id="23" name="文本框 22">
+            <a:extLst>
+              <a:ext uri="{FF2B5EF4-FFF2-40B4-BE49-F238E27FC236}">
+                <a16:creationId xmlns:a16="http://schemas.microsoft.com/office/drawing/2014/main" id="{DB9F40C9-85DE-37A2-0101-48B01CB32D91}"/>
+              </a:ext>
+            </a:extLst>
+          </p:cNvPr>
+          <p:cNvSpPr txBox="1"/>
+          <p:nvPr/>
+        </p:nvSpPr>
+        <p:spPr>
+          <a:xfrm>
+            <a:off x="1926199" y="311972"/>
+            <a:ext cx="1107996" cy="369332"/>
+          </a:xfrm>
+          <a:prstGeom prst="rect">
+            <a:avLst/>
+          </a:prstGeom>
+          <a:noFill/>
+        </p:spPr>
+        <p:txBody>
+          <a:bodyPr wrap="none" rtlCol="0">
+            <a:spAutoFit/>
+          </a:bodyPr>
+          <a:lstStyle/>
+          <a:p>
+            <a:r>
+              <a:rPr kumimoji="1" lang="zh-CN" altLang="en-US" dirty="0"/>
+              <a:t>有序记录</a:t>
+            </a:r>
+          </a:p>
+        </p:txBody>
+      </p:sp>
+      <p:sp>
+        <p:nvSpPr>
+          <p:cNvPr id="24" name="文本框 23">
+            <a:extLst>
+              <a:ext uri="{FF2B5EF4-FFF2-40B4-BE49-F238E27FC236}">
+                <a16:creationId xmlns:a16="http://schemas.microsoft.com/office/drawing/2014/main" id="{230FE678-C94B-8C8D-6901-B44B9F023604}"/>
+              </a:ext>
+            </a:extLst>
+          </p:cNvPr>
+          <p:cNvSpPr txBox="1"/>
+          <p:nvPr/>
+        </p:nvSpPr>
+        <p:spPr>
+          <a:xfrm>
+            <a:off x="4647345" y="312641"/>
+            <a:ext cx="1107996" cy="369332"/>
+          </a:xfrm>
+          <a:prstGeom prst="rect">
+            <a:avLst/>
+          </a:prstGeom>
+          <a:noFill/>
+        </p:spPr>
+        <p:txBody>
+          <a:bodyPr wrap="none" rtlCol="0">
+            <a:spAutoFit/>
+          </a:bodyPr>
+          <a:lstStyle/>
+          <a:p>
+            <a:r>
+              <a:rPr kumimoji="1" lang="zh-CN" altLang="en-US" dirty="0"/>
+              <a:t>散列文件</a:t>
+            </a:r>
+          </a:p>
+        </p:txBody>
+      </p:sp>
     </p:spTree>
     <p:extLst>
       <p:ext uri="{BB962C8B-B14F-4D97-AF65-F5344CB8AC3E}">
         <p14:creationId xmlns:p14="http://schemas.microsoft.com/office/powerpoint/2010/main" val="3999040655"/>
+      </p:ext>
+    </p:extLst>
+  </p:cSld>
+  <p:clrMapOvr>
+    <a:masterClrMapping/>
+  </p:clrMapOvr>
+</p:sld>
+</file>
+
+<file path=ppt/slides/slide6.xml><?xml version="1.0" encoding="utf-8"?>
+<p:sld xmlns:a="http://schemas.openxmlformats.org/drawingml/2006/main" xmlns:r="http://schemas.openxmlformats.org/officeDocument/2006/relationships" xmlns:p="http://schemas.openxmlformats.org/presentationml/2006/main">
+  <p:cSld>
+    <p:spTree>
+      <p:nvGrpSpPr>
+        <p:cNvPr id="1" name=""/>
+        <p:cNvGrpSpPr/>
+        <p:nvPr/>
+      </p:nvGrpSpPr>
+      <p:grpSpPr>
+        <a:xfrm>
+          <a:off x="0" y="0"/>
+          <a:ext cx="0" cy="0"/>
+          <a:chOff x="0" y="0"/>
+          <a:chExt cx="0" cy="0"/>
+        </a:xfrm>
+      </p:grpSpPr>
+      <p:graphicFrame>
+        <p:nvGraphicFramePr>
+          <p:cNvPr id="4" name="object 4">
+            <a:extLst>
+              <a:ext uri="{FF2B5EF4-FFF2-40B4-BE49-F238E27FC236}">
+                <a16:creationId xmlns:a16="http://schemas.microsoft.com/office/drawing/2014/main" id="{5E4A83E8-746F-28EC-C3BE-C187A27DB88C}"/>
+              </a:ext>
+            </a:extLst>
+          </p:cNvPr>
+          <p:cNvGraphicFramePr>
+            <a:graphicFrameLocks noGrp="1"/>
+          </p:cNvGraphicFramePr>
+          <p:nvPr>
+            <p:extLst>
+              <p:ext uri="{D42A27DB-BD31-4B8C-83A1-F6EECF244321}">
+                <p14:modId xmlns:p14="http://schemas.microsoft.com/office/powerpoint/2010/main" val="3244996501"/>
+              </p:ext>
+            </p:extLst>
+          </p:nvPr>
+        </p:nvGraphicFramePr>
+        <p:xfrm>
+          <a:off x="7579834" y="1825625"/>
+          <a:ext cx="2234565" cy="3094355"/>
+        </p:xfrm>
+        <a:graphic>
+          <a:graphicData uri="http://schemas.openxmlformats.org/drawingml/2006/table">
+            <a:tbl>
+              <a:tblPr firstRow="1" bandRow="1">
+                <a:tableStyleId>{2D5ABB26-0587-4C30-8999-92F81FD0307C}</a:tableStyleId>
+              </a:tblPr>
+              <a:tblGrid>
+                <a:gridCol w="439420">
+                  <a:extLst>
+                    <a:ext uri="{9D8B030D-6E8A-4147-A177-3AD203B41FA5}">
+                      <a16:colId xmlns:a16="http://schemas.microsoft.com/office/drawing/2014/main" val="20000"/>
+                    </a:ext>
+                  </a:extLst>
+                </a:gridCol>
+                <a:gridCol w="1795145">
+                  <a:extLst>
+                    <a:ext uri="{9D8B030D-6E8A-4147-A177-3AD203B41FA5}">
+                      <a16:colId xmlns:a16="http://schemas.microsoft.com/office/drawing/2014/main" val="20001"/>
+                    </a:ext>
+                  </a:extLst>
+                </a:gridCol>
+              </a:tblGrid>
+              <a:tr h="307340">
+                <a:tc>
+                  <a:txBody>
+                    <a:bodyPr/>
+                    <a:lstStyle/>
+                    <a:p>
+                      <a:pPr marR="222250">
+                        <a:lnSpc>
+                          <a:spcPct val="100000"/>
+                        </a:lnSpc>
+                      </a:pPr>
+                      <a:endParaRPr sz="1700">
+                        <a:latin typeface="Times New Roman"/>
+                        <a:cs typeface="Times New Roman"/>
+                      </a:endParaRPr>
+                    </a:p>
+                  </a:txBody>
+                  <a:tcPr marL="0" marR="0" marT="0" marB="0">
+                    <a:lnL w="9525">
+                      <a:solidFill>
+                        <a:srgbClr val="3333CC"/>
+                      </a:solidFill>
+                      <a:prstDash val="solid"/>
+                    </a:lnL>
+                    <a:lnR w="9525">
+                      <a:solidFill>
+                        <a:srgbClr val="3333CC"/>
+                      </a:solidFill>
+                      <a:prstDash val="solid"/>
+                    </a:lnR>
+                    <a:lnT w="9525">
+                      <a:solidFill>
+                        <a:srgbClr val="3333CC"/>
+                      </a:solidFill>
+                      <a:prstDash val="solid"/>
+                    </a:lnT>
+                    <a:lnB w="19050">
+                      <a:solidFill>
+                        <a:srgbClr val="3333CC"/>
+                      </a:solidFill>
+                      <a:prstDash val="solid"/>
+                    </a:lnB>
+                    <a:solidFill>
+                      <a:srgbClr val="FF0066"/>
+                    </a:solidFill>
+                  </a:tcPr>
+                </a:tc>
+                <a:tc>
+                  <a:txBody>
+                    <a:bodyPr/>
+                    <a:lstStyle/>
+                    <a:p>
+                      <a:pPr marL="290195">
+                        <a:lnSpc>
+                          <a:spcPts val="1800"/>
+                        </a:lnSpc>
+                        <a:spcBef>
+                          <a:spcPts val="525"/>
+                        </a:spcBef>
+                      </a:pPr>
+                      <a:r>
+                        <a:rPr sz="1600" b="1" spc="-25" dirty="0">
+                          <a:latin typeface="Lantinghei SC Heavy"/>
+                          <a:cs typeface="Lantinghei SC Heavy"/>
+                        </a:rPr>
+                        <a:t>(系</a:t>
+                      </a:r>
+                      <a:r>
+                        <a:rPr sz="1600" b="1" spc="-20" dirty="0">
+                          <a:latin typeface="Lantinghei SC Heavy"/>
+                          <a:cs typeface="Lantinghei SC Heavy"/>
+                        </a:rPr>
+                        <a:t>1</a:t>
+                      </a:r>
+                      <a:r>
+                        <a:rPr sz="1600" b="1" spc="-35" dirty="0">
+                          <a:latin typeface="Lantinghei SC Heavy"/>
+                          <a:cs typeface="Lantinghei SC Heavy"/>
+                        </a:rPr>
+                        <a:t>的)记录</a:t>
+                      </a:r>
+                      <a:endParaRPr sz="1600">
+                        <a:latin typeface="Lantinghei SC Heavy"/>
+                        <a:cs typeface="Lantinghei SC Heavy"/>
+                      </a:endParaRPr>
+                    </a:p>
+                  </a:txBody>
+                  <a:tcPr marL="0" marR="0" marT="66675" marB="0">
+                    <a:lnL w="9525">
+                      <a:solidFill>
+                        <a:srgbClr val="3333CC"/>
+                      </a:solidFill>
+                      <a:prstDash val="solid"/>
+                    </a:lnL>
+                    <a:lnR w="9525">
+                      <a:solidFill>
+                        <a:srgbClr val="FF0066"/>
+                      </a:solidFill>
+                      <a:prstDash val="solid"/>
+                    </a:lnR>
+                    <a:lnT w="9525">
+                      <a:solidFill>
+                        <a:srgbClr val="FF0066"/>
+                      </a:solidFill>
+                      <a:prstDash val="solid"/>
+                    </a:lnT>
+                    <a:lnB w="19050">
+                      <a:solidFill>
+                        <a:srgbClr val="FF0066"/>
+                      </a:solidFill>
+                      <a:prstDash val="solid"/>
+                    </a:lnB>
+                    <a:solidFill>
+                      <a:srgbClr val="FFFF99"/>
+                    </a:solidFill>
+                  </a:tcPr>
+                </a:tc>
+                <a:extLst>
+                  <a:ext uri="{0D108BD9-81ED-4DB2-BD59-A6C34878D82A}">
+                    <a16:rowId xmlns:a16="http://schemas.microsoft.com/office/drawing/2014/main" val="10000"/>
+                  </a:ext>
+                </a:extLst>
+              </a:tr>
+              <a:tr h="311150">
+                <a:tc>
+                  <a:txBody>
+                    <a:bodyPr/>
+                    <a:lstStyle/>
+                    <a:p>
+                      <a:pPr marR="2540" algn="r">
+                        <a:lnSpc>
+                          <a:spcPts val="1805"/>
+                        </a:lnSpc>
+                        <a:spcBef>
+                          <a:spcPts val="545"/>
+                        </a:spcBef>
+                      </a:pPr>
+                      <a:r>
+                        <a:rPr sz="1600" b="1" spc="-40" dirty="0">
+                          <a:latin typeface="Lantinghei SC Heavy"/>
+                          <a:cs typeface="Lantinghei SC Heavy"/>
+                        </a:rPr>
+                        <a:t>(系</a:t>
+                      </a:r>
+                      <a:endParaRPr sz="1600">
+                        <a:latin typeface="Lantinghei SC Heavy"/>
+                        <a:cs typeface="Lantinghei SC Heavy"/>
+                      </a:endParaRPr>
+                    </a:p>
+                  </a:txBody>
+                  <a:tcPr marL="0" marR="0" marT="69215" marB="0">
+                    <a:lnL w="9525">
+                      <a:solidFill>
+                        <a:srgbClr val="3333CC"/>
+                      </a:solidFill>
+                      <a:prstDash val="solid"/>
+                    </a:lnL>
+                    <a:lnR w="9525">
+                      <a:solidFill>
+                        <a:srgbClr val="3333CC"/>
+                      </a:solidFill>
+                      <a:prstDash val="solid"/>
+                    </a:lnR>
+                    <a:lnT w="19050">
+                      <a:solidFill>
+                        <a:srgbClr val="3333CC"/>
+                      </a:solidFill>
+                      <a:prstDash val="solid"/>
+                    </a:lnT>
+                    <a:lnB w="19050">
+                      <a:solidFill>
+                        <a:srgbClr val="3333CC"/>
+                      </a:solidFill>
+                      <a:prstDash val="solid"/>
+                    </a:lnB>
+                    <a:solidFill>
+                      <a:srgbClr val="FF0066"/>
+                    </a:solidFill>
+                  </a:tcPr>
+                </a:tc>
+                <a:tc>
+                  <a:txBody>
+                    <a:bodyPr/>
+                    <a:lstStyle/>
+                    <a:p>
+                      <a:pPr marR="26670" algn="r">
+                        <a:lnSpc>
+                          <a:spcPts val="1805"/>
+                        </a:lnSpc>
+                        <a:spcBef>
+                          <a:spcPts val="545"/>
+                        </a:spcBef>
+                      </a:pPr>
+                      <a:r>
+                        <a:rPr sz="1600" b="1" spc="-10" dirty="0">
+                          <a:latin typeface="Lantinghei SC Heavy"/>
+                          <a:cs typeface="Lantinghei SC Heavy"/>
+                        </a:rPr>
+                        <a:t>1的教师1</a:t>
+                      </a:r>
+                      <a:r>
+                        <a:rPr sz="1600" b="1" spc="-20" dirty="0">
+                          <a:latin typeface="Lantinghei SC Heavy"/>
+                          <a:cs typeface="Lantinghei SC Heavy"/>
+                        </a:rPr>
+                        <a:t>的)记录</a:t>
+                      </a:r>
+                      <a:endParaRPr sz="1600">
+                        <a:latin typeface="Lantinghei SC Heavy"/>
+                        <a:cs typeface="Lantinghei SC Heavy"/>
+                      </a:endParaRPr>
+                    </a:p>
+                  </a:txBody>
+                  <a:tcPr marL="0" marR="0" marT="69215" marB="0">
+                    <a:lnL w="9525">
+                      <a:solidFill>
+                        <a:srgbClr val="3333CC"/>
+                      </a:solidFill>
+                      <a:prstDash val="solid"/>
+                    </a:lnL>
+                    <a:lnR w="9525">
+                      <a:solidFill>
+                        <a:srgbClr val="FF0066"/>
+                      </a:solidFill>
+                      <a:prstDash val="solid"/>
+                    </a:lnR>
+                    <a:lnT w="19050">
+                      <a:solidFill>
+                        <a:srgbClr val="FF0066"/>
+                      </a:solidFill>
+                      <a:prstDash val="solid"/>
+                    </a:lnT>
+                    <a:lnB w="19050">
+                      <a:solidFill>
+                        <a:srgbClr val="FF0066"/>
+                      </a:solidFill>
+                      <a:prstDash val="solid"/>
+                    </a:lnB>
+                    <a:solidFill>
+                      <a:srgbClr val="FFFF99"/>
+                    </a:solidFill>
+                  </a:tcPr>
+                </a:tc>
+                <a:extLst>
+                  <a:ext uri="{0D108BD9-81ED-4DB2-BD59-A6C34878D82A}">
+                    <a16:rowId xmlns:a16="http://schemas.microsoft.com/office/drawing/2014/main" val="10001"/>
+                  </a:ext>
+                </a:extLst>
+              </a:tr>
+              <a:tr h="310515">
+                <a:tc>
+                  <a:txBody>
+                    <a:bodyPr/>
+                    <a:lstStyle/>
+                    <a:p>
+                      <a:pPr marR="2540" algn="r">
+                        <a:lnSpc>
+                          <a:spcPts val="1895"/>
+                        </a:lnSpc>
+                        <a:spcBef>
+                          <a:spcPts val="445"/>
+                        </a:spcBef>
+                      </a:pPr>
+                      <a:r>
+                        <a:rPr sz="1600" b="1" spc="-40" dirty="0">
+                          <a:latin typeface="Lantinghei SC Heavy"/>
+                          <a:cs typeface="Lantinghei SC Heavy"/>
+                        </a:rPr>
+                        <a:t>(系</a:t>
+                      </a:r>
+                      <a:endParaRPr sz="1600">
+                        <a:latin typeface="Lantinghei SC Heavy"/>
+                        <a:cs typeface="Lantinghei SC Heavy"/>
+                      </a:endParaRPr>
+                    </a:p>
+                  </a:txBody>
+                  <a:tcPr marL="0" marR="0" marT="56515" marB="0">
+                    <a:lnL w="9525">
+                      <a:solidFill>
+                        <a:srgbClr val="3333CC"/>
+                      </a:solidFill>
+                      <a:prstDash val="solid"/>
+                    </a:lnL>
+                    <a:lnR w="9525">
+                      <a:solidFill>
+                        <a:srgbClr val="3333CC"/>
+                      </a:solidFill>
+                      <a:prstDash val="solid"/>
+                    </a:lnR>
+                    <a:lnT w="19050">
+                      <a:solidFill>
+                        <a:srgbClr val="3333CC"/>
+                      </a:solidFill>
+                      <a:prstDash val="solid"/>
+                    </a:lnT>
+                    <a:lnB w="12700">
+                      <a:solidFill>
+                        <a:srgbClr val="3333CC"/>
+                      </a:solidFill>
+                      <a:prstDash val="solid"/>
+                    </a:lnB>
+                    <a:solidFill>
+                      <a:srgbClr val="FF0066"/>
+                    </a:solidFill>
+                  </a:tcPr>
+                </a:tc>
+                <a:tc>
+                  <a:txBody>
+                    <a:bodyPr/>
+                    <a:lstStyle/>
+                    <a:p>
+                      <a:pPr marR="17780" algn="r">
+                        <a:lnSpc>
+                          <a:spcPts val="1895"/>
+                        </a:lnSpc>
+                        <a:spcBef>
+                          <a:spcPts val="445"/>
+                        </a:spcBef>
+                      </a:pPr>
+                      <a:r>
+                        <a:rPr sz="1600" b="1" spc="-30" dirty="0">
+                          <a:latin typeface="Lantinghei SC Heavy"/>
+                          <a:cs typeface="Lantinghei SC Heavy"/>
+                        </a:rPr>
+                        <a:t>1</a:t>
+                      </a:r>
+                      <a:r>
+                        <a:rPr sz="1600" b="1" spc="-45" dirty="0">
+                          <a:latin typeface="Lantinghei SC Heavy"/>
+                          <a:cs typeface="Lantinghei SC Heavy"/>
+                        </a:rPr>
+                        <a:t>的教师</a:t>
+                      </a:r>
+                      <a:r>
+                        <a:rPr sz="1600" b="1" spc="-35" dirty="0">
+                          <a:latin typeface="Lantinghei SC Heavy"/>
+                          <a:cs typeface="Lantinghei SC Heavy"/>
+                        </a:rPr>
+                        <a:t>2</a:t>
+                      </a:r>
+                      <a:r>
+                        <a:rPr sz="1600" b="1" spc="-45" dirty="0">
+                          <a:latin typeface="Lantinghei SC Heavy"/>
+                          <a:cs typeface="Lantinghei SC Heavy"/>
+                        </a:rPr>
+                        <a:t>的)记录</a:t>
+                      </a:r>
+                      <a:endParaRPr sz="1600">
+                        <a:latin typeface="Lantinghei SC Heavy"/>
+                        <a:cs typeface="Lantinghei SC Heavy"/>
+                      </a:endParaRPr>
+                    </a:p>
+                  </a:txBody>
+                  <a:tcPr marL="0" marR="0" marT="56515" marB="0">
+                    <a:lnL w="9525">
+                      <a:solidFill>
+                        <a:srgbClr val="3333CC"/>
+                      </a:solidFill>
+                      <a:prstDash val="solid"/>
+                    </a:lnL>
+                    <a:lnR w="9525">
+                      <a:solidFill>
+                        <a:srgbClr val="FF0066"/>
+                      </a:solidFill>
+                      <a:prstDash val="solid"/>
+                    </a:lnR>
+                    <a:lnT w="19050">
+                      <a:solidFill>
+                        <a:srgbClr val="FF0066"/>
+                      </a:solidFill>
+                      <a:prstDash val="solid"/>
+                    </a:lnT>
+                    <a:lnB w="19050">
+                      <a:solidFill>
+                        <a:srgbClr val="FF0066"/>
+                      </a:solidFill>
+                      <a:prstDash val="solid"/>
+                    </a:lnB>
+                    <a:solidFill>
+                      <a:srgbClr val="FFFF99"/>
+                    </a:solidFill>
+                  </a:tcPr>
+                </a:tc>
+                <a:extLst>
+                  <a:ext uri="{0D108BD9-81ED-4DB2-BD59-A6C34878D82A}">
+                    <a16:rowId xmlns:a16="http://schemas.microsoft.com/office/drawing/2014/main" val="10002"/>
+                  </a:ext>
+                </a:extLst>
+              </a:tr>
+              <a:tr h="309880">
+                <a:tc>
+                  <a:txBody>
+                    <a:bodyPr/>
+                    <a:lstStyle/>
+                    <a:p>
+                      <a:pPr marR="11430" algn="r">
+                        <a:lnSpc>
+                          <a:spcPts val="1800"/>
+                        </a:lnSpc>
+                        <a:spcBef>
+                          <a:spcPts val="540"/>
+                        </a:spcBef>
+                      </a:pPr>
+                      <a:r>
+                        <a:rPr sz="1600" b="1" spc="-40" dirty="0">
+                          <a:latin typeface="Lantinghei SC Heavy"/>
+                          <a:cs typeface="Lantinghei SC Heavy"/>
+                        </a:rPr>
+                        <a:t>(系</a:t>
+                      </a:r>
+                      <a:endParaRPr sz="1600">
+                        <a:latin typeface="Lantinghei SC Heavy"/>
+                        <a:cs typeface="Lantinghei SC Heavy"/>
+                      </a:endParaRPr>
+                    </a:p>
+                  </a:txBody>
+                  <a:tcPr marL="0" marR="0" marT="68580" marB="0">
+                    <a:lnL w="9525">
+                      <a:solidFill>
+                        <a:srgbClr val="3333CC"/>
+                      </a:solidFill>
+                      <a:prstDash val="solid"/>
+                    </a:lnL>
+                    <a:lnR w="9525">
+                      <a:solidFill>
+                        <a:srgbClr val="3333CC"/>
+                      </a:solidFill>
+                      <a:prstDash val="solid"/>
+                    </a:lnR>
+                    <a:lnT w="12700">
+                      <a:solidFill>
+                        <a:srgbClr val="3333CC"/>
+                      </a:solidFill>
+                      <a:prstDash val="solid"/>
+                    </a:lnT>
+                    <a:lnB w="19050">
+                      <a:solidFill>
+                        <a:srgbClr val="3333CC"/>
+                      </a:solidFill>
+                      <a:prstDash val="solid"/>
+                    </a:lnB>
+                    <a:solidFill>
+                      <a:srgbClr val="FF0066"/>
+                    </a:solidFill>
+                  </a:tcPr>
+                </a:tc>
+                <a:tc>
+                  <a:txBody>
+                    <a:bodyPr/>
+                    <a:lstStyle/>
+                    <a:p>
+                      <a:pPr marR="31115" algn="r">
+                        <a:lnSpc>
+                          <a:spcPts val="1800"/>
+                        </a:lnSpc>
+                        <a:spcBef>
+                          <a:spcPts val="540"/>
+                        </a:spcBef>
+                      </a:pPr>
+                      <a:r>
+                        <a:rPr sz="1600" b="1" spc="-30" dirty="0">
+                          <a:latin typeface="Lantinghei SC Heavy"/>
+                          <a:cs typeface="Lantinghei SC Heavy"/>
+                        </a:rPr>
+                        <a:t>1</a:t>
+                      </a:r>
+                      <a:r>
+                        <a:rPr sz="1600" b="1" spc="-45" dirty="0">
+                          <a:latin typeface="Lantinghei SC Heavy"/>
+                          <a:cs typeface="Lantinghei SC Heavy"/>
+                        </a:rPr>
+                        <a:t>的教师</a:t>
+                      </a:r>
+                      <a:r>
+                        <a:rPr sz="1600" b="1" spc="-35" dirty="0">
+                          <a:latin typeface="Lantinghei SC Heavy"/>
+                          <a:cs typeface="Lantinghei SC Heavy"/>
+                        </a:rPr>
+                        <a:t>3</a:t>
+                      </a:r>
+                      <a:r>
+                        <a:rPr sz="1600" b="1" spc="-45" dirty="0">
+                          <a:latin typeface="Lantinghei SC Heavy"/>
+                          <a:cs typeface="Lantinghei SC Heavy"/>
+                        </a:rPr>
+                        <a:t>的)记录</a:t>
+                      </a:r>
+                      <a:endParaRPr sz="1600">
+                        <a:latin typeface="Lantinghei SC Heavy"/>
+                        <a:cs typeface="Lantinghei SC Heavy"/>
+                      </a:endParaRPr>
+                    </a:p>
+                  </a:txBody>
+                  <a:tcPr marL="0" marR="0" marT="68580" marB="0">
+                    <a:lnL w="9525">
+                      <a:solidFill>
+                        <a:srgbClr val="3333CC"/>
+                      </a:solidFill>
+                      <a:prstDash val="solid"/>
+                    </a:lnL>
+                    <a:lnR w="9525">
+                      <a:solidFill>
+                        <a:srgbClr val="FF0066"/>
+                      </a:solidFill>
+                      <a:prstDash val="solid"/>
+                    </a:lnR>
+                    <a:lnT w="19050">
+                      <a:solidFill>
+                        <a:srgbClr val="FF0066"/>
+                      </a:solidFill>
+                      <a:prstDash val="solid"/>
+                    </a:lnT>
+                    <a:lnB w="19050">
+                      <a:solidFill>
+                        <a:srgbClr val="FF0066"/>
+                      </a:solidFill>
+                      <a:prstDash val="solid"/>
+                    </a:lnB>
+                    <a:solidFill>
+                      <a:srgbClr val="FFFF99"/>
+                    </a:solidFill>
+                  </a:tcPr>
+                </a:tc>
+                <a:extLst>
+                  <a:ext uri="{0D108BD9-81ED-4DB2-BD59-A6C34878D82A}">
+                    <a16:rowId xmlns:a16="http://schemas.microsoft.com/office/drawing/2014/main" val="10003"/>
+                  </a:ext>
+                </a:extLst>
+              </a:tr>
+              <a:tr h="309880">
+                <a:tc>
+                  <a:txBody>
+                    <a:bodyPr/>
+                    <a:lstStyle/>
+                    <a:p>
+                      <a:pPr marR="222250">
+                        <a:lnSpc>
+                          <a:spcPct val="100000"/>
+                        </a:lnSpc>
+                      </a:pPr>
+                      <a:endParaRPr sz="1700">
+                        <a:latin typeface="Times New Roman"/>
+                        <a:cs typeface="Times New Roman"/>
+                      </a:endParaRPr>
+                    </a:p>
+                  </a:txBody>
+                  <a:tcPr marL="0" marR="0" marT="0" marB="0">
+                    <a:lnL w="9525">
+                      <a:solidFill>
+                        <a:srgbClr val="3333CC"/>
+                      </a:solidFill>
+                      <a:prstDash val="solid"/>
+                    </a:lnL>
+                    <a:lnR w="9525">
+                      <a:solidFill>
+                        <a:srgbClr val="3333CC"/>
+                      </a:solidFill>
+                      <a:prstDash val="solid"/>
+                    </a:lnR>
+                    <a:lnT w="19050">
+                      <a:solidFill>
+                        <a:srgbClr val="3333CC"/>
+                      </a:solidFill>
+                      <a:prstDash val="solid"/>
+                    </a:lnT>
+                    <a:lnB w="12700">
+                      <a:solidFill>
+                        <a:srgbClr val="3333CC"/>
+                      </a:solidFill>
+                      <a:prstDash val="solid"/>
+                    </a:lnB>
+                    <a:solidFill>
+                      <a:srgbClr val="FF0066"/>
+                    </a:solidFill>
+                  </a:tcPr>
+                </a:tc>
+                <a:tc>
+                  <a:txBody>
+                    <a:bodyPr/>
+                    <a:lstStyle/>
+                    <a:p>
+                      <a:pPr marL="292100">
+                        <a:lnSpc>
+                          <a:spcPts val="1795"/>
+                        </a:lnSpc>
+                        <a:spcBef>
+                          <a:spcPts val="545"/>
+                        </a:spcBef>
+                      </a:pPr>
+                      <a:r>
+                        <a:rPr sz="1600" b="1" spc="-45" dirty="0">
+                          <a:latin typeface="Lantinghei SC Heavy"/>
+                          <a:cs typeface="Lantinghei SC Heavy"/>
+                        </a:rPr>
+                        <a:t>(系2</a:t>
+                      </a:r>
+                      <a:r>
+                        <a:rPr sz="1600" b="1" spc="-50" dirty="0">
+                          <a:latin typeface="Lantinghei SC Heavy"/>
+                          <a:cs typeface="Lantinghei SC Heavy"/>
+                        </a:rPr>
+                        <a:t>的)记录</a:t>
+                      </a:r>
+                      <a:endParaRPr sz="1600">
+                        <a:latin typeface="Lantinghei SC Heavy"/>
+                        <a:cs typeface="Lantinghei SC Heavy"/>
+                      </a:endParaRPr>
+                    </a:p>
+                  </a:txBody>
+                  <a:tcPr marL="0" marR="0" marT="69215" marB="0">
+                    <a:lnL w="9525">
+                      <a:solidFill>
+                        <a:srgbClr val="3333CC"/>
+                      </a:solidFill>
+                      <a:prstDash val="solid"/>
+                    </a:lnL>
+                    <a:lnR w="9525">
+                      <a:solidFill>
+                        <a:srgbClr val="FF0066"/>
+                      </a:solidFill>
+                      <a:prstDash val="solid"/>
+                    </a:lnR>
+                    <a:lnT w="19050">
+                      <a:solidFill>
+                        <a:srgbClr val="FF0066"/>
+                      </a:solidFill>
+                      <a:prstDash val="solid"/>
+                    </a:lnT>
+                    <a:lnB w="19050">
+                      <a:solidFill>
+                        <a:srgbClr val="FF0066"/>
+                      </a:solidFill>
+                      <a:prstDash val="solid"/>
+                    </a:lnB>
+                    <a:solidFill>
+                      <a:srgbClr val="FFFF99"/>
+                    </a:solidFill>
+                  </a:tcPr>
+                </a:tc>
+                <a:extLst>
+                  <a:ext uri="{0D108BD9-81ED-4DB2-BD59-A6C34878D82A}">
+                    <a16:rowId xmlns:a16="http://schemas.microsoft.com/office/drawing/2014/main" val="10004"/>
+                  </a:ext>
+                </a:extLst>
+              </a:tr>
+              <a:tr h="309880">
+                <a:tc>
+                  <a:txBody>
+                    <a:bodyPr/>
+                    <a:lstStyle/>
+                    <a:p>
+                      <a:pPr algn="r">
+                        <a:lnSpc>
+                          <a:spcPts val="1914"/>
+                        </a:lnSpc>
+                        <a:spcBef>
+                          <a:spcPts val="425"/>
+                        </a:spcBef>
+                      </a:pPr>
+                      <a:r>
+                        <a:rPr sz="1600" b="1" spc="-40" dirty="0">
+                          <a:latin typeface="Lantinghei SC Heavy"/>
+                          <a:cs typeface="Lantinghei SC Heavy"/>
+                        </a:rPr>
+                        <a:t>(系</a:t>
+                      </a:r>
+                      <a:endParaRPr sz="1600">
+                        <a:latin typeface="Lantinghei SC Heavy"/>
+                        <a:cs typeface="Lantinghei SC Heavy"/>
+                      </a:endParaRPr>
+                    </a:p>
+                  </a:txBody>
+                  <a:tcPr marL="0" marR="0" marT="53975" marB="0">
+                    <a:lnL w="9525">
+                      <a:solidFill>
+                        <a:srgbClr val="3333CC"/>
+                      </a:solidFill>
+                      <a:prstDash val="solid"/>
+                    </a:lnL>
+                    <a:lnR w="9525">
+                      <a:solidFill>
+                        <a:srgbClr val="3333CC"/>
+                      </a:solidFill>
+                      <a:prstDash val="solid"/>
+                    </a:lnR>
+                    <a:lnT w="12700">
+                      <a:solidFill>
+                        <a:srgbClr val="3333CC"/>
+                      </a:solidFill>
+                      <a:prstDash val="solid"/>
+                    </a:lnT>
+                    <a:lnB w="19050">
+                      <a:solidFill>
+                        <a:srgbClr val="3333CC"/>
+                      </a:solidFill>
+                      <a:prstDash val="solid"/>
+                    </a:lnB>
+                    <a:solidFill>
+                      <a:srgbClr val="FF0066"/>
+                    </a:solidFill>
+                  </a:tcPr>
+                </a:tc>
+                <a:tc>
+                  <a:txBody>
+                    <a:bodyPr/>
+                    <a:lstStyle/>
+                    <a:p>
+                      <a:pPr marR="15240" algn="r">
+                        <a:lnSpc>
+                          <a:spcPts val="1914"/>
+                        </a:lnSpc>
+                        <a:spcBef>
+                          <a:spcPts val="425"/>
+                        </a:spcBef>
+                      </a:pPr>
+                      <a:r>
+                        <a:rPr sz="1600" b="1" spc="-45" dirty="0">
+                          <a:latin typeface="Lantinghei SC Heavy"/>
+                          <a:cs typeface="Lantinghei SC Heavy"/>
+                        </a:rPr>
+                        <a:t>2</a:t>
+                      </a:r>
+                      <a:r>
+                        <a:rPr sz="1600" b="1" spc="-60" dirty="0">
+                          <a:latin typeface="Lantinghei SC Heavy"/>
+                          <a:cs typeface="Lantinghei SC Heavy"/>
+                        </a:rPr>
+                        <a:t>的教师</a:t>
+                      </a:r>
+                      <a:r>
+                        <a:rPr sz="1600" b="1" spc="-45" dirty="0">
+                          <a:latin typeface="Lantinghei SC Heavy"/>
+                          <a:cs typeface="Lantinghei SC Heavy"/>
+                        </a:rPr>
+                        <a:t>5</a:t>
+                      </a:r>
+                      <a:r>
+                        <a:rPr sz="1600" b="1" spc="-50" dirty="0">
+                          <a:latin typeface="Lantinghei SC Heavy"/>
+                          <a:cs typeface="Lantinghei SC Heavy"/>
+                        </a:rPr>
+                        <a:t>的)记录</a:t>
+                      </a:r>
+                      <a:endParaRPr sz="1600">
+                        <a:latin typeface="Lantinghei SC Heavy"/>
+                        <a:cs typeface="Lantinghei SC Heavy"/>
+                      </a:endParaRPr>
+                    </a:p>
+                  </a:txBody>
+                  <a:tcPr marL="0" marR="0" marT="53975" marB="0">
+                    <a:lnL w="9525">
+                      <a:solidFill>
+                        <a:srgbClr val="3333CC"/>
+                      </a:solidFill>
+                      <a:prstDash val="solid"/>
+                    </a:lnL>
+                    <a:lnR w="9525">
+                      <a:solidFill>
+                        <a:srgbClr val="FF0066"/>
+                      </a:solidFill>
+                      <a:prstDash val="solid"/>
+                    </a:lnR>
+                    <a:lnT w="19050">
+                      <a:solidFill>
+                        <a:srgbClr val="FF0066"/>
+                      </a:solidFill>
+                      <a:prstDash val="solid"/>
+                    </a:lnT>
+                    <a:lnB w="19050">
+                      <a:solidFill>
+                        <a:srgbClr val="FF0066"/>
+                      </a:solidFill>
+                      <a:prstDash val="solid"/>
+                    </a:lnB>
+                    <a:solidFill>
+                      <a:srgbClr val="FFFF99"/>
+                    </a:solidFill>
+                  </a:tcPr>
+                </a:tc>
+                <a:extLst>
+                  <a:ext uri="{0D108BD9-81ED-4DB2-BD59-A6C34878D82A}">
+                    <a16:rowId xmlns:a16="http://schemas.microsoft.com/office/drawing/2014/main" val="10005"/>
+                  </a:ext>
+                </a:extLst>
+              </a:tr>
+              <a:tr h="310515">
+                <a:tc>
+                  <a:txBody>
+                    <a:bodyPr/>
+                    <a:lstStyle/>
+                    <a:p>
+                      <a:pPr marR="2540" algn="r">
+                        <a:lnSpc>
+                          <a:spcPts val="1795"/>
+                        </a:lnSpc>
+                        <a:spcBef>
+                          <a:spcPts val="550"/>
+                        </a:spcBef>
+                      </a:pPr>
+                      <a:r>
+                        <a:rPr sz="1600" b="1" spc="-40" dirty="0">
+                          <a:latin typeface="Lantinghei SC Heavy"/>
+                          <a:cs typeface="Lantinghei SC Heavy"/>
+                        </a:rPr>
+                        <a:t>(系</a:t>
+                      </a:r>
+                      <a:endParaRPr sz="1600">
+                        <a:latin typeface="Lantinghei SC Heavy"/>
+                        <a:cs typeface="Lantinghei SC Heavy"/>
+                      </a:endParaRPr>
+                    </a:p>
+                  </a:txBody>
+                  <a:tcPr marL="0" marR="0" marT="69850" marB="0">
+                    <a:lnL w="9525">
+                      <a:solidFill>
+                        <a:srgbClr val="3333CC"/>
+                      </a:solidFill>
+                      <a:prstDash val="solid"/>
+                    </a:lnL>
+                    <a:lnR w="9525">
+                      <a:solidFill>
+                        <a:srgbClr val="3333CC"/>
+                      </a:solidFill>
+                      <a:prstDash val="solid"/>
+                    </a:lnR>
+                    <a:lnT w="19050">
+                      <a:solidFill>
+                        <a:srgbClr val="3333CC"/>
+                      </a:solidFill>
+                      <a:prstDash val="solid"/>
+                    </a:lnT>
+                    <a:lnB w="12700">
+                      <a:solidFill>
+                        <a:srgbClr val="3333CC"/>
+                      </a:solidFill>
+                      <a:prstDash val="solid"/>
+                    </a:lnB>
+                    <a:solidFill>
+                      <a:srgbClr val="FF0066"/>
+                    </a:solidFill>
+                  </a:tcPr>
+                </a:tc>
+                <a:tc>
+                  <a:txBody>
+                    <a:bodyPr/>
+                    <a:lstStyle/>
+                    <a:p>
+                      <a:pPr marR="26670" algn="r">
+                        <a:lnSpc>
+                          <a:spcPts val="1795"/>
+                        </a:lnSpc>
+                        <a:spcBef>
+                          <a:spcPts val="550"/>
+                        </a:spcBef>
+                      </a:pPr>
+                      <a:r>
+                        <a:rPr sz="1600" b="1" spc="-45" dirty="0">
+                          <a:latin typeface="Lantinghei SC Heavy"/>
+                          <a:cs typeface="Lantinghei SC Heavy"/>
+                        </a:rPr>
+                        <a:t>2</a:t>
+                      </a:r>
+                      <a:r>
+                        <a:rPr sz="1600" b="1" spc="-60" dirty="0">
+                          <a:latin typeface="Lantinghei SC Heavy"/>
+                          <a:cs typeface="Lantinghei SC Heavy"/>
+                        </a:rPr>
+                        <a:t>的教师</a:t>
+                      </a:r>
+                      <a:r>
+                        <a:rPr sz="1600" b="1" spc="-50" dirty="0">
+                          <a:latin typeface="Lantinghei SC Heavy"/>
+                          <a:cs typeface="Lantinghei SC Heavy"/>
+                        </a:rPr>
+                        <a:t>8的)记录</a:t>
+                      </a:r>
+                      <a:endParaRPr sz="1600">
+                        <a:latin typeface="Lantinghei SC Heavy"/>
+                        <a:cs typeface="Lantinghei SC Heavy"/>
+                      </a:endParaRPr>
+                    </a:p>
+                  </a:txBody>
+                  <a:tcPr marL="0" marR="0" marT="69850" marB="0">
+                    <a:lnL w="9525">
+                      <a:solidFill>
+                        <a:srgbClr val="3333CC"/>
+                      </a:solidFill>
+                      <a:prstDash val="solid"/>
+                    </a:lnL>
+                    <a:lnR w="9525">
+                      <a:solidFill>
+                        <a:srgbClr val="FF0066"/>
+                      </a:solidFill>
+                      <a:prstDash val="solid"/>
+                    </a:lnR>
+                    <a:lnT w="19050">
+                      <a:solidFill>
+                        <a:srgbClr val="FF0066"/>
+                      </a:solidFill>
+                      <a:prstDash val="solid"/>
+                    </a:lnT>
+                    <a:lnB w="19050">
+                      <a:solidFill>
+                        <a:srgbClr val="FF0066"/>
+                      </a:solidFill>
+                      <a:prstDash val="solid"/>
+                    </a:lnB>
+                    <a:solidFill>
+                      <a:srgbClr val="FFFF99"/>
+                    </a:solidFill>
+                  </a:tcPr>
+                </a:tc>
+                <a:extLst>
+                  <a:ext uri="{0D108BD9-81ED-4DB2-BD59-A6C34878D82A}">
+                    <a16:rowId xmlns:a16="http://schemas.microsoft.com/office/drawing/2014/main" val="10006"/>
+                  </a:ext>
+                </a:extLst>
+              </a:tr>
+              <a:tr h="308610">
+                <a:tc>
+                  <a:txBody>
+                    <a:bodyPr/>
+                    <a:lstStyle/>
+                    <a:p>
+                      <a:pPr marR="222250">
+                        <a:lnSpc>
+                          <a:spcPct val="100000"/>
+                        </a:lnSpc>
+                      </a:pPr>
+                      <a:endParaRPr sz="1700">
+                        <a:latin typeface="Times New Roman"/>
+                        <a:cs typeface="Times New Roman"/>
+                      </a:endParaRPr>
+                    </a:p>
+                  </a:txBody>
+                  <a:tcPr marL="0" marR="0" marT="0" marB="0">
+                    <a:lnL w="9525">
+                      <a:solidFill>
+                        <a:srgbClr val="3333CC"/>
+                      </a:solidFill>
+                      <a:prstDash val="solid"/>
+                    </a:lnL>
+                    <a:lnR w="9525">
+                      <a:solidFill>
+                        <a:srgbClr val="3333CC"/>
+                      </a:solidFill>
+                      <a:prstDash val="solid"/>
+                    </a:lnR>
+                    <a:lnT w="12700">
+                      <a:solidFill>
+                        <a:srgbClr val="3333CC"/>
+                      </a:solidFill>
+                      <a:prstDash val="solid"/>
+                    </a:lnT>
+                    <a:lnB w="12700">
+                      <a:solidFill>
+                        <a:srgbClr val="3333CC"/>
+                      </a:solidFill>
+                      <a:prstDash val="solid"/>
+                    </a:lnB>
+                    <a:solidFill>
+                      <a:srgbClr val="FF0066"/>
+                    </a:solidFill>
+                  </a:tcPr>
+                </a:tc>
+                <a:tc>
+                  <a:txBody>
+                    <a:bodyPr/>
+                    <a:lstStyle/>
+                    <a:p>
+                      <a:pPr marL="292100">
+                        <a:lnSpc>
+                          <a:spcPts val="1789"/>
+                        </a:lnSpc>
+                        <a:spcBef>
+                          <a:spcPts val="540"/>
+                        </a:spcBef>
+                      </a:pPr>
+                      <a:r>
+                        <a:rPr sz="1600" b="1" spc="-45" dirty="0">
+                          <a:latin typeface="Lantinghei SC Heavy"/>
+                          <a:cs typeface="Lantinghei SC Heavy"/>
+                        </a:rPr>
+                        <a:t>(系</a:t>
+                      </a:r>
+                      <a:r>
+                        <a:rPr sz="1600" b="1" spc="-50" dirty="0">
+                          <a:latin typeface="Lantinghei SC Heavy"/>
+                          <a:cs typeface="Lantinghei SC Heavy"/>
+                        </a:rPr>
+                        <a:t>4的)记录</a:t>
+                      </a:r>
+                      <a:endParaRPr sz="1600">
+                        <a:latin typeface="Lantinghei SC Heavy"/>
+                        <a:cs typeface="Lantinghei SC Heavy"/>
+                      </a:endParaRPr>
+                    </a:p>
+                  </a:txBody>
+                  <a:tcPr marL="0" marR="0" marT="68580" marB="0">
+                    <a:lnL w="9525">
+                      <a:solidFill>
+                        <a:srgbClr val="3333CC"/>
+                      </a:solidFill>
+                      <a:prstDash val="solid"/>
+                    </a:lnL>
+                    <a:lnR w="9525">
+                      <a:solidFill>
+                        <a:srgbClr val="FF0066"/>
+                      </a:solidFill>
+                      <a:prstDash val="solid"/>
+                    </a:lnR>
+                    <a:lnT w="19050">
+                      <a:solidFill>
+                        <a:srgbClr val="FF0066"/>
+                      </a:solidFill>
+                      <a:prstDash val="solid"/>
+                    </a:lnT>
+                    <a:lnB w="12700">
+                      <a:solidFill>
+                        <a:srgbClr val="FF0066"/>
+                      </a:solidFill>
+                      <a:prstDash val="solid"/>
+                    </a:lnB>
+                    <a:solidFill>
+                      <a:srgbClr val="FFFF99"/>
+                    </a:solidFill>
+                  </a:tcPr>
+                </a:tc>
+                <a:extLst>
+                  <a:ext uri="{0D108BD9-81ED-4DB2-BD59-A6C34878D82A}">
+                    <a16:rowId xmlns:a16="http://schemas.microsoft.com/office/drawing/2014/main" val="10007"/>
+                  </a:ext>
+                </a:extLst>
+              </a:tr>
+              <a:tr h="309245">
+                <a:tc>
+                  <a:txBody>
+                    <a:bodyPr/>
+                    <a:lstStyle/>
+                    <a:p>
+                      <a:pPr algn="r">
+                        <a:lnSpc>
+                          <a:spcPts val="1914"/>
+                        </a:lnSpc>
+                        <a:spcBef>
+                          <a:spcPts val="420"/>
+                        </a:spcBef>
+                      </a:pPr>
+                      <a:r>
+                        <a:rPr sz="1600" b="1" spc="-40" dirty="0">
+                          <a:latin typeface="Lantinghei SC Heavy"/>
+                          <a:cs typeface="Lantinghei SC Heavy"/>
+                        </a:rPr>
+                        <a:t>(系</a:t>
+                      </a:r>
+                      <a:endParaRPr sz="1600">
+                        <a:latin typeface="Lantinghei SC Heavy"/>
+                        <a:cs typeface="Lantinghei SC Heavy"/>
+                      </a:endParaRPr>
+                    </a:p>
+                  </a:txBody>
+                  <a:tcPr marL="0" marR="0" marT="53340" marB="0">
+                    <a:lnL w="9525">
+                      <a:solidFill>
+                        <a:srgbClr val="3333CC"/>
+                      </a:solidFill>
+                      <a:prstDash val="solid"/>
+                    </a:lnL>
+                    <a:lnR w="9525">
+                      <a:solidFill>
+                        <a:srgbClr val="3333CC"/>
+                      </a:solidFill>
+                      <a:prstDash val="solid"/>
+                    </a:lnR>
+                    <a:lnT w="12700">
+                      <a:solidFill>
+                        <a:srgbClr val="3333CC"/>
+                      </a:solidFill>
+                      <a:prstDash val="solid"/>
+                    </a:lnT>
+                    <a:lnB w="19050">
+                      <a:solidFill>
+                        <a:srgbClr val="3333CC"/>
+                      </a:solidFill>
+                      <a:prstDash val="solid"/>
+                    </a:lnB>
+                    <a:solidFill>
+                      <a:srgbClr val="FF0066"/>
+                    </a:solidFill>
+                  </a:tcPr>
+                </a:tc>
+                <a:tc>
+                  <a:txBody>
+                    <a:bodyPr/>
+                    <a:lstStyle/>
+                    <a:p>
+                      <a:pPr marR="16510" algn="r">
+                        <a:lnSpc>
+                          <a:spcPts val="1914"/>
+                        </a:lnSpc>
+                        <a:spcBef>
+                          <a:spcPts val="420"/>
+                        </a:spcBef>
+                      </a:pPr>
+                      <a:r>
+                        <a:rPr sz="1600" b="1" spc="-60" dirty="0">
+                          <a:latin typeface="Lantinghei SC Heavy"/>
+                          <a:cs typeface="Lantinghei SC Heavy"/>
+                        </a:rPr>
+                        <a:t>4</a:t>
+                      </a:r>
+                      <a:r>
+                        <a:rPr sz="1600" b="1" spc="-75" dirty="0">
+                          <a:latin typeface="Lantinghei SC Heavy"/>
+                          <a:cs typeface="Lantinghei SC Heavy"/>
+                        </a:rPr>
+                        <a:t>的教师</a:t>
+                      </a:r>
+                      <a:r>
+                        <a:rPr sz="1600" b="1" spc="-60" dirty="0">
+                          <a:latin typeface="Lantinghei SC Heavy"/>
+                          <a:cs typeface="Lantinghei SC Heavy"/>
+                        </a:rPr>
+                        <a:t>6</a:t>
+                      </a:r>
+                      <a:r>
+                        <a:rPr sz="1600" b="1" spc="-65" dirty="0">
+                          <a:latin typeface="Lantinghei SC Heavy"/>
+                          <a:cs typeface="Lantinghei SC Heavy"/>
+                        </a:rPr>
+                        <a:t>的)记录</a:t>
+                      </a:r>
+                      <a:endParaRPr sz="1600">
+                        <a:latin typeface="Lantinghei SC Heavy"/>
+                        <a:cs typeface="Lantinghei SC Heavy"/>
+                      </a:endParaRPr>
+                    </a:p>
+                  </a:txBody>
+                  <a:tcPr marL="0" marR="0" marT="53340" marB="0">
+                    <a:lnL w="9525">
+                      <a:solidFill>
+                        <a:srgbClr val="3333CC"/>
+                      </a:solidFill>
+                      <a:prstDash val="solid"/>
+                    </a:lnL>
+                    <a:lnR w="9525">
+                      <a:solidFill>
+                        <a:srgbClr val="FF0066"/>
+                      </a:solidFill>
+                      <a:prstDash val="solid"/>
+                    </a:lnR>
+                    <a:lnT w="12700">
+                      <a:solidFill>
+                        <a:srgbClr val="FF0066"/>
+                      </a:solidFill>
+                      <a:prstDash val="solid"/>
+                    </a:lnT>
+                    <a:lnB w="19050">
+                      <a:solidFill>
+                        <a:srgbClr val="FF0066"/>
+                      </a:solidFill>
+                      <a:prstDash val="solid"/>
+                    </a:lnB>
+                    <a:solidFill>
+                      <a:srgbClr val="FFFF99"/>
+                    </a:solidFill>
+                  </a:tcPr>
+                </a:tc>
+                <a:extLst>
+                  <a:ext uri="{0D108BD9-81ED-4DB2-BD59-A6C34878D82A}">
+                    <a16:rowId xmlns:a16="http://schemas.microsoft.com/office/drawing/2014/main" val="10008"/>
+                  </a:ext>
+                </a:extLst>
+              </a:tr>
+              <a:tr h="307340">
+                <a:tc>
+                  <a:txBody>
+                    <a:bodyPr/>
+                    <a:lstStyle/>
+                    <a:p>
+                      <a:pPr marR="11430" algn="r">
+                        <a:lnSpc>
+                          <a:spcPts val="1775"/>
+                        </a:lnSpc>
+                        <a:spcBef>
+                          <a:spcPts val="545"/>
+                        </a:spcBef>
+                      </a:pPr>
+                      <a:r>
+                        <a:rPr sz="1600" b="1" spc="-40" dirty="0">
+                          <a:latin typeface="Lantinghei SC Heavy"/>
+                          <a:cs typeface="Lantinghei SC Heavy"/>
+                        </a:rPr>
+                        <a:t>(系</a:t>
+                      </a:r>
+                      <a:endParaRPr sz="1600">
+                        <a:latin typeface="Lantinghei SC Heavy"/>
+                        <a:cs typeface="Lantinghei SC Heavy"/>
+                      </a:endParaRPr>
+                    </a:p>
+                  </a:txBody>
+                  <a:tcPr marL="0" marR="0" marT="69215" marB="0">
+                    <a:lnL w="9525">
+                      <a:solidFill>
+                        <a:srgbClr val="3333CC"/>
+                      </a:solidFill>
+                      <a:prstDash val="solid"/>
+                    </a:lnL>
+                    <a:lnR w="9525">
+                      <a:solidFill>
+                        <a:srgbClr val="3333CC"/>
+                      </a:solidFill>
+                      <a:prstDash val="solid"/>
+                    </a:lnR>
+                    <a:lnT w="19050">
+                      <a:solidFill>
+                        <a:srgbClr val="3333CC"/>
+                      </a:solidFill>
+                      <a:prstDash val="solid"/>
+                    </a:lnT>
+                    <a:lnB w="9525">
+                      <a:solidFill>
+                        <a:srgbClr val="3333CC"/>
+                      </a:solidFill>
+                      <a:prstDash val="solid"/>
+                    </a:lnB>
+                    <a:solidFill>
+                      <a:srgbClr val="FF0066"/>
+                    </a:solidFill>
+                  </a:tcPr>
+                </a:tc>
+                <a:tc>
+                  <a:txBody>
+                    <a:bodyPr/>
+                    <a:lstStyle/>
+                    <a:p>
+                      <a:pPr marR="27940" algn="r">
+                        <a:lnSpc>
+                          <a:spcPts val="1775"/>
+                        </a:lnSpc>
+                        <a:spcBef>
+                          <a:spcPts val="545"/>
+                        </a:spcBef>
+                      </a:pPr>
+                      <a:r>
+                        <a:rPr sz="1600" b="1" spc="-60" dirty="0">
+                          <a:latin typeface="Lantinghei SC Heavy"/>
+                          <a:cs typeface="Lantinghei SC Heavy"/>
+                        </a:rPr>
+                        <a:t>4</a:t>
+                      </a:r>
+                      <a:r>
+                        <a:rPr sz="1600" b="1" spc="-75" dirty="0">
+                          <a:latin typeface="Lantinghei SC Heavy"/>
+                          <a:cs typeface="Lantinghei SC Heavy"/>
+                        </a:rPr>
+                        <a:t>的教师</a:t>
+                      </a:r>
+                      <a:r>
+                        <a:rPr sz="1600" b="1" spc="-60" dirty="0">
+                          <a:latin typeface="Lantinghei SC Heavy"/>
+                          <a:cs typeface="Lantinghei SC Heavy"/>
+                        </a:rPr>
+                        <a:t>9</a:t>
+                      </a:r>
+                      <a:r>
+                        <a:rPr sz="1600" b="1" spc="-65" dirty="0">
+                          <a:latin typeface="Lantinghei SC Heavy"/>
+                          <a:cs typeface="Lantinghei SC Heavy"/>
+                        </a:rPr>
+                        <a:t>的)记录</a:t>
+                      </a:r>
+                      <a:endParaRPr sz="1600" dirty="0">
+                        <a:latin typeface="Lantinghei SC Heavy"/>
+                        <a:cs typeface="Lantinghei SC Heavy"/>
+                      </a:endParaRPr>
+                    </a:p>
+                  </a:txBody>
+                  <a:tcPr marL="0" marR="0" marT="69215" marB="0">
+                    <a:lnL w="9525">
+                      <a:solidFill>
+                        <a:srgbClr val="3333CC"/>
+                      </a:solidFill>
+                      <a:prstDash val="solid"/>
+                    </a:lnL>
+                    <a:lnR w="9525">
+                      <a:solidFill>
+                        <a:srgbClr val="FF0066"/>
+                      </a:solidFill>
+                      <a:prstDash val="solid"/>
+                    </a:lnR>
+                    <a:lnT w="19050">
+                      <a:solidFill>
+                        <a:srgbClr val="FF0066"/>
+                      </a:solidFill>
+                      <a:prstDash val="solid"/>
+                    </a:lnT>
+                    <a:lnB w="9525">
+                      <a:solidFill>
+                        <a:srgbClr val="FF0066"/>
+                      </a:solidFill>
+                      <a:prstDash val="solid"/>
+                    </a:lnB>
+                    <a:solidFill>
+                      <a:srgbClr val="FFFF99"/>
+                    </a:solidFill>
+                  </a:tcPr>
+                </a:tc>
+                <a:extLst>
+                  <a:ext uri="{0D108BD9-81ED-4DB2-BD59-A6C34878D82A}">
+                    <a16:rowId xmlns:a16="http://schemas.microsoft.com/office/drawing/2014/main" val="10009"/>
+                  </a:ext>
+                </a:extLst>
+              </a:tr>
+            </a:tbl>
+          </a:graphicData>
+        </a:graphic>
+      </p:graphicFrame>
+      <p:sp>
+        <p:nvSpPr>
+          <p:cNvPr id="5" name="object 5">
+            <a:extLst>
+              <a:ext uri="{FF2B5EF4-FFF2-40B4-BE49-F238E27FC236}">
+                <a16:creationId xmlns:a16="http://schemas.microsoft.com/office/drawing/2014/main" id="{280D208E-71DF-41BA-2538-B744E314ADE4}"/>
+              </a:ext>
+            </a:extLst>
+          </p:cNvPr>
+          <p:cNvSpPr txBox="1"/>
+          <p:nvPr/>
+        </p:nvSpPr>
+        <p:spPr>
+          <a:xfrm>
+            <a:off x="4907951" y="3713543"/>
+            <a:ext cx="279400" cy="330200"/>
+          </a:xfrm>
+          <a:prstGeom prst="rect">
+            <a:avLst/>
+          </a:prstGeom>
+        </p:spPr>
+        <p:txBody>
+          <a:bodyPr vert="horz" wrap="square" lIns="0" tIns="12065" rIns="0" bIns="0" rtlCol="0">
+            <a:spAutoFit/>
+          </a:bodyPr>
+          <a:lstStyle/>
+          <a:p>
+            <a:pPr marL="12700">
+              <a:lnSpc>
+                <a:spcPct val="100000"/>
+              </a:lnSpc>
+              <a:spcBef>
+                <a:spcPts val="95"/>
+              </a:spcBef>
+            </a:pPr>
+            <a:r>
+              <a:rPr sz="2000" b="1" spc="-50" dirty="0">
+                <a:latin typeface="Lantinghei SC Heavy"/>
+                <a:cs typeface="Lantinghei SC Heavy"/>
+              </a:rPr>
+              <a:t>系</a:t>
+            </a:r>
+            <a:endParaRPr sz="2000">
+              <a:latin typeface="Lantinghei SC Heavy"/>
+              <a:cs typeface="Lantinghei SC Heavy"/>
+            </a:endParaRPr>
+          </a:p>
+        </p:txBody>
+      </p:sp>
+      <p:graphicFrame>
+        <p:nvGraphicFramePr>
+          <p:cNvPr id="6" name="object 6">
+            <a:extLst>
+              <a:ext uri="{FF2B5EF4-FFF2-40B4-BE49-F238E27FC236}">
+                <a16:creationId xmlns:a16="http://schemas.microsoft.com/office/drawing/2014/main" id="{DABB857F-EFFE-A719-7252-D028B4679FB9}"/>
+              </a:ext>
+            </a:extLst>
+          </p:cNvPr>
+          <p:cNvGraphicFramePr>
+            <a:graphicFrameLocks noGrp="1"/>
+          </p:cNvGraphicFramePr>
+          <p:nvPr>
+            <p:extLst>
+              <p:ext uri="{D42A27DB-BD31-4B8C-83A1-F6EECF244321}">
+                <p14:modId xmlns:p14="http://schemas.microsoft.com/office/powerpoint/2010/main" val="1100695378"/>
+              </p:ext>
+            </p:extLst>
+          </p:nvPr>
+        </p:nvGraphicFramePr>
+        <p:xfrm>
+          <a:off x="4879509" y="4138295"/>
+          <a:ext cx="2568574" cy="1297940"/>
+        </p:xfrm>
+        <a:graphic>
+          <a:graphicData uri="http://schemas.openxmlformats.org/drawingml/2006/table">
+            <a:tbl>
+              <a:tblPr firstRow="1" bandRow="1">
+                <a:tableStyleId>{2D5ABB26-0587-4C30-8999-92F81FD0307C}</a:tableStyleId>
+              </a:tblPr>
+              <a:tblGrid>
+                <a:gridCol w="792480">
+                  <a:extLst>
+                    <a:ext uri="{9D8B030D-6E8A-4147-A177-3AD203B41FA5}">
+                      <a16:colId xmlns:a16="http://schemas.microsoft.com/office/drawing/2014/main" val="20000"/>
+                    </a:ext>
+                  </a:extLst>
+                </a:gridCol>
+                <a:gridCol w="1158239">
+                  <a:extLst>
+                    <a:ext uri="{9D8B030D-6E8A-4147-A177-3AD203B41FA5}">
+                      <a16:colId xmlns:a16="http://schemas.microsoft.com/office/drawing/2014/main" val="20001"/>
+                    </a:ext>
+                  </a:extLst>
+                </a:gridCol>
+                <a:gridCol w="617855">
+                  <a:extLst>
+                    <a:ext uri="{9D8B030D-6E8A-4147-A177-3AD203B41FA5}">
+                      <a16:colId xmlns:a16="http://schemas.microsoft.com/office/drawing/2014/main" val="20002"/>
+                    </a:ext>
+                  </a:extLst>
+                </a:gridCol>
+              </a:tblGrid>
+              <a:tr h="358775">
+                <a:tc>
+                  <a:txBody>
+                    <a:bodyPr/>
+                    <a:lstStyle/>
+                    <a:p>
+                      <a:pPr marL="99695">
+                        <a:lnSpc>
+                          <a:spcPct val="100000"/>
+                        </a:lnSpc>
+                        <a:spcBef>
+                          <a:spcPts val="409"/>
+                        </a:spcBef>
+                      </a:pPr>
+                      <a:r>
+                        <a:rPr sz="1600" b="1" spc="-25" dirty="0">
+                          <a:latin typeface="Lantinghei SC Heavy"/>
+                          <a:cs typeface="Lantinghei SC Heavy"/>
+                        </a:rPr>
+                        <a:t>系编号</a:t>
+                      </a:r>
+                      <a:endParaRPr sz="1600">
+                        <a:latin typeface="Lantinghei SC Heavy"/>
+                        <a:cs typeface="Lantinghei SC Heavy"/>
+                      </a:endParaRPr>
+                    </a:p>
+                  </a:txBody>
+                  <a:tcPr marL="0" marR="0" marT="52069" marB="0">
+                    <a:lnR w="9525">
+                      <a:solidFill>
+                        <a:srgbClr val="000000"/>
+                      </a:solidFill>
+                      <a:prstDash val="solid"/>
+                    </a:lnR>
+                    <a:lnT w="9525">
+                      <a:solidFill>
+                        <a:srgbClr val="000000"/>
+                      </a:solidFill>
+                      <a:prstDash val="solid"/>
+                    </a:lnT>
+                    <a:lnB w="9525">
+                      <a:solidFill>
+                        <a:srgbClr val="000000"/>
+                      </a:solidFill>
+                      <a:prstDash val="solid"/>
+                    </a:lnB>
+                  </a:tcPr>
+                </a:tc>
+                <a:tc>
+                  <a:txBody>
+                    <a:bodyPr/>
+                    <a:lstStyle/>
+                    <a:p>
+                      <a:pPr marL="278765">
+                        <a:lnSpc>
+                          <a:spcPct val="100000"/>
+                        </a:lnSpc>
+                        <a:spcBef>
+                          <a:spcPts val="409"/>
+                        </a:spcBef>
+                      </a:pPr>
+                      <a:r>
+                        <a:rPr sz="1600" b="1" spc="-30" dirty="0">
+                          <a:latin typeface="Lantinghei SC Heavy"/>
+                          <a:cs typeface="Lantinghei SC Heavy"/>
+                        </a:rPr>
+                        <a:t>系名</a:t>
+                      </a:r>
+                      <a:endParaRPr sz="1600">
+                        <a:latin typeface="Lantinghei SC Heavy"/>
+                        <a:cs typeface="Lantinghei SC Heavy"/>
+                      </a:endParaRPr>
+                    </a:p>
+                  </a:txBody>
+                  <a:tcPr marL="0" marR="0" marT="52069" marB="0">
+                    <a:lnL w="9525">
+                      <a:solidFill>
+                        <a:srgbClr val="000000"/>
+                      </a:solidFill>
+                      <a:prstDash val="solid"/>
+                    </a:lnL>
+                    <a:lnR w="9525">
+                      <a:solidFill>
+                        <a:srgbClr val="000000"/>
+                      </a:solidFill>
+                      <a:prstDash val="solid"/>
+                    </a:lnR>
+                    <a:lnT w="9525">
+                      <a:solidFill>
+                        <a:srgbClr val="000000"/>
+                      </a:solidFill>
+                      <a:prstDash val="solid"/>
+                    </a:lnT>
+                    <a:lnB w="9525">
+                      <a:solidFill>
+                        <a:srgbClr val="000000"/>
+                      </a:solidFill>
+                      <a:prstDash val="solid"/>
+                    </a:lnB>
+                  </a:tcPr>
+                </a:tc>
+                <a:tc>
+                  <a:txBody>
+                    <a:bodyPr/>
+                    <a:lstStyle/>
+                    <a:p>
+                      <a:pPr marR="45085" algn="r">
+                        <a:lnSpc>
+                          <a:spcPct val="100000"/>
+                        </a:lnSpc>
+                        <a:spcBef>
+                          <a:spcPts val="409"/>
+                        </a:spcBef>
+                      </a:pPr>
+                      <a:r>
+                        <a:rPr sz="1600" b="1" spc="-25" dirty="0">
+                          <a:latin typeface="Lantinghei SC Heavy"/>
+                          <a:cs typeface="Lantinghei SC Heavy"/>
+                        </a:rPr>
+                        <a:t>….</a:t>
+                      </a:r>
+                      <a:endParaRPr sz="1600">
+                        <a:latin typeface="Lantinghei SC Heavy"/>
+                        <a:cs typeface="Lantinghei SC Heavy"/>
+                      </a:endParaRPr>
+                    </a:p>
+                  </a:txBody>
+                  <a:tcPr marL="0" marR="0" marT="52069" marB="0">
+                    <a:lnL w="9525">
+                      <a:solidFill>
+                        <a:srgbClr val="000000"/>
+                      </a:solidFill>
+                      <a:prstDash val="solid"/>
+                    </a:lnL>
+                    <a:lnT w="9525">
+                      <a:solidFill>
+                        <a:srgbClr val="000000"/>
+                      </a:solidFill>
+                      <a:prstDash val="solid"/>
+                    </a:lnT>
+                    <a:lnB w="9525">
+                      <a:solidFill>
+                        <a:srgbClr val="000000"/>
+                      </a:solidFill>
+                      <a:prstDash val="solid"/>
+                    </a:lnB>
+                  </a:tcPr>
+                </a:tc>
+                <a:extLst>
+                  <a:ext uri="{0D108BD9-81ED-4DB2-BD59-A6C34878D82A}">
+                    <a16:rowId xmlns:a16="http://schemas.microsoft.com/office/drawing/2014/main" val="10000"/>
+                  </a:ext>
+                </a:extLst>
+              </a:tr>
+              <a:tr h="426720">
+                <a:tc>
+                  <a:txBody>
+                    <a:bodyPr/>
+                    <a:lstStyle/>
+                    <a:p>
+                      <a:pPr marL="99695">
+                        <a:lnSpc>
+                          <a:spcPts val="1825"/>
+                        </a:lnSpc>
+                        <a:spcBef>
+                          <a:spcPts val="1435"/>
+                        </a:spcBef>
+                      </a:pPr>
+                      <a:r>
+                        <a:rPr sz="1600" b="1" dirty="0">
+                          <a:latin typeface="Lantinghei SC Heavy"/>
+                          <a:cs typeface="Lantinghei SC Heavy"/>
+                        </a:rPr>
+                        <a:t>系</a:t>
+                      </a:r>
+                      <a:r>
+                        <a:rPr sz="1600" b="1" spc="-50" dirty="0">
+                          <a:latin typeface="Lantinghei SC Heavy"/>
+                          <a:cs typeface="Lantinghei SC Heavy"/>
+                        </a:rPr>
+                        <a:t>1</a:t>
+                      </a:r>
+                      <a:endParaRPr sz="1600">
+                        <a:latin typeface="Lantinghei SC Heavy"/>
+                        <a:cs typeface="Lantinghei SC Heavy"/>
+                      </a:endParaRPr>
+                    </a:p>
+                  </a:txBody>
+                  <a:tcPr marL="0" marR="0" marT="182245" marB="0">
+                    <a:lnR w="9525">
+                      <a:solidFill>
+                        <a:srgbClr val="000000"/>
+                      </a:solidFill>
+                      <a:prstDash val="solid"/>
+                    </a:lnR>
+                    <a:lnT w="9525">
+                      <a:solidFill>
+                        <a:srgbClr val="000000"/>
+                      </a:solidFill>
+                      <a:prstDash val="solid"/>
+                    </a:lnT>
+                  </a:tcPr>
+                </a:tc>
+                <a:tc>
+                  <a:txBody>
+                    <a:bodyPr/>
+                    <a:lstStyle/>
+                    <a:p>
+                      <a:pPr marL="179070">
+                        <a:lnSpc>
+                          <a:spcPts val="1825"/>
+                        </a:lnSpc>
+                        <a:spcBef>
+                          <a:spcPts val="1435"/>
+                        </a:spcBef>
+                      </a:pPr>
+                      <a:r>
+                        <a:rPr sz="1600" b="1" spc="-25" dirty="0">
+                          <a:latin typeface="Lantinghei SC Heavy"/>
+                          <a:cs typeface="Lantinghei SC Heavy"/>
+                        </a:rPr>
+                        <a:t>计算机</a:t>
+                      </a:r>
+                      <a:endParaRPr sz="1600">
+                        <a:latin typeface="Lantinghei SC Heavy"/>
+                        <a:cs typeface="Lantinghei SC Heavy"/>
+                      </a:endParaRPr>
+                    </a:p>
+                  </a:txBody>
+                  <a:tcPr marL="0" marR="0" marT="182245" marB="0">
+                    <a:lnL w="9525">
+                      <a:solidFill>
+                        <a:srgbClr val="000000"/>
+                      </a:solidFill>
+                      <a:prstDash val="solid"/>
+                    </a:lnL>
+                    <a:lnR w="9525">
+                      <a:solidFill>
+                        <a:srgbClr val="000000"/>
+                      </a:solidFill>
+                      <a:prstDash val="solid"/>
+                    </a:lnR>
+                    <a:lnT w="9525">
+                      <a:solidFill>
+                        <a:srgbClr val="000000"/>
+                      </a:solidFill>
+                      <a:prstDash val="solid"/>
+                    </a:lnT>
+                  </a:tcPr>
+                </a:tc>
+                <a:tc>
+                  <a:txBody>
+                    <a:bodyPr/>
+                    <a:lstStyle/>
+                    <a:p>
+                      <a:pPr marR="1905" algn="r">
+                        <a:lnSpc>
+                          <a:spcPts val="1825"/>
+                        </a:lnSpc>
+                        <a:spcBef>
+                          <a:spcPts val="1435"/>
+                        </a:spcBef>
+                      </a:pPr>
+                      <a:r>
+                        <a:rPr sz="1600" b="1" spc="-25" dirty="0">
+                          <a:latin typeface="Lantinghei SC Heavy"/>
+                          <a:cs typeface="Lantinghei SC Heavy"/>
+                        </a:rPr>
+                        <a:t>….</a:t>
+                      </a:r>
+                      <a:endParaRPr sz="1600">
+                        <a:latin typeface="Lantinghei SC Heavy"/>
+                        <a:cs typeface="Lantinghei SC Heavy"/>
+                      </a:endParaRPr>
+                    </a:p>
+                  </a:txBody>
+                  <a:tcPr marL="0" marR="0" marT="182245" marB="0">
+                    <a:lnL w="9525">
+                      <a:solidFill>
+                        <a:srgbClr val="000000"/>
+                      </a:solidFill>
+                      <a:prstDash val="solid"/>
+                    </a:lnL>
+                    <a:lnT w="9525">
+                      <a:solidFill>
+                        <a:srgbClr val="000000"/>
+                      </a:solidFill>
+                      <a:prstDash val="solid"/>
+                    </a:lnT>
+                  </a:tcPr>
+                </a:tc>
+                <a:extLst>
+                  <a:ext uri="{0D108BD9-81ED-4DB2-BD59-A6C34878D82A}">
+                    <a16:rowId xmlns:a16="http://schemas.microsoft.com/office/drawing/2014/main" val="10001"/>
+                  </a:ext>
+                </a:extLst>
+              </a:tr>
+              <a:tr h="244475">
+                <a:tc>
+                  <a:txBody>
+                    <a:bodyPr/>
+                    <a:lstStyle/>
+                    <a:p>
+                      <a:pPr marL="99695">
+                        <a:lnSpc>
+                          <a:spcPts val="1825"/>
+                        </a:lnSpc>
+                      </a:pPr>
+                      <a:r>
+                        <a:rPr sz="1600" b="1" spc="-110" dirty="0">
+                          <a:latin typeface="Lantinghei SC Heavy"/>
+                          <a:cs typeface="Lantinghei SC Heavy"/>
+                        </a:rPr>
+                        <a:t>系</a:t>
+                      </a:r>
+                      <a:r>
+                        <a:rPr sz="1600" b="1" spc="-50" dirty="0">
+                          <a:latin typeface="Lantinghei SC Heavy"/>
+                          <a:cs typeface="Lantinghei SC Heavy"/>
+                        </a:rPr>
+                        <a:t>2</a:t>
+                      </a:r>
+                      <a:endParaRPr sz="1600">
+                        <a:latin typeface="Lantinghei SC Heavy"/>
+                        <a:cs typeface="Lantinghei SC Heavy"/>
+                      </a:endParaRPr>
+                    </a:p>
+                  </a:txBody>
+                  <a:tcPr marL="0" marR="0" marT="0" marB="0">
+                    <a:lnR w="9525">
+                      <a:solidFill>
+                        <a:srgbClr val="000000"/>
+                      </a:solidFill>
+                      <a:prstDash val="solid"/>
+                    </a:lnR>
+                  </a:tcPr>
+                </a:tc>
+                <a:tc>
+                  <a:txBody>
+                    <a:bodyPr/>
+                    <a:lstStyle/>
+                    <a:p>
+                      <a:pPr marL="179070">
+                        <a:lnSpc>
+                          <a:spcPts val="1825"/>
+                        </a:lnSpc>
+                      </a:pPr>
+                      <a:r>
+                        <a:rPr sz="1600" b="1" spc="-20" dirty="0">
+                          <a:latin typeface="Lantinghei SC Heavy"/>
+                          <a:cs typeface="Lantinghei SC Heavy"/>
+                        </a:rPr>
+                        <a:t>自动控制</a:t>
+                      </a:r>
+                      <a:endParaRPr sz="1600">
+                        <a:latin typeface="Lantinghei SC Heavy"/>
+                        <a:cs typeface="Lantinghei SC Heavy"/>
+                      </a:endParaRPr>
+                    </a:p>
+                  </a:txBody>
+                  <a:tcPr marL="0" marR="0" marT="0" marB="0">
+                    <a:lnL w="9525">
+                      <a:solidFill>
+                        <a:srgbClr val="000000"/>
+                      </a:solidFill>
+                      <a:prstDash val="solid"/>
+                    </a:lnL>
+                    <a:lnR w="9525">
+                      <a:solidFill>
+                        <a:srgbClr val="000000"/>
+                      </a:solidFill>
+                      <a:prstDash val="solid"/>
+                    </a:lnR>
+                  </a:tcPr>
+                </a:tc>
+                <a:tc>
+                  <a:txBody>
+                    <a:bodyPr/>
+                    <a:lstStyle/>
+                    <a:p>
+                      <a:pPr marR="40005" algn="r">
+                        <a:lnSpc>
+                          <a:spcPts val="1825"/>
+                        </a:lnSpc>
+                      </a:pPr>
+                      <a:r>
+                        <a:rPr sz="1600" b="1" spc="-25" dirty="0">
+                          <a:latin typeface="Lantinghei SC Heavy"/>
+                          <a:cs typeface="Lantinghei SC Heavy"/>
+                        </a:rPr>
+                        <a:t>….</a:t>
+                      </a:r>
+                      <a:endParaRPr sz="1600">
+                        <a:latin typeface="Lantinghei SC Heavy"/>
+                        <a:cs typeface="Lantinghei SC Heavy"/>
+                      </a:endParaRPr>
+                    </a:p>
+                  </a:txBody>
+                  <a:tcPr marL="0" marR="0" marT="0" marB="0">
+                    <a:lnL w="9525">
+                      <a:solidFill>
+                        <a:srgbClr val="000000"/>
+                      </a:solidFill>
+                      <a:prstDash val="solid"/>
+                    </a:lnL>
+                  </a:tcPr>
+                </a:tc>
+                <a:extLst>
+                  <a:ext uri="{0D108BD9-81ED-4DB2-BD59-A6C34878D82A}">
+                    <a16:rowId xmlns:a16="http://schemas.microsoft.com/office/drawing/2014/main" val="10002"/>
+                  </a:ext>
+                </a:extLst>
+              </a:tr>
+              <a:tr h="267970">
+                <a:tc>
+                  <a:txBody>
+                    <a:bodyPr/>
+                    <a:lstStyle/>
+                    <a:p>
+                      <a:pPr marL="99695">
+                        <a:lnSpc>
+                          <a:spcPct val="100000"/>
+                        </a:lnSpc>
+                      </a:pPr>
+                      <a:r>
+                        <a:rPr sz="1600" b="1" spc="-140" dirty="0">
+                          <a:latin typeface="Lantinghei SC Heavy"/>
+                          <a:cs typeface="Lantinghei SC Heavy"/>
+                        </a:rPr>
+                        <a:t>系</a:t>
+                      </a:r>
+                      <a:r>
+                        <a:rPr sz="1600" b="1" spc="-50" dirty="0">
+                          <a:latin typeface="Lantinghei SC Heavy"/>
+                          <a:cs typeface="Lantinghei SC Heavy"/>
+                        </a:rPr>
+                        <a:t>4</a:t>
+                      </a:r>
+                      <a:endParaRPr sz="1600">
+                        <a:latin typeface="Lantinghei SC Heavy"/>
+                        <a:cs typeface="Lantinghei SC Heavy"/>
+                      </a:endParaRPr>
+                    </a:p>
+                  </a:txBody>
+                  <a:tcPr marL="0" marR="0" marT="0" marB="0">
+                    <a:lnR w="9525">
+                      <a:solidFill>
+                        <a:srgbClr val="000000"/>
+                      </a:solidFill>
+                      <a:prstDash val="solid"/>
+                    </a:lnR>
+                  </a:tcPr>
+                </a:tc>
+                <a:tc>
+                  <a:txBody>
+                    <a:bodyPr/>
+                    <a:lstStyle/>
+                    <a:p>
+                      <a:pPr marL="179705">
+                        <a:lnSpc>
+                          <a:spcPct val="100000"/>
+                        </a:lnSpc>
+                      </a:pPr>
+                      <a:r>
+                        <a:rPr sz="1600" b="1" spc="-30" dirty="0">
+                          <a:latin typeface="Lantinghei SC Heavy"/>
+                          <a:cs typeface="Lantinghei SC Heavy"/>
+                        </a:rPr>
+                        <a:t>化学</a:t>
+                      </a:r>
+                      <a:endParaRPr sz="1600">
+                        <a:latin typeface="Lantinghei SC Heavy"/>
+                        <a:cs typeface="Lantinghei SC Heavy"/>
+                      </a:endParaRPr>
+                    </a:p>
+                  </a:txBody>
+                  <a:tcPr marL="0" marR="0" marT="0" marB="0">
+                    <a:lnL w="9525">
+                      <a:solidFill>
+                        <a:srgbClr val="000000"/>
+                      </a:solidFill>
+                      <a:prstDash val="solid"/>
+                    </a:lnL>
+                    <a:lnR w="9525">
+                      <a:solidFill>
+                        <a:srgbClr val="000000"/>
+                      </a:solidFill>
+                      <a:prstDash val="solid"/>
+                    </a:lnR>
+                  </a:tcPr>
+                </a:tc>
+                <a:tc>
+                  <a:txBody>
+                    <a:bodyPr/>
+                    <a:lstStyle/>
+                    <a:p>
+                      <a:pPr marR="24130" algn="r">
+                        <a:lnSpc>
+                          <a:spcPct val="100000"/>
+                        </a:lnSpc>
+                      </a:pPr>
+                      <a:r>
+                        <a:rPr sz="1600" b="1" spc="-25" dirty="0">
+                          <a:latin typeface="Lantinghei SC Heavy"/>
+                          <a:cs typeface="Lantinghei SC Heavy"/>
+                        </a:rPr>
+                        <a:t>….</a:t>
+                      </a:r>
+                      <a:endParaRPr sz="1600">
+                        <a:latin typeface="Lantinghei SC Heavy"/>
+                        <a:cs typeface="Lantinghei SC Heavy"/>
+                      </a:endParaRPr>
+                    </a:p>
+                  </a:txBody>
+                  <a:tcPr marL="0" marR="0" marT="0" marB="0">
+                    <a:lnL w="9525">
+                      <a:solidFill>
+                        <a:srgbClr val="000000"/>
+                      </a:solidFill>
+                      <a:prstDash val="solid"/>
+                    </a:lnL>
+                  </a:tcPr>
+                </a:tc>
+                <a:extLst>
+                  <a:ext uri="{0D108BD9-81ED-4DB2-BD59-A6C34878D82A}">
+                    <a16:rowId xmlns:a16="http://schemas.microsoft.com/office/drawing/2014/main" val="10003"/>
+                  </a:ext>
+                </a:extLst>
+              </a:tr>
+            </a:tbl>
+          </a:graphicData>
+        </a:graphic>
+      </p:graphicFrame>
+      <p:sp>
+        <p:nvSpPr>
+          <p:cNvPr id="7" name="object 8">
+            <a:extLst>
+              <a:ext uri="{FF2B5EF4-FFF2-40B4-BE49-F238E27FC236}">
+                <a16:creationId xmlns:a16="http://schemas.microsoft.com/office/drawing/2014/main" id="{8B8D3B53-4E2C-92FC-BF00-1DC8282A50A1}"/>
+              </a:ext>
+            </a:extLst>
+          </p:cNvPr>
+          <p:cNvSpPr txBox="1"/>
+          <p:nvPr/>
+        </p:nvSpPr>
+        <p:spPr>
+          <a:xfrm>
+            <a:off x="1412657" y="2274126"/>
+            <a:ext cx="635635" cy="269875"/>
+          </a:xfrm>
+          <a:prstGeom prst="rect">
+            <a:avLst/>
+          </a:prstGeom>
+        </p:spPr>
+        <p:txBody>
+          <a:bodyPr vert="horz" wrap="square" lIns="0" tIns="12700" rIns="0" bIns="0" rtlCol="0">
+            <a:spAutoFit/>
+          </a:bodyPr>
+          <a:lstStyle/>
+          <a:p>
+            <a:pPr marL="12700">
+              <a:lnSpc>
+                <a:spcPct val="100000"/>
+              </a:lnSpc>
+              <a:spcBef>
+                <a:spcPts val="100"/>
+              </a:spcBef>
+            </a:pPr>
+            <a:r>
+              <a:rPr sz="1600" b="1" spc="-25" dirty="0">
+                <a:latin typeface="Lantinghei SC Heavy"/>
+                <a:cs typeface="Lantinghei SC Heavy"/>
+              </a:rPr>
+              <a:t>教师号</a:t>
+            </a:r>
+            <a:endParaRPr sz="1600">
+              <a:latin typeface="Lantinghei SC Heavy"/>
+              <a:cs typeface="Lantinghei SC Heavy"/>
+            </a:endParaRPr>
+          </a:p>
+        </p:txBody>
+      </p:sp>
+      <p:sp>
+        <p:nvSpPr>
+          <p:cNvPr id="8" name="object 9">
+            <a:extLst>
+              <a:ext uri="{FF2B5EF4-FFF2-40B4-BE49-F238E27FC236}">
+                <a16:creationId xmlns:a16="http://schemas.microsoft.com/office/drawing/2014/main" id="{CE7948D4-E079-7176-D23D-04813D254C7E}"/>
+              </a:ext>
+            </a:extLst>
+          </p:cNvPr>
+          <p:cNvSpPr txBox="1"/>
+          <p:nvPr/>
+        </p:nvSpPr>
+        <p:spPr>
+          <a:xfrm>
+            <a:off x="2178981" y="2235010"/>
+            <a:ext cx="1159510" cy="359410"/>
+          </a:xfrm>
+          <a:prstGeom prst="rect">
+            <a:avLst/>
+          </a:prstGeom>
+          <a:ln w="9525">
+            <a:solidFill>
+              <a:srgbClr val="000000"/>
+            </a:solidFill>
+          </a:ln>
+        </p:spPr>
+        <p:txBody>
+          <a:bodyPr vert="horz" wrap="square" lIns="0" tIns="52069" rIns="0" bIns="0" rtlCol="0">
+            <a:spAutoFit/>
+          </a:bodyPr>
+          <a:lstStyle/>
+          <a:p>
+            <a:pPr marL="217170">
+              <a:lnSpc>
+                <a:spcPct val="100000"/>
+              </a:lnSpc>
+              <a:spcBef>
+                <a:spcPts val="409"/>
+              </a:spcBef>
+            </a:pPr>
+            <a:r>
+              <a:rPr sz="1600" b="1" spc="-25" dirty="0">
+                <a:latin typeface="Lantinghei SC Heavy"/>
+                <a:cs typeface="Lantinghei SC Heavy"/>
+              </a:rPr>
+              <a:t>教师名</a:t>
+            </a:r>
+            <a:endParaRPr sz="1600">
+              <a:latin typeface="Lantinghei SC Heavy"/>
+              <a:cs typeface="Lantinghei SC Heavy"/>
+            </a:endParaRPr>
+          </a:p>
+        </p:txBody>
+      </p:sp>
+      <p:sp>
+        <p:nvSpPr>
+          <p:cNvPr id="9" name="object 10">
+            <a:extLst>
+              <a:ext uri="{FF2B5EF4-FFF2-40B4-BE49-F238E27FC236}">
+                <a16:creationId xmlns:a16="http://schemas.microsoft.com/office/drawing/2014/main" id="{FE17EDA7-AAD0-BF03-A4F2-EFE139158784}"/>
+              </a:ext>
+            </a:extLst>
+          </p:cNvPr>
+          <p:cNvSpPr txBox="1"/>
+          <p:nvPr/>
+        </p:nvSpPr>
+        <p:spPr>
+          <a:xfrm>
+            <a:off x="3536798" y="2274126"/>
+            <a:ext cx="1130935" cy="269875"/>
+          </a:xfrm>
+          <a:prstGeom prst="rect">
+            <a:avLst/>
+          </a:prstGeom>
+        </p:spPr>
+        <p:txBody>
+          <a:bodyPr vert="horz" wrap="square" lIns="0" tIns="12700" rIns="0" bIns="0" rtlCol="0">
+            <a:spAutoFit/>
+          </a:bodyPr>
+          <a:lstStyle/>
+          <a:p>
+            <a:pPr marL="12700">
+              <a:lnSpc>
+                <a:spcPct val="100000"/>
+              </a:lnSpc>
+              <a:spcBef>
+                <a:spcPts val="100"/>
+              </a:spcBef>
+              <a:tabLst>
+                <a:tab pos="863600" algn="l"/>
+              </a:tabLst>
+            </a:pPr>
+            <a:r>
+              <a:rPr sz="1600" b="1" spc="-10" dirty="0">
+                <a:latin typeface="Lantinghei SC Heavy"/>
+                <a:cs typeface="Lantinghei SC Heavy"/>
+              </a:rPr>
+              <a:t>系编</a:t>
+            </a:r>
+            <a:r>
+              <a:rPr sz="1600" b="1" spc="-50" dirty="0">
+                <a:latin typeface="Lantinghei SC Heavy"/>
+                <a:cs typeface="Lantinghei SC Heavy"/>
+              </a:rPr>
+              <a:t>号</a:t>
+            </a:r>
+            <a:r>
+              <a:rPr sz="1600" b="1" dirty="0">
+                <a:latin typeface="Lantinghei SC Heavy"/>
+                <a:cs typeface="Lantinghei SC Heavy"/>
+              </a:rPr>
+              <a:t>	</a:t>
+            </a:r>
+            <a:r>
+              <a:rPr sz="1600" b="1" spc="-25" dirty="0">
+                <a:latin typeface="Lantinghei SC Heavy"/>
+                <a:cs typeface="Lantinghei SC Heavy"/>
+              </a:rPr>
+              <a:t>….</a:t>
+            </a:r>
+            <a:endParaRPr sz="1600">
+              <a:latin typeface="Lantinghei SC Heavy"/>
+              <a:cs typeface="Lantinghei SC Heavy"/>
+            </a:endParaRPr>
+          </a:p>
+        </p:txBody>
+      </p:sp>
+      <p:sp>
+        <p:nvSpPr>
+          <p:cNvPr id="10" name="object 11">
+            <a:extLst>
+              <a:ext uri="{FF2B5EF4-FFF2-40B4-BE49-F238E27FC236}">
+                <a16:creationId xmlns:a16="http://schemas.microsoft.com/office/drawing/2014/main" id="{DFDCBC67-2451-146F-3E5C-1E01815C7F6F}"/>
+              </a:ext>
+            </a:extLst>
+          </p:cNvPr>
+          <p:cNvSpPr txBox="1"/>
+          <p:nvPr/>
+        </p:nvSpPr>
+        <p:spPr>
+          <a:xfrm>
+            <a:off x="1412657" y="2763331"/>
+            <a:ext cx="557530" cy="1736725"/>
+          </a:xfrm>
+          <a:prstGeom prst="rect">
+            <a:avLst/>
+          </a:prstGeom>
+        </p:spPr>
+        <p:txBody>
+          <a:bodyPr vert="horz" wrap="square" lIns="0" tIns="12700" rIns="0" bIns="0" rtlCol="0">
+            <a:spAutoFit/>
+          </a:bodyPr>
+          <a:lstStyle/>
+          <a:p>
+            <a:pPr marL="12700" marR="5080" algn="just">
+              <a:lnSpc>
+                <a:spcPct val="100000"/>
+              </a:lnSpc>
+              <a:spcBef>
+                <a:spcPts val="100"/>
+              </a:spcBef>
+            </a:pPr>
+            <a:r>
+              <a:rPr sz="1600" b="1" spc="-5" dirty="0">
+                <a:latin typeface="Lantinghei SC Heavy"/>
+                <a:cs typeface="Lantinghei SC Heavy"/>
+              </a:rPr>
+              <a:t>教师</a:t>
+            </a:r>
+            <a:r>
+              <a:rPr sz="1600" b="1" spc="-50" dirty="0">
+                <a:latin typeface="Lantinghei SC Heavy"/>
+                <a:cs typeface="Lantinghei SC Heavy"/>
+              </a:rPr>
+              <a:t>1</a:t>
+            </a:r>
+            <a:r>
+              <a:rPr sz="1600" b="1" spc="-70" dirty="0">
+                <a:latin typeface="Lantinghei SC Heavy"/>
+                <a:cs typeface="Lantinghei SC Heavy"/>
+              </a:rPr>
+              <a:t>教师</a:t>
+            </a:r>
+            <a:r>
+              <a:rPr sz="1600" b="1" spc="-100" dirty="0">
+                <a:latin typeface="Lantinghei SC Heavy"/>
+                <a:cs typeface="Lantinghei SC Heavy"/>
+              </a:rPr>
+              <a:t>5</a:t>
+            </a:r>
+            <a:r>
+              <a:rPr sz="1600" b="1" spc="-70" dirty="0">
+                <a:latin typeface="Lantinghei SC Heavy"/>
+                <a:cs typeface="Lantinghei SC Heavy"/>
+              </a:rPr>
+              <a:t>教师</a:t>
+            </a:r>
+            <a:r>
+              <a:rPr sz="1600" b="1" spc="-110" dirty="0">
+                <a:latin typeface="Lantinghei SC Heavy"/>
+                <a:cs typeface="Lantinghei SC Heavy"/>
+              </a:rPr>
+              <a:t>8</a:t>
+            </a:r>
+            <a:r>
+              <a:rPr sz="1600" b="1" spc="-65" dirty="0">
+                <a:latin typeface="Lantinghei SC Heavy"/>
+                <a:cs typeface="Lantinghei SC Heavy"/>
+              </a:rPr>
+              <a:t>教师</a:t>
+            </a:r>
+            <a:r>
+              <a:rPr sz="1600" b="1" spc="-90" dirty="0">
+                <a:latin typeface="Lantinghei SC Heavy"/>
+                <a:cs typeface="Lantinghei SC Heavy"/>
+              </a:rPr>
+              <a:t>2</a:t>
+            </a:r>
+            <a:r>
+              <a:rPr sz="1600" b="1" spc="-65" dirty="0">
+                <a:latin typeface="Lantinghei SC Heavy"/>
+                <a:cs typeface="Lantinghei SC Heavy"/>
+              </a:rPr>
+              <a:t>教师</a:t>
+            </a:r>
+            <a:r>
+              <a:rPr sz="1600" b="1" spc="-100" dirty="0">
+                <a:latin typeface="Lantinghei SC Heavy"/>
+                <a:cs typeface="Lantinghei SC Heavy"/>
+              </a:rPr>
+              <a:t>9</a:t>
+            </a:r>
+            <a:r>
+              <a:rPr sz="1600" b="1" spc="-70" dirty="0">
+                <a:latin typeface="Lantinghei SC Heavy"/>
+                <a:cs typeface="Lantinghei SC Heavy"/>
+              </a:rPr>
+              <a:t>教师</a:t>
+            </a:r>
+            <a:r>
+              <a:rPr sz="1600" b="1" spc="-110" dirty="0">
+                <a:latin typeface="Lantinghei SC Heavy"/>
+                <a:cs typeface="Lantinghei SC Heavy"/>
+              </a:rPr>
+              <a:t>3</a:t>
+            </a:r>
+            <a:r>
+              <a:rPr sz="1600" b="1" spc="-70" dirty="0">
+                <a:latin typeface="Lantinghei SC Heavy"/>
+                <a:cs typeface="Lantinghei SC Heavy"/>
+              </a:rPr>
+              <a:t>教师</a:t>
+            </a:r>
+            <a:r>
+              <a:rPr sz="1600" b="1" spc="-100" dirty="0">
+                <a:latin typeface="Lantinghei SC Heavy"/>
+                <a:cs typeface="Lantinghei SC Heavy"/>
+              </a:rPr>
+              <a:t>6</a:t>
+            </a:r>
+            <a:endParaRPr sz="1600">
+              <a:latin typeface="Lantinghei SC Heavy"/>
+              <a:cs typeface="Lantinghei SC Heavy"/>
+            </a:endParaRPr>
+          </a:p>
+        </p:txBody>
+      </p:sp>
+      <p:sp>
+        <p:nvSpPr>
+          <p:cNvPr id="11" name="object 12">
+            <a:extLst>
+              <a:ext uri="{FF2B5EF4-FFF2-40B4-BE49-F238E27FC236}">
+                <a16:creationId xmlns:a16="http://schemas.microsoft.com/office/drawing/2014/main" id="{30A82F65-4D11-3BD6-20EB-40EED7A0B287}"/>
+              </a:ext>
+            </a:extLst>
+          </p:cNvPr>
+          <p:cNvSpPr txBox="1"/>
+          <p:nvPr/>
+        </p:nvSpPr>
+        <p:spPr>
+          <a:xfrm>
+            <a:off x="2427791" y="2763331"/>
+            <a:ext cx="432434" cy="1736725"/>
+          </a:xfrm>
+          <a:prstGeom prst="rect">
+            <a:avLst/>
+          </a:prstGeom>
+        </p:spPr>
+        <p:txBody>
+          <a:bodyPr vert="horz" wrap="square" lIns="0" tIns="12700" rIns="0" bIns="0" rtlCol="0">
+            <a:spAutoFit/>
+          </a:bodyPr>
+          <a:lstStyle/>
+          <a:p>
+            <a:pPr marL="12700" marR="5080" algn="just">
+              <a:lnSpc>
+                <a:spcPct val="100000"/>
+              </a:lnSpc>
+              <a:spcBef>
+                <a:spcPts val="100"/>
+              </a:spcBef>
+            </a:pPr>
+            <a:r>
+              <a:rPr sz="1600" b="1" spc="-30" dirty="0">
+                <a:latin typeface="Lantinghei SC Heavy"/>
+                <a:cs typeface="Lantinghei SC Heavy"/>
+              </a:rPr>
+              <a:t>张三李一王一张四李二王二王三</a:t>
+            </a:r>
+            <a:endParaRPr sz="1600">
+              <a:latin typeface="Lantinghei SC Heavy"/>
+              <a:cs typeface="Lantinghei SC Heavy"/>
+            </a:endParaRPr>
+          </a:p>
+        </p:txBody>
+      </p:sp>
+      <p:sp>
+        <p:nvSpPr>
+          <p:cNvPr id="12" name="object 13">
+            <a:extLst>
+              <a:ext uri="{FF2B5EF4-FFF2-40B4-BE49-F238E27FC236}">
+                <a16:creationId xmlns:a16="http://schemas.microsoft.com/office/drawing/2014/main" id="{F3701716-804A-3373-C645-436E210ED6E7}"/>
+              </a:ext>
+            </a:extLst>
+          </p:cNvPr>
+          <p:cNvSpPr txBox="1"/>
+          <p:nvPr/>
+        </p:nvSpPr>
+        <p:spPr>
+          <a:xfrm>
+            <a:off x="3617814" y="2763331"/>
+            <a:ext cx="1031240" cy="1736725"/>
+          </a:xfrm>
+          <a:prstGeom prst="rect">
+            <a:avLst/>
+          </a:prstGeom>
+        </p:spPr>
+        <p:txBody>
+          <a:bodyPr vert="horz" wrap="square" lIns="0" tIns="12700" rIns="0" bIns="0" rtlCol="0">
+            <a:spAutoFit/>
+          </a:bodyPr>
+          <a:lstStyle/>
+          <a:p>
+            <a:pPr marL="12700">
+              <a:lnSpc>
+                <a:spcPct val="100000"/>
+              </a:lnSpc>
+              <a:spcBef>
+                <a:spcPts val="100"/>
+              </a:spcBef>
+              <a:tabLst>
+                <a:tab pos="763905" algn="l"/>
+              </a:tabLst>
+            </a:pPr>
+            <a:r>
+              <a:rPr sz="1600" b="1" dirty="0">
+                <a:latin typeface="Lantinghei SC Heavy"/>
+                <a:cs typeface="Lantinghei SC Heavy"/>
+              </a:rPr>
+              <a:t>系</a:t>
+            </a:r>
+            <a:r>
+              <a:rPr sz="1600" b="1" spc="-50" dirty="0">
+                <a:latin typeface="Lantinghei SC Heavy"/>
+                <a:cs typeface="Lantinghei SC Heavy"/>
+              </a:rPr>
+              <a:t>1</a:t>
+            </a:r>
+            <a:r>
+              <a:rPr sz="1600" b="1" dirty="0">
+                <a:latin typeface="Lantinghei SC Heavy"/>
+                <a:cs typeface="Lantinghei SC Heavy"/>
+              </a:rPr>
+              <a:t>	</a:t>
+            </a:r>
+            <a:r>
+              <a:rPr sz="1600" b="1" spc="-25" dirty="0">
+                <a:latin typeface="Lantinghei SC Heavy"/>
+                <a:cs typeface="Lantinghei SC Heavy"/>
+              </a:rPr>
+              <a:t>….</a:t>
+            </a:r>
+            <a:endParaRPr sz="1600">
+              <a:latin typeface="Lantinghei SC Heavy"/>
+              <a:cs typeface="Lantinghei SC Heavy"/>
+            </a:endParaRPr>
+          </a:p>
+          <a:p>
+            <a:pPr marL="12700">
+              <a:lnSpc>
+                <a:spcPct val="100000"/>
+              </a:lnSpc>
+              <a:spcBef>
+                <a:spcPts val="5"/>
+              </a:spcBef>
+              <a:tabLst>
+                <a:tab pos="763905" algn="l"/>
+              </a:tabLst>
+            </a:pPr>
+            <a:r>
+              <a:rPr sz="1600" b="1" dirty="0">
+                <a:latin typeface="Lantinghei SC Heavy"/>
+                <a:cs typeface="Lantinghei SC Heavy"/>
+              </a:rPr>
+              <a:t>系</a:t>
+            </a:r>
+            <a:r>
+              <a:rPr sz="1600" b="1" spc="-50" dirty="0">
+                <a:latin typeface="Lantinghei SC Heavy"/>
+                <a:cs typeface="Lantinghei SC Heavy"/>
+              </a:rPr>
+              <a:t>2</a:t>
+            </a:r>
+            <a:r>
+              <a:rPr sz="1600" b="1" dirty="0">
+                <a:latin typeface="Lantinghei SC Heavy"/>
+                <a:cs typeface="Lantinghei SC Heavy"/>
+              </a:rPr>
+              <a:t>	</a:t>
+            </a:r>
+            <a:r>
+              <a:rPr sz="1600" b="1" spc="-25" dirty="0">
+                <a:latin typeface="Lantinghei SC Heavy"/>
+                <a:cs typeface="Lantinghei SC Heavy"/>
+              </a:rPr>
+              <a:t>….</a:t>
+            </a:r>
+            <a:endParaRPr sz="1600">
+              <a:latin typeface="Lantinghei SC Heavy"/>
+              <a:cs typeface="Lantinghei SC Heavy"/>
+            </a:endParaRPr>
+          </a:p>
+          <a:p>
+            <a:pPr marL="12700">
+              <a:lnSpc>
+                <a:spcPct val="100000"/>
+              </a:lnSpc>
+              <a:spcBef>
+                <a:spcPts val="5"/>
+              </a:spcBef>
+              <a:tabLst>
+                <a:tab pos="763905" algn="l"/>
+              </a:tabLst>
+            </a:pPr>
+            <a:r>
+              <a:rPr sz="1600" b="1" dirty="0">
+                <a:latin typeface="Lantinghei SC Heavy"/>
+                <a:cs typeface="Lantinghei SC Heavy"/>
+              </a:rPr>
+              <a:t>系</a:t>
+            </a:r>
+            <a:r>
+              <a:rPr sz="1600" b="1" spc="-50" dirty="0">
+                <a:latin typeface="Lantinghei SC Heavy"/>
+                <a:cs typeface="Lantinghei SC Heavy"/>
+              </a:rPr>
+              <a:t>2</a:t>
+            </a:r>
+            <a:r>
+              <a:rPr sz="1600" b="1" dirty="0">
+                <a:latin typeface="Lantinghei SC Heavy"/>
+                <a:cs typeface="Lantinghei SC Heavy"/>
+              </a:rPr>
+              <a:t>	</a:t>
+            </a:r>
+            <a:r>
+              <a:rPr sz="1600" b="1" spc="-25" dirty="0">
+                <a:latin typeface="Lantinghei SC Heavy"/>
+                <a:cs typeface="Lantinghei SC Heavy"/>
+              </a:rPr>
+              <a:t>….</a:t>
+            </a:r>
+            <a:endParaRPr sz="1600">
+              <a:latin typeface="Lantinghei SC Heavy"/>
+              <a:cs typeface="Lantinghei SC Heavy"/>
+            </a:endParaRPr>
+          </a:p>
+          <a:p>
+            <a:pPr marL="12700">
+              <a:lnSpc>
+                <a:spcPct val="100000"/>
+              </a:lnSpc>
+              <a:tabLst>
+                <a:tab pos="763905" algn="l"/>
+              </a:tabLst>
+            </a:pPr>
+            <a:r>
+              <a:rPr sz="1600" b="1" dirty="0">
+                <a:latin typeface="Lantinghei SC Heavy"/>
+                <a:cs typeface="Lantinghei SC Heavy"/>
+              </a:rPr>
+              <a:t>系</a:t>
+            </a:r>
+            <a:r>
+              <a:rPr sz="1600" b="1" spc="-50" dirty="0">
+                <a:latin typeface="Lantinghei SC Heavy"/>
+                <a:cs typeface="Lantinghei SC Heavy"/>
+              </a:rPr>
+              <a:t>1</a:t>
+            </a:r>
+            <a:r>
+              <a:rPr sz="1600" b="1" dirty="0">
+                <a:latin typeface="Lantinghei SC Heavy"/>
+                <a:cs typeface="Lantinghei SC Heavy"/>
+              </a:rPr>
+              <a:t>	</a:t>
+            </a:r>
+            <a:r>
+              <a:rPr sz="1600" b="1" spc="-25" dirty="0">
+                <a:latin typeface="Lantinghei SC Heavy"/>
+                <a:cs typeface="Lantinghei SC Heavy"/>
+              </a:rPr>
+              <a:t>….</a:t>
+            </a:r>
+            <a:endParaRPr sz="1600">
+              <a:latin typeface="Lantinghei SC Heavy"/>
+              <a:cs typeface="Lantinghei SC Heavy"/>
+            </a:endParaRPr>
+          </a:p>
+          <a:p>
+            <a:pPr marL="12700">
+              <a:lnSpc>
+                <a:spcPct val="100000"/>
+              </a:lnSpc>
+              <a:spcBef>
+                <a:spcPts val="10"/>
+              </a:spcBef>
+              <a:tabLst>
+                <a:tab pos="763905" algn="l"/>
+              </a:tabLst>
+            </a:pPr>
+            <a:r>
+              <a:rPr sz="1600" b="1" dirty="0">
+                <a:latin typeface="Lantinghei SC Heavy"/>
+                <a:cs typeface="Lantinghei SC Heavy"/>
+              </a:rPr>
+              <a:t>系</a:t>
+            </a:r>
+            <a:r>
+              <a:rPr sz="1600" b="1" spc="-50" dirty="0">
+                <a:latin typeface="Lantinghei SC Heavy"/>
+                <a:cs typeface="Lantinghei SC Heavy"/>
+              </a:rPr>
+              <a:t>4</a:t>
+            </a:r>
+            <a:r>
+              <a:rPr sz="1600" b="1" dirty="0">
+                <a:latin typeface="Lantinghei SC Heavy"/>
+                <a:cs typeface="Lantinghei SC Heavy"/>
+              </a:rPr>
+              <a:t>	</a:t>
+            </a:r>
+            <a:r>
+              <a:rPr sz="1600" b="1" spc="-25" dirty="0">
+                <a:latin typeface="Lantinghei SC Heavy"/>
+                <a:cs typeface="Lantinghei SC Heavy"/>
+              </a:rPr>
+              <a:t>….</a:t>
+            </a:r>
+            <a:endParaRPr sz="1600">
+              <a:latin typeface="Lantinghei SC Heavy"/>
+              <a:cs typeface="Lantinghei SC Heavy"/>
+            </a:endParaRPr>
+          </a:p>
+          <a:p>
+            <a:pPr marL="12700">
+              <a:lnSpc>
+                <a:spcPct val="100000"/>
+              </a:lnSpc>
+              <a:spcBef>
+                <a:spcPts val="5"/>
+              </a:spcBef>
+              <a:tabLst>
+                <a:tab pos="763905" algn="l"/>
+              </a:tabLst>
+            </a:pPr>
+            <a:r>
+              <a:rPr sz="1600" b="1" dirty="0">
+                <a:latin typeface="Lantinghei SC Heavy"/>
+                <a:cs typeface="Lantinghei SC Heavy"/>
+              </a:rPr>
+              <a:t>系</a:t>
+            </a:r>
+            <a:r>
+              <a:rPr sz="1600" b="1" spc="-50" dirty="0">
+                <a:latin typeface="Lantinghei SC Heavy"/>
+                <a:cs typeface="Lantinghei SC Heavy"/>
+              </a:rPr>
+              <a:t>1</a:t>
+            </a:r>
+            <a:r>
+              <a:rPr sz="1600" b="1" dirty="0">
+                <a:latin typeface="Lantinghei SC Heavy"/>
+                <a:cs typeface="Lantinghei SC Heavy"/>
+              </a:rPr>
+              <a:t>	</a:t>
+            </a:r>
+            <a:r>
+              <a:rPr sz="1600" b="1" spc="-25" dirty="0">
+                <a:latin typeface="Lantinghei SC Heavy"/>
+                <a:cs typeface="Lantinghei SC Heavy"/>
+              </a:rPr>
+              <a:t>….</a:t>
+            </a:r>
+            <a:endParaRPr sz="1600">
+              <a:latin typeface="Lantinghei SC Heavy"/>
+              <a:cs typeface="Lantinghei SC Heavy"/>
+            </a:endParaRPr>
+          </a:p>
+          <a:p>
+            <a:pPr marL="12700">
+              <a:lnSpc>
+                <a:spcPct val="100000"/>
+              </a:lnSpc>
+              <a:spcBef>
+                <a:spcPts val="5"/>
+              </a:spcBef>
+              <a:tabLst>
+                <a:tab pos="763905" algn="l"/>
+              </a:tabLst>
+            </a:pPr>
+            <a:r>
+              <a:rPr sz="1600" b="1" dirty="0">
+                <a:latin typeface="Lantinghei SC Heavy"/>
+                <a:cs typeface="Lantinghei SC Heavy"/>
+              </a:rPr>
+              <a:t>系</a:t>
+            </a:r>
+            <a:r>
+              <a:rPr sz="1600" b="1" spc="-50" dirty="0">
+                <a:latin typeface="Lantinghei SC Heavy"/>
+                <a:cs typeface="Lantinghei SC Heavy"/>
+              </a:rPr>
+              <a:t>4</a:t>
+            </a:r>
+            <a:r>
+              <a:rPr sz="1600" b="1" dirty="0">
+                <a:latin typeface="Lantinghei SC Heavy"/>
+                <a:cs typeface="Lantinghei SC Heavy"/>
+              </a:rPr>
+              <a:t>	</a:t>
+            </a:r>
+            <a:r>
+              <a:rPr sz="1600" b="1" spc="-25" dirty="0">
+                <a:latin typeface="Lantinghei SC Heavy"/>
+                <a:cs typeface="Lantinghei SC Heavy"/>
+              </a:rPr>
+              <a:t>….</a:t>
+            </a:r>
+            <a:endParaRPr sz="1600">
+              <a:latin typeface="Lantinghei SC Heavy"/>
+              <a:cs typeface="Lantinghei SC Heavy"/>
+            </a:endParaRPr>
+          </a:p>
+        </p:txBody>
+      </p:sp>
+      <p:grpSp>
+        <p:nvGrpSpPr>
+          <p:cNvPr id="13" name="object 14">
+            <a:extLst>
+              <a:ext uri="{FF2B5EF4-FFF2-40B4-BE49-F238E27FC236}">
+                <a16:creationId xmlns:a16="http://schemas.microsoft.com/office/drawing/2014/main" id="{C166CBCA-1C38-583B-FA10-12D45B32DF73}"/>
+              </a:ext>
+            </a:extLst>
+          </p:cNvPr>
+          <p:cNvGrpSpPr/>
+          <p:nvPr/>
+        </p:nvGrpSpPr>
+        <p:grpSpPr>
+          <a:xfrm>
+            <a:off x="1515279" y="1953831"/>
+            <a:ext cx="5909310" cy="2480310"/>
+            <a:chOff x="1450733" y="3461765"/>
+            <a:chExt cx="5909310" cy="2480310"/>
+          </a:xfrm>
+        </p:grpSpPr>
+        <p:sp>
+          <p:nvSpPr>
+            <p:cNvPr id="14" name="object 15">
+              <a:extLst>
+                <a:ext uri="{FF2B5EF4-FFF2-40B4-BE49-F238E27FC236}">
+                  <a16:creationId xmlns:a16="http://schemas.microsoft.com/office/drawing/2014/main" id="{E10EBF44-66DD-9ABB-773B-5C43FD20C5F5}"/>
+                </a:ext>
+              </a:extLst>
+            </p:cNvPr>
+            <p:cNvSpPr/>
+            <p:nvPr/>
+          </p:nvSpPr>
+          <p:spPr>
+            <a:xfrm>
+              <a:off x="1450733" y="3742943"/>
+              <a:ext cx="3415665" cy="0"/>
+            </a:xfrm>
+            <a:custGeom>
+              <a:avLst/>
+              <a:gdLst/>
+              <a:ahLst/>
+              <a:cxnLst/>
+              <a:rect l="l" t="t" r="r" b="b"/>
+              <a:pathLst>
+                <a:path w="3415665">
+                  <a:moveTo>
+                    <a:pt x="0" y="0"/>
+                  </a:moveTo>
+                  <a:lnTo>
+                    <a:pt x="3415284" y="0"/>
+                  </a:lnTo>
+                </a:path>
+              </a:pathLst>
+            </a:custGeom>
+            <a:ln w="9525">
+              <a:solidFill>
+                <a:srgbClr val="000000"/>
+              </a:solidFill>
+            </a:ln>
+          </p:spPr>
+          <p:txBody>
+            <a:bodyPr wrap="square" lIns="0" tIns="0" rIns="0" bIns="0" rtlCol="0"/>
+            <a:lstStyle/>
+            <a:p>
+              <a:endParaRPr/>
+            </a:p>
+          </p:txBody>
+        </p:sp>
+        <p:sp>
+          <p:nvSpPr>
+            <p:cNvPr id="15" name="object 16">
+              <a:extLst>
+                <a:ext uri="{FF2B5EF4-FFF2-40B4-BE49-F238E27FC236}">
+                  <a16:creationId xmlns:a16="http://schemas.microsoft.com/office/drawing/2014/main" id="{953B61B1-60BE-268F-C86F-7E3E59CE1062}"/>
+                </a:ext>
+              </a:extLst>
+            </p:cNvPr>
+            <p:cNvSpPr/>
+            <p:nvPr/>
+          </p:nvSpPr>
+          <p:spPr>
+            <a:xfrm>
+              <a:off x="1492643" y="4101845"/>
+              <a:ext cx="3415029" cy="0"/>
+            </a:xfrm>
+            <a:custGeom>
+              <a:avLst/>
+              <a:gdLst/>
+              <a:ahLst/>
+              <a:cxnLst/>
+              <a:rect l="l" t="t" r="r" b="b"/>
+              <a:pathLst>
+                <a:path w="3415029">
+                  <a:moveTo>
+                    <a:pt x="0" y="0"/>
+                  </a:moveTo>
+                  <a:lnTo>
+                    <a:pt x="3414522" y="0"/>
+                  </a:lnTo>
+                </a:path>
+              </a:pathLst>
+            </a:custGeom>
+            <a:ln w="9525">
+              <a:solidFill>
+                <a:srgbClr val="000000"/>
+              </a:solidFill>
+            </a:ln>
+          </p:spPr>
+          <p:txBody>
+            <a:bodyPr wrap="square" lIns="0" tIns="0" rIns="0" bIns="0" rtlCol="0"/>
+            <a:lstStyle/>
+            <a:p>
+              <a:endParaRPr/>
+            </a:p>
+          </p:txBody>
+        </p:sp>
+        <p:sp>
+          <p:nvSpPr>
+            <p:cNvPr id="16" name="object 17">
+              <a:extLst>
+                <a:ext uri="{FF2B5EF4-FFF2-40B4-BE49-F238E27FC236}">
+                  <a16:creationId xmlns:a16="http://schemas.microsoft.com/office/drawing/2014/main" id="{512DE131-89A2-F0B0-1480-6EA44898EEA4}"/>
+                </a:ext>
+              </a:extLst>
+            </p:cNvPr>
+            <p:cNvSpPr/>
+            <p:nvPr/>
+          </p:nvSpPr>
+          <p:spPr>
+            <a:xfrm>
+              <a:off x="2114435" y="3729989"/>
+              <a:ext cx="0" cy="2208530"/>
+            </a:xfrm>
+            <a:custGeom>
+              <a:avLst/>
+              <a:gdLst/>
+              <a:ahLst/>
+              <a:cxnLst/>
+              <a:rect l="l" t="t" r="r" b="b"/>
+              <a:pathLst>
+                <a:path h="2208529">
+                  <a:moveTo>
+                    <a:pt x="0" y="0"/>
+                  </a:moveTo>
+                  <a:lnTo>
+                    <a:pt x="0" y="2208276"/>
+                  </a:lnTo>
+                </a:path>
+              </a:pathLst>
+            </a:custGeom>
+            <a:ln w="9525">
+              <a:solidFill>
+                <a:srgbClr val="000000"/>
+              </a:solidFill>
+            </a:ln>
+          </p:spPr>
+          <p:txBody>
+            <a:bodyPr wrap="square" lIns="0" tIns="0" rIns="0" bIns="0" rtlCol="0"/>
+            <a:lstStyle/>
+            <a:p>
+              <a:endParaRPr/>
+            </a:p>
+          </p:txBody>
+        </p:sp>
+        <p:sp>
+          <p:nvSpPr>
+            <p:cNvPr id="17" name="object 18">
+              <a:extLst>
+                <a:ext uri="{FF2B5EF4-FFF2-40B4-BE49-F238E27FC236}">
+                  <a16:creationId xmlns:a16="http://schemas.microsoft.com/office/drawing/2014/main" id="{1EF1B542-4080-45F9-9C1C-4C81D24C25B2}"/>
+                </a:ext>
+              </a:extLst>
+            </p:cNvPr>
+            <p:cNvSpPr/>
+            <p:nvPr/>
+          </p:nvSpPr>
+          <p:spPr>
+            <a:xfrm>
+              <a:off x="3273437" y="3733799"/>
+              <a:ext cx="0" cy="2208530"/>
+            </a:xfrm>
+            <a:custGeom>
+              <a:avLst/>
+              <a:gdLst/>
+              <a:ahLst/>
+              <a:cxnLst/>
+              <a:rect l="l" t="t" r="r" b="b"/>
+              <a:pathLst>
+                <a:path h="2208529">
+                  <a:moveTo>
+                    <a:pt x="0" y="0"/>
+                  </a:moveTo>
+                  <a:lnTo>
+                    <a:pt x="0" y="2208276"/>
+                  </a:lnTo>
+                </a:path>
+              </a:pathLst>
+            </a:custGeom>
+            <a:ln w="9525">
+              <a:solidFill>
+                <a:srgbClr val="000000"/>
+              </a:solidFill>
+            </a:ln>
+          </p:spPr>
+          <p:txBody>
+            <a:bodyPr wrap="square" lIns="0" tIns="0" rIns="0" bIns="0" rtlCol="0"/>
+            <a:lstStyle/>
+            <a:p>
+              <a:endParaRPr/>
+            </a:p>
+          </p:txBody>
+        </p:sp>
+        <p:sp>
+          <p:nvSpPr>
+            <p:cNvPr id="18" name="object 19">
+              <a:extLst>
+                <a:ext uri="{FF2B5EF4-FFF2-40B4-BE49-F238E27FC236}">
+                  <a16:creationId xmlns:a16="http://schemas.microsoft.com/office/drawing/2014/main" id="{923CF678-0EF2-D529-997A-11BB042D8362}"/>
+                </a:ext>
+              </a:extLst>
+            </p:cNvPr>
+            <p:cNvSpPr/>
+            <p:nvPr/>
+          </p:nvSpPr>
+          <p:spPr>
+            <a:xfrm>
+              <a:off x="4238891" y="3461777"/>
+              <a:ext cx="3121660" cy="2033905"/>
+            </a:xfrm>
+            <a:custGeom>
+              <a:avLst/>
+              <a:gdLst/>
+              <a:ahLst/>
+              <a:cxnLst/>
+              <a:rect l="l" t="t" r="r" b="b"/>
+              <a:pathLst>
+                <a:path w="3121659" h="2033904">
+                  <a:moveTo>
+                    <a:pt x="3121152" y="422910"/>
+                  </a:moveTo>
+                  <a:lnTo>
+                    <a:pt x="2930652" y="327977"/>
+                  </a:lnTo>
+                  <a:lnTo>
+                    <a:pt x="2930652" y="461010"/>
+                  </a:lnTo>
+                  <a:lnTo>
+                    <a:pt x="2913773" y="461187"/>
+                  </a:lnTo>
+                  <a:lnTo>
+                    <a:pt x="2929890" y="461010"/>
+                  </a:lnTo>
+                  <a:lnTo>
+                    <a:pt x="2930652" y="461010"/>
+                  </a:lnTo>
+                  <a:lnTo>
+                    <a:pt x="2930652" y="327977"/>
+                  </a:lnTo>
+                  <a:lnTo>
+                    <a:pt x="2891790" y="308610"/>
+                  </a:lnTo>
+                  <a:lnTo>
+                    <a:pt x="2892044" y="385191"/>
+                  </a:lnTo>
+                  <a:lnTo>
+                    <a:pt x="2856738" y="385546"/>
+                  </a:lnTo>
+                  <a:lnTo>
+                    <a:pt x="2817114" y="386334"/>
+                  </a:lnTo>
+                  <a:lnTo>
+                    <a:pt x="2769247" y="387781"/>
+                  </a:lnTo>
+                  <a:lnTo>
+                    <a:pt x="2714841" y="390245"/>
+                  </a:lnTo>
+                  <a:lnTo>
+                    <a:pt x="2663571" y="393382"/>
+                  </a:lnTo>
+                  <a:lnTo>
+                    <a:pt x="2612237" y="397281"/>
+                  </a:lnTo>
+                  <a:lnTo>
+                    <a:pt x="2560878" y="401916"/>
+                  </a:lnTo>
+                  <a:lnTo>
+                    <a:pt x="2509520" y="407238"/>
+                  </a:lnTo>
+                  <a:lnTo>
+                    <a:pt x="2458186" y="413245"/>
+                  </a:lnTo>
+                  <a:lnTo>
+                    <a:pt x="2406904" y="419887"/>
+                  </a:lnTo>
+                  <a:lnTo>
+                    <a:pt x="2355697" y="427151"/>
+                  </a:lnTo>
+                  <a:lnTo>
+                    <a:pt x="2304605" y="435013"/>
+                  </a:lnTo>
+                  <a:lnTo>
+                    <a:pt x="2253640" y="443433"/>
+                  </a:lnTo>
+                  <a:lnTo>
+                    <a:pt x="2202840" y="452386"/>
+                  </a:lnTo>
+                  <a:lnTo>
+                    <a:pt x="2152218" y="461848"/>
+                  </a:lnTo>
+                  <a:lnTo>
+                    <a:pt x="2101824" y="471792"/>
+                  </a:lnTo>
+                  <a:lnTo>
+                    <a:pt x="2051659" y="482180"/>
+                  </a:lnTo>
+                  <a:lnTo>
+                    <a:pt x="2001774" y="493014"/>
+                  </a:lnTo>
+                  <a:lnTo>
+                    <a:pt x="1962150" y="502920"/>
+                  </a:lnTo>
+                  <a:lnTo>
+                    <a:pt x="1911388" y="515848"/>
+                  </a:lnTo>
+                  <a:lnTo>
+                    <a:pt x="1862226" y="530275"/>
+                  </a:lnTo>
+                  <a:lnTo>
+                    <a:pt x="1814449" y="546252"/>
+                  </a:lnTo>
+                  <a:lnTo>
+                    <a:pt x="1767814" y="563841"/>
+                  </a:lnTo>
+                  <a:lnTo>
+                    <a:pt x="1722120" y="583057"/>
+                  </a:lnTo>
+                  <a:lnTo>
+                    <a:pt x="1677111" y="603986"/>
+                  </a:lnTo>
+                  <a:lnTo>
+                    <a:pt x="1632585" y="626656"/>
+                  </a:lnTo>
+                  <a:lnTo>
+                    <a:pt x="1588312" y="651116"/>
+                  </a:lnTo>
+                  <a:lnTo>
+                    <a:pt x="1544066" y="677418"/>
+                  </a:lnTo>
+                  <a:lnTo>
+                    <a:pt x="1499616" y="705612"/>
+                  </a:lnTo>
+                  <a:lnTo>
+                    <a:pt x="1433322" y="749808"/>
+                  </a:lnTo>
+                  <a:lnTo>
+                    <a:pt x="1435849" y="753630"/>
+                  </a:lnTo>
+                  <a:lnTo>
+                    <a:pt x="1431036" y="757428"/>
+                  </a:lnTo>
+                  <a:lnTo>
+                    <a:pt x="1380629" y="797280"/>
+                  </a:lnTo>
+                  <a:lnTo>
+                    <a:pt x="1334465" y="810069"/>
+                  </a:lnTo>
+                  <a:lnTo>
+                    <a:pt x="1285709" y="810437"/>
+                  </a:lnTo>
+                  <a:lnTo>
+                    <a:pt x="1238250" y="800862"/>
+                  </a:lnTo>
+                  <a:lnTo>
+                    <a:pt x="1197102" y="784098"/>
+                  </a:lnTo>
+                  <a:lnTo>
+                    <a:pt x="1177290" y="772668"/>
+                  </a:lnTo>
+                  <a:lnTo>
+                    <a:pt x="1166622" y="766572"/>
+                  </a:lnTo>
+                  <a:lnTo>
+                    <a:pt x="1157478" y="759714"/>
+                  </a:lnTo>
+                  <a:lnTo>
+                    <a:pt x="1146810" y="752094"/>
+                  </a:lnTo>
+                  <a:lnTo>
+                    <a:pt x="340614" y="121920"/>
+                  </a:lnTo>
+                  <a:lnTo>
+                    <a:pt x="305562" y="97536"/>
+                  </a:lnTo>
+                  <a:lnTo>
+                    <a:pt x="258051" y="73672"/>
+                  </a:lnTo>
+                  <a:lnTo>
+                    <a:pt x="207264" y="57912"/>
+                  </a:lnTo>
+                  <a:lnTo>
+                    <a:pt x="182118" y="53340"/>
+                  </a:lnTo>
+                  <a:lnTo>
+                    <a:pt x="171246" y="51879"/>
+                  </a:lnTo>
+                  <a:lnTo>
+                    <a:pt x="170954" y="51841"/>
+                  </a:lnTo>
+                  <a:lnTo>
+                    <a:pt x="170954" y="108750"/>
+                  </a:lnTo>
+                  <a:lnTo>
+                    <a:pt x="169087" y="109308"/>
+                  </a:lnTo>
+                  <a:lnTo>
+                    <a:pt x="170675" y="108826"/>
+                  </a:lnTo>
+                  <a:lnTo>
+                    <a:pt x="170954" y="108750"/>
+                  </a:lnTo>
+                  <a:lnTo>
+                    <a:pt x="170954" y="51841"/>
+                  </a:lnTo>
+                  <a:lnTo>
+                    <a:pt x="170675" y="51803"/>
+                  </a:lnTo>
+                  <a:lnTo>
+                    <a:pt x="166878" y="51054"/>
+                  </a:lnTo>
+                  <a:lnTo>
+                    <a:pt x="163068" y="51816"/>
+                  </a:lnTo>
+                  <a:lnTo>
+                    <a:pt x="160020" y="52578"/>
+                  </a:lnTo>
+                  <a:lnTo>
+                    <a:pt x="149567" y="55524"/>
+                  </a:lnTo>
+                  <a:lnTo>
+                    <a:pt x="127254" y="0"/>
+                  </a:lnTo>
+                  <a:lnTo>
+                    <a:pt x="0" y="143256"/>
+                  </a:lnTo>
+                  <a:lnTo>
+                    <a:pt x="124968" y="153708"/>
+                  </a:lnTo>
+                  <a:lnTo>
+                    <a:pt x="191262" y="159258"/>
+                  </a:lnTo>
+                  <a:lnTo>
+                    <a:pt x="171246" y="109448"/>
+                  </a:lnTo>
+                  <a:lnTo>
+                    <a:pt x="175260" y="109728"/>
+                  </a:lnTo>
+                  <a:lnTo>
+                    <a:pt x="185928" y="111252"/>
+                  </a:lnTo>
+                  <a:lnTo>
+                    <a:pt x="243166" y="129514"/>
+                  </a:lnTo>
+                  <a:lnTo>
+                    <a:pt x="287274" y="153162"/>
+                  </a:lnTo>
+                  <a:lnTo>
+                    <a:pt x="306324" y="167640"/>
+                  </a:lnTo>
+                  <a:lnTo>
+                    <a:pt x="1111758" y="797052"/>
+                  </a:lnTo>
+                  <a:lnTo>
+                    <a:pt x="1134618" y="813816"/>
+                  </a:lnTo>
+                  <a:lnTo>
+                    <a:pt x="1146048" y="820674"/>
+                  </a:lnTo>
+                  <a:lnTo>
+                    <a:pt x="1158240" y="828294"/>
+                  </a:lnTo>
+                  <a:lnTo>
+                    <a:pt x="1194816" y="845820"/>
+                  </a:lnTo>
+                  <a:lnTo>
+                    <a:pt x="1232154" y="858012"/>
+                  </a:lnTo>
+                  <a:lnTo>
+                    <a:pt x="1279525" y="867511"/>
+                  </a:lnTo>
+                  <a:lnTo>
+                    <a:pt x="1328102" y="868184"/>
+                  </a:lnTo>
+                  <a:lnTo>
+                    <a:pt x="1375689" y="859536"/>
+                  </a:lnTo>
+                  <a:lnTo>
+                    <a:pt x="1393812" y="852004"/>
+                  </a:lnTo>
+                  <a:lnTo>
+                    <a:pt x="1390611" y="874915"/>
+                  </a:lnTo>
+                  <a:lnTo>
+                    <a:pt x="1395018" y="925436"/>
+                  </a:lnTo>
+                  <a:lnTo>
+                    <a:pt x="1409446" y="974547"/>
+                  </a:lnTo>
+                  <a:lnTo>
+                    <a:pt x="1432560" y="1020318"/>
+                  </a:lnTo>
+                  <a:lnTo>
+                    <a:pt x="1455420" y="1053084"/>
+                  </a:lnTo>
+                  <a:lnTo>
+                    <a:pt x="1490332" y="1089952"/>
+                  </a:lnTo>
+                  <a:lnTo>
+                    <a:pt x="1526463" y="1125512"/>
+                  </a:lnTo>
+                  <a:lnTo>
+                    <a:pt x="1563700" y="1159903"/>
+                  </a:lnTo>
+                  <a:lnTo>
+                    <a:pt x="1601914" y="1193228"/>
+                  </a:lnTo>
+                  <a:lnTo>
+                    <a:pt x="1641017" y="1225613"/>
+                  </a:lnTo>
+                  <a:lnTo>
+                    <a:pt x="1680870" y="1257185"/>
+                  </a:lnTo>
+                  <a:lnTo>
+                    <a:pt x="1721383" y="1288059"/>
+                  </a:lnTo>
+                  <a:lnTo>
+                    <a:pt x="1762429" y="1318348"/>
+                  </a:lnTo>
+                  <a:lnTo>
+                    <a:pt x="1803895" y="1348193"/>
+                  </a:lnTo>
+                  <a:lnTo>
+                    <a:pt x="1845678" y="1377708"/>
+                  </a:lnTo>
+                  <a:lnTo>
+                    <a:pt x="1971751" y="1465491"/>
+                  </a:lnTo>
+                  <a:lnTo>
+                    <a:pt x="2013648" y="1494891"/>
+                  </a:lnTo>
+                  <a:lnTo>
+                    <a:pt x="2055291" y="1524571"/>
+                  </a:lnTo>
+                  <a:lnTo>
+                    <a:pt x="2096566" y="1554657"/>
+                  </a:lnTo>
+                  <a:lnTo>
+                    <a:pt x="2137359" y="1585252"/>
+                  </a:lnTo>
+                  <a:lnTo>
+                    <a:pt x="2177567" y="1616494"/>
+                  </a:lnTo>
+                  <a:lnTo>
+                    <a:pt x="2217064" y="1648498"/>
+                  </a:lnTo>
+                  <a:lnTo>
+                    <a:pt x="2255736" y="1681391"/>
+                  </a:lnTo>
+                  <a:lnTo>
+                    <a:pt x="2293493" y="1715287"/>
+                  </a:lnTo>
+                  <a:lnTo>
+                    <a:pt x="2330196" y="1750314"/>
+                  </a:lnTo>
+                  <a:lnTo>
+                    <a:pt x="2339340" y="1757934"/>
+                  </a:lnTo>
+                  <a:lnTo>
+                    <a:pt x="2376652" y="1799526"/>
+                  </a:lnTo>
+                  <a:lnTo>
+                    <a:pt x="2399538" y="1837182"/>
+                  </a:lnTo>
+                  <a:lnTo>
+                    <a:pt x="2407920" y="1856232"/>
+                  </a:lnTo>
+                  <a:lnTo>
+                    <a:pt x="2409075" y="1859013"/>
+                  </a:lnTo>
+                  <a:lnTo>
+                    <a:pt x="2356104" y="1851660"/>
+                  </a:lnTo>
+                  <a:lnTo>
+                    <a:pt x="2408682" y="2006790"/>
+                  </a:lnTo>
+                  <a:lnTo>
+                    <a:pt x="2417826" y="2033778"/>
+                  </a:lnTo>
+                  <a:lnTo>
+                    <a:pt x="2526030" y="1875282"/>
+                  </a:lnTo>
+                  <a:lnTo>
+                    <a:pt x="2467356" y="1867115"/>
+                  </a:lnTo>
+                  <a:lnTo>
+                    <a:pt x="2466898" y="1867052"/>
+                  </a:lnTo>
+                  <a:lnTo>
+                    <a:pt x="2467356" y="1856232"/>
+                  </a:lnTo>
+                  <a:lnTo>
+                    <a:pt x="2467356" y="1852422"/>
+                  </a:lnTo>
+                  <a:lnTo>
+                    <a:pt x="2466594" y="1849374"/>
+                  </a:lnTo>
+                  <a:lnTo>
+                    <a:pt x="2465832" y="1847469"/>
+                  </a:lnTo>
+                  <a:lnTo>
+                    <a:pt x="2465832" y="1892808"/>
+                  </a:lnTo>
+                  <a:lnTo>
+                    <a:pt x="2411730" y="1891360"/>
+                  </a:lnTo>
+                  <a:lnTo>
+                    <a:pt x="2455926" y="1892541"/>
+                  </a:lnTo>
+                  <a:lnTo>
+                    <a:pt x="2460498" y="1892655"/>
+                  </a:lnTo>
+                  <a:lnTo>
+                    <a:pt x="2465070" y="1892782"/>
+                  </a:lnTo>
+                  <a:lnTo>
+                    <a:pt x="2465832" y="1892808"/>
+                  </a:lnTo>
+                  <a:lnTo>
+                    <a:pt x="2465832" y="1847469"/>
+                  </a:lnTo>
+                  <a:lnTo>
+                    <a:pt x="2465070" y="1845564"/>
+                  </a:lnTo>
+                  <a:lnTo>
+                    <a:pt x="2460498" y="1833372"/>
+                  </a:lnTo>
+                  <a:lnTo>
+                    <a:pt x="2435809" y="1784769"/>
+                  </a:lnTo>
+                  <a:lnTo>
+                    <a:pt x="2398611" y="1736001"/>
+                  </a:lnTo>
+                  <a:lnTo>
+                    <a:pt x="2356104" y="1696974"/>
+                  </a:lnTo>
+                  <a:lnTo>
+                    <a:pt x="1550670" y="1067562"/>
+                  </a:lnTo>
+                  <a:lnTo>
+                    <a:pt x="1540764" y="1059942"/>
+                  </a:lnTo>
+                  <a:lnTo>
+                    <a:pt x="1532382" y="1052322"/>
+                  </a:lnTo>
+                  <a:lnTo>
+                    <a:pt x="1515618" y="1035558"/>
+                  </a:lnTo>
+                  <a:lnTo>
+                    <a:pt x="1500378" y="1018794"/>
+                  </a:lnTo>
+                  <a:lnTo>
+                    <a:pt x="1494282" y="1009650"/>
+                  </a:lnTo>
+                  <a:lnTo>
+                    <a:pt x="1487424" y="1000506"/>
+                  </a:lnTo>
+                  <a:lnTo>
+                    <a:pt x="1476756" y="982218"/>
+                  </a:lnTo>
+                  <a:lnTo>
+                    <a:pt x="1458023" y="940917"/>
+                  </a:lnTo>
+                  <a:lnTo>
+                    <a:pt x="1448384" y="895807"/>
+                  </a:lnTo>
+                  <a:lnTo>
+                    <a:pt x="1450263" y="850290"/>
+                  </a:lnTo>
+                  <a:lnTo>
+                    <a:pt x="1466088" y="807720"/>
+                  </a:lnTo>
+                  <a:lnTo>
+                    <a:pt x="1468640" y="803122"/>
+                  </a:lnTo>
+                  <a:lnTo>
+                    <a:pt x="1475232" y="813054"/>
+                  </a:lnTo>
+                  <a:lnTo>
+                    <a:pt x="1541526" y="769620"/>
+                  </a:lnTo>
+                  <a:lnTo>
+                    <a:pt x="1583143" y="742899"/>
+                  </a:lnTo>
+                  <a:lnTo>
+                    <a:pt x="1624965" y="717880"/>
+                  </a:lnTo>
+                  <a:lnTo>
+                    <a:pt x="1667090" y="694550"/>
+                  </a:lnTo>
+                  <a:lnTo>
+                    <a:pt x="1709661" y="672884"/>
+                  </a:lnTo>
+                  <a:lnTo>
+                    <a:pt x="1752790" y="652868"/>
+                  </a:lnTo>
+                  <a:lnTo>
+                    <a:pt x="1796605" y="634479"/>
+                  </a:lnTo>
+                  <a:lnTo>
+                    <a:pt x="1841220" y="617702"/>
+                  </a:lnTo>
+                  <a:lnTo>
+                    <a:pt x="1886775" y="602513"/>
+                  </a:lnTo>
+                  <a:lnTo>
+                    <a:pt x="1933397" y="588886"/>
+                  </a:lnTo>
+                  <a:lnTo>
+                    <a:pt x="1981200" y="576834"/>
+                  </a:lnTo>
+                  <a:lnTo>
+                    <a:pt x="2000250" y="571500"/>
+                  </a:lnTo>
+                  <a:lnTo>
+                    <a:pt x="2068283" y="556310"/>
+                  </a:lnTo>
+                  <a:lnTo>
+                    <a:pt x="2117521" y="546125"/>
+                  </a:lnTo>
+                  <a:lnTo>
+                    <a:pt x="2166988" y="536397"/>
+                  </a:lnTo>
+                  <a:lnTo>
+                    <a:pt x="2216658" y="527151"/>
+                  </a:lnTo>
+                  <a:lnTo>
+                    <a:pt x="2266505" y="518414"/>
+                  </a:lnTo>
+                  <a:lnTo>
+                    <a:pt x="2316505" y="510209"/>
+                  </a:lnTo>
+                  <a:lnTo>
+                    <a:pt x="2366632" y="502551"/>
+                  </a:lnTo>
+                  <a:lnTo>
+                    <a:pt x="2416873" y="495477"/>
+                  </a:lnTo>
+                  <a:lnTo>
+                    <a:pt x="2467178" y="489000"/>
+                  </a:lnTo>
+                  <a:lnTo>
+                    <a:pt x="2517533" y="483158"/>
+                  </a:lnTo>
+                  <a:lnTo>
+                    <a:pt x="2567927" y="477951"/>
+                  </a:lnTo>
+                  <a:lnTo>
+                    <a:pt x="2618321" y="473430"/>
+                  </a:lnTo>
+                  <a:lnTo>
+                    <a:pt x="2668676" y="469595"/>
+                  </a:lnTo>
+                  <a:lnTo>
+                    <a:pt x="2719006" y="466483"/>
+                  </a:lnTo>
+                  <a:lnTo>
+                    <a:pt x="2769247" y="464121"/>
+                  </a:lnTo>
+                  <a:lnTo>
+                    <a:pt x="2817114" y="462597"/>
+                  </a:lnTo>
+                  <a:lnTo>
+                    <a:pt x="2855214" y="461797"/>
+                  </a:lnTo>
+                  <a:lnTo>
+                    <a:pt x="2891790" y="461403"/>
+                  </a:lnTo>
+                  <a:lnTo>
+                    <a:pt x="2892298" y="461403"/>
+                  </a:lnTo>
+                  <a:lnTo>
+                    <a:pt x="2892552" y="537210"/>
+                  </a:lnTo>
+                  <a:lnTo>
+                    <a:pt x="2930652" y="518160"/>
+                  </a:lnTo>
+                  <a:lnTo>
+                    <a:pt x="3121152" y="422910"/>
+                  </a:lnTo>
+                  <a:close/>
+                </a:path>
+              </a:pathLst>
+            </a:custGeom>
+            <a:solidFill>
+              <a:srgbClr val="3333CC"/>
+            </a:solidFill>
+          </p:spPr>
+          <p:txBody>
+            <a:bodyPr wrap="square" lIns="0" tIns="0" rIns="0" bIns="0" rtlCol="0"/>
+            <a:lstStyle/>
+            <a:p>
+              <a:endParaRPr/>
+            </a:p>
+          </p:txBody>
+        </p:sp>
+      </p:grpSp>
+      <p:sp>
+        <p:nvSpPr>
+          <p:cNvPr id="19" name="文本框 18">
+            <a:extLst>
+              <a:ext uri="{FF2B5EF4-FFF2-40B4-BE49-F238E27FC236}">
+                <a16:creationId xmlns:a16="http://schemas.microsoft.com/office/drawing/2014/main" id="{CA8331CE-C3B9-5945-D9A0-EF3C8964067D}"/>
+              </a:ext>
+            </a:extLst>
+          </p:cNvPr>
+          <p:cNvSpPr txBox="1"/>
+          <p:nvPr/>
+        </p:nvSpPr>
+        <p:spPr>
+          <a:xfrm>
+            <a:off x="4879509" y="960100"/>
+            <a:ext cx="1415772" cy="461665"/>
+          </a:xfrm>
+          <a:prstGeom prst="rect">
+            <a:avLst/>
+          </a:prstGeom>
+          <a:noFill/>
+        </p:spPr>
+        <p:txBody>
+          <a:bodyPr wrap="none" rtlCol="0">
+            <a:spAutoFit/>
+          </a:bodyPr>
+          <a:lstStyle/>
+          <a:p>
+            <a:r>
+              <a:rPr kumimoji="1" lang="zh-CN" altLang="en-US" sz="2400" b="1" dirty="0"/>
+              <a:t>聚簇文件</a:t>
+            </a:r>
+          </a:p>
+        </p:txBody>
+      </p:sp>
+      <p:sp>
+        <p:nvSpPr>
+          <p:cNvPr id="22" name="object 5">
+            <a:extLst>
+              <a:ext uri="{FF2B5EF4-FFF2-40B4-BE49-F238E27FC236}">
+                <a16:creationId xmlns:a16="http://schemas.microsoft.com/office/drawing/2014/main" id="{88229E6B-0C26-A826-5A27-3E517B08DF50}"/>
+              </a:ext>
+            </a:extLst>
+          </p:cNvPr>
+          <p:cNvSpPr txBox="1"/>
+          <p:nvPr/>
+        </p:nvSpPr>
+        <p:spPr>
+          <a:xfrm>
+            <a:off x="1459349" y="1789890"/>
+            <a:ext cx="542249" cy="319959"/>
+          </a:xfrm>
+          <a:prstGeom prst="rect">
+            <a:avLst/>
+          </a:prstGeom>
+        </p:spPr>
+        <p:txBody>
+          <a:bodyPr vert="horz" wrap="square" lIns="0" tIns="12065" rIns="0" bIns="0" rtlCol="0">
+            <a:spAutoFit/>
+          </a:bodyPr>
+          <a:lstStyle/>
+          <a:p>
+            <a:pPr marL="12700">
+              <a:lnSpc>
+                <a:spcPct val="100000"/>
+              </a:lnSpc>
+              <a:spcBef>
+                <a:spcPts val="95"/>
+              </a:spcBef>
+            </a:pPr>
+            <a:r>
+              <a:rPr lang="zh-CN" altLang="en-US" sz="2000" b="1" spc="-50" dirty="0">
+                <a:latin typeface="Lantinghei SC Heavy"/>
+                <a:cs typeface="Lantinghei SC Heavy"/>
+              </a:rPr>
+              <a:t>教师</a:t>
+            </a:r>
+            <a:endParaRPr sz="2000" dirty="0">
+              <a:latin typeface="Lantinghei SC Heavy"/>
+              <a:cs typeface="Lantinghei SC Heavy"/>
+            </a:endParaRPr>
+          </a:p>
+        </p:txBody>
+      </p:sp>
+    </p:spTree>
+    <p:extLst>
+      <p:ext uri="{BB962C8B-B14F-4D97-AF65-F5344CB8AC3E}">
+        <p14:creationId xmlns:p14="http://schemas.microsoft.com/office/powerpoint/2010/main" val="3644270791"/>
+      </p:ext>
+    </p:extLst>
+  </p:cSld>
+  <p:clrMapOvr>
+    <a:masterClrMapping/>
+  </p:clrMapOvr>
+</p:sld>
+</file>
+
+<file path=ppt/slides/slide7.xml><?xml version="1.0" encoding="utf-8"?>
+<p:sld xmlns:a="http://schemas.openxmlformats.org/drawingml/2006/main" xmlns:r="http://schemas.openxmlformats.org/officeDocument/2006/relationships" xmlns:p="http://schemas.openxmlformats.org/presentationml/2006/main">
+  <p:cSld>
+    <p:spTree>
+      <p:nvGrpSpPr>
+        <p:cNvPr id="1" name=""/>
+        <p:cNvGrpSpPr/>
+        <p:nvPr/>
+      </p:nvGrpSpPr>
+      <p:grpSpPr>
+        <a:xfrm>
+          <a:off x="0" y="0"/>
+          <a:ext cx="0" cy="0"/>
+          <a:chOff x="0" y="0"/>
+          <a:chExt cx="0" cy="0"/>
+        </a:xfrm>
+      </p:grpSpPr>
+      <p:grpSp>
+        <p:nvGrpSpPr>
+          <p:cNvPr id="24" name="组合 23">
+            <a:extLst>
+              <a:ext uri="{FF2B5EF4-FFF2-40B4-BE49-F238E27FC236}">
+                <a16:creationId xmlns:a16="http://schemas.microsoft.com/office/drawing/2014/main" id="{641ECC68-F452-701F-10C2-6ED247F7FEC5}"/>
+              </a:ext>
+            </a:extLst>
+          </p:cNvPr>
+          <p:cNvGrpSpPr/>
+          <p:nvPr/>
+        </p:nvGrpSpPr>
+        <p:grpSpPr>
+          <a:xfrm>
+            <a:off x="1178453" y="1989119"/>
+            <a:ext cx="8473953" cy="3015741"/>
+            <a:chOff x="1178453" y="1989119"/>
+            <a:chExt cx="8473953" cy="3015741"/>
+          </a:xfrm>
+        </p:grpSpPr>
+        <p:grpSp>
+          <p:nvGrpSpPr>
+            <p:cNvPr id="8" name="object 5">
+              <a:extLst>
+                <a:ext uri="{FF2B5EF4-FFF2-40B4-BE49-F238E27FC236}">
+                  <a16:creationId xmlns:a16="http://schemas.microsoft.com/office/drawing/2014/main" id="{97DF56DD-0D28-86D5-B8AE-6DA586BC2727}"/>
+                </a:ext>
+              </a:extLst>
+            </p:cNvPr>
+            <p:cNvGrpSpPr/>
+            <p:nvPr/>
+          </p:nvGrpSpPr>
+          <p:grpSpPr>
+            <a:xfrm>
+              <a:off x="1245261" y="2430824"/>
+              <a:ext cx="3900678" cy="2574036"/>
+              <a:chOff x="1212989" y="4162805"/>
+              <a:chExt cx="3900678" cy="2574036"/>
+            </a:xfrm>
+          </p:grpSpPr>
+          <p:pic>
+            <p:nvPicPr>
+              <p:cNvPr id="9" name="object 6">
+                <a:extLst>
+                  <a:ext uri="{FF2B5EF4-FFF2-40B4-BE49-F238E27FC236}">
+                    <a16:creationId xmlns:a16="http://schemas.microsoft.com/office/drawing/2014/main" id="{11887DBD-DD90-97C7-6879-7F6F1C473E12}"/>
+                  </a:ext>
+                </a:extLst>
+              </p:cNvPr>
+              <p:cNvPicPr/>
+              <p:nvPr/>
+            </p:nvPicPr>
+            <p:blipFill>
+              <a:blip r:embed="rId2" cstate="print"/>
+              <a:stretch>
+                <a:fillRect/>
+              </a:stretch>
+            </p:blipFill>
+            <p:spPr>
+              <a:xfrm>
+                <a:off x="1212989" y="4162805"/>
+                <a:ext cx="3849623" cy="1667256"/>
+              </a:xfrm>
+              <a:prstGeom prst="rect">
+                <a:avLst/>
+              </a:prstGeom>
+            </p:spPr>
+          </p:pic>
+          <p:pic>
+            <p:nvPicPr>
+              <p:cNvPr id="10" name="object 7">
+                <a:extLst>
+                  <a:ext uri="{FF2B5EF4-FFF2-40B4-BE49-F238E27FC236}">
+                    <a16:creationId xmlns:a16="http://schemas.microsoft.com/office/drawing/2014/main" id="{FDDBD48E-3619-3664-E4BE-33A391FBF5A2}"/>
+                  </a:ext>
+                </a:extLst>
+              </p:cNvPr>
+              <p:cNvPicPr/>
+              <p:nvPr/>
+            </p:nvPicPr>
+            <p:blipFill>
+              <a:blip r:embed="rId3" cstate="print"/>
+              <a:stretch>
+                <a:fillRect/>
+              </a:stretch>
+            </p:blipFill>
+            <p:spPr>
+              <a:xfrm>
+                <a:off x="3018929" y="5816345"/>
+                <a:ext cx="2094738" cy="217169"/>
+              </a:xfrm>
+              <a:prstGeom prst="rect">
+                <a:avLst/>
+              </a:prstGeom>
+            </p:spPr>
+          </p:pic>
+          <p:sp>
+            <p:nvSpPr>
+              <p:cNvPr id="13" name="object 10">
+                <a:extLst>
+                  <a:ext uri="{FF2B5EF4-FFF2-40B4-BE49-F238E27FC236}">
+                    <a16:creationId xmlns:a16="http://schemas.microsoft.com/office/drawing/2014/main" id="{6EA775D2-BE87-6B22-1656-B9045A0FF3B4}"/>
+                  </a:ext>
+                </a:extLst>
+              </p:cNvPr>
+              <p:cNvSpPr/>
+              <p:nvPr/>
+            </p:nvSpPr>
+            <p:spPr>
+              <a:xfrm>
+                <a:off x="1258709" y="5765291"/>
+                <a:ext cx="1697355" cy="971550"/>
+              </a:xfrm>
+              <a:custGeom>
+                <a:avLst/>
+                <a:gdLst/>
+                <a:ahLst/>
+                <a:cxnLst/>
+                <a:rect l="l" t="t" r="r" b="b"/>
+                <a:pathLst>
+                  <a:path w="1697355" h="971550">
+                    <a:moveTo>
+                      <a:pt x="162306" y="0"/>
+                    </a:moveTo>
+                    <a:lnTo>
+                      <a:pt x="119327" y="5778"/>
+                    </a:lnTo>
+                    <a:lnTo>
+                      <a:pt x="80602" y="22098"/>
+                    </a:lnTo>
+                    <a:lnTo>
+                      <a:pt x="47720" y="47434"/>
+                    </a:lnTo>
+                    <a:lnTo>
+                      <a:pt x="22267" y="80264"/>
+                    </a:lnTo>
+                    <a:lnTo>
+                      <a:pt x="5831" y="119062"/>
+                    </a:lnTo>
+                    <a:lnTo>
+                      <a:pt x="0" y="162306"/>
+                    </a:lnTo>
+                    <a:lnTo>
+                      <a:pt x="0" y="810006"/>
+                    </a:lnTo>
+                    <a:lnTo>
+                      <a:pt x="5831" y="852928"/>
+                    </a:lnTo>
+                    <a:lnTo>
+                      <a:pt x="22267" y="891511"/>
+                    </a:lnTo>
+                    <a:lnTo>
+                      <a:pt x="47720" y="924210"/>
+                    </a:lnTo>
+                    <a:lnTo>
+                      <a:pt x="80602" y="949480"/>
+                    </a:lnTo>
+                    <a:lnTo>
+                      <a:pt x="119327" y="965775"/>
+                    </a:lnTo>
+                    <a:lnTo>
+                      <a:pt x="162306" y="971550"/>
+                    </a:lnTo>
+                    <a:lnTo>
+                      <a:pt x="1535430" y="971550"/>
+                    </a:lnTo>
+                    <a:lnTo>
+                      <a:pt x="1578352" y="965775"/>
+                    </a:lnTo>
+                    <a:lnTo>
+                      <a:pt x="1616935" y="949480"/>
+                    </a:lnTo>
+                    <a:lnTo>
+                      <a:pt x="1649634" y="924210"/>
+                    </a:lnTo>
+                    <a:lnTo>
+                      <a:pt x="1674904" y="891511"/>
+                    </a:lnTo>
+                    <a:lnTo>
+                      <a:pt x="1691199" y="852928"/>
+                    </a:lnTo>
+                    <a:lnTo>
+                      <a:pt x="1696974" y="810005"/>
+                    </a:lnTo>
+                    <a:lnTo>
+                      <a:pt x="1696974" y="162305"/>
+                    </a:lnTo>
+                    <a:lnTo>
+                      <a:pt x="1691199" y="119062"/>
+                    </a:lnTo>
+                    <a:lnTo>
+                      <a:pt x="1674904" y="80263"/>
+                    </a:lnTo>
+                    <a:lnTo>
+                      <a:pt x="1649634" y="47434"/>
+                    </a:lnTo>
+                    <a:lnTo>
+                      <a:pt x="1616935" y="22097"/>
+                    </a:lnTo>
+                    <a:lnTo>
+                      <a:pt x="1578352" y="5778"/>
+                    </a:lnTo>
+                    <a:lnTo>
+                      <a:pt x="1535430" y="0"/>
+                    </a:lnTo>
+                    <a:lnTo>
+                      <a:pt x="162306" y="0"/>
+                    </a:lnTo>
+                    <a:close/>
+                  </a:path>
+                </a:pathLst>
+              </a:custGeom>
+              <a:ln w="28575">
+                <a:solidFill>
+                  <a:srgbClr val="FFFFFF"/>
+                </a:solidFill>
+              </a:ln>
+            </p:spPr>
+            <p:txBody>
+              <a:bodyPr wrap="square" lIns="0" tIns="0" rIns="0" bIns="0" rtlCol="0"/>
+              <a:lstStyle/>
+              <a:p>
+                <a:endParaRPr/>
+              </a:p>
+            </p:txBody>
+          </p:sp>
+        </p:grpSp>
+        <p:sp>
+          <p:nvSpPr>
+            <p:cNvPr id="14" name="object 11">
+              <a:extLst>
+                <a:ext uri="{FF2B5EF4-FFF2-40B4-BE49-F238E27FC236}">
+                  <a16:creationId xmlns:a16="http://schemas.microsoft.com/office/drawing/2014/main" id="{2BC7C2DE-A2E4-14FF-9DC7-38640062394B}"/>
+                </a:ext>
+              </a:extLst>
+            </p:cNvPr>
+            <p:cNvSpPr txBox="1"/>
+            <p:nvPr/>
+          </p:nvSpPr>
+          <p:spPr>
+            <a:xfrm>
+              <a:off x="1178453" y="1989119"/>
+              <a:ext cx="1042035" cy="330200"/>
+            </a:xfrm>
+            <a:prstGeom prst="rect">
+              <a:avLst/>
+            </a:prstGeom>
+          </p:spPr>
+          <p:txBody>
+            <a:bodyPr vert="horz" wrap="square" lIns="0" tIns="12065" rIns="0" bIns="0" rtlCol="0">
+              <a:spAutoFit/>
+            </a:bodyPr>
+            <a:lstStyle/>
+            <a:p>
+              <a:pPr marL="12700">
+                <a:lnSpc>
+                  <a:spcPct val="100000"/>
+                </a:lnSpc>
+                <a:spcBef>
+                  <a:spcPts val="95"/>
+                </a:spcBef>
+              </a:pPr>
+              <a:r>
+                <a:rPr sz="2000" b="1" spc="-30" dirty="0">
+                  <a:solidFill>
+                    <a:srgbClr val="3333CC"/>
+                  </a:solidFill>
+                  <a:latin typeface="Lantinghei SC Heavy"/>
+                  <a:cs typeface="Lantinghei SC Heavy"/>
+                </a:rPr>
+                <a:t>稠密索引</a:t>
+              </a:r>
+              <a:endParaRPr sz="2000">
+                <a:latin typeface="Lantinghei SC Heavy"/>
+                <a:cs typeface="Lantinghei SC Heavy"/>
+              </a:endParaRPr>
+            </a:p>
+          </p:txBody>
+        </p:sp>
+        <p:grpSp>
+          <p:nvGrpSpPr>
+            <p:cNvPr id="16" name="object 13">
+              <a:extLst>
+                <a:ext uri="{FF2B5EF4-FFF2-40B4-BE49-F238E27FC236}">
+                  <a16:creationId xmlns:a16="http://schemas.microsoft.com/office/drawing/2014/main" id="{02985670-819E-7529-A6CA-A7E1C87C9356}"/>
+                </a:ext>
+              </a:extLst>
+            </p:cNvPr>
+            <p:cNvGrpSpPr/>
+            <p:nvPr/>
+          </p:nvGrpSpPr>
+          <p:grpSpPr>
+            <a:xfrm>
+              <a:off x="5594757" y="2425490"/>
+              <a:ext cx="4057649" cy="2579370"/>
+              <a:chOff x="5562485" y="4157471"/>
+              <a:chExt cx="4057649" cy="2579370"/>
+            </a:xfrm>
+          </p:grpSpPr>
+          <p:pic>
+            <p:nvPicPr>
+              <p:cNvPr id="17" name="object 14">
+                <a:extLst>
+                  <a:ext uri="{FF2B5EF4-FFF2-40B4-BE49-F238E27FC236}">
+                    <a16:creationId xmlns:a16="http://schemas.microsoft.com/office/drawing/2014/main" id="{0B69B578-E50D-A603-DEA2-B88037D77F5E}"/>
+                  </a:ext>
+                </a:extLst>
+              </p:cNvPr>
+              <p:cNvPicPr/>
+              <p:nvPr/>
+            </p:nvPicPr>
+            <p:blipFill>
+              <a:blip r:embed="rId4" cstate="print"/>
+              <a:stretch>
+                <a:fillRect/>
+              </a:stretch>
+            </p:blipFill>
+            <p:spPr>
+              <a:xfrm>
+                <a:off x="5812421" y="4157471"/>
+                <a:ext cx="3753611" cy="1491233"/>
+              </a:xfrm>
+              <a:prstGeom prst="rect">
+                <a:avLst/>
+              </a:prstGeom>
+            </p:spPr>
+          </p:pic>
+          <p:pic>
+            <p:nvPicPr>
+              <p:cNvPr id="18" name="object 15">
+                <a:extLst>
+                  <a:ext uri="{FF2B5EF4-FFF2-40B4-BE49-F238E27FC236}">
+                    <a16:creationId xmlns:a16="http://schemas.microsoft.com/office/drawing/2014/main" id="{40FEC5E6-F30B-A088-AC38-3314F1124A13}"/>
+                  </a:ext>
+                </a:extLst>
+              </p:cNvPr>
+              <p:cNvPicPr/>
+              <p:nvPr/>
+            </p:nvPicPr>
+            <p:blipFill>
+              <a:blip r:embed="rId5" cstate="print"/>
+              <a:stretch>
+                <a:fillRect/>
+              </a:stretch>
+            </p:blipFill>
+            <p:spPr>
+              <a:xfrm>
+                <a:off x="7481201" y="5634989"/>
+                <a:ext cx="2138933" cy="413765"/>
+              </a:xfrm>
+              <a:prstGeom prst="rect">
+                <a:avLst/>
+              </a:prstGeom>
+            </p:spPr>
+          </p:pic>
+          <p:sp>
+            <p:nvSpPr>
+              <p:cNvPr id="21" name="object 18">
+                <a:extLst>
+                  <a:ext uri="{FF2B5EF4-FFF2-40B4-BE49-F238E27FC236}">
+                    <a16:creationId xmlns:a16="http://schemas.microsoft.com/office/drawing/2014/main" id="{DB3C5DFE-7A87-7CBE-EDB4-A2764772561A}"/>
+                  </a:ext>
+                </a:extLst>
+              </p:cNvPr>
+              <p:cNvSpPr/>
+              <p:nvPr/>
+            </p:nvSpPr>
+            <p:spPr>
+              <a:xfrm>
+                <a:off x="5562485" y="5765291"/>
+                <a:ext cx="1697355" cy="971550"/>
+              </a:xfrm>
+              <a:custGeom>
+                <a:avLst/>
+                <a:gdLst/>
+                <a:ahLst/>
+                <a:cxnLst/>
+                <a:rect l="l" t="t" r="r" b="b"/>
+                <a:pathLst>
+                  <a:path w="1697354" h="971550">
+                    <a:moveTo>
+                      <a:pt x="162305" y="0"/>
+                    </a:moveTo>
+                    <a:lnTo>
+                      <a:pt x="119062" y="5778"/>
+                    </a:lnTo>
+                    <a:lnTo>
+                      <a:pt x="80263" y="22098"/>
+                    </a:lnTo>
+                    <a:lnTo>
+                      <a:pt x="47434" y="47434"/>
+                    </a:lnTo>
+                    <a:lnTo>
+                      <a:pt x="22097" y="80264"/>
+                    </a:lnTo>
+                    <a:lnTo>
+                      <a:pt x="5778" y="119062"/>
+                    </a:lnTo>
+                    <a:lnTo>
+                      <a:pt x="0" y="162306"/>
+                    </a:lnTo>
+                    <a:lnTo>
+                      <a:pt x="0" y="810006"/>
+                    </a:lnTo>
+                    <a:lnTo>
+                      <a:pt x="5778" y="852928"/>
+                    </a:lnTo>
+                    <a:lnTo>
+                      <a:pt x="22097" y="891511"/>
+                    </a:lnTo>
+                    <a:lnTo>
+                      <a:pt x="47434" y="924210"/>
+                    </a:lnTo>
+                    <a:lnTo>
+                      <a:pt x="80263" y="949480"/>
+                    </a:lnTo>
+                    <a:lnTo>
+                      <a:pt x="119062" y="965775"/>
+                    </a:lnTo>
+                    <a:lnTo>
+                      <a:pt x="162305" y="971550"/>
+                    </a:lnTo>
+                    <a:lnTo>
+                      <a:pt x="1535429" y="971550"/>
+                    </a:lnTo>
+                    <a:lnTo>
+                      <a:pt x="1578352" y="965775"/>
+                    </a:lnTo>
+                    <a:lnTo>
+                      <a:pt x="1616935" y="949480"/>
+                    </a:lnTo>
+                    <a:lnTo>
+                      <a:pt x="1649634" y="924210"/>
+                    </a:lnTo>
+                    <a:lnTo>
+                      <a:pt x="1674904" y="891511"/>
+                    </a:lnTo>
+                    <a:lnTo>
+                      <a:pt x="1691199" y="852928"/>
+                    </a:lnTo>
+                    <a:lnTo>
+                      <a:pt x="1696973" y="810005"/>
+                    </a:lnTo>
+                    <a:lnTo>
+                      <a:pt x="1696973" y="162305"/>
+                    </a:lnTo>
+                    <a:lnTo>
+                      <a:pt x="1691199" y="119062"/>
+                    </a:lnTo>
+                    <a:lnTo>
+                      <a:pt x="1674904" y="80263"/>
+                    </a:lnTo>
+                    <a:lnTo>
+                      <a:pt x="1649634" y="47434"/>
+                    </a:lnTo>
+                    <a:lnTo>
+                      <a:pt x="1616935" y="22097"/>
+                    </a:lnTo>
+                    <a:lnTo>
+                      <a:pt x="1578352" y="5778"/>
+                    </a:lnTo>
+                    <a:lnTo>
+                      <a:pt x="1535429" y="0"/>
+                    </a:lnTo>
+                    <a:lnTo>
+                      <a:pt x="162305" y="0"/>
+                    </a:lnTo>
+                    <a:close/>
+                  </a:path>
+                </a:pathLst>
+              </a:custGeom>
+              <a:ln w="28575">
+                <a:solidFill>
+                  <a:srgbClr val="FFFFFF"/>
+                </a:solidFill>
+              </a:ln>
+            </p:spPr>
+            <p:txBody>
+              <a:bodyPr wrap="square" lIns="0" tIns="0" rIns="0" bIns="0" rtlCol="0"/>
+              <a:lstStyle/>
+              <a:p>
+                <a:endParaRPr/>
+              </a:p>
+            </p:txBody>
+          </p:sp>
+        </p:grpSp>
+        <p:sp>
+          <p:nvSpPr>
+            <p:cNvPr id="22" name="object 19">
+              <a:extLst>
+                <a:ext uri="{FF2B5EF4-FFF2-40B4-BE49-F238E27FC236}">
+                  <a16:creationId xmlns:a16="http://schemas.microsoft.com/office/drawing/2014/main" id="{63E005A7-04BD-3146-4E5D-CDC8749A1DF2}"/>
+                </a:ext>
+              </a:extLst>
+            </p:cNvPr>
+            <p:cNvSpPr txBox="1"/>
+            <p:nvPr/>
+          </p:nvSpPr>
+          <p:spPr>
+            <a:xfrm>
+              <a:off x="5915807" y="2003596"/>
+              <a:ext cx="1041400" cy="330200"/>
+            </a:xfrm>
+            <a:prstGeom prst="rect">
+              <a:avLst/>
+            </a:prstGeom>
+          </p:spPr>
+          <p:txBody>
+            <a:bodyPr vert="horz" wrap="square" lIns="0" tIns="12065" rIns="0" bIns="0" rtlCol="0">
+              <a:spAutoFit/>
+            </a:bodyPr>
+            <a:lstStyle/>
+            <a:p>
+              <a:pPr marL="12700">
+                <a:lnSpc>
+                  <a:spcPct val="100000"/>
+                </a:lnSpc>
+                <a:spcBef>
+                  <a:spcPts val="95"/>
+                </a:spcBef>
+              </a:pPr>
+              <a:r>
+                <a:rPr sz="2000" b="1" spc="-30" dirty="0">
+                  <a:solidFill>
+                    <a:srgbClr val="3333CC"/>
+                  </a:solidFill>
+                  <a:latin typeface="Lantinghei SC Heavy"/>
+                  <a:cs typeface="Lantinghei SC Heavy"/>
+                </a:rPr>
+                <a:t>稀疏索引</a:t>
+              </a:r>
+              <a:endParaRPr sz="2000" dirty="0">
+                <a:latin typeface="Lantinghei SC Heavy"/>
+                <a:cs typeface="Lantinghei SC Heavy"/>
+              </a:endParaRPr>
+            </a:p>
+          </p:txBody>
+        </p:sp>
+      </p:grpSp>
+    </p:spTree>
+    <p:extLst>
+      <p:ext uri="{BB962C8B-B14F-4D97-AF65-F5344CB8AC3E}">
+        <p14:creationId xmlns:p14="http://schemas.microsoft.com/office/powerpoint/2010/main" val="504162217"/>
+      </p:ext>
+    </p:extLst>
+  </p:cSld>
+  <p:clrMapOvr>
+    <a:masterClrMapping/>
+  </p:clrMapOvr>
+</p:sld>
+</file>
+
+<file path=ppt/slides/slide8.xml><?xml version="1.0" encoding="utf-8"?>
+<p:sld xmlns:a="http://schemas.openxmlformats.org/drawingml/2006/main" xmlns:r="http://schemas.openxmlformats.org/officeDocument/2006/relationships" xmlns:p="http://schemas.openxmlformats.org/presentationml/2006/main">
+  <p:cSld>
+    <p:spTree>
+      <p:nvGrpSpPr>
+        <p:cNvPr id="1" name=""/>
+        <p:cNvGrpSpPr/>
+        <p:nvPr/>
+      </p:nvGrpSpPr>
+      <p:grpSpPr>
+        <a:xfrm>
+          <a:off x="0" y="0"/>
+          <a:ext cx="0" cy="0"/>
+          <a:chOff x="0" y="0"/>
+          <a:chExt cx="0" cy="0"/>
+        </a:xfrm>
+      </p:grpSpPr>
+      <p:sp>
+        <p:nvSpPr>
+          <p:cNvPr id="4" name="object 3">
+            <a:extLst>
+              <a:ext uri="{FF2B5EF4-FFF2-40B4-BE49-F238E27FC236}">
+                <a16:creationId xmlns:a16="http://schemas.microsoft.com/office/drawing/2014/main" id="{D8B184C1-E72B-DF64-CD4E-D5DFBE13B56E}"/>
+              </a:ext>
+            </a:extLst>
+          </p:cNvPr>
+          <p:cNvSpPr txBox="1"/>
+          <p:nvPr/>
+        </p:nvSpPr>
+        <p:spPr>
+          <a:xfrm>
+            <a:off x="1462278" y="740828"/>
+            <a:ext cx="3378200" cy="975360"/>
+          </a:xfrm>
+          <a:prstGeom prst="rect">
+            <a:avLst/>
+          </a:prstGeom>
+        </p:spPr>
+        <p:txBody>
+          <a:bodyPr vert="horz" wrap="square" lIns="0" tIns="12700" rIns="0" bIns="0" rtlCol="0">
+            <a:spAutoFit/>
+          </a:bodyPr>
+          <a:lstStyle/>
+          <a:p>
+            <a:pPr marL="12700" marR="5080">
+              <a:lnSpc>
+                <a:spcPct val="129800"/>
+              </a:lnSpc>
+              <a:spcBef>
+                <a:spcPts val="100"/>
+              </a:spcBef>
+            </a:pPr>
+            <a:r>
+              <a:rPr sz="2400" b="1" spc="-5" dirty="0">
+                <a:latin typeface="Lantinghei SC Heavy"/>
+                <a:cs typeface="Lantinghei SC Heavy"/>
+              </a:rPr>
+              <a:t>非候选键属性的稠密索引</a:t>
+            </a:r>
+            <a:r>
+              <a:rPr sz="2400" b="1" spc="-10" dirty="0">
+                <a:latin typeface="Lantinghei SC Heavy"/>
+                <a:cs typeface="Lantinghei SC Heavy"/>
+              </a:rPr>
+              <a:t>的三种情况之对比</a:t>
+            </a:r>
+            <a:endParaRPr sz="2400" dirty="0">
+              <a:latin typeface="Lantinghei SC Heavy"/>
+              <a:cs typeface="Lantinghei SC Heavy"/>
+            </a:endParaRPr>
+          </a:p>
+        </p:txBody>
+      </p:sp>
+      <p:grpSp>
+        <p:nvGrpSpPr>
+          <p:cNvPr id="5" name="object 4">
+            <a:extLst>
+              <a:ext uri="{FF2B5EF4-FFF2-40B4-BE49-F238E27FC236}">
+                <a16:creationId xmlns:a16="http://schemas.microsoft.com/office/drawing/2014/main" id="{745AB750-7A1F-3BB8-2975-83B3304C22E7}"/>
+              </a:ext>
+            </a:extLst>
+          </p:cNvPr>
+          <p:cNvGrpSpPr/>
+          <p:nvPr/>
+        </p:nvGrpSpPr>
+        <p:grpSpPr>
+          <a:xfrm>
+            <a:off x="3267207" y="4477423"/>
+            <a:ext cx="1830705" cy="998219"/>
+            <a:chOff x="2826143" y="5036820"/>
+            <a:chExt cx="1830705" cy="998219"/>
+          </a:xfrm>
+        </p:grpSpPr>
+        <p:sp>
+          <p:nvSpPr>
+            <p:cNvPr id="6" name="object 5">
+              <a:extLst>
+                <a:ext uri="{FF2B5EF4-FFF2-40B4-BE49-F238E27FC236}">
+                  <a16:creationId xmlns:a16="http://schemas.microsoft.com/office/drawing/2014/main" id="{274FC153-016C-034B-D267-CC7FD0D2C0AC}"/>
+                </a:ext>
+              </a:extLst>
+            </p:cNvPr>
+            <p:cNvSpPr/>
+            <p:nvPr/>
+          </p:nvSpPr>
+          <p:spPr>
+            <a:xfrm>
+              <a:off x="2826143" y="5036820"/>
+              <a:ext cx="1830705" cy="998219"/>
+            </a:xfrm>
+            <a:custGeom>
+              <a:avLst/>
+              <a:gdLst/>
+              <a:ahLst/>
+              <a:cxnLst/>
+              <a:rect l="l" t="t" r="r" b="b"/>
+              <a:pathLst>
+                <a:path w="1830704" h="998220">
+                  <a:moveTo>
+                    <a:pt x="1830324" y="832103"/>
+                  </a:moveTo>
+                  <a:lnTo>
+                    <a:pt x="1830324" y="166115"/>
+                  </a:lnTo>
+                  <a:lnTo>
+                    <a:pt x="1824365" y="122061"/>
+                  </a:lnTo>
+                  <a:lnTo>
+                    <a:pt x="1807548" y="82408"/>
+                  </a:lnTo>
+                  <a:lnTo>
+                    <a:pt x="1781460" y="48767"/>
+                  </a:lnTo>
+                  <a:lnTo>
+                    <a:pt x="1747689" y="22747"/>
+                  </a:lnTo>
+                  <a:lnTo>
+                    <a:pt x="1707821" y="5954"/>
+                  </a:lnTo>
+                  <a:lnTo>
+                    <a:pt x="1663446" y="0"/>
+                  </a:lnTo>
+                  <a:lnTo>
+                    <a:pt x="166116" y="0"/>
+                  </a:lnTo>
+                  <a:lnTo>
+                    <a:pt x="121796" y="5954"/>
+                  </a:lnTo>
+                  <a:lnTo>
+                    <a:pt x="82070" y="22747"/>
+                  </a:lnTo>
+                  <a:lnTo>
+                    <a:pt x="48482" y="48768"/>
+                  </a:lnTo>
+                  <a:lnTo>
+                    <a:pt x="22577" y="82408"/>
+                  </a:lnTo>
+                  <a:lnTo>
+                    <a:pt x="5901" y="122061"/>
+                  </a:lnTo>
+                  <a:lnTo>
+                    <a:pt x="0" y="166116"/>
+                  </a:lnTo>
+                  <a:lnTo>
+                    <a:pt x="0" y="832104"/>
+                  </a:lnTo>
+                  <a:lnTo>
+                    <a:pt x="5901" y="876423"/>
+                  </a:lnTo>
+                  <a:lnTo>
+                    <a:pt x="22577" y="916149"/>
+                  </a:lnTo>
+                  <a:lnTo>
+                    <a:pt x="48482" y="949737"/>
+                  </a:lnTo>
+                  <a:lnTo>
+                    <a:pt x="82070" y="975642"/>
+                  </a:lnTo>
+                  <a:lnTo>
+                    <a:pt x="121796" y="992318"/>
+                  </a:lnTo>
+                  <a:lnTo>
+                    <a:pt x="166116" y="998219"/>
+                  </a:lnTo>
+                  <a:lnTo>
+                    <a:pt x="1663446" y="998219"/>
+                  </a:lnTo>
+                  <a:lnTo>
+                    <a:pt x="1707821" y="992318"/>
+                  </a:lnTo>
+                  <a:lnTo>
+                    <a:pt x="1747689" y="975642"/>
+                  </a:lnTo>
+                  <a:lnTo>
+                    <a:pt x="1781460" y="949737"/>
+                  </a:lnTo>
+                  <a:lnTo>
+                    <a:pt x="1807548" y="916149"/>
+                  </a:lnTo>
+                  <a:lnTo>
+                    <a:pt x="1824365" y="876423"/>
+                  </a:lnTo>
+                  <a:lnTo>
+                    <a:pt x="1830324" y="832103"/>
+                  </a:lnTo>
+                  <a:close/>
+                </a:path>
+              </a:pathLst>
+            </a:custGeom>
+            <a:solidFill>
+              <a:srgbClr val="3333CC"/>
+            </a:solidFill>
+          </p:spPr>
+          <p:txBody>
+            <a:bodyPr wrap="square" lIns="0" tIns="0" rIns="0" bIns="0" rtlCol="0"/>
+            <a:lstStyle/>
+            <a:p>
+              <a:endParaRPr/>
+            </a:p>
+          </p:txBody>
+        </p:sp>
+        <p:sp>
+          <p:nvSpPr>
+            <p:cNvPr id="7" name="object 6">
+              <a:extLst>
+                <a:ext uri="{FF2B5EF4-FFF2-40B4-BE49-F238E27FC236}">
+                  <a16:creationId xmlns:a16="http://schemas.microsoft.com/office/drawing/2014/main" id="{201F6BBC-571C-EF14-00E2-F82A5C7BE693}"/>
+                </a:ext>
+              </a:extLst>
+            </p:cNvPr>
+            <p:cNvSpPr/>
+            <p:nvPr/>
+          </p:nvSpPr>
+          <p:spPr>
+            <a:xfrm>
+              <a:off x="2897009" y="5100066"/>
+              <a:ext cx="1697355" cy="871855"/>
+            </a:xfrm>
+            <a:custGeom>
+              <a:avLst/>
+              <a:gdLst/>
+              <a:ahLst/>
+              <a:cxnLst/>
+              <a:rect l="l" t="t" r="r" b="b"/>
+              <a:pathLst>
+                <a:path w="1697354" h="871854">
+                  <a:moveTo>
+                    <a:pt x="1696974" y="726947"/>
+                  </a:moveTo>
+                  <a:lnTo>
+                    <a:pt x="1696974" y="145541"/>
+                  </a:lnTo>
+                  <a:lnTo>
+                    <a:pt x="1689597" y="99681"/>
+                  </a:lnTo>
+                  <a:lnTo>
+                    <a:pt x="1669054" y="59746"/>
+                  </a:lnTo>
+                  <a:lnTo>
+                    <a:pt x="1637720" y="28187"/>
+                  </a:lnTo>
+                  <a:lnTo>
+                    <a:pt x="1597974" y="7455"/>
+                  </a:lnTo>
+                  <a:lnTo>
+                    <a:pt x="1552194" y="0"/>
+                  </a:lnTo>
+                  <a:lnTo>
+                    <a:pt x="145542" y="0"/>
+                  </a:lnTo>
+                  <a:lnTo>
+                    <a:pt x="99681" y="7455"/>
+                  </a:lnTo>
+                  <a:lnTo>
+                    <a:pt x="59746" y="28187"/>
+                  </a:lnTo>
+                  <a:lnTo>
+                    <a:pt x="28187" y="59746"/>
+                  </a:lnTo>
+                  <a:lnTo>
+                    <a:pt x="7455" y="99681"/>
+                  </a:lnTo>
+                  <a:lnTo>
+                    <a:pt x="0" y="145542"/>
+                  </a:lnTo>
+                  <a:lnTo>
+                    <a:pt x="0" y="726948"/>
+                  </a:lnTo>
+                  <a:lnTo>
+                    <a:pt x="7455" y="772728"/>
+                  </a:lnTo>
+                  <a:lnTo>
+                    <a:pt x="28187" y="812474"/>
+                  </a:lnTo>
+                  <a:lnTo>
+                    <a:pt x="59746" y="843808"/>
+                  </a:lnTo>
+                  <a:lnTo>
+                    <a:pt x="99681" y="864351"/>
+                  </a:lnTo>
+                  <a:lnTo>
+                    <a:pt x="145542" y="871728"/>
+                  </a:lnTo>
+                  <a:lnTo>
+                    <a:pt x="1552194" y="871728"/>
+                  </a:lnTo>
+                  <a:lnTo>
+                    <a:pt x="1597974" y="864351"/>
+                  </a:lnTo>
+                  <a:lnTo>
+                    <a:pt x="1637720" y="843808"/>
+                  </a:lnTo>
+                  <a:lnTo>
+                    <a:pt x="1669054" y="812474"/>
+                  </a:lnTo>
+                  <a:lnTo>
+                    <a:pt x="1689597" y="772728"/>
+                  </a:lnTo>
+                  <a:lnTo>
+                    <a:pt x="1696974" y="726947"/>
+                  </a:lnTo>
+                  <a:close/>
+                </a:path>
+              </a:pathLst>
+            </a:custGeom>
+            <a:solidFill>
+              <a:srgbClr val="FFFF66"/>
+            </a:solidFill>
+          </p:spPr>
+          <p:txBody>
+            <a:bodyPr wrap="square" lIns="0" tIns="0" rIns="0" bIns="0" rtlCol="0"/>
+            <a:lstStyle/>
+            <a:p>
+              <a:endParaRPr/>
+            </a:p>
+          </p:txBody>
+        </p:sp>
+        <p:sp>
+          <p:nvSpPr>
+            <p:cNvPr id="8" name="object 7">
+              <a:extLst>
+                <a:ext uri="{FF2B5EF4-FFF2-40B4-BE49-F238E27FC236}">
+                  <a16:creationId xmlns:a16="http://schemas.microsoft.com/office/drawing/2014/main" id="{A56AEB07-99D7-C479-D4FB-399E2F247EBA}"/>
+                </a:ext>
+              </a:extLst>
+            </p:cNvPr>
+            <p:cNvSpPr/>
+            <p:nvPr/>
+          </p:nvSpPr>
+          <p:spPr>
+            <a:xfrm>
+              <a:off x="2897009" y="5100066"/>
+              <a:ext cx="1697355" cy="871855"/>
+            </a:xfrm>
+            <a:custGeom>
+              <a:avLst/>
+              <a:gdLst/>
+              <a:ahLst/>
+              <a:cxnLst/>
+              <a:rect l="l" t="t" r="r" b="b"/>
+              <a:pathLst>
+                <a:path w="1697354" h="871854">
+                  <a:moveTo>
+                    <a:pt x="145542" y="0"/>
+                  </a:moveTo>
+                  <a:lnTo>
+                    <a:pt x="99681" y="7455"/>
+                  </a:lnTo>
+                  <a:lnTo>
+                    <a:pt x="59746" y="28187"/>
+                  </a:lnTo>
+                  <a:lnTo>
+                    <a:pt x="28187" y="59746"/>
+                  </a:lnTo>
+                  <a:lnTo>
+                    <a:pt x="7455" y="99681"/>
+                  </a:lnTo>
+                  <a:lnTo>
+                    <a:pt x="0" y="145542"/>
+                  </a:lnTo>
+                  <a:lnTo>
+                    <a:pt x="0" y="726948"/>
+                  </a:lnTo>
+                  <a:lnTo>
+                    <a:pt x="7455" y="772728"/>
+                  </a:lnTo>
+                  <a:lnTo>
+                    <a:pt x="28187" y="812474"/>
+                  </a:lnTo>
+                  <a:lnTo>
+                    <a:pt x="59746" y="843808"/>
+                  </a:lnTo>
+                  <a:lnTo>
+                    <a:pt x="99681" y="864351"/>
+                  </a:lnTo>
+                  <a:lnTo>
+                    <a:pt x="145542" y="871728"/>
+                  </a:lnTo>
+                  <a:lnTo>
+                    <a:pt x="1552194" y="871728"/>
+                  </a:lnTo>
+                  <a:lnTo>
+                    <a:pt x="1597974" y="864351"/>
+                  </a:lnTo>
+                  <a:lnTo>
+                    <a:pt x="1637720" y="843808"/>
+                  </a:lnTo>
+                  <a:lnTo>
+                    <a:pt x="1669054" y="812474"/>
+                  </a:lnTo>
+                  <a:lnTo>
+                    <a:pt x="1689597" y="772728"/>
+                  </a:lnTo>
+                  <a:lnTo>
+                    <a:pt x="1696974" y="726947"/>
+                  </a:lnTo>
+                  <a:lnTo>
+                    <a:pt x="1696974" y="145541"/>
+                  </a:lnTo>
+                  <a:lnTo>
+                    <a:pt x="1689597" y="99681"/>
+                  </a:lnTo>
+                  <a:lnTo>
+                    <a:pt x="1669054" y="59746"/>
+                  </a:lnTo>
+                  <a:lnTo>
+                    <a:pt x="1637720" y="28187"/>
+                  </a:lnTo>
+                  <a:lnTo>
+                    <a:pt x="1597974" y="7455"/>
+                  </a:lnTo>
+                  <a:lnTo>
+                    <a:pt x="1552194" y="0"/>
+                  </a:lnTo>
+                  <a:lnTo>
+                    <a:pt x="145542" y="0"/>
+                  </a:lnTo>
+                  <a:close/>
+                </a:path>
+              </a:pathLst>
+            </a:custGeom>
+            <a:ln w="28575">
+              <a:solidFill>
+                <a:srgbClr val="FFFFFF"/>
+              </a:solidFill>
+            </a:ln>
+          </p:spPr>
+          <p:txBody>
+            <a:bodyPr wrap="square" lIns="0" tIns="0" rIns="0" bIns="0" rtlCol="0"/>
+            <a:lstStyle/>
+            <a:p>
+              <a:endParaRPr/>
+            </a:p>
+          </p:txBody>
+        </p:sp>
+      </p:grpSp>
+      <p:grpSp>
+        <p:nvGrpSpPr>
+          <p:cNvPr id="9" name="object 8">
+            <a:extLst>
+              <a:ext uri="{FF2B5EF4-FFF2-40B4-BE49-F238E27FC236}">
+                <a16:creationId xmlns:a16="http://schemas.microsoft.com/office/drawing/2014/main" id="{7429E855-A134-5246-16A0-CD6DF0434465}"/>
+              </a:ext>
+            </a:extLst>
+          </p:cNvPr>
+          <p:cNvGrpSpPr/>
+          <p:nvPr/>
+        </p:nvGrpSpPr>
+        <p:grpSpPr>
+          <a:xfrm>
+            <a:off x="1406403" y="2608998"/>
+            <a:ext cx="3883660" cy="2443480"/>
+            <a:chOff x="965339" y="3168395"/>
+            <a:chExt cx="3883660" cy="2443480"/>
+          </a:xfrm>
+        </p:grpSpPr>
+        <p:pic>
+          <p:nvPicPr>
+            <p:cNvPr id="10" name="object 9">
+              <a:extLst>
+                <a:ext uri="{FF2B5EF4-FFF2-40B4-BE49-F238E27FC236}">
+                  <a16:creationId xmlns:a16="http://schemas.microsoft.com/office/drawing/2014/main" id="{FF3326DD-737D-CAA2-3A3C-4583DA6AE7FE}"/>
+                </a:ext>
+              </a:extLst>
+            </p:cNvPr>
+            <p:cNvPicPr/>
+            <p:nvPr/>
+          </p:nvPicPr>
+          <p:blipFill>
+            <a:blip r:embed="rId2" cstate="print"/>
+            <a:stretch>
+              <a:fillRect/>
+            </a:stretch>
+          </p:blipFill>
+          <p:spPr>
+            <a:xfrm>
+              <a:off x="2753753" y="3168395"/>
+              <a:ext cx="2016251" cy="112013"/>
+            </a:xfrm>
+            <a:prstGeom prst="rect">
+              <a:avLst/>
+            </a:prstGeom>
+          </p:spPr>
+        </p:pic>
+        <p:pic>
+          <p:nvPicPr>
+            <p:cNvPr id="11" name="object 10">
+              <a:extLst>
+                <a:ext uri="{FF2B5EF4-FFF2-40B4-BE49-F238E27FC236}">
+                  <a16:creationId xmlns:a16="http://schemas.microsoft.com/office/drawing/2014/main" id="{E766F103-127C-6E6B-F439-689BFDBB72F5}"/>
+                </a:ext>
+              </a:extLst>
+            </p:cNvPr>
+            <p:cNvPicPr/>
+            <p:nvPr/>
+          </p:nvPicPr>
+          <p:blipFill>
+            <a:blip r:embed="rId3" cstate="print"/>
+            <a:stretch>
+              <a:fillRect/>
+            </a:stretch>
+          </p:blipFill>
+          <p:spPr>
+            <a:xfrm>
+              <a:off x="998867" y="3264407"/>
+              <a:ext cx="3849623" cy="1594866"/>
+            </a:xfrm>
+            <a:prstGeom prst="rect">
+              <a:avLst/>
+            </a:prstGeom>
+          </p:spPr>
+        </p:pic>
+        <p:pic>
+          <p:nvPicPr>
+            <p:cNvPr id="12" name="object 11">
+              <a:extLst>
+                <a:ext uri="{FF2B5EF4-FFF2-40B4-BE49-F238E27FC236}">
+                  <a16:creationId xmlns:a16="http://schemas.microsoft.com/office/drawing/2014/main" id="{F092C9AE-676A-A068-B21A-7B2C02CFBF8F}"/>
+                </a:ext>
+              </a:extLst>
+            </p:cNvPr>
+            <p:cNvPicPr/>
+            <p:nvPr/>
+          </p:nvPicPr>
+          <p:blipFill>
+            <a:blip r:embed="rId4" cstate="print"/>
+            <a:stretch>
+              <a:fillRect/>
+            </a:stretch>
+          </p:blipFill>
+          <p:spPr>
+            <a:xfrm>
+              <a:off x="2753753" y="4859273"/>
+              <a:ext cx="2016251" cy="90677"/>
+            </a:xfrm>
+            <a:prstGeom prst="rect">
+              <a:avLst/>
+            </a:prstGeom>
+          </p:spPr>
+        </p:pic>
+        <p:sp>
+          <p:nvSpPr>
+            <p:cNvPr id="13" name="object 12">
+              <a:extLst>
+                <a:ext uri="{FF2B5EF4-FFF2-40B4-BE49-F238E27FC236}">
+                  <a16:creationId xmlns:a16="http://schemas.microsoft.com/office/drawing/2014/main" id="{3DE33FE2-50B0-31E9-50DD-A3B74C0793BB}"/>
+                </a:ext>
+              </a:extLst>
+            </p:cNvPr>
+            <p:cNvSpPr/>
+            <p:nvPr/>
+          </p:nvSpPr>
+          <p:spPr>
+            <a:xfrm>
+              <a:off x="965339" y="4613147"/>
+              <a:ext cx="1455420" cy="998219"/>
+            </a:xfrm>
+            <a:custGeom>
+              <a:avLst/>
+              <a:gdLst/>
+              <a:ahLst/>
+              <a:cxnLst/>
+              <a:rect l="l" t="t" r="r" b="b"/>
+              <a:pathLst>
+                <a:path w="1455420" h="998220">
+                  <a:moveTo>
+                    <a:pt x="1455420" y="832104"/>
+                  </a:moveTo>
+                  <a:lnTo>
+                    <a:pt x="1455420" y="166115"/>
+                  </a:lnTo>
+                  <a:lnTo>
+                    <a:pt x="1449518" y="122061"/>
+                  </a:lnTo>
+                  <a:lnTo>
+                    <a:pt x="1432842" y="82408"/>
+                  </a:lnTo>
+                  <a:lnTo>
+                    <a:pt x="1406937" y="48767"/>
+                  </a:lnTo>
+                  <a:lnTo>
+                    <a:pt x="1373349" y="22747"/>
+                  </a:lnTo>
+                  <a:lnTo>
+                    <a:pt x="1333623" y="5954"/>
+                  </a:lnTo>
+                  <a:lnTo>
+                    <a:pt x="1289304" y="0"/>
+                  </a:lnTo>
+                  <a:lnTo>
+                    <a:pt x="166115" y="0"/>
+                  </a:lnTo>
+                  <a:lnTo>
+                    <a:pt x="122061" y="5954"/>
+                  </a:lnTo>
+                  <a:lnTo>
+                    <a:pt x="82408" y="22747"/>
+                  </a:lnTo>
+                  <a:lnTo>
+                    <a:pt x="48767" y="48768"/>
+                  </a:lnTo>
+                  <a:lnTo>
+                    <a:pt x="22747" y="82408"/>
+                  </a:lnTo>
+                  <a:lnTo>
+                    <a:pt x="5954" y="122061"/>
+                  </a:lnTo>
+                  <a:lnTo>
+                    <a:pt x="0" y="166116"/>
+                  </a:lnTo>
+                  <a:lnTo>
+                    <a:pt x="0" y="832104"/>
+                  </a:lnTo>
+                  <a:lnTo>
+                    <a:pt x="5954" y="876158"/>
+                  </a:lnTo>
+                  <a:lnTo>
+                    <a:pt x="22747" y="915811"/>
+                  </a:lnTo>
+                  <a:lnTo>
+                    <a:pt x="48768" y="949451"/>
+                  </a:lnTo>
+                  <a:lnTo>
+                    <a:pt x="82408" y="975472"/>
+                  </a:lnTo>
+                  <a:lnTo>
+                    <a:pt x="122061" y="992265"/>
+                  </a:lnTo>
+                  <a:lnTo>
+                    <a:pt x="166116" y="998219"/>
+                  </a:lnTo>
+                  <a:lnTo>
+                    <a:pt x="1289304" y="998219"/>
+                  </a:lnTo>
+                  <a:lnTo>
+                    <a:pt x="1333623" y="992265"/>
+                  </a:lnTo>
+                  <a:lnTo>
+                    <a:pt x="1373349" y="975472"/>
+                  </a:lnTo>
+                  <a:lnTo>
+                    <a:pt x="1406937" y="949452"/>
+                  </a:lnTo>
+                  <a:lnTo>
+                    <a:pt x="1432842" y="915811"/>
+                  </a:lnTo>
+                  <a:lnTo>
+                    <a:pt x="1449518" y="876158"/>
+                  </a:lnTo>
+                  <a:lnTo>
+                    <a:pt x="1455420" y="832104"/>
+                  </a:lnTo>
+                  <a:close/>
+                </a:path>
+              </a:pathLst>
+            </a:custGeom>
+            <a:solidFill>
+              <a:srgbClr val="3333CC"/>
+            </a:solidFill>
+          </p:spPr>
+          <p:txBody>
+            <a:bodyPr wrap="square" lIns="0" tIns="0" rIns="0" bIns="0" rtlCol="0"/>
+            <a:lstStyle/>
+            <a:p>
+              <a:endParaRPr/>
+            </a:p>
+          </p:txBody>
+        </p:sp>
+        <p:sp>
+          <p:nvSpPr>
+            <p:cNvPr id="14" name="object 13">
+              <a:extLst>
+                <a:ext uri="{FF2B5EF4-FFF2-40B4-BE49-F238E27FC236}">
+                  <a16:creationId xmlns:a16="http://schemas.microsoft.com/office/drawing/2014/main" id="{A9537C77-D73E-D5D6-E130-DE1029B0187B}"/>
+                </a:ext>
+              </a:extLst>
+            </p:cNvPr>
+            <p:cNvSpPr/>
+            <p:nvPr/>
+          </p:nvSpPr>
+          <p:spPr>
+            <a:xfrm>
+              <a:off x="1022489" y="4676393"/>
+              <a:ext cx="1350010" cy="871855"/>
+            </a:xfrm>
+            <a:custGeom>
+              <a:avLst/>
+              <a:gdLst/>
+              <a:ahLst/>
+              <a:cxnLst/>
+              <a:rect l="l" t="t" r="r" b="b"/>
+              <a:pathLst>
+                <a:path w="1350010" h="871854">
+                  <a:moveTo>
+                    <a:pt x="1349502" y="726185"/>
+                  </a:moveTo>
+                  <a:lnTo>
+                    <a:pt x="1349502" y="145541"/>
+                  </a:lnTo>
+                  <a:lnTo>
+                    <a:pt x="1342046" y="99389"/>
+                  </a:lnTo>
+                  <a:lnTo>
+                    <a:pt x="1321314" y="59417"/>
+                  </a:lnTo>
+                  <a:lnTo>
+                    <a:pt x="1289755" y="27968"/>
+                  </a:lnTo>
+                  <a:lnTo>
+                    <a:pt x="1249820" y="7382"/>
+                  </a:lnTo>
+                  <a:lnTo>
+                    <a:pt x="1203960" y="0"/>
+                  </a:lnTo>
+                  <a:lnTo>
+                    <a:pt x="145542" y="0"/>
+                  </a:lnTo>
+                  <a:lnTo>
+                    <a:pt x="99389" y="7382"/>
+                  </a:lnTo>
+                  <a:lnTo>
+                    <a:pt x="59417" y="27968"/>
+                  </a:lnTo>
+                  <a:lnTo>
+                    <a:pt x="27968" y="59417"/>
+                  </a:lnTo>
+                  <a:lnTo>
+                    <a:pt x="7382" y="99389"/>
+                  </a:lnTo>
+                  <a:lnTo>
+                    <a:pt x="0" y="145542"/>
+                  </a:lnTo>
+                  <a:lnTo>
+                    <a:pt x="0" y="726186"/>
+                  </a:lnTo>
+                  <a:lnTo>
+                    <a:pt x="7382" y="772338"/>
+                  </a:lnTo>
+                  <a:lnTo>
+                    <a:pt x="27968" y="812310"/>
+                  </a:lnTo>
+                  <a:lnTo>
+                    <a:pt x="59417" y="843759"/>
+                  </a:lnTo>
+                  <a:lnTo>
+                    <a:pt x="99389" y="864345"/>
+                  </a:lnTo>
+                  <a:lnTo>
+                    <a:pt x="145542" y="871728"/>
+                  </a:lnTo>
+                  <a:lnTo>
+                    <a:pt x="1203960" y="871728"/>
+                  </a:lnTo>
+                  <a:lnTo>
+                    <a:pt x="1249820" y="864345"/>
+                  </a:lnTo>
+                  <a:lnTo>
+                    <a:pt x="1289755" y="843759"/>
+                  </a:lnTo>
+                  <a:lnTo>
+                    <a:pt x="1321314" y="812310"/>
+                  </a:lnTo>
+                  <a:lnTo>
+                    <a:pt x="1342046" y="772338"/>
+                  </a:lnTo>
+                  <a:lnTo>
+                    <a:pt x="1349502" y="726185"/>
+                  </a:lnTo>
+                  <a:close/>
+                </a:path>
+              </a:pathLst>
+            </a:custGeom>
+            <a:solidFill>
+              <a:srgbClr val="FFFF66"/>
+            </a:solidFill>
+          </p:spPr>
+          <p:txBody>
+            <a:bodyPr wrap="square" lIns="0" tIns="0" rIns="0" bIns="0" rtlCol="0"/>
+            <a:lstStyle/>
+            <a:p>
+              <a:endParaRPr/>
+            </a:p>
+          </p:txBody>
+        </p:sp>
+        <p:sp>
+          <p:nvSpPr>
+            <p:cNvPr id="15" name="object 14">
+              <a:extLst>
+                <a:ext uri="{FF2B5EF4-FFF2-40B4-BE49-F238E27FC236}">
+                  <a16:creationId xmlns:a16="http://schemas.microsoft.com/office/drawing/2014/main" id="{2A5A66E1-0EB1-34DE-A10D-35E43FBD572C}"/>
+                </a:ext>
+              </a:extLst>
+            </p:cNvPr>
+            <p:cNvSpPr/>
+            <p:nvPr/>
+          </p:nvSpPr>
+          <p:spPr>
+            <a:xfrm>
+              <a:off x="1022489" y="4676393"/>
+              <a:ext cx="1350010" cy="871855"/>
+            </a:xfrm>
+            <a:custGeom>
+              <a:avLst/>
+              <a:gdLst/>
+              <a:ahLst/>
+              <a:cxnLst/>
+              <a:rect l="l" t="t" r="r" b="b"/>
+              <a:pathLst>
+                <a:path w="1350010" h="871854">
+                  <a:moveTo>
+                    <a:pt x="145542" y="0"/>
+                  </a:moveTo>
+                  <a:lnTo>
+                    <a:pt x="99389" y="7382"/>
+                  </a:lnTo>
+                  <a:lnTo>
+                    <a:pt x="59417" y="27968"/>
+                  </a:lnTo>
+                  <a:lnTo>
+                    <a:pt x="27968" y="59417"/>
+                  </a:lnTo>
+                  <a:lnTo>
+                    <a:pt x="7382" y="99389"/>
+                  </a:lnTo>
+                  <a:lnTo>
+                    <a:pt x="0" y="145542"/>
+                  </a:lnTo>
+                  <a:lnTo>
+                    <a:pt x="0" y="726186"/>
+                  </a:lnTo>
+                  <a:lnTo>
+                    <a:pt x="7382" y="772338"/>
+                  </a:lnTo>
+                  <a:lnTo>
+                    <a:pt x="27968" y="812310"/>
+                  </a:lnTo>
+                  <a:lnTo>
+                    <a:pt x="59417" y="843759"/>
+                  </a:lnTo>
+                  <a:lnTo>
+                    <a:pt x="99389" y="864345"/>
+                  </a:lnTo>
+                  <a:lnTo>
+                    <a:pt x="145542" y="871728"/>
+                  </a:lnTo>
+                  <a:lnTo>
+                    <a:pt x="1203960" y="871728"/>
+                  </a:lnTo>
+                  <a:lnTo>
+                    <a:pt x="1249820" y="864345"/>
+                  </a:lnTo>
+                  <a:lnTo>
+                    <a:pt x="1289755" y="843759"/>
+                  </a:lnTo>
+                  <a:lnTo>
+                    <a:pt x="1321314" y="812310"/>
+                  </a:lnTo>
+                  <a:lnTo>
+                    <a:pt x="1342046" y="772338"/>
+                  </a:lnTo>
+                  <a:lnTo>
+                    <a:pt x="1349502" y="726185"/>
+                  </a:lnTo>
+                  <a:lnTo>
+                    <a:pt x="1349502" y="145541"/>
+                  </a:lnTo>
+                  <a:lnTo>
+                    <a:pt x="1342046" y="99389"/>
+                  </a:lnTo>
+                  <a:lnTo>
+                    <a:pt x="1321314" y="59417"/>
+                  </a:lnTo>
+                  <a:lnTo>
+                    <a:pt x="1289755" y="27968"/>
+                  </a:lnTo>
+                  <a:lnTo>
+                    <a:pt x="1249820" y="7382"/>
+                  </a:lnTo>
+                  <a:lnTo>
+                    <a:pt x="1203960" y="0"/>
+                  </a:lnTo>
+                  <a:lnTo>
+                    <a:pt x="145542" y="0"/>
+                  </a:lnTo>
+                  <a:close/>
+                </a:path>
+              </a:pathLst>
+            </a:custGeom>
+            <a:ln w="28575">
+              <a:solidFill>
+                <a:srgbClr val="FFFFFF"/>
+              </a:solidFill>
+            </a:ln>
+          </p:spPr>
+          <p:txBody>
+            <a:bodyPr wrap="square" lIns="0" tIns="0" rIns="0" bIns="0" rtlCol="0"/>
+            <a:lstStyle/>
+            <a:p>
+              <a:endParaRPr/>
+            </a:p>
+          </p:txBody>
+        </p:sp>
+      </p:grpSp>
+      <p:grpSp>
+        <p:nvGrpSpPr>
+          <p:cNvPr id="16" name="object 15">
+            <a:extLst>
+              <a:ext uri="{FF2B5EF4-FFF2-40B4-BE49-F238E27FC236}">
+                <a16:creationId xmlns:a16="http://schemas.microsoft.com/office/drawing/2014/main" id="{EBAA2515-63D9-5747-2A18-1646389FFA3F}"/>
+              </a:ext>
+            </a:extLst>
+          </p:cNvPr>
+          <p:cNvGrpSpPr/>
+          <p:nvPr/>
+        </p:nvGrpSpPr>
+        <p:grpSpPr>
+          <a:xfrm>
+            <a:off x="6002025" y="3694849"/>
+            <a:ext cx="3807460" cy="2863850"/>
+            <a:chOff x="5560961" y="4254246"/>
+            <a:chExt cx="3807460" cy="2863850"/>
+          </a:xfrm>
+        </p:grpSpPr>
+        <p:pic>
+          <p:nvPicPr>
+            <p:cNvPr id="17" name="object 16">
+              <a:extLst>
+                <a:ext uri="{FF2B5EF4-FFF2-40B4-BE49-F238E27FC236}">
+                  <a16:creationId xmlns:a16="http://schemas.microsoft.com/office/drawing/2014/main" id="{27736C4A-C1B0-C82E-D2F2-4EF2B6CF820A}"/>
+                </a:ext>
+              </a:extLst>
+            </p:cNvPr>
+            <p:cNvPicPr/>
+            <p:nvPr/>
+          </p:nvPicPr>
+          <p:blipFill>
+            <a:blip r:embed="rId5" cstate="print"/>
+            <a:stretch>
+              <a:fillRect/>
+            </a:stretch>
+          </p:blipFill>
+          <p:spPr>
+            <a:xfrm>
+              <a:off x="5560961" y="4254246"/>
+              <a:ext cx="3749040" cy="1826513"/>
+            </a:xfrm>
+            <a:prstGeom prst="rect">
+              <a:avLst/>
+            </a:prstGeom>
+          </p:spPr>
+        </p:pic>
+        <p:sp>
+          <p:nvSpPr>
+            <p:cNvPr id="18" name="object 17">
+              <a:extLst>
+                <a:ext uri="{FF2B5EF4-FFF2-40B4-BE49-F238E27FC236}">
+                  <a16:creationId xmlns:a16="http://schemas.microsoft.com/office/drawing/2014/main" id="{3D3BBAAC-A686-A37E-76F8-5D14C7D1EA79}"/>
+                </a:ext>
+              </a:extLst>
+            </p:cNvPr>
+            <p:cNvSpPr/>
+            <p:nvPr/>
+          </p:nvSpPr>
+          <p:spPr>
+            <a:xfrm>
+              <a:off x="7537589" y="6119622"/>
+              <a:ext cx="1830705" cy="998219"/>
+            </a:xfrm>
+            <a:custGeom>
+              <a:avLst/>
+              <a:gdLst/>
+              <a:ahLst/>
+              <a:cxnLst/>
+              <a:rect l="l" t="t" r="r" b="b"/>
+              <a:pathLst>
+                <a:path w="1830704" h="998220">
+                  <a:moveTo>
+                    <a:pt x="1830324" y="832103"/>
+                  </a:moveTo>
+                  <a:lnTo>
+                    <a:pt x="1830324" y="166115"/>
+                  </a:lnTo>
+                  <a:lnTo>
+                    <a:pt x="1824369" y="122061"/>
+                  </a:lnTo>
+                  <a:lnTo>
+                    <a:pt x="1807576" y="82408"/>
+                  </a:lnTo>
+                  <a:lnTo>
+                    <a:pt x="1781556" y="48767"/>
+                  </a:lnTo>
+                  <a:lnTo>
+                    <a:pt x="1747915" y="22747"/>
+                  </a:lnTo>
+                  <a:lnTo>
+                    <a:pt x="1708262" y="5954"/>
+                  </a:lnTo>
+                  <a:lnTo>
+                    <a:pt x="1664208" y="0"/>
+                  </a:lnTo>
+                  <a:lnTo>
+                    <a:pt x="166116" y="0"/>
+                  </a:lnTo>
+                  <a:lnTo>
+                    <a:pt x="122061" y="5954"/>
+                  </a:lnTo>
+                  <a:lnTo>
+                    <a:pt x="82408" y="22747"/>
+                  </a:lnTo>
+                  <a:lnTo>
+                    <a:pt x="48768" y="48768"/>
+                  </a:lnTo>
+                  <a:lnTo>
+                    <a:pt x="22747" y="82408"/>
+                  </a:lnTo>
+                  <a:lnTo>
+                    <a:pt x="5954" y="122061"/>
+                  </a:lnTo>
+                  <a:lnTo>
+                    <a:pt x="0" y="166116"/>
+                  </a:lnTo>
+                  <a:lnTo>
+                    <a:pt x="0" y="832104"/>
+                  </a:lnTo>
+                  <a:lnTo>
+                    <a:pt x="5954" y="876423"/>
+                  </a:lnTo>
+                  <a:lnTo>
+                    <a:pt x="22747" y="916149"/>
+                  </a:lnTo>
+                  <a:lnTo>
+                    <a:pt x="48768" y="949737"/>
+                  </a:lnTo>
+                  <a:lnTo>
+                    <a:pt x="82408" y="975642"/>
+                  </a:lnTo>
+                  <a:lnTo>
+                    <a:pt x="122061" y="992318"/>
+                  </a:lnTo>
+                  <a:lnTo>
+                    <a:pt x="166116" y="998219"/>
+                  </a:lnTo>
+                  <a:lnTo>
+                    <a:pt x="1664208" y="998219"/>
+                  </a:lnTo>
+                  <a:lnTo>
+                    <a:pt x="1708262" y="992318"/>
+                  </a:lnTo>
+                  <a:lnTo>
+                    <a:pt x="1747915" y="975642"/>
+                  </a:lnTo>
+                  <a:lnTo>
+                    <a:pt x="1781556" y="949737"/>
+                  </a:lnTo>
+                  <a:lnTo>
+                    <a:pt x="1807576" y="916149"/>
+                  </a:lnTo>
+                  <a:lnTo>
+                    <a:pt x="1824369" y="876423"/>
+                  </a:lnTo>
+                  <a:lnTo>
+                    <a:pt x="1830324" y="832103"/>
+                  </a:lnTo>
+                  <a:close/>
+                </a:path>
+              </a:pathLst>
+            </a:custGeom>
+            <a:solidFill>
+              <a:srgbClr val="3333CC"/>
+            </a:solidFill>
+          </p:spPr>
+          <p:txBody>
+            <a:bodyPr wrap="square" lIns="0" tIns="0" rIns="0" bIns="0" rtlCol="0"/>
+            <a:lstStyle/>
+            <a:p>
+              <a:endParaRPr/>
+            </a:p>
+          </p:txBody>
+        </p:sp>
+        <p:sp>
+          <p:nvSpPr>
+            <p:cNvPr id="19" name="object 18">
+              <a:extLst>
+                <a:ext uri="{FF2B5EF4-FFF2-40B4-BE49-F238E27FC236}">
+                  <a16:creationId xmlns:a16="http://schemas.microsoft.com/office/drawing/2014/main" id="{148FAEFB-2275-8BB2-29D3-85D97A39F238}"/>
+                </a:ext>
+              </a:extLst>
+            </p:cNvPr>
+            <p:cNvSpPr/>
+            <p:nvPr/>
+          </p:nvSpPr>
+          <p:spPr>
+            <a:xfrm>
+              <a:off x="7609217" y="6182868"/>
+              <a:ext cx="1697355" cy="871855"/>
+            </a:xfrm>
+            <a:custGeom>
+              <a:avLst/>
+              <a:gdLst/>
+              <a:ahLst/>
+              <a:cxnLst/>
+              <a:rect l="l" t="t" r="r" b="b"/>
+              <a:pathLst>
+                <a:path w="1697354" h="871854">
+                  <a:moveTo>
+                    <a:pt x="1696973" y="726185"/>
+                  </a:moveTo>
+                  <a:lnTo>
+                    <a:pt x="1696973" y="145541"/>
+                  </a:lnTo>
+                  <a:lnTo>
+                    <a:pt x="1689518" y="99681"/>
+                  </a:lnTo>
+                  <a:lnTo>
+                    <a:pt x="1668786" y="59746"/>
+                  </a:lnTo>
+                  <a:lnTo>
+                    <a:pt x="1637227" y="28187"/>
+                  </a:lnTo>
+                  <a:lnTo>
+                    <a:pt x="1597292" y="7455"/>
+                  </a:lnTo>
+                  <a:lnTo>
+                    <a:pt x="1551431" y="0"/>
+                  </a:lnTo>
+                  <a:lnTo>
+                    <a:pt x="144779" y="0"/>
+                  </a:lnTo>
+                  <a:lnTo>
+                    <a:pt x="98999" y="7455"/>
+                  </a:lnTo>
+                  <a:lnTo>
+                    <a:pt x="59253" y="28187"/>
+                  </a:lnTo>
+                  <a:lnTo>
+                    <a:pt x="27919" y="59746"/>
+                  </a:lnTo>
+                  <a:lnTo>
+                    <a:pt x="7376" y="99681"/>
+                  </a:lnTo>
+                  <a:lnTo>
+                    <a:pt x="0" y="145542"/>
+                  </a:lnTo>
+                  <a:lnTo>
+                    <a:pt x="0" y="726186"/>
+                  </a:lnTo>
+                  <a:lnTo>
+                    <a:pt x="7376" y="772338"/>
+                  </a:lnTo>
+                  <a:lnTo>
+                    <a:pt x="27919" y="812310"/>
+                  </a:lnTo>
+                  <a:lnTo>
+                    <a:pt x="59253" y="843759"/>
+                  </a:lnTo>
+                  <a:lnTo>
+                    <a:pt x="98999" y="864345"/>
+                  </a:lnTo>
+                  <a:lnTo>
+                    <a:pt x="144779" y="871728"/>
+                  </a:lnTo>
+                  <a:lnTo>
+                    <a:pt x="1551431" y="871728"/>
+                  </a:lnTo>
+                  <a:lnTo>
+                    <a:pt x="1597292" y="864345"/>
+                  </a:lnTo>
+                  <a:lnTo>
+                    <a:pt x="1637227" y="843759"/>
+                  </a:lnTo>
+                  <a:lnTo>
+                    <a:pt x="1668786" y="812310"/>
+                  </a:lnTo>
+                  <a:lnTo>
+                    <a:pt x="1689518" y="772338"/>
+                  </a:lnTo>
+                  <a:lnTo>
+                    <a:pt x="1696973" y="726185"/>
+                  </a:lnTo>
+                  <a:close/>
+                </a:path>
+              </a:pathLst>
+            </a:custGeom>
+            <a:solidFill>
+              <a:srgbClr val="FFFF66"/>
+            </a:solidFill>
+          </p:spPr>
+          <p:txBody>
+            <a:bodyPr wrap="square" lIns="0" tIns="0" rIns="0" bIns="0" rtlCol="0"/>
+            <a:lstStyle/>
+            <a:p>
+              <a:endParaRPr/>
+            </a:p>
+          </p:txBody>
+        </p:sp>
+        <p:sp>
+          <p:nvSpPr>
+            <p:cNvPr id="20" name="object 19">
+              <a:extLst>
+                <a:ext uri="{FF2B5EF4-FFF2-40B4-BE49-F238E27FC236}">
+                  <a16:creationId xmlns:a16="http://schemas.microsoft.com/office/drawing/2014/main" id="{AD7EC7CC-BA57-5536-DE66-D4B5711272AD}"/>
+                </a:ext>
+              </a:extLst>
+            </p:cNvPr>
+            <p:cNvSpPr/>
+            <p:nvPr/>
+          </p:nvSpPr>
+          <p:spPr>
+            <a:xfrm>
+              <a:off x="7609217" y="6182868"/>
+              <a:ext cx="1697355" cy="871855"/>
+            </a:xfrm>
+            <a:custGeom>
+              <a:avLst/>
+              <a:gdLst/>
+              <a:ahLst/>
+              <a:cxnLst/>
+              <a:rect l="l" t="t" r="r" b="b"/>
+              <a:pathLst>
+                <a:path w="1697354" h="871854">
+                  <a:moveTo>
+                    <a:pt x="144779" y="0"/>
+                  </a:moveTo>
+                  <a:lnTo>
+                    <a:pt x="98999" y="7455"/>
+                  </a:lnTo>
+                  <a:lnTo>
+                    <a:pt x="59253" y="28187"/>
+                  </a:lnTo>
+                  <a:lnTo>
+                    <a:pt x="27919" y="59746"/>
+                  </a:lnTo>
+                  <a:lnTo>
+                    <a:pt x="7376" y="99681"/>
+                  </a:lnTo>
+                  <a:lnTo>
+                    <a:pt x="0" y="145542"/>
+                  </a:lnTo>
+                  <a:lnTo>
+                    <a:pt x="0" y="726186"/>
+                  </a:lnTo>
+                  <a:lnTo>
+                    <a:pt x="7376" y="772338"/>
+                  </a:lnTo>
+                  <a:lnTo>
+                    <a:pt x="27919" y="812310"/>
+                  </a:lnTo>
+                  <a:lnTo>
+                    <a:pt x="59253" y="843759"/>
+                  </a:lnTo>
+                  <a:lnTo>
+                    <a:pt x="98999" y="864345"/>
+                  </a:lnTo>
+                  <a:lnTo>
+                    <a:pt x="144779" y="871728"/>
+                  </a:lnTo>
+                  <a:lnTo>
+                    <a:pt x="1551431" y="871728"/>
+                  </a:lnTo>
+                  <a:lnTo>
+                    <a:pt x="1597292" y="864345"/>
+                  </a:lnTo>
+                  <a:lnTo>
+                    <a:pt x="1637227" y="843759"/>
+                  </a:lnTo>
+                  <a:lnTo>
+                    <a:pt x="1668786" y="812310"/>
+                  </a:lnTo>
+                  <a:lnTo>
+                    <a:pt x="1689518" y="772338"/>
+                  </a:lnTo>
+                  <a:lnTo>
+                    <a:pt x="1696973" y="726185"/>
+                  </a:lnTo>
+                  <a:lnTo>
+                    <a:pt x="1696973" y="145541"/>
+                  </a:lnTo>
+                  <a:lnTo>
+                    <a:pt x="1689518" y="99681"/>
+                  </a:lnTo>
+                  <a:lnTo>
+                    <a:pt x="1668786" y="59746"/>
+                  </a:lnTo>
+                  <a:lnTo>
+                    <a:pt x="1637227" y="28187"/>
+                  </a:lnTo>
+                  <a:lnTo>
+                    <a:pt x="1597292" y="7455"/>
+                  </a:lnTo>
+                  <a:lnTo>
+                    <a:pt x="1551431" y="0"/>
+                  </a:lnTo>
+                  <a:lnTo>
+                    <a:pt x="144779" y="0"/>
+                  </a:lnTo>
+                  <a:close/>
+                </a:path>
+              </a:pathLst>
+            </a:custGeom>
+            <a:ln w="28575">
+              <a:solidFill>
+                <a:srgbClr val="FFFFFF"/>
+              </a:solidFill>
+            </a:ln>
+          </p:spPr>
+          <p:txBody>
+            <a:bodyPr wrap="square" lIns="0" tIns="0" rIns="0" bIns="0" rtlCol="0"/>
+            <a:lstStyle/>
+            <a:p>
+              <a:endParaRPr/>
+            </a:p>
+          </p:txBody>
+        </p:sp>
+      </p:grpSp>
+      <p:grpSp>
+        <p:nvGrpSpPr>
+          <p:cNvPr id="21" name="object 20">
+            <a:extLst>
+              <a:ext uri="{FF2B5EF4-FFF2-40B4-BE49-F238E27FC236}">
+                <a16:creationId xmlns:a16="http://schemas.microsoft.com/office/drawing/2014/main" id="{32F7AF18-DAFC-DBFB-976A-E4DC87236087}"/>
+              </a:ext>
+            </a:extLst>
+          </p:cNvPr>
+          <p:cNvGrpSpPr/>
+          <p:nvPr/>
+        </p:nvGrpSpPr>
+        <p:grpSpPr>
+          <a:xfrm>
+            <a:off x="5603499" y="629322"/>
+            <a:ext cx="4478020" cy="2540000"/>
+            <a:chOff x="5162435" y="1188719"/>
+            <a:chExt cx="4478020" cy="2540000"/>
+          </a:xfrm>
+        </p:grpSpPr>
+        <p:pic>
+          <p:nvPicPr>
+            <p:cNvPr id="22" name="object 21">
+              <a:extLst>
+                <a:ext uri="{FF2B5EF4-FFF2-40B4-BE49-F238E27FC236}">
+                  <a16:creationId xmlns:a16="http://schemas.microsoft.com/office/drawing/2014/main" id="{4F1CFF6C-0E61-1D72-B0F9-49EF25926495}"/>
+                </a:ext>
+              </a:extLst>
+            </p:cNvPr>
+            <p:cNvPicPr/>
+            <p:nvPr/>
+          </p:nvPicPr>
+          <p:blipFill>
+            <a:blip r:embed="rId6" cstate="print"/>
+            <a:stretch>
+              <a:fillRect/>
+            </a:stretch>
+          </p:blipFill>
+          <p:spPr>
+            <a:xfrm>
+              <a:off x="5162435" y="1188719"/>
+              <a:ext cx="4477511" cy="1892045"/>
+            </a:xfrm>
+            <a:prstGeom prst="rect">
+              <a:avLst/>
+            </a:prstGeom>
+          </p:spPr>
+        </p:pic>
+        <p:sp>
+          <p:nvSpPr>
+            <p:cNvPr id="23" name="object 22">
+              <a:extLst>
+                <a:ext uri="{FF2B5EF4-FFF2-40B4-BE49-F238E27FC236}">
+                  <a16:creationId xmlns:a16="http://schemas.microsoft.com/office/drawing/2014/main" id="{128C8065-2C7F-3B4E-0FF9-B3FF7AA627DC}"/>
+                </a:ext>
+              </a:extLst>
+            </p:cNvPr>
+            <p:cNvSpPr/>
+            <p:nvPr/>
+          </p:nvSpPr>
+          <p:spPr>
+            <a:xfrm>
+              <a:off x="5247017" y="2743200"/>
+              <a:ext cx="1682750" cy="985519"/>
+            </a:xfrm>
+            <a:custGeom>
+              <a:avLst/>
+              <a:gdLst/>
+              <a:ahLst/>
+              <a:cxnLst/>
+              <a:rect l="l" t="t" r="r" b="b"/>
+              <a:pathLst>
+                <a:path w="1682750" h="985520">
+                  <a:moveTo>
+                    <a:pt x="1682495" y="821435"/>
+                  </a:moveTo>
+                  <a:lnTo>
+                    <a:pt x="1682495" y="163829"/>
+                  </a:lnTo>
+                  <a:lnTo>
+                    <a:pt x="1676653" y="120209"/>
+                  </a:lnTo>
+                  <a:lnTo>
+                    <a:pt x="1660143" y="81054"/>
+                  </a:lnTo>
+                  <a:lnTo>
+                    <a:pt x="1634489" y="47910"/>
+                  </a:lnTo>
+                  <a:lnTo>
+                    <a:pt x="1601215" y="22323"/>
+                  </a:lnTo>
+                  <a:lnTo>
+                    <a:pt x="1561845" y="5838"/>
+                  </a:lnTo>
+                  <a:lnTo>
+                    <a:pt x="1517903" y="0"/>
+                  </a:lnTo>
+                  <a:lnTo>
+                    <a:pt x="163829" y="0"/>
+                  </a:lnTo>
+                  <a:lnTo>
+                    <a:pt x="120209" y="5838"/>
+                  </a:lnTo>
+                  <a:lnTo>
+                    <a:pt x="81054" y="22323"/>
+                  </a:lnTo>
+                  <a:lnTo>
+                    <a:pt x="47910" y="47910"/>
+                  </a:lnTo>
+                  <a:lnTo>
+                    <a:pt x="22323" y="81054"/>
+                  </a:lnTo>
+                  <a:lnTo>
+                    <a:pt x="5838" y="120209"/>
+                  </a:lnTo>
+                  <a:lnTo>
+                    <a:pt x="0" y="163830"/>
+                  </a:lnTo>
+                  <a:lnTo>
+                    <a:pt x="0" y="821436"/>
+                  </a:lnTo>
+                  <a:lnTo>
+                    <a:pt x="5838" y="865056"/>
+                  </a:lnTo>
+                  <a:lnTo>
+                    <a:pt x="22323" y="904211"/>
+                  </a:lnTo>
+                  <a:lnTo>
+                    <a:pt x="47910" y="937355"/>
+                  </a:lnTo>
+                  <a:lnTo>
+                    <a:pt x="81054" y="962942"/>
+                  </a:lnTo>
+                  <a:lnTo>
+                    <a:pt x="120209" y="979427"/>
+                  </a:lnTo>
+                  <a:lnTo>
+                    <a:pt x="163829" y="985266"/>
+                  </a:lnTo>
+                  <a:lnTo>
+                    <a:pt x="1517903" y="985266"/>
+                  </a:lnTo>
+                  <a:lnTo>
+                    <a:pt x="1561845" y="979427"/>
+                  </a:lnTo>
+                  <a:lnTo>
+                    <a:pt x="1601215" y="962942"/>
+                  </a:lnTo>
+                  <a:lnTo>
+                    <a:pt x="1634489" y="937355"/>
+                  </a:lnTo>
+                  <a:lnTo>
+                    <a:pt x="1660143" y="904211"/>
+                  </a:lnTo>
+                  <a:lnTo>
+                    <a:pt x="1676653" y="865056"/>
+                  </a:lnTo>
+                  <a:lnTo>
+                    <a:pt x="1682495" y="821435"/>
+                  </a:lnTo>
+                  <a:close/>
+                </a:path>
+              </a:pathLst>
+            </a:custGeom>
+            <a:solidFill>
+              <a:srgbClr val="3333CC"/>
+            </a:solidFill>
+          </p:spPr>
+          <p:txBody>
+            <a:bodyPr wrap="square" lIns="0" tIns="0" rIns="0" bIns="0" rtlCol="0"/>
+            <a:lstStyle/>
+            <a:p>
+              <a:endParaRPr/>
+            </a:p>
+          </p:txBody>
+        </p:sp>
+        <p:sp>
+          <p:nvSpPr>
+            <p:cNvPr id="24" name="object 23">
+              <a:extLst>
+                <a:ext uri="{FF2B5EF4-FFF2-40B4-BE49-F238E27FC236}">
+                  <a16:creationId xmlns:a16="http://schemas.microsoft.com/office/drawing/2014/main" id="{748893BB-ED94-8DD3-2B81-09DC89934B79}"/>
+                </a:ext>
+              </a:extLst>
+            </p:cNvPr>
+            <p:cNvSpPr/>
+            <p:nvPr/>
+          </p:nvSpPr>
+          <p:spPr>
+            <a:xfrm>
+              <a:off x="5311787" y="2804922"/>
+              <a:ext cx="1560830" cy="862330"/>
+            </a:xfrm>
+            <a:custGeom>
+              <a:avLst/>
+              <a:gdLst/>
+              <a:ahLst/>
+              <a:cxnLst/>
+              <a:rect l="l" t="t" r="r" b="b"/>
+              <a:pathLst>
+                <a:path w="1560829" h="862329">
+                  <a:moveTo>
+                    <a:pt x="1560575" y="718565"/>
+                  </a:moveTo>
+                  <a:lnTo>
+                    <a:pt x="1560575" y="143255"/>
+                  </a:lnTo>
+                  <a:lnTo>
+                    <a:pt x="1553285" y="97926"/>
+                  </a:lnTo>
+                  <a:lnTo>
+                    <a:pt x="1532973" y="58594"/>
+                  </a:lnTo>
+                  <a:lnTo>
+                    <a:pt x="1501981" y="27602"/>
+                  </a:lnTo>
+                  <a:lnTo>
+                    <a:pt x="1462649" y="7290"/>
+                  </a:lnTo>
+                  <a:lnTo>
+                    <a:pt x="1417319" y="0"/>
+                  </a:lnTo>
+                  <a:lnTo>
+                    <a:pt x="144017" y="0"/>
+                  </a:lnTo>
+                  <a:lnTo>
+                    <a:pt x="98608" y="7290"/>
+                  </a:lnTo>
+                  <a:lnTo>
+                    <a:pt x="59088" y="27602"/>
+                  </a:lnTo>
+                  <a:lnTo>
+                    <a:pt x="27870" y="58594"/>
+                  </a:lnTo>
+                  <a:lnTo>
+                    <a:pt x="7370" y="97926"/>
+                  </a:lnTo>
+                  <a:lnTo>
+                    <a:pt x="0" y="143256"/>
+                  </a:lnTo>
+                  <a:lnTo>
+                    <a:pt x="0" y="718566"/>
+                  </a:lnTo>
+                  <a:lnTo>
+                    <a:pt x="7370" y="763895"/>
+                  </a:lnTo>
+                  <a:lnTo>
+                    <a:pt x="27870" y="803227"/>
+                  </a:lnTo>
+                  <a:lnTo>
+                    <a:pt x="59088" y="834219"/>
+                  </a:lnTo>
+                  <a:lnTo>
+                    <a:pt x="98608" y="854531"/>
+                  </a:lnTo>
+                  <a:lnTo>
+                    <a:pt x="144017" y="861822"/>
+                  </a:lnTo>
+                  <a:lnTo>
+                    <a:pt x="1417319" y="861822"/>
+                  </a:lnTo>
+                  <a:lnTo>
+                    <a:pt x="1462649" y="854531"/>
+                  </a:lnTo>
+                  <a:lnTo>
+                    <a:pt x="1501981" y="834219"/>
+                  </a:lnTo>
+                  <a:lnTo>
+                    <a:pt x="1532973" y="803227"/>
+                  </a:lnTo>
+                  <a:lnTo>
+                    <a:pt x="1553285" y="763895"/>
+                  </a:lnTo>
+                  <a:lnTo>
+                    <a:pt x="1560575" y="718565"/>
+                  </a:lnTo>
+                  <a:close/>
+                </a:path>
+              </a:pathLst>
+            </a:custGeom>
+            <a:solidFill>
+              <a:srgbClr val="FFFF66"/>
+            </a:solidFill>
+          </p:spPr>
+          <p:txBody>
+            <a:bodyPr wrap="square" lIns="0" tIns="0" rIns="0" bIns="0" rtlCol="0"/>
+            <a:lstStyle/>
+            <a:p>
+              <a:endParaRPr/>
+            </a:p>
+          </p:txBody>
+        </p:sp>
+        <p:sp>
+          <p:nvSpPr>
+            <p:cNvPr id="25" name="object 24">
+              <a:extLst>
+                <a:ext uri="{FF2B5EF4-FFF2-40B4-BE49-F238E27FC236}">
+                  <a16:creationId xmlns:a16="http://schemas.microsoft.com/office/drawing/2014/main" id="{5B63516B-DB60-F248-B3B1-4A53373E4A6C}"/>
+                </a:ext>
+              </a:extLst>
+            </p:cNvPr>
+            <p:cNvSpPr/>
+            <p:nvPr/>
+          </p:nvSpPr>
+          <p:spPr>
+            <a:xfrm>
+              <a:off x="5311787" y="2804922"/>
+              <a:ext cx="1560830" cy="862330"/>
+            </a:xfrm>
+            <a:custGeom>
+              <a:avLst/>
+              <a:gdLst/>
+              <a:ahLst/>
+              <a:cxnLst/>
+              <a:rect l="l" t="t" r="r" b="b"/>
+              <a:pathLst>
+                <a:path w="1560829" h="862329">
+                  <a:moveTo>
+                    <a:pt x="144017" y="0"/>
+                  </a:moveTo>
+                  <a:lnTo>
+                    <a:pt x="98608" y="7290"/>
+                  </a:lnTo>
+                  <a:lnTo>
+                    <a:pt x="59088" y="27602"/>
+                  </a:lnTo>
+                  <a:lnTo>
+                    <a:pt x="27870" y="58594"/>
+                  </a:lnTo>
+                  <a:lnTo>
+                    <a:pt x="7370" y="97926"/>
+                  </a:lnTo>
+                  <a:lnTo>
+                    <a:pt x="0" y="143256"/>
+                  </a:lnTo>
+                  <a:lnTo>
+                    <a:pt x="0" y="718566"/>
+                  </a:lnTo>
+                  <a:lnTo>
+                    <a:pt x="7370" y="763895"/>
+                  </a:lnTo>
+                  <a:lnTo>
+                    <a:pt x="27870" y="803227"/>
+                  </a:lnTo>
+                  <a:lnTo>
+                    <a:pt x="59088" y="834219"/>
+                  </a:lnTo>
+                  <a:lnTo>
+                    <a:pt x="98608" y="854531"/>
+                  </a:lnTo>
+                  <a:lnTo>
+                    <a:pt x="144017" y="861822"/>
+                  </a:lnTo>
+                  <a:lnTo>
+                    <a:pt x="1417319" y="861822"/>
+                  </a:lnTo>
+                  <a:lnTo>
+                    <a:pt x="1462649" y="854531"/>
+                  </a:lnTo>
+                  <a:lnTo>
+                    <a:pt x="1501981" y="834219"/>
+                  </a:lnTo>
+                  <a:lnTo>
+                    <a:pt x="1532973" y="803227"/>
+                  </a:lnTo>
+                  <a:lnTo>
+                    <a:pt x="1553285" y="763895"/>
+                  </a:lnTo>
+                  <a:lnTo>
+                    <a:pt x="1560575" y="718565"/>
+                  </a:lnTo>
+                  <a:lnTo>
+                    <a:pt x="1560575" y="143255"/>
+                  </a:lnTo>
+                  <a:lnTo>
+                    <a:pt x="1553285" y="97926"/>
+                  </a:lnTo>
+                  <a:lnTo>
+                    <a:pt x="1532973" y="58594"/>
+                  </a:lnTo>
+                  <a:lnTo>
+                    <a:pt x="1501981" y="27602"/>
+                  </a:lnTo>
+                  <a:lnTo>
+                    <a:pt x="1462649" y="7290"/>
+                  </a:lnTo>
+                  <a:lnTo>
+                    <a:pt x="1417319" y="0"/>
+                  </a:lnTo>
+                  <a:lnTo>
+                    <a:pt x="144017" y="0"/>
+                  </a:lnTo>
+                  <a:close/>
+                </a:path>
+              </a:pathLst>
+            </a:custGeom>
+            <a:ln w="28575">
+              <a:solidFill>
+                <a:srgbClr val="FFFFFF"/>
+              </a:solidFill>
+            </a:ln>
+          </p:spPr>
+          <p:txBody>
+            <a:bodyPr wrap="square" lIns="0" tIns="0" rIns="0" bIns="0" rtlCol="0"/>
+            <a:lstStyle/>
+            <a:p>
+              <a:endParaRPr/>
+            </a:p>
+          </p:txBody>
+        </p:sp>
+      </p:grpSp>
+      <p:sp>
+        <p:nvSpPr>
+          <p:cNvPr id="26" name="object 25">
+            <a:extLst>
+              <a:ext uri="{FF2B5EF4-FFF2-40B4-BE49-F238E27FC236}">
+                <a16:creationId xmlns:a16="http://schemas.microsoft.com/office/drawing/2014/main" id="{4BBDCC2D-671D-EC9E-8CEA-FA3E522AC531}"/>
+              </a:ext>
+            </a:extLst>
+          </p:cNvPr>
+          <p:cNvSpPr txBox="1"/>
+          <p:nvPr/>
+        </p:nvSpPr>
+        <p:spPr>
+          <a:xfrm>
+            <a:off x="3416814" y="4589691"/>
+            <a:ext cx="1549400" cy="819150"/>
+          </a:xfrm>
+          <a:prstGeom prst="rect">
+            <a:avLst/>
+          </a:prstGeom>
+        </p:spPr>
+        <p:txBody>
+          <a:bodyPr vert="horz" wrap="square" lIns="0" tIns="12700" rIns="0" bIns="0" rtlCol="0">
+            <a:spAutoFit/>
+          </a:bodyPr>
+          <a:lstStyle/>
+          <a:p>
+            <a:pPr marL="12065" marR="5080" indent="635" algn="ctr">
+              <a:lnSpc>
+                <a:spcPct val="100099"/>
+              </a:lnSpc>
+              <a:spcBef>
+                <a:spcPts val="100"/>
+              </a:spcBef>
+            </a:pPr>
+            <a:r>
+              <a:rPr sz="1600" b="1" spc="-20" dirty="0">
+                <a:solidFill>
+                  <a:srgbClr val="3333CC"/>
+                </a:solidFill>
+                <a:latin typeface="Lantinghei SC Heavy"/>
+                <a:cs typeface="Lantinghei SC Heavy"/>
+              </a:rPr>
+              <a:t>主文件按索引字</a:t>
+            </a:r>
+            <a:r>
+              <a:rPr sz="1600" b="1" spc="-10" dirty="0">
+                <a:solidFill>
+                  <a:srgbClr val="3333CC"/>
+                </a:solidFill>
+                <a:latin typeface="Lantinghei SC Heavy"/>
+                <a:cs typeface="Lantinghei SC Heavy"/>
+              </a:rPr>
+              <a:t>段</a:t>
+            </a:r>
+            <a:r>
+              <a:rPr sz="2000" b="1" spc="-20" dirty="0">
+                <a:solidFill>
+                  <a:srgbClr val="CC0000"/>
+                </a:solidFill>
+                <a:latin typeface="Lantinghei SC Heavy"/>
+                <a:cs typeface="Lantinghei SC Heavy"/>
+              </a:rPr>
+              <a:t>排序</a:t>
+            </a:r>
+            <a:r>
+              <a:rPr sz="1600" b="1" spc="-20" dirty="0">
+                <a:solidFill>
+                  <a:srgbClr val="3333CC"/>
+                </a:solidFill>
+                <a:latin typeface="Lantinghei SC Heavy"/>
+                <a:cs typeface="Lantinghei SC Heavy"/>
+              </a:rPr>
+              <a:t>且索引字段不是候选键</a:t>
+            </a:r>
+            <a:endParaRPr sz="1600">
+              <a:latin typeface="Lantinghei SC Heavy"/>
+              <a:cs typeface="Lantinghei SC Heavy"/>
+            </a:endParaRPr>
+          </a:p>
+        </p:txBody>
+      </p:sp>
+      <p:sp>
+        <p:nvSpPr>
+          <p:cNvPr id="27" name="object 26">
+            <a:extLst>
+              <a:ext uri="{FF2B5EF4-FFF2-40B4-BE49-F238E27FC236}">
+                <a16:creationId xmlns:a16="http://schemas.microsoft.com/office/drawing/2014/main" id="{119F3A63-F7E3-9E1C-D1C6-2105E1018798}"/>
+              </a:ext>
+            </a:extLst>
+          </p:cNvPr>
+          <p:cNvSpPr txBox="1"/>
+          <p:nvPr/>
+        </p:nvSpPr>
+        <p:spPr>
+          <a:xfrm>
+            <a:off x="1594862" y="4166019"/>
+            <a:ext cx="1093470" cy="818515"/>
+          </a:xfrm>
+          <a:prstGeom prst="rect">
+            <a:avLst/>
+          </a:prstGeom>
+        </p:spPr>
+        <p:txBody>
+          <a:bodyPr vert="horz" wrap="square" lIns="0" tIns="12700" rIns="0" bIns="0" rtlCol="0">
+            <a:spAutoFit/>
+          </a:bodyPr>
+          <a:lstStyle/>
+          <a:p>
+            <a:pPr marL="12700" marR="5080" indent="26670" algn="just">
+              <a:lnSpc>
+                <a:spcPct val="100000"/>
+              </a:lnSpc>
+              <a:spcBef>
+                <a:spcPts val="100"/>
+              </a:spcBef>
+            </a:pPr>
+            <a:r>
+              <a:rPr sz="1600" b="1" spc="-20" dirty="0">
+                <a:solidFill>
+                  <a:srgbClr val="3333CC"/>
+                </a:solidFill>
+                <a:latin typeface="Lantinghei SC Heavy"/>
+                <a:cs typeface="Lantinghei SC Heavy"/>
+              </a:rPr>
+              <a:t>索引文件中索引字段值</a:t>
+            </a:r>
+            <a:r>
+              <a:rPr sz="1600" b="1" dirty="0">
+                <a:solidFill>
+                  <a:srgbClr val="3333CC"/>
+                </a:solidFill>
+                <a:latin typeface="Lantinghei SC Heavy"/>
+                <a:cs typeface="Lantinghei SC Heavy"/>
+              </a:rPr>
+              <a:t>是</a:t>
+            </a:r>
+            <a:r>
+              <a:rPr sz="2000" b="1" spc="-20" dirty="0">
+                <a:solidFill>
+                  <a:srgbClr val="CC0000"/>
+                </a:solidFill>
+                <a:latin typeface="Lantinghei SC Heavy"/>
+                <a:cs typeface="Lantinghei SC Heavy"/>
+              </a:rPr>
+              <a:t>不</a:t>
+            </a:r>
+            <a:r>
+              <a:rPr sz="1600" b="1" spc="-20" dirty="0">
+                <a:solidFill>
+                  <a:srgbClr val="3333CC"/>
+                </a:solidFill>
+                <a:latin typeface="Lantinghei SC Heavy"/>
+                <a:cs typeface="Lantinghei SC Heavy"/>
+              </a:rPr>
+              <a:t>重复的</a:t>
+            </a:r>
+            <a:endParaRPr sz="1600">
+              <a:latin typeface="Lantinghei SC Heavy"/>
+              <a:cs typeface="Lantinghei SC Heavy"/>
+            </a:endParaRPr>
+          </a:p>
+        </p:txBody>
+      </p:sp>
+      <p:grpSp>
+        <p:nvGrpSpPr>
+          <p:cNvPr id="28" name="object 27">
+            <a:extLst>
+              <a:ext uri="{FF2B5EF4-FFF2-40B4-BE49-F238E27FC236}">
+                <a16:creationId xmlns:a16="http://schemas.microsoft.com/office/drawing/2014/main" id="{417D6817-52D9-E934-927F-10E49AAB8152}"/>
+              </a:ext>
+            </a:extLst>
+          </p:cNvPr>
+          <p:cNvGrpSpPr/>
+          <p:nvPr/>
+        </p:nvGrpSpPr>
+        <p:grpSpPr>
+          <a:xfrm>
+            <a:off x="5800857" y="5588418"/>
+            <a:ext cx="1455420" cy="999490"/>
+            <a:chOff x="5359793" y="6147815"/>
+            <a:chExt cx="1455420" cy="999490"/>
+          </a:xfrm>
+        </p:grpSpPr>
+        <p:sp>
+          <p:nvSpPr>
+            <p:cNvPr id="29" name="object 28">
+              <a:extLst>
+                <a:ext uri="{FF2B5EF4-FFF2-40B4-BE49-F238E27FC236}">
+                  <a16:creationId xmlns:a16="http://schemas.microsoft.com/office/drawing/2014/main" id="{4532C115-9DB7-800A-D9A2-8EDA9E202940}"/>
+                </a:ext>
+              </a:extLst>
+            </p:cNvPr>
+            <p:cNvSpPr/>
+            <p:nvPr/>
+          </p:nvSpPr>
+          <p:spPr>
+            <a:xfrm>
+              <a:off x="5359793" y="6147815"/>
+              <a:ext cx="1455420" cy="999490"/>
+            </a:xfrm>
+            <a:custGeom>
+              <a:avLst/>
+              <a:gdLst/>
+              <a:ahLst/>
+              <a:cxnLst/>
+              <a:rect l="l" t="t" r="r" b="b"/>
+              <a:pathLst>
+                <a:path w="1455420" h="999490">
+                  <a:moveTo>
+                    <a:pt x="1455419" y="832104"/>
+                  </a:moveTo>
+                  <a:lnTo>
+                    <a:pt x="1455419" y="166877"/>
+                  </a:lnTo>
+                  <a:lnTo>
+                    <a:pt x="1449465" y="122502"/>
+                  </a:lnTo>
+                  <a:lnTo>
+                    <a:pt x="1432672" y="82634"/>
+                  </a:lnTo>
+                  <a:lnTo>
+                    <a:pt x="1406652" y="48863"/>
+                  </a:lnTo>
+                  <a:lnTo>
+                    <a:pt x="1373011" y="22775"/>
+                  </a:lnTo>
+                  <a:lnTo>
+                    <a:pt x="1333358" y="5958"/>
+                  </a:lnTo>
+                  <a:lnTo>
+                    <a:pt x="1289303" y="0"/>
+                  </a:lnTo>
+                  <a:lnTo>
+                    <a:pt x="166115" y="0"/>
+                  </a:lnTo>
+                  <a:lnTo>
+                    <a:pt x="121796" y="5958"/>
+                  </a:lnTo>
+                  <a:lnTo>
+                    <a:pt x="82070" y="22775"/>
+                  </a:lnTo>
+                  <a:lnTo>
+                    <a:pt x="48482" y="48863"/>
+                  </a:lnTo>
+                  <a:lnTo>
+                    <a:pt x="22577" y="82634"/>
+                  </a:lnTo>
+                  <a:lnTo>
+                    <a:pt x="5901" y="122502"/>
+                  </a:lnTo>
+                  <a:lnTo>
+                    <a:pt x="0" y="166878"/>
+                  </a:lnTo>
+                  <a:lnTo>
+                    <a:pt x="0" y="832104"/>
+                  </a:lnTo>
+                  <a:lnTo>
+                    <a:pt x="5901" y="876479"/>
+                  </a:lnTo>
+                  <a:lnTo>
+                    <a:pt x="22577" y="916347"/>
+                  </a:lnTo>
+                  <a:lnTo>
+                    <a:pt x="48482" y="950118"/>
+                  </a:lnTo>
+                  <a:lnTo>
+                    <a:pt x="82070" y="976206"/>
+                  </a:lnTo>
+                  <a:lnTo>
+                    <a:pt x="121796" y="993023"/>
+                  </a:lnTo>
+                  <a:lnTo>
+                    <a:pt x="166115" y="998982"/>
+                  </a:lnTo>
+                  <a:lnTo>
+                    <a:pt x="1289303" y="998982"/>
+                  </a:lnTo>
+                  <a:lnTo>
+                    <a:pt x="1333358" y="993023"/>
+                  </a:lnTo>
+                  <a:lnTo>
+                    <a:pt x="1373011" y="976206"/>
+                  </a:lnTo>
+                  <a:lnTo>
+                    <a:pt x="1406651" y="950118"/>
+                  </a:lnTo>
+                  <a:lnTo>
+                    <a:pt x="1432672" y="916347"/>
+                  </a:lnTo>
+                  <a:lnTo>
+                    <a:pt x="1449465" y="876479"/>
+                  </a:lnTo>
+                  <a:lnTo>
+                    <a:pt x="1455419" y="832104"/>
+                  </a:lnTo>
+                  <a:close/>
+                </a:path>
+              </a:pathLst>
+            </a:custGeom>
+            <a:solidFill>
+              <a:srgbClr val="3333CC"/>
+            </a:solidFill>
+          </p:spPr>
+          <p:txBody>
+            <a:bodyPr wrap="square" lIns="0" tIns="0" rIns="0" bIns="0" rtlCol="0"/>
+            <a:lstStyle/>
+            <a:p>
+              <a:endParaRPr/>
+            </a:p>
+          </p:txBody>
+        </p:sp>
+        <p:sp>
+          <p:nvSpPr>
+            <p:cNvPr id="30" name="object 29">
+              <a:extLst>
+                <a:ext uri="{FF2B5EF4-FFF2-40B4-BE49-F238E27FC236}">
+                  <a16:creationId xmlns:a16="http://schemas.microsoft.com/office/drawing/2014/main" id="{8F922FB6-E16C-01F0-47B1-FC9CB6B8BC1C}"/>
+                </a:ext>
+              </a:extLst>
+            </p:cNvPr>
+            <p:cNvSpPr/>
+            <p:nvPr/>
+          </p:nvSpPr>
+          <p:spPr>
+            <a:xfrm>
+              <a:off x="5416943" y="6211823"/>
+              <a:ext cx="1348740" cy="871219"/>
+            </a:xfrm>
+            <a:custGeom>
+              <a:avLst/>
+              <a:gdLst/>
+              <a:ahLst/>
+              <a:cxnLst/>
+              <a:rect l="l" t="t" r="r" b="b"/>
+              <a:pathLst>
+                <a:path w="1348740" h="871220">
+                  <a:moveTo>
+                    <a:pt x="1348739" y="726185"/>
+                  </a:moveTo>
+                  <a:lnTo>
+                    <a:pt x="1348739" y="144779"/>
+                  </a:lnTo>
+                  <a:lnTo>
+                    <a:pt x="1341363" y="98999"/>
+                  </a:lnTo>
+                  <a:lnTo>
+                    <a:pt x="1320820" y="59253"/>
+                  </a:lnTo>
+                  <a:lnTo>
+                    <a:pt x="1289486" y="27919"/>
+                  </a:lnTo>
+                  <a:lnTo>
+                    <a:pt x="1249740" y="7376"/>
+                  </a:lnTo>
+                  <a:lnTo>
+                    <a:pt x="1203959" y="0"/>
+                  </a:lnTo>
+                  <a:lnTo>
+                    <a:pt x="144779" y="0"/>
+                  </a:lnTo>
+                  <a:lnTo>
+                    <a:pt x="98999" y="7376"/>
+                  </a:lnTo>
+                  <a:lnTo>
+                    <a:pt x="59253" y="27919"/>
+                  </a:lnTo>
+                  <a:lnTo>
+                    <a:pt x="27919" y="59253"/>
+                  </a:lnTo>
+                  <a:lnTo>
+                    <a:pt x="7376" y="98999"/>
+                  </a:lnTo>
+                  <a:lnTo>
+                    <a:pt x="0" y="144780"/>
+                  </a:lnTo>
+                  <a:lnTo>
+                    <a:pt x="0" y="726186"/>
+                  </a:lnTo>
+                  <a:lnTo>
+                    <a:pt x="7376" y="771966"/>
+                  </a:lnTo>
+                  <a:lnTo>
+                    <a:pt x="27919" y="811712"/>
+                  </a:lnTo>
+                  <a:lnTo>
+                    <a:pt x="59253" y="843046"/>
+                  </a:lnTo>
+                  <a:lnTo>
+                    <a:pt x="98999" y="863589"/>
+                  </a:lnTo>
+                  <a:lnTo>
+                    <a:pt x="144779" y="870966"/>
+                  </a:lnTo>
+                  <a:lnTo>
+                    <a:pt x="1203959" y="870966"/>
+                  </a:lnTo>
+                  <a:lnTo>
+                    <a:pt x="1249740" y="863589"/>
+                  </a:lnTo>
+                  <a:lnTo>
+                    <a:pt x="1289486" y="843046"/>
+                  </a:lnTo>
+                  <a:lnTo>
+                    <a:pt x="1320820" y="811712"/>
+                  </a:lnTo>
+                  <a:lnTo>
+                    <a:pt x="1341363" y="771966"/>
+                  </a:lnTo>
+                  <a:lnTo>
+                    <a:pt x="1348739" y="726185"/>
+                  </a:lnTo>
+                  <a:close/>
+                </a:path>
+              </a:pathLst>
+            </a:custGeom>
+            <a:solidFill>
+              <a:srgbClr val="FFFF66"/>
+            </a:solidFill>
+          </p:spPr>
+          <p:txBody>
+            <a:bodyPr wrap="square" lIns="0" tIns="0" rIns="0" bIns="0" rtlCol="0"/>
+            <a:lstStyle/>
+            <a:p>
+              <a:endParaRPr/>
+            </a:p>
+          </p:txBody>
+        </p:sp>
+        <p:sp>
+          <p:nvSpPr>
+            <p:cNvPr id="31" name="object 30">
+              <a:extLst>
+                <a:ext uri="{FF2B5EF4-FFF2-40B4-BE49-F238E27FC236}">
+                  <a16:creationId xmlns:a16="http://schemas.microsoft.com/office/drawing/2014/main" id="{8F61D737-9DAD-88E8-5117-F1E9194354B0}"/>
+                </a:ext>
+              </a:extLst>
+            </p:cNvPr>
+            <p:cNvSpPr/>
+            <p:nvPr/>
+          </p:nvSpPr>
+          <p:spPr>
+            <a:xfrm>
+              <a:off x="5416943" y="6211823"/>
+              <a:ext cx="1348740" cy="871219"/>
+            </a:xfrm>
+            <a:custGeom>
+              <a:avLst/>
+              <a:gdLst/>
+              <a:ahLst/>
+              <a:cxnLst/>
+              <a:rect l="l" t="t" r="r" b="b"/>
+              <a:pathLst>
+                <a:path w="1348740" h="871220">
+                  <a:moveTo>
+                    <a:pt x="144779" y="0"/>
+                  </a:moveTo>
+                  <a:lnTo>
+                    <a:pt x="98999" y="7376"/>
+                  </a:lnTo>
+                  <a:lnTo>
+                    <a:pt x="59253" y="27919"/>
+                  </a:lnTo>
+                  <a:lnTo>
+                    <a:pt x="27919" y="59253"/>
+                  </a:lnTo>
+                  <a:lnTo>
+                    <a:pt x="7376" y="98999"/>
+                  </a:lnTo>
+                  <a:lnTo>
+                    <a:pt x="0" y="144780"/>
+                  </a:lnTo>
+                  <a:lnTo>
+                    <a:pt x="0" y="726186"/>
+                  </a:lnTo>
+                  <a:lnTo>
+                    <a:pt x="7376" y="771966"/>
+                  </a:lnTo>
+                  <a:lnTo>
+                    <a:pt x="27919" y="811712"/>
+                  </a:lnTo>
+                  <a:lnTo>
+                    <a:pt x="59253" y="843046"/>
+                  </a:lnTo>
+                  <a:lnTo>
+                    <a:pt x="98999" y="863589"/>
+                  </a:lnTo>
+                  <a:lnTo>
+                    <a:pt x="144779" y="870966"/>
+                  </a:lnTo>
+                  <a:lnTo>
+                    <a:pt x="1203959" y="870966"/>
+                  </a:lnTo>
+                  <a:lnTo>
+                    <a:pt x="1249740" y="863589"/>
+                  </a:lnTo>
+                  <a:lnTo>
+                    <a:pt x="1289486" y="843046"/>
+                  </a:lnTo>
+                  <a:lnTo>
+                    <a:pt x="1320820" y="811712"/>
+                  </a:lnTo>
+                  <a:lnTo>
+                    <a:pt x="1341363" y="771966"/>
+                  </a:lnTo>
+                  <a:lnTo>
+                    <a:pt x="1348739" y="726185"/>
+                  </a:lnTo>
+                  <a:lnTo>
+                    <a:pt x="1348739" y="144779"/>
+                  </a:lnTo>
+                  <a:lnTo>
+                    <a:pt x="1341363" y="98999"/>
+                  </a:lnTo>
+                  <a:lnTo>
+                    <a:pt x="1320820" y="59253"/>
+                  </a:lnTo>
+                  <a:lnTo>
+                    <a:pt x="1289486" y="27919"/>
+                  </a:lnTo>
+                  <a:lnTo>
+                    <a:pt x="1249740" y="7376"/>
+                  </a:lnTo>
+                  <a:lnTo>
+                    <a:pt x="1203959" y="0"/>
+                  </a:lnTo>
+                  <a:lnTo>
+                    <a:pt x="144779" y="0"/>
+                  </a:lnTo>
+                  <a:close/>
+                </a:path>
+              </a:pathLst>
+            </a:custGeom>
+            <a:ln w="28575">
+              <a:solidFill>
+                <a:srgbClr val="FFFFFF"/>
+              </a:solidFill>
+            </a:ln>
+          </p:spPr>
+          <p:txBody>
+            <a:bodyPr wrap="square" lIns="0" tIns="0" rIns="0" bIns="0" rtlCol="0"/>
+            <a:lstStyle/>
+            <a:p>
+              <a:endParaRPr/>
+            </a:p>
+          </p:txBody>
+        </p:sp>
+      </p:grpSp>
+      <p:sp>
+        <p:nvSpPr>
+          <p:cNvPr id="32" name="object 31">
+            <a:extLst>
+              <a:ext uri="{FF2B5EF4-FFF2-40B4-BE49-F238E27FC236}">
+                <a16:creationId xmlns:a16="http://schemas.microsoft.com/office/drawing/2014/main" id="{E92CF738-1553-AADC-2506-B1A6D1E4C78A}"/>
+              </a:ext>
+            </a:extLst>
+          </p:cNvPr>
+          <p:cNvSpPr txBox="1"/>
+          <p:nvPr/>
+        </p:nvSpPr>
+        <p:spPr>
+          <a:xfrm>
+            <a:off x="5989316" y="5700685"/>
+            <a:ext cx="1093470" cy="818515"/>
+          </a:xfrm>
+          <a:prstGeom prst="rect">
+            <a:avLst/>
+          </a:prstGeom>
+        </p:spPr>
+        <p:txBody>
+          <a:bodyPr vert="horz" wrap="square" lIns="0" tIns="12700" rIns="0" bIns="0" rtlCol="0">
+            <a:spAutoFit/>
+          </a:bodyPr>
+          <a:lstStyle/>
+          <a:p>
+            <a:pPr marL="12700" marR="5080" indent="26670" algn="just">
+              <a:lnSpc>
+                <a:spcPct val="100000"/>
+              </a:lnSpc>
+              <a:spcBef>
+                <a:spcPts val="100"/>
+              </a:spcBef>
+            </a:pPr>
+            <a:r>
+              <a:rPr sz="1600" b="1" spc="-20" dirty="0">
+                <a:solidFill>
+                  <a:srgbClr val="3333CC"/>
+                </a:solidFill>
+                <a:latin typeface="Lantinghei SC Heavy"/>
+                <a:cs typeface="Lantinghei SC Heavy"/>
+              </a:rPr>
+              <a:t>索引文件中索引字段值</a:t>
+            </a:r>
+            <a:r>
+              <a:rPr sz="1600" b="1" dirty="0">
+                <a:solidFill>
+                  <a:srgbClr val="3333CC"/>
+                </a:solidFill>
+                <a:latin typeface="Lantinghei SC Heavy"/>
+                <a:cs typeface="Lantinghei SC Heavy"/>
+              </a:rPr>
+              <a:t>是</a:t>
+            </a:r>
+            <a:r>
+              <a:rPr sz="2000" b="1" spc="-20" dirty="0">
+                <a:solidFill>
+                  <a:srgbClr val="CC0000"/>
+                </a:solidFill>
+                <a:latin typeface="Lantinghei SC Heavy"/>
+                <a:cs typeface="Lantinghei SC Heavy"/>
+              </a:rPr>
+              <a:t>有</a:t>
+            </a:r>
+            <a:r>
+              <a:rPr sz="1600" b="1" spc="-20" dirty="0">
+                <a:solidFill>
+                  <a:srgbClr val="3333CC"/>
+                </a:solidFill>
+                <a:latin typeface="Lantinghei SC Heavy"/>
+                <a:cs typeface="Lantinghei SC Heavy"/>
+              </a:rPr>
+              <a:t>重复的</a:t>
+            </a:r>
+            <a:endParaRPr sz="1600">
+              <a:latin typeface="Lantinghei SC Heavy"/>
+              <a:cs typeface="Lantinghei SC Heavy"/>
+            </a:endParaRPr>
+          </a:p>
+        </p:txBody>
+      </p:sp>
+      <p:sp>
+        <p:nvSpPr>
+          <p:cNvPr id="33" name="object 32">
+            <a:extLst>
+              <a:ext uri="{FF2B5EF4-FFF2-40B4-BE49-F238E27FC236}">
+                <a16:creationId xmlns:a16="http://schemas.microsoft.com/office/drawing/2014/main" id="{85405236-1915-6251-B819-6FDB5F73A5C3}"/>
+              </a:ext>
+            </a:extLst>
+          </p:cNvPr>
+          <p:cNvSpPr txBox="1"/>
+          <p:nvPr/>
+        </p:nvSpPr>
+        <p:spPr>
+          <a:xfrm>
+            <a:off x="8153399" y="5671729"/>
+            <a:ext cx="1499235" cy="819785"/>
+          </a:xfrm>
+          <a:prstGeom prst="rect">
+            <a:avLst/>
+          </a:prstGeom>
+        </p:spPr>
+        <p:txBody>
+          <a:bodyPr vert="horz" wrap="square" lIns="0" tIns="10795" rIns="0" bIns="0" rtlCol="0">
+            <a:spAutoFit/>
+          </a:bodyPr>
+          <a:lstStyle/>
+          <a:p>
+            <a:pPr marL="37465" marR="5080" indent="-25400" algn="just">
+              <a:lnSpc>
+                <a:spcPct val="100400"/>
+              </a:lnSpc>
+              <a:spcBef>
+                <a:spcPts val="85"/>
+              </a:spcBef>
+            </a:pPr>
+            <a:r>
+              <a:rPr sz="1600" b="1" spc="-5" dirty="0">
+                <a:solidFill>
+                  <a:srgbClr val="3333CC"/>
+                </a:solidFill>
+                <a:latin typeface="Lantinghei SC Heavy"/>
+                <a:cs typeface="Lantinghei SC Heavy"/>
+              </a:rPr>
+              <a:t>主文件</a:t>
+            </a:r>
+            <a:r>
+              <a:rPr sz="2000" b="1" spc="-20" dirty="0">
+                <a:solidFill>
+                  <a:srgbClr val="CC0000"/>
+                </a:solidFill>
+                <a:latin typeface="Lantinghei SC Heavy"/>
+                <a:cs typeface="Lantinghei SC Heavy"/>
+              </a:rPr>
+              <a:t>未</a:t>
+            </a:r>
+            <a:r>
+              <a:rPr sz="1600" b="1" spc="-20" dirty="0">
+                <a:solidFill>
+                  <a:srgbClr val="3333CC"/>
+                </a:solidFill>
+                <a:latin typeface="Lantinghei SC Heavy"/>
+                <a:cs typeface="Lantinghei SC Heavy"/>
+              </a:rPr>
+              <a:t>按索引字段排序且索引字段不是候选键</a:t>
+            </a:r>
+            <a:endParaRPr sz="1600">
+              <a:latin typeface="Lantinghei SC Heavy"/>
+              <a:cs typeface="Lantinghei SC Heavy"/>
+            </a:endParaRPr>
+          </a:p>
+        </p:txBody>
+      </p:sp>
+      <p:sp>
+        <p:nvSpPr>
+          <p:cNvPr id="34" name="object 33">
+            <a:extLst>
+              <a:ext uri="{FF2B5EF4-FFF2-40B4-BE49-F238E27FC236}">
+                <a16:creationId xmlns:a16="http://schemas.microsoft.com/office/drawing/2014/main" id="{2CCC0BB7-DC40-8513-C3AE-4CC5B8FF7D77}"/>
+              </a:ext>
+            </a:extLst>
+          </p:cNvPr>
+          <p:cNvSpPr txBox="1"/>
+          <p:nvPr/>
+        </p:nvSpPr>
+        <p:spPr>
+          <a:xfrm>
+            <a:off x="5813297" y="2293784"/>
+            <a:ext cx="1448435" cy="758825"/>
+          </a:xfrm>
+          <a:prstGeom prst="rect">
+            <a:avLst/>
+          </a:prstGeom>
+        </p:spPr>
+        <p:txBody>
+          <a:bodyPr vert="horz" wrap="square" lIns="0" tIns="12700" rIns="0" bIns="0" rtlCol="0">
+            <a:spAutoFit/>
+          </a:bodyPr>
+          <a:lstStyle/>
+          <a:p>
+            <a:pPr marL="12700" marR="5080" algn="ctr">
+              <a:lnSpc>
+                <a:spcPct val="100000"/>
+              </a:lnSpc>
+              <a:spcBef>
+                <a:spcPts val="100"/>
+              </a:spcBef>
+            </a:pPr>
+            <a:r>
+              <a:rPr sz="1600" b="1" spc="-20" dirty="0">
+                <a:solidFill>
+                  <a:srgbClr val="3333CC"/>
+                </a:solidFill>
+                <a:latin typeface="Lantinghei SC Heavy"/>
+                <a:cs typeface="Lantinghei SC Heavy"/>
+              </a:rPr>
+              <a:t>引入指针桶处理非候选键索引的多记录情况</a:t>
+            </a:r>
+            <a:endParaRPr sz="1600">
+              <a:latin typeface="Lantinghei SC Heavy"/>
+              <a:cs typeface="Lantinghei SC Heavy"/>
+            </a:endParaRPr>
+          </a:p>
+        </p:txBody>
+      </p:sp>
+      <p:grpSp>
+        <p:nvGrpSpPr>
+          <p:cNvPr id="35" name="object 34">
+            <a:extLst>
+              <a:ext uri="{FF2B5EF4-FFF2-40B4-BE49-F238E27FC236}">
+                <a16:creationId xmlns:a16="http://schemas.microsoft.com/office/drawing/2014/main" id="{7E2D7D50-3638-CC76-4842-2C25F73BCD46}"/>
+              </a:ext>
+            </a:extLst>
+          </p:cNvPr>
+          <p:cNvGrpSpPr/>
+          <p:nvPr/>
+        </p:nvGrpSpPr>
+        <p:grpSpPr>
+          <a:xfrm>
+            <a:off x="7983212" y="2506129"/>
+            <a:ext cx="1830705" cy="998219"/>
+            <a:chOff x="7542148" y="3065526"/>
+            <a:chExt cx="1830705" cy="998219"/>
+          </a:xfrm>
+        </p:grpSpPr>
+        <p:sp>
+          <p:nvSpPr>
+            <p:cNvPr id="36" name="object 35">
+              <a:extLst>
+                <a:ext uri="{FF2B5EF4-FFF2-40B4-BE49-F238E27FC236}">
+                  <a16:creationId xmlns:a16="http://schemas.microsoft.com/office/drawing/2014/main" id="{E8AEBBBC-4C50-6D0F-1DEB-DDF2C24391C0}"/>
+                </a:ext>
+              </a:extLst>
+            </p:cNvPr>
+            <p:cNvSpPr/>
+            <p:nvPr/>
+          </p:nvSpPr>
+          <p:spPr>
+            <a:xfrm>
+              <a:off x="7542148" y="3065526"/>
+              <a:ext cx="1830705" cy="998219"/>
+            </a:xfrm>
+            <a:custGeom>
+              <a:avLst/>
+              <a:gdLst/>
+              <a:ahLst/>
+              <a:cxnLst/>
+              <a:rect l="l" t="t" r="r" b="b"/>
+              <a:pathLst>
+                <a:path w="1830704" h="998220">
+                  <a:moveTo>
+                    <a:pt x="1830323" y="832103"/>
+                  </a:moveTo>
+                  <a:lnTo>
+                    <a:pt x="1830323" y="166115"/>
+                  </a:lnTo>
+                  <a:lnTo>
+                    <a:pt x="1824422" y="121796"/>
+                  </a:lnTo>
+                  <a:lnTo>
+                    <a:pt x="1807746" y="82070"/>
+                  </a:lnTo>
+                  <a:lnTo>
+                    <a:pt x="1781841" y="48482"/>
+                  </a:lnTo>
+                  <a:lnTo>
+                    <a:pt x="1748253" y="22577"/>
+                  </a:lnTo>
+                  <a:lnTo>
+                    <a:pt x="1708527" y="5901"/>
+                  </a:lnTo>
+                  <a:lnTo>
+                    <a:pt x="1664208" y="0"/>
+                  </a:lnTo>
+                  <a:lnTo>
+                    <a:pt x="166877" y="0"/>
+                  </a:lnTo>
+                  <a:lnTo>
+                    <a:pt x="122502" y="5901"/>
+                  </a:lnTo>
+                  <a:lnTo>
+                    <a:pt x="82634" y="22577"/>
+                  </a:lnTo>
+                  <a:lnTo>
+                    <a:pt x="48863" y="48482"/>
+                  </a:lnTo>
+                  <a:lnTo>
+                    <a:pt x="22775" y="82070"/>
+                  </a:lnTo>
+                  <a:lnTo>
+                    <a:pt x="5958" y="121796"/>
+                  </a:lnTo>
+                  <a:lnTo>
+                    <a:pt x="0" y="166116"/>
+                  </a:lnTo>
+                  <a:lnTo>
+                    <a:pt x="0" y="832104"/>
+                  </a:lnTo>
+                  <a:lnTo>
+                    <a:pt x="5958" y="876158"/>
+                  </a:lnTo>
+                  <a:lnTo>
+                    <a:pt x="22775" y="915811"/>
+                  </a:lnTo>
+                  <a:lnTo>
+                    <a:pt x="48863" y="949451"/>
+                  </a:lnTo>
+                  <a:lnTo>
+                    <a:pt x="82634" y="975472"/>
+                  </a:lnTo>
+                  <a:lnTo>
+                    <a:pt x="122502" y="992265"/>
+                  </a:lnTo>
+                  <a:lnTo>
+                    <a:pt x="166877" y="998219"/>
+                  </a:lnTo>
+                  <a:lnTo>
+                    <a:pt x="1664208" y="998219"/>
+                  </a:lnTo>
+                  <a:lnTo>
+                    <a:pt x="1708527" y="992265"/>
+                  </a:lnTo>
+                  <a:lnTo>
+                    <a:pt x="1748253" y="975472"/>
+                  </a:lnTo>
+                  <a:lnTo>
+                    <a:pt x="1781841" y="949451"/>
+                  </a:lnTo>
+                  <a:lnTo>
+                    <a:pt x="1807746" y="915811"/>
+                  </a:lnTo>
+                  <a:lnTo>
+                    <a:pt x="1824422" y="876158"/>
+                  </a:lnTo>
+                  <a:lnTo>
+                    <a:pt x="1830323" y="832103"/>
+                  </a:lnTo>
+                  <a:close/>
+                </a:path>
+              </a:pathLst>
+            </a:custGeom>
+            <a:solidFill>
+              <a:srgbClr val="3333CC"/>
+            </a:solidFill>
+          </p:spPr>
+          <p:txBody>
+            <a:bodyPr wrap="square" lIns="0" tIns="0" rIns="0" bIns="0" rtlCol="0"/>
+            <a:lstStyle/>
+            <a:p>
+              <a:endParaRPr/>
+            </a:p>
+          </p:txBody>
+        </p:sp>
+        <p:sp>
+          <p:nvSpPr>
+            <p:cNvPr id="37" name="object 36">
+              <a:extLst>
+                <a:ext uri="{FF2B5EF4-FFF2-40B4-BE49-F238E27FC236}">
+                  <a16:creationId xmlns:a16="http://schemas.microsoft.com/office/drawing/2014/main" id="{942DC501-4A9C-9887-74F7-55560A825E77}"/>
+                </a:ext>
+              </a:extLst>
+            </p:cNvPr>
+            <p:cNvSpPr/>
+            <p:nvPr/>
+          </p:nvSpPr>
+          <p:spPr>
+            <a:xfrm>
+              <a:off x="7613789" y="3128772"/>
+              <a:ext cx="1697355" cy="871855"/>
+            </a:xfrm>
+            <a:custGeom>
+              <a:avLst/>
+              <a:gdLst/>
+              <a:ahLst/>
+              <a:cxnLst/>
+              <a:rect l="l" t="t" r="r" b="b"/>
+              <a:pathLst>
+                <a:path w="1697354" h="871854">
+                  <a:moveTo>
+                    <a:pt x="1696974" y="726185"/>
+                  </a:moveTo>
+                  <a:lnTo>
+                    <a:pt x="1696974" y="145541"/>
+                  </a:lnTo>
+                  <a:lnTo>
+                    <a:pt x="1689591" y="99389"/>
+                  </a:lnTo>
+                  <a:lnTo>
+                    <a:pt x="1669005" y="59417"/>
+                  </a:lnTo>
+                  <a:lnTo>
+                    <a:pt x="1637556" y="27968"/>
+                  </a:lnTo>
+                  <a:lnTo>
+                    <a:pt x="1597584" y="7382"/>
+                  </a:lnTo>
+                  <a:lnTo>
+                    <a:pt x="1551432" y="0"/>
+                  </a:lnTo>
+                  <a:lnTo>
+                    <a:pt x="145542" y="0"/>
+                  </a:lnTo>
+                  <a:lnTo>
+                    <a:pt x="99389" y="7382"/>
+                  </a:lnTo>
+                  <a:lnTo>
+                    <a:pt x="59417" y="27968"/>
+                  </a:lnTo>
+                  <a:lnTo>
+                    <a:pt x="27968" y="59417"/>
+                  </a:lnTo>
+                  <a:lnTo>
+                    <a:pt x="7382" y="99389"/>
+                  </a:lnTo>
+                  <a:lnTo>
+                    <a:pt x="0" y="145542"/>
+                  </a:lnTo>
+                  <a:lnTo>
+                    <a:pt x="0" y="726186"/>
+                  </a:lnTo>
+                  <a:lnTo>
+                    <a:pt x="7382" y="772046"/>
+                  </a:lnTo>
+                  <a:lnTo>
+                    <a:pt x="27968" y="811981"/>
+                  </a:lnTo>
+                  <a:lnTo>
+                    <a:pt x="59417" y="843540"/>
+                  </a:lnTo>
+                  <a:lnTo>
+                    <a:pt x="99389" y="864272"/>
+                  </a:lnTo>
+                  <a:lnTo>
+                    <a:pt x="145542" y="871728"/>
+                  </a:lnTo>
+                  <a:lnTo>
+                    <a:pt x="1551432" y="871728"/>
+                  </a:lnTo>
+                  <a:lnTo>
+                    <a:pt x="1597584" y="864272"/>
+                  </a:lnTo>
+                  <a:lnTo>
+                    <a:pt x="1637556" y="843540"/>
+                  </a:lnTo>
+                  <a:lnTo>
+                    <a:pt x="1669005" y="811981"/>
+                  </a:lnTo>
+                  <a:lnTo>
+                    <a:pt x="1689591" y="772046"/>
+                  </a:lnTo>
+                  <a:lnTo>
+                    <a:pt x="1696974" y="726185"/>
+                  </a:lnTo>
+                  <a:close/>
+                </a:path>
+              </a:pathLst>
+            </a:custGeom>
+            <a:solidFill>
+              <a:srgbClr val="FFFF66"/>
+            </a:solidFill>
+          </p:spPr>
+          <p:txBody>
+            <a:bodyPr wrap="square" lIns="0" tIns="0" rIns="0" bIns="0" rtlCol="0"/>
+            <a:lstStyle/>
+            <a:p>
+              <a:endParaRPr/>
+            </a:p>
+          </p:txBody>
+        </p:sp>
+        <p:sp>
+          <p:nvSpPr>
+            <p:cNvPr id="38" name="object 37">
+              <a:extLst>
+                <a:ext uri="{FF2B5EF4-FFF2-40B4-BE49-F238E27FC236}">
+                  <a16:creationId xmlns:a16="http://schemas.microsoft.com/office/drawing/2014/main" id="{708EEC3C-C069-CA3C-6054-426AB3640303}"/>
+                </a:ext>
+              </a:extLst>
+            </p:cNvPr>
+            <p:cNvSpPr/>
+            <p:nvPr/>
+          </p:nvSpPr>
+          <p:spPr>
+            <a:xfrm>
+              <a:off x="7613789" y="3128772"/>
+              <a:ext cx="1697355" cy="871855"/>
+            </a:xfrm>
+            <a:custGeom>
+              <a:avLst/>
+              <a:gdLst/>
+              <a:ahLst/>
+              <a:cxnLst/>
+              <a:rect l="l" t="t" r="r" b="b"/>
+              <a:pathLst>
+                <a:path w="1697354" h="871854">
+                  <a:moveTo>
+                    <a:pt x="145542" y="0"/>
+                  </a:moveTo>
+                  <a:lnTo>
+                    <a:pt x="99389" y="7382"/>
+                  </a:lnTo>
+                  <a:lnTo>
+                    <a:pt x="59417" y="27968"/>
+                  </a:lnTo>
+                  <a:lnTo>
+                    <a:pt x="27968" y="59417"/>
+                  </a:lnTo>
+                  <a:lnTo>
+                    <a:pt x="7382" y="99389"/>
+                  </a:lnTo>
+                  <a:lnTo>
+                    <a:pt x="0" y="145542"/>
+                  </a:lnTo>
+                  <a:lnTo>
+                    <a:pt x="0" y="726186"/>
+                  </a:lnTo>
+                  <a:lnTo>
+                    <a:pt x="7382" y="772046"/>
+                  </a:lnTo>
+                  <a:lnTo>
+                    <a:pt x="27968" y="811981"/>
+                  </a:lnTo>
+                  <a:lnTo>
+                    <a:pt x="59417" y="843540"/>
+                  </a:lnTo>
+                  <a:lnTo>
+                    <a:pt x="99389" y="864272"/>
+                  </a:lnTo>
+                  <a:lnTo>
+                    <a:pt x="145542" y="871728"/>
+                  </a:lnTo>
+                  <a:lnTo>
+                    <a:pt x="1551432" y="871728"/>
+                  </a:lnTo>
+                  <a:lnTo>
+                    <a:pt x="1597584" y="864272"/>
+                  </a:lnTo>
+                  <a:lnTo>
+                    <a:pt x="1637556" y="843540"/>
+                  </a:lnTo>
+                  <a:lnTo>
+                    <a:pt x="1669005" y="811981"/>
+                  </a:lnTo>
+                  <a:lnTo>
+                    <a:pt x="1689591" y="772046"/>
+                  </a:lnTo>
+                  <a:lnTo>
+                    <a:pt x="1696974" y="726185"/>
+                  </a:lnTo>
+                  <a:lnTo>
+                    <a:pt x="1696974" y="145541"/>
+                  </a:lnTo>
+                  <a:lnTo>
+                    <a:pt x="1689591" y="99389"/>
+                  </a:lnTo>
+                  <a:lnTo>
+                    <a:pt x="1669005" y="59417"/>
+                  </a:lnTo>
+                  <a:lnTo>
+                    <a:pt x="1637556" y="27968"/>
+                  </a:lnTo>
+                  <a:lnTo>
+                    <a:pt x="1597584" y="7382"/>
+                  </a:lnTo>
+                  <a:lnTo>
+                    <a:pt x="1551432" y="0"/>
+                  </a:lnTo>
+                  <a:lnTo>
+                    <a:pt x="145542" y="0"/>
+                  </a:lnTo>
+                  <a:close/>
+                </a:path>
+              </a:pathLst>
+            </a:custGeom>
+            <a:ln w="28575">
+              <a:solidFill>
+                <a:srgbClr val="FFFFFF"/>
+              </a:solidFill>
+            </a:ln>
+          </p:spPr>
+          <p:txBody>
+            <a:bodyPr wrap="square" lIns="0" tIns="0" rIns="0" bIns="0" rtlCol="0"/>
+            <a:lstStyle/>
+            <a:p>
+              <a:endParaRPr/>
+            </a:p>
+          </p:txBody>
+        </p:sp>
+      </p:grpSp>
+      <p:sp>
+        <p:nvSpPr>
+          <p:cNvPr id="39" name="object 38">
+            <a:extLst>
+              <a:ext uri="{FF2B5EF4-FFF2-40B4-BE49-F238E27FC236}">
+                <a16:creationId xmlns:a16="http://schemas.microsoft.com/office/drawing/2014/main" id="{CBD3B78C-F450-DBA2-9085-3C0351534005}"/>
+              </a:ext>
+            </a:extLst>
+          </p:cNvPr>
+          <p:cNvSpPr txBox="1"/>
+          <p:nvPr/>
+        </p:nvSpPr>
+        <p:spPr>
+          <a:xfrm>
+            <a:off x="8157971" y="2617635"/>
+            <a:ext cx="1499235" cy="819150"/>
+          </a:xfrm>
+          <a:prstGeom prst="rect">
+            <a:avLst/>
+          </a:prstGeom>
+        </p:spPr>
+        <p:txBody>
+          <a:bodyPr vert="horz" wrap="square" lIns="0" tIns="12065" rIns="0" bIns="0" rtlCol="0">
+            <a:spAutoFit/>
+          </a:bodyPr>
+          <a:lstStyle/>
+          <a:p>
+            <a:pPr marL="37465" marR="5080" indent="-25400" algn="just">
+              <a:lnSpc>
+                <a:spcPct val="100000"/>
+              </a:lnSpc>
+              <a:spcBef>
+                <a:spcPts val="95"/>
+              </a:spcBef>
+            </a:pPr>
+            <a:r>
+              <a:rPr sz="1600" b="1" spc="-5" dirty="0">
+                <a:solidFill>
+                  <a:srgbClr val="3333CC"/>
+                </a:solidFill>
+                <a:latin typeface="Lantinghei SC Heavy"/>
+                <a:cs typeface="Lantinghei SC Heavy"/>
+              </a:rPr>
+              <a:t>主文件</a:t>
+            </a:r>
+            <a:r>
+              <a:rPr sz="2000" b="1" spc="-20" dirty="0">
+                <a:solidFill>
+                  <a:srgbClr val="CC0000"/>
+                </a:solidFill>
+                <a:latin typeface="Lantinghei SC Heavy"/>
+                <a:cs typeface="Lantinghei SC Heavy"/>
+              </a:rPr>
+              <a:t>未</a:t>
+            </a:r>
+            <a:r>
+              <a:rPr sz="1600" b="1" spc="-20" dirty="0">
+                <a:solidFill>
+                  <a:srgbClr val="3333CC"/>
+                </a:solidFill>
+                <a:latin typeface="Lantinghei SC Heavy"/>
+                <a:cs typeface="Lantinghei SC Heavy"/>
+              </a:rPr>
+              <a:t>按索引字段排序且索引字段不是候选键</a:t>
+            </a:r>
+            <a:endParaRPr sz="1600">
+              <a:latin typeface="Lantinghei SC Heavy"/>
+              <a:cs typeface="Lantinghei SC Heavy"/>
+            </a:endParaRPr>
+          </a:p>
+        </p:txBody>
+      </p:sp>
+    </p:spTree>
+    <p:extLst>
+      <p:ext uri="{BB962C8B-B14F-4D97-AF65-F5344CB8AC3E}">
+        <p14:creationId xmlns:p14="http://schemas.microsoft.com/office/powerpoint/2010/main" val="1904439712"/>
+      </p:ext>
+    </p:extLst>
+  </p:cSld>
+  <p:clrMapOvr>
+    <a:masterClrMapping/>
+  </p:clrMapOvr>
+</p:sld>
+</file>
+
+<file path=ppt/slides/slide9.xml><?xml version="1.0" encoding="utf-8"?>
+<p:sld xmlns:a="http://schemas.openxmlformats.org/drawingml/2006/main" xmlns:r="http://schemas.openxmlformats.org/officeDocument/2006/relationships" xmlns:p="http://schemas.openxmlformats.org/presentationml/2006/main">
+  <p:cSld>
+    <p:spTree>
+      <p:nvGrpSpPr>
+        <p:cNvPr id="1" name=""/>
+        <p:cNvGrpSpPr/>
+        <p:nvPr/>
+      </p:nvGrpSpPr>
+      <p:grpSpPr>
+        <a:xfrm>
+          <a:off x="0" y="0"/>
+          <a:ext cx="0" cy="0"/>
+          <a:chOff x="0" y="0"/>
+          <a:chExt cx="0" cy="0"/>
+        </a:xfrm>
+      </p:grpSpPr>
+    </p:spTree>
+    <p:extLst>
+      <p:ext uri="{BB962C8B-B14F-4D97-AF65-F5344CB8AC3E}">
+        <p14:creationId xmlns:p14="http://schemas.microsoft.com/office/powerpoint/2010/main" val="4179245825"/>
       </p:ext>
     </p:extLst>
   </p:cSld>

--- a/computer/database/database.pptx
+++ b/computer/database/database.pptx
@@ -5,7 +5,7 @@
     <p:sldMasterId id="2147483648" r:id="rId1"/>
   </p:sldMasterIdLst>
   <p:notesMasterIdLst>
-    <p:notesMasterId r:id="rId14"/>
+    <p:notesMasterId r:id="rId13"/>
   </p:notesMasterIdLst>
   <p:sldIdLst>
     <p:sldId id="256" r:id="rId2"/>
@@ -16,10 +16,9 @@
     <p:sldId id="261" r:id="rId7"/>
     <p:sldId id="262" r:id="rId8"/>
     <p:sldId id="263" r:id="rId9"/>
-    <p:sldId id="264" r:id="rId10"/>
-    <p:sldId id="265" r:id="rId11"/>
-    <p:sldId id="266" r:id="rId12"/>
-    <p:sldId id="267" r:id="rId13"/>
+    <p:sldId id="268" r:id="rId10"/>
+    <p:sldId id="266" r:id="rId11"/>
+    <p:sldId id="267" r:id="rId12"/>
   </p:sldIdLst>
   <p:sldSz cx="12192000" cy="6858000"/>
   <p:notesSz cx="6858000" cy="9144000"/>
@@ -208,7 +207,7 @@
           <a:p>
             <a:fld id="{4B34EB50-FBFF-D34A-A715-7643877794B6}" type="datetimeFigureOut">
               <a:rPr kumimoji="1" lang="zh-CN" altLang="en-US" smtClean="0"/>
-              <a:t>2026/7/6</a:t>
+              <a:t>2026/7/8</a:t>
             </a:fld>
             <a:endParaRPr kumimoji="1" lang="zh-CN" altLang="en-US"/>
           </a:p>
@@ -790,7 +789,7 @@
           <a:p>
             <a:fld id="{CC815592-B1F7-8B46-801D-F591E835BC0C}" type="datetimeFigureOut">
               <a:rPr kumimoji="1" lang="zh-CN" altLang="en-US" smtClean="0"/>
-              <a:t>2026/7/6</a:t>
+              <a:t>2026/7/8</a:t>
             </a:fld>
             <a:endParaRPr kumimoji="1" lang="zh-CN" altLang="en-US"/>
           </a:p>
@@ -988,7 +987,7 @@
           <a:p>
             <a:fld id="{CC815592-B1F7-8B46-801D-F591E835BC0C}" type="datetimeFigureOut">
               <a:rPr kumimoji="1" lang="zh-CN" altLang="en-US" smtClean="0"/>
-              <a:t>2026/7/7</a:t>
+              <a:t>2026/7/8</a:t>
             </a:fld>
             <a:endParaRPr kumimoji="1" lang="zh-CN" altLang="en-US"/>
           </a:p>
@@ -1196,7 +1195,7 @@
           <a:p>
             <a:fld id="{CC815592-B1F7-8B46-801D-F591E835BC0C}" type="datetimeFigureOut">
               <a:rPr kumimoji="1" lang="zh-CN" altLang="en-US" smtClean="0"/>
-              <a:t>2026/7/7</a:t>
+              <a:t>2026/7/8</a:t>
             </a:fld>
             <a:endParaRPr kumimoji="1" lang="zh-CN" altLang="en-US"/>
           </a:p>
@@ -1394,7 +1393,7 @@
           <a:p>
             <a:fld id="{CC815592-B1F7-8B46-801D-F591E835BC0C}" type="datetimeFigureOut">
               <a:rPr kumimoji="1" lang="zh-CN" altLang="en-US" smtClean="0"/>
-              <a:t>2026/7/6</a:t>
+              <a:t>2026/7/8</a:t>
             </a:fld>
             <a:endParaRPr kumimoji="1" lang="zh-CN" altLang="en-US"/>
           </a:p>
@@ -1669,7 +1668,7 @@
           <a:p>
             <a:fld id="{CC815592-B1F7-8B46-801D-F591E835BC0C}" type="datetimeFigureOut">
               <a:rPr kumimoji="1" lang="zh-CN" altLang="en-US" smtClean="0"/>
-              <a:t>2026/7/7</a:t>
+              <a:t>2026/7/8</a:t>
             </a:fld>
             <a:endParaRPr kumimoji="1" lang="zh-CN" altLang="en-US"/>
           </a:p>
@@ -1934,7 +1933,7 @@
           <a:p>
             <a:fld id="{CC815592-B1F7-8B46-801D-F591E835BC0C}" type="datetimeFigureOut">
               <a:rPr kumimoji="1" lang="zh-CN" altLang="en-US" smtClean="0"/>
-              <a:t>2026/7/7</a:t>
+              <a:t>2026/7/8</a:t>
             </a:fld>
             <a:endParaRPr kumimoji="1" lang="zh-CN" altLang="en-US"/>
           </a:p>
@@ -2346,7 +2345,7 @@
           <a:p>
             <a:fld id="{CC815592-B1F7-8B46-801D-F591E835BC0C}" type="datetimeFigureOut">
               <a:rPr kumimoji="1" lang="zh-CN" altLang="en-US" smtClean="0"/>
-              <a:t>2026/7/7</a:t>
+              <a:t>2026/7/8</a:t>
             </a:fld>
             <a:endParaRPr kumimoji="1" lang="zh-CN" altLang="en-US"/>
           </a:p>
@@ -2487,7 +2486,7 @@
           <a:p>
             <a:fld id="{CC815592-B1F7-8B46-801D-F591E835BC0C}" type="datetimeFigureOut">
               <a:rPr kumimoji="1" lang="zh-CN" altLang="en-US" smtClean="0"/>
-              <a:t>2026/7/7</a:t>
+              <a:t>2026/7/8</a:t>
             </a:fld>
             <a:endParaRPr kumimoji="1" lang="zh-CN" altLang="en-US"/>
           </a:p>
@@ -2600,7 +2599,7 @@
           <a:p>
             <a:fld id="{CC815592-B1F7-8B46-801D-F591E835BC0C}" type="datetimeFigureOut">
               <a:rPr kumimoji="1" lang="zh-CN" altLang="en-US" smtClean="0"/>
-              <a:t>2026/7/7</a:t>
+              <a:t>2026/7/8</a:t>
             </a:fld>
             <a:endParaRPr kumimoji="1" lang="zh-CN" altLang="en-US"/>
           </a:p>
@@ -2911,7 +2910,7 @@
           <a:p>
             <a:fld id="{CC815592-B1F7-8B46-801D-F591E835BC0C}" type="datetimeFigureOut">
               <a:rPr kumimoji="1" lang="zh-CN" altLang="en-US" smtClean="0"/>
-              <a:t>2026/7/7</a:t>
+              <a:t>2026/7/8</a:t>
             </a:fld>
             <a:endParaRPr kumimoji="1" lang="zh-CN" altLang="en-US"/>
           </a:p>
@@ -3199,7 +3198,7 @@
           <a:p>
             <a:fld id="{CC815592-B1F7-8B46-801D-F591E835BC0C}" type="datetimeFigureOut">
               <a:rPr kumimoji="1" lang="zh-CN" altLang="en-US" smtClean="0"/>
-              <a:t>2026/7/7</a:t>
+              <a:t>2026/7/8</a:t>
             </a:fld>
             <a:endParaRPr kumimoji="1" lang="zh-CN" altLang="en-US"/>
           </a:p>
@@ -3440,7 +3439,7 @@
           <a:p>
             <a:fld id="{CC815592-B1F7-8B46-801D-F591E835BC0C}" type="datetimeFigureOut">
               <a:rPr kumimoji="1" lang="zh-CN" altLang="en-US" smtClean="0"/>
-              <a:t>2026/7/6</a:t>
+              <a:t>2026/7/8</a:t>
             </a:fld>
             <a:endParaRPr kumimoji="1" lang="zh-CN" altLang="en-US"/>
           </a:p>
@@ -20901,42 +20900,6 @@
         <p:cNvPr id="1" name="">
           <a:extLst>
             <a:ext uri="{FF2B5EF4-FFF2-40B4-BE49-F238E27FC236}">
-              <a16:creationId xmlns:a16="http://schemas.microsoft.com/office/drawing/2014/main" id="{414B79CD-6271-6862-9087-9BECBF12180B}"/>
-            </a:ext>
-          </a:extLst>
-        </p:cNvPr>
-        <p:cNvGrpSpPr/>
-        <p:nvPr/>
-      </p:nvGrpSpPr>
-      <p:grpSpPr>
-        <a:xfrm>
-          <a:off x="0" y="0"/>
-          <a:ext cx="0" cy="0"/>
-          <a:chOff x="0" y="0"/>
-          <a:chExt cx="0" cy="0"/>
-        </a:xfrm>
-      </p:grpSpPr>
-    </p:spTree>
-    <p:extLst>
-      <p:ext uri="{BB962C8B-B14F-4D97-AF65-F5344CB8AC3E}">
-        <p14:creationId xmlns:p14="http://schemas.microsoft.com/office/powerpoint/2010/main" val="4112531508"/>
-      </p:ext>
-    </p:extLst>
-  </p:cSld>
-  <p:clrMapOvr>
-    <a:masterClrMapping/>
-  </p:clrMapOvr>
-</p:sld>
-</file>
-
-<file path=ppt/slides/slide11.xml><?xml version="1.0" encoding="utf-8"?>
-<p:sld xmlns:a="http://schemas.openxmlformats.org/drawingml/2006/main" xmlns:r="http://schemas.openxmlformats.org/officeDocument/2006/relationships" xmlns:p="http://schemas.openxmlformats.org/presentationml/2006/main">
-  <p:cSld>
-    <p:spTree>
-      <p:nvGrpSpPr>
-        <p:cNvPr id="1" name="">
-          <a:extLst>
-            <a:ext uri="{FF2B5EF4-FFF2-40B4-BE49-F238E27FC236}">
               <a16:creationId xmlns:a16="http://schemas.microsoft.com/office/drawing/2014/main" id="{E542D565-7CAE-55D0-B81F-CDF72A31DA10}"/>
             </a:ext>
           </a:extLst>
@@ -20965,7 +20928,7 @@
 </p:sld>
 </file>
 
-<file path=ppt/slides/slide12.xml><?xml version="1.0" encoding="utf-8"?>
+<file path=ppt/slides/slide11.xml><?xml version="1.0" encoding="utf-8"?>
 <p:sld xmlns:a="http://schemas.openxmlformats.org/drawingml/2006/main" xmlns:r="http://schemas.openxmlformats.org/officeDocument/2006/relationships" xmlns:p="http://schemas.openxmlformats.org/presentationml/2006/main">
   <p:cSld>
     <p:spTree>
@@ -33738,10 +33701,1385 @@
           <a:chExt cx="0" cy="0"/>
         </a:xfrm>
       </p:grpSpPr>
+      <p:grpSp>
+        <p:nvGrpSpPr>
+          <p:cNvPr id="21" name="组合 20">
+            <a:extLst>
+              <a:ext uri="{FF2B5EF4-FFF2-40B4-BE49-F238E27FC236}">
+                <a16:creationId xmlns:a16="http://schemas.microsoft.com/office/drawing/2014/main" id="{E844FF3D-313B-8A34-2836-83CADE112FA5}"/>
+              </a:ext>
+            </a:extLst>
+          </p:cNvPr>
+          <p:cNvGrpSpPr/>
+          <p:nvPr/>
+        </p:nvGrpSpPr>
+        <p:grpSpPr>
+          <a:xfrm>
+            <a:off x="130565" y="103445"/>
+            <a:ext cx="6375406" cy="3072532"/>
+            <a:chOff x="2008003" y="3994509"/>
+            <a:chExt cx="6375406" cy="3072532"/>
+          </a:xfrm>
+        </p:grpSpPr>
+        <p:pic>
+          <p:nvPicPr>
+            <p:cNvPr id="7" name="object 5">
+              <a:extLst>
+                <a:ext uri="{FF2B5EF4-FFF2-40B4-BE49-F238E27FC236}">
+                  <a16:creationId xmlns:a16="http://schemas.microsoft.com/office/drawing/2014/main" id="{D55A298D-92D9-7014-5EBC-F8AB1A842743}"/>
+                </a:ext>
+              </a:extLst>
+            </p:cNvPr>
+            <p:cNvPicPr/>
+            <p:nvPr/>
+          </p:nvPicPr>
+          <p:blipFill>
+            <a:blip r:embed="rId2" cstate="print"/>
+            <a:stretch>
+              <a:fillRect/>
+            </a:stretch>
+          </p:blipFill>
+          <p:spPr>
+            <a:xfrm>
+              <a:off x="5392559" y="4594097"/>
+              <a:ext cx="2990850" cy="195071"/>
+            </a:xfrm>
+            <a:prstGeom prst="rect">
+              <a:avLst/>
+            </a:prstGeom>
+          </p:spPr>
+        </p:pic>
+        <p:grpSp>
+          <p:nvGrpSpPr>
+            <p:cNvPr id="8" name="object 6">
+              <a:extLst>
+                <a:ext uri="{FF2B5EF4-FFF2-40B4-BE49-F238E27FC236}">
+                  <a16:creationId xmlns:a16="http://schemas.microsoft.com/office/drawing/2014/main" id="{758B4C40-6950-9499-2800-7630069B6B3F}"/>
+                </a:ext>
+              </a:extLst>
+            </p:cNvPr>
+            <p:cNvGrpSpPr/>
+            <p:nvPr/>
+          </p:nvGrpSpPr>
+          <p:grpSpPr>
+            <a:xfrm>
+              <a:off x="2689745" y="4927091"/>
+              <a:ext cx="5689600" cy="2139950"/>
+              <a:chOff x="2689745" y="4927091"/>
+              <a:chExt cx="5689600" cy="2139950"/>
+            </a:xfrm>
+          </p:grpSpPr>
+          <p:pic>
+            <p:nvPicPr>
+              <p:cNvPr id="9" name="object 7">
+                <a:extLst>
+                  <a:ext uri="{FF2B5EF4-FFF2-40B4-BE49-F238E27FC236}">
+                    <a16:creationId xmlns:a16="http://schemas.microsoft.com/office/drawing/2014/main" id="{6E576E6E-1C0E-5DCE-C4DB-41701174DDF4}"/>
+                  </a:ext>
+                </a:extLst>
+              </p:cNvPr>
+              <p:cNvPicPr/>
+              <p:nvPr/>
+            </p:nvPicPr>
+            <p:blipFill>
+              <a:blip r:embed="rId3" cstate="print"/>
+              <a:stretch>
+                <a:fillRect/>
+              </a:stretch>
+            </p:blipFill>
+            <p:spPr>
+              <a:xfrm>
+                <a:off x="5399417" y="4927091"/>
+                <a:ext cx="2979420" cy="547877"/>
+              </a:xfrm>
+              <a:prstGeom prst="rect">
+                <a:avLst/>
+              </a:prstGeom>
+            </p:spPr>
+          </p:pic>
+          <p:pic>
+            <p:nvPicPr>
+              <p:cNvPr id="10" name="object 8">
+                <a:extLst>
+                  <a:ext uri="{FF2B5EF4-FFF2-40B4-BE49-F238E27FC236}">
+                    <a16:creationId xmlns:a16="http://schemas.microsoft.com/office/drawing/2014/main" id="{ABF2BD3E-9AAF-8FF1-8FD9-9B9A3B2630FD}"/>
+                  </a:ext>
+                </a:extLst>
+              </p:cNvPr>
+              <p:cNvPicPr/>
+              <p:nvPr/>
+            </p:nvPicPr>
+            <p:blipFill>
+              <a:blip r:embed="rId4" cstate="print"/>
+              <a:stretch>
+                <a:fillRect/>
+              </a:stretch>
+            </p:blipFill>
+            <p:spPr>
+              <a:xfrm>
+                <a:off x="5399417" y="5725667"/>
+                <a:ext cx="2979420" cy="547877"/>
+              </a:xfrm>
+              <a:prstGeom prst="rect">
+                <a:avLst/>
+              </a:prstGeom>
+            </p:spPr>
+          </p:pic>
+          <p:pic>
+            <p:nvPicPr>
+              <p:cNvPr id="11" name="object 9">
+                <a:extLst>
+                  <a:ext uri="{FF2B5EF4-FFF2-40B4-BE49-F238E27FC236}">
+                    <a16:creationId xmlns:a16="http://schemas.microsoft.com/office/drawing/2014/main" id="{98805204-BB8F-7A11-8019-F08AFFED9908}"/>
+                  </a:ext>
+                </a:extLst>
+              </p:cNvPr>
+              <p:cNvPicPr/>
+              <p:nvPr/>
+            </p:nvPicPr>
+            <p:blipFill>
+              <a:blip r:embed="rId5" cstate="print"/>
+              <a:stretch>
+                <a:fillRect/>
+              </a:stretch>
+            </p:blipFill>
+            <p:spPr>
+              <a:xfrm>
+                <a:off x="5399417" y="6524243"/>
+                <a:ext cx="2979420" cy="542544"/>
+              </a:xfrm>
+              <a:prstGeom prst="rect">
+                <a:avLst/>
+              </a:prstGeom>
+            </p:spPr>
+          </p:pic>
+          <p:pic>
+            <p:nvPicPr>
+              <p:cNvPr id="12" name="object 10">
+                <a:extLst>
+                  <a:ext uri="{FF2B5EF4-FFF2-40B4-BE49-F238E27FC236}">
+                    <a16:creationId xmlns:a16="http://schemas.microsoft.com/office/drawing/2014/main" id="{05479FED-D365-A985-F715-1BDC4117E993}"/>
+                  </a:ext>
+                </a:extLst>
+              </p:cNvPr>
+              <p:cNvPicPr/>
+              <p:nvPr/>
+            </p:nvPicPr>
+            <p:blipFill>
+              <a:blip r:embed="rId6" cstate="print"/>
+              <a:stretch>
+                <a:fillRect/>
+              </a:stretch>
+            </p:blipFill>
+            <p:spPr>
+              <a:xfrm>
+                <a:off x="2692031" y="5725667"/>
+                <a:ext cx="1059180" cy="534923"/>
+              </a:xfrm>
+              <a:prstGeom prst="rect">
+                <a:avLst/>
+              </a:prstGeom>
+            </p:spPr>
+          </p:pic>
+          <p:pic>
+            <p:nvPicPr>
+              <p:cNvPr id="13" name="object 11">
+                <a:extLst>
+                  <a:ext uri="{FF2B5EF4-FFF2-40B4-BE49-F238E27FC236}">
+                    <a16:creationId xmlns:a16="http://schemas.microsoft.com/office/drawing/2014/main" id="{2DCB8A64-F478-5F82-BD24-2F4E80805358}"/>
+                  </a:ext>
+                </a:extLst>
+              </p:cNvPr>
+              <p:cNvPicPr/>
+              <p:nvPr/>
+            </p:nvPicPr>
+            <p:blipFill>
+              <a:blip r:embed="rId7" cstate="print"/>
+              <a:stretch>
+                <a:fillRect/>
+              </a:stretch>
+            </p:blipFill>
+            <p:spPr>
+              <a:xfrm>
+                <a:off x="2689745" y="5422391"/>
+                <a:ext cx="1066800" cy="181355"/>
+              </a:xfrm>
+              <a:prstGeom prst="rect">
+                <a:avLst/>
+              </a:prstGeom>
+            </p:spPr>
+          </p:pic>
+          <p:sp>
+            <p:nvSpPr>
+              <p:cNvPr id="14" name="object 12">
+                <a:extLst>
+                  <a:ext uri="{FF2B5EF4-FFF2-40B4-BE49-F238E27FC236}">
+                    <a16:creationId xmlns:a16="http://schemas.microsoft.com/office/drawing/2014/main" id="{BD2DD9C7-4465-C754-05CD-F2BE41E01025}"/>
+                  </a:ext>
+                </a:extLst>
+              </p:cNvPr>
+              <p:cNvSpPr/>
+              <p:nvPr/>
+            </p:nvSpPr>
+            <p:spPr>
+              <a:xfrm>
+                <a:off x="3648341" y="4988826"/>
+                <a:ext cx="1833880" cy="1664970"/>
+              </a:xfrm>
+              <a:custGeom>
+                <a:avLst/>
+                <a:gdLst/>
+                <a:ahLst/>
+                <a:cxnLst/>
+                <a:rect l="l" t="t" r="r" b="b"/>
+                <a:pathLst>
+                  <a:path w="1833879" h="1664970">
+                    <a:moveTo>
+                      <a:pt x="1743024" y="794804"/>
+                    </a:moveTo>
+                    <a:lnTo>
+                      <a:pt x="1706181" y="794880"/>
+                    </a:lnTo>
+                    <a:lnTo>
+                      <a:pt x="1673491" y="795108"/>
+                    </a:lnTo>
+                    <a:lnTo>
+                      <a:pt x="1623885" y="795235"/>
+                    </a:lnTo>
+                    <a:lnTo>
+                      <a:pt x="1557731" y="795324"/>
+                    </a:lnTo>
+                    <a:lnTo>
+                      <a:pt x="1474292" y="795782"/>
+                    </a:lnTo>
+                    <a:lnTo>
+                      <a:pt x="1424305" y="796544"/>
+                    </a:lnTo>
+                    <a:lnTo>
+                      <a:pt x="1374343" y="797852"/>
+                    </a:lnTo>
+                    <a:lnTo>
+                      <a:pt x="1324419" y="799858"/>
+                    </a:lnTo>
+                    <a:lnTo>
+                      <a:pt x="1274610" y="802728"/>
+                    </a:lnTo>
+                    <a:lnTo>
+                      <a:pt x="1224940" y="806627"/>
+                    </a:lnTo>
+                    <a:lnTo>
+                      <a:pt x="1175473" y="811682"/>
+                    </a:lnTo>
+                    <a:lnTo>
+                      <a:pt x="1126223" y="818070"/>
+                    </a:lnTo>
+                    <a:lnTo>
+                      <a:pt x="1077264" y="825944"/>
+                    </a:lnTo>
+                    <a:lnTo>
+                      <a:pt x="1028623" y="835469"/>
+                    </a:lnTo>
+                    <a:lnTo>
+                      <a:pt x="980351" y="846785"/>
+                    </a:lnTo>
+                    <a:lnTo>
+                      <a:pt x="932497" y="860044"/>
+                    </a:lnTo>
+                    <a:lnTo>
+                      <a:pt x="885101" y="875423"/>
+                    </a:lnTo>
+                    <a:lnTo>
+                      <a:pt x="838200" y="893064"/>
+                    </a:lnTo>
+                    <a:lnTo>
+                      <a:pt x="804672" y="905256"/>
+                    </a:lnTo>
+                    <a:lnTo>
+                      <a:pt x="739140" y="929640"/>
+                    </a:lnTo>
+                    <a:lnTo>
+                      <a:pt x="690359" y="946531"/>
+                    </a:lnTo>
+                    <a:lnTo>
+                      <a:pt x="641705" y="961923"/>
+                    </a:lnTo>
+                    <a:lnTo>
+                      <a:pt x="592429" y="974890"/>
+                    </a:lnTo>
+                    <a:lnTo>
+                      <a:pt x="541782" y="984504"/>
+                    </a:lnTo>
+                    <a:lnTo>
+                      <a:pt x="475488" y="993559"/>
+                    </a:lnTo>
+                    <a:lnTo>
+                      <a:pt x="424751" y="998550"/>
+                    </a:lnTo>
+                    <a:lnTo>
+                      <a:pt x="374332" y="1001979"/>
+                    </a:lnTo>
+                    <a:lnTo>
+                      <a:pt x="323672" y="1004074"/>
+                    </a:lnTo>
+                    <a:lnTo>
+                      <a:pt x="272973" y="1004951"/>
+                    </a:lnTo>
+                    <a:lnTo>
+                      <a:pt x="233895" y="1004785"/>
+                    </a:lnTo>
+                    <a:lnTo>
+                      <a:pt x="222415" y="1004735"/>
+                    </a:lnTo>
+                    <a:lnTo>
+                      <a:pt x="172212" y="1003554"/>
+                    </a:lnTo>
+                    <a:lnTo>
+                      <a:pt x="138684" y="1002792"/>
+                    </a:lnTo>
+                    <a:lnTo>
+                      <a:pt x="71628" y="1000506"/>
+                    </a:lnTo>
+                    <a:lnTo>
+                      <a:pt x="4572" y="997458"/>
+                    </a:lnTo>
+                    <a:lnTo>
+                      <a:pt x="1524" y="998982"/>
+                    </a:lnTo>
+                    <a:lnTo>
+                      <a:pt x="0" y="1002030"/>
+                    </a:lnTo>
+                    <a:lnTo>
+                      <a:pt x="762" y="1005078"/>
+                    </a:lnTo>
+                    <a:lnTo>
+                      <a:pt x="4572" y="1006602"/>
+                    </a:lnTo>
+                    <a:lnTo>
+                      <a:pt x="70866" y="1009650"/>
+                    </a:lnTo>
+                    <a:lnTo>
+                      <a:pt x="185610" y="1013574"/>
+                    </a:lnTo>
+                    <a:lnTo>
+                      <a:pt x="233895" y="1014323"/>
+                    </a:lnTo>
+                    <a:lnTo>
+                      <a:pt x="272973" y="1014183"/>
+                    </a:lnTo>
+                    <a:lnTo>
+                      <a:pt x="282511" y="1014158"/>
+                    </a:lnTo>
+                    <a:lnTo>
+                      <a:pt x="331228" y="1013028"/>
+                    </a:lnTo>
+                    <a:lnTo>
+                      <a:pt x="379793" y="1010907"/>
+                    </a:lnTo>
+                    <a:lnTo>
+                      <a:pt x="427951" y="1007757"/>
+                    </a:lnTo>
+                    <a:lnTo>
+                      <a:pt x="474726" y="1003617"/>
+                    </a:lnTo>
+                    <a:lnTo>
+                      <a:pt x="475488" y="1003554"/>
+                    </a:lnTo>
+                    <a:lnTo>
+                      <a:pt x="543306" y="994410"/>
+                    </a:lnTo>
+                    <a:lnTo>
+                      <a:pt x="590765" y="985202"/>
+                    </a:lnTo>
+                    <a:lnTo>
+                      <a:pt x="637552" y="973124"/>
+                    </a:lnTo>
+                    <a:lnTo>
+                      <a:pt x="683768" y="958862"/>
+                    </a:lnTo>
+                    <a:lnTo>
+                      <a:pt x="729526" y="943114"/>
+                    </a:lnTo>
+                    <a:lnTo>
+                      <a:pt x="774954" y="926592"/>
+                    </a:lnTo>
+                    <a:lnTo>
+                      <a:pt x="841248" y="901446"/>
+                    </a:lnTo>
+                    <a:lnTo>
+                      <a:pt x="875538" y="890016"/>
+                    </a:lnTo>
+                    <a:lnTo>
+                      <a:pt x="962215" y="861517"/>
+                    </a:lnTo>
+                    <a:lnTo>
+                      <a:pt x="1014704" y="847801"/>
+                    </a:lnTo>
+                    <a:lnTo>
+                      <a:pt x="1067587" y="836676"/>
+                    </a:lnTo>
+                    <a:lnTo>
+                      <a:pt x="1121168" y="828141"/>
+                    </a:lnTo>
+                    <a:lnTo>
+                      <a:pt x="1217676" y="817626"/>
+                    </a:lnTo>
+                    <a:lnTo>
+                      <a:pt x="1261110" y="814578"/>
+                    </a:lnTo>
+                    <a:lnTo>
+                      <a:pt x="1310474" y="811174"/>
+                    </a:lnTo>
+                    <a:lnTo>
+                      <a:pt x="1359877" y="808520"/>
+                    </a:lnTo>
+                    <a:lnTo>
+                      <a:pt x="1409319" y="806538"/>
+                    </a:lnTo>
+                    <a:lnTo>
+                      <a:pt x="1458772" y="805154"/>
+                    </a:lnTo>
+                    <a:lnTo>
+                      <a:pt x="1508239" y="804265"/>
+                    </a:lnTo>
+                    <a:lnTo>
+                      <a:pt x="1557731" y="803821"/>
+                    </a:lnTo>
+                    <a:lnTo>
+                      <a:pt x="1656702" y="803871"/>
+                    </a:lnTo>
+                    <a:lnTo>
+                      <a:pt x="1706181" y="804214"/>
+                    </a:lnTo>
+                    <a:lnTo>
+                      <a:pt x="1742694" y="804545"/>
+                    </a:lnTo>
+                    <a:lnTo>
+                      <a:pt x="1743024" y="804557"/>
+                    </a:lnTo>
+                    <a:lnTo>
+                      <a:pt x="1743024" y="794804"/>
+                    </a:lnTo>
+                    <a:close/>
+                  </a:path>
+                  <a:path w="1833879" h="1664970">
+                    <a:moveTo>
+                      <a:pt x="1818894" y="1633728"/>
+                    </a:moveTo>
+                    <a:lnTo>
+                      <a:pt x="1746504" y="1588770"/>
+                    </a:lnTo>
+                    <a:lnTo>
+                      <a:pt x="1743456" y="1622526"/>
+                    </a:lnTo>
+                    <a:lnTo>
+                      <a:pt x="1725930" y="1620774"/>
+                    </a:lnTo>
+                    <a:lnTo>
+                      <a:pt x="1676577" y="1617383"/>
+                    </a:lnTo>
+                    <a:lnTo>
+                      <a:pt x="1626870" y="1614017"/>
+                    </a:lnTo>
+                    <a:lnTo>
+                      <a:pt x="1576908" y="1610474"/>
+                    </a:lnTo>
+                    <a:lnTo>
+                      <a:pt x="1526819" y="1606537"/>
+                    </a:lnTo>
+                    <a:lnTo>
+                      <a:pt x="1476730" y="1602028"/>
+                    </a:lnTo>
+                    <a:lnTo>
+                      <a:pt x="1426768" y="1596732"/>
+                    </a:lnTo>
+                    <a:lnTo>
+                      <a:pt x="1377061" y="1590433"/>
+                    </a:lnTo>
+                    <a:lnTo>
+                      <a:pt x="1327708" y="1582953"/>
+                    </a:lnTo>
+                    <a:lnTo>
+                      <a:pt x="1278851" y="1574088"/>
+                    </a:lnTo>
+                    <a:lnTo>
+                      <a:pt x="1230630" y="1563624"/>
+                    </a:lnTo>
+                    <a:lnTo>
+                      <a:pt x="1193292" y="1553718"/>
+                    </a:lnTo>
+                    <a:lnTo>
+                      <a:pt x="1145222" y="1536954"/>
+                    </a:lnTo>
+                    <a:lnTo>
+                      <a:pt x="1101420" y="1515287"/>
+                    </a:lnTo>
+                    <a:lnTo>
+                      <a:pt x="1060894" y="1489722"/>
+                    </a:lnTo>
+                    <a:lnTo>
+                      <a:pt x="1022604" y="1461249"/>
+                    </a:lnTo>
+                    <a:lnTo>
+                      <a:pt x="985558" y="1430845"/>
+                    </a:lnTo>
+                    <a:lnTo>
+                      <a:pt x="948728" y="1399527"/>
+                    </a:lnTo>
+                    <a:lnTo>
+                      <a:pt x="911123" y="1368259"/>
+                    </a:lnTo>
+                    <a:lnTo>
+                      <a:pt x="871728" y="1338072"/>
+                    </a:lnTo>
+                    <a:lnTo>
+                      <a:pt x="829056" y="1309878"/>
+                    </a:lnTo>
+                    <a:lnTo>
+                      <a:pt x="773811" y="1281963"/>
+                    </a:lnTo>
+                    <a:lnTo>
+                      <a:pt x="729996" y="1265707"/>
+                    </a:lnTo>
+                    <a:lnTo>
+                      <a:pt x="683856" y="1252283"/>
+                    </a:lnTo>
+                    <a:lnTo>
+                      <a:pt x="636130" y="1241272"/>
+                    </a:lnTo>
+                    <a:lnTo>
+                      <a:pt x="587552" y="1232217"/>
+                    </a:lnTo>
+                    <a:lnTo>
+                      <a:pt x="538848" y="1224699"/>
+                    </a:lnTo>
+                    <a:lnTo>
+                      <a:pt x="490753" y="1218285"/>
+                    </a:lnTo>
+                    <a:lnTo>
+                      <a:pt x="399288" y="1207008"/>
+                    </a:lnTo>
+                    <a:lnTo>
+                      <a:pt x="346710" y="1201674"/>
+                    </a:lnTo>
+                    <a:lnTo>
+                      <a:pt x="320802" y="1199388"/>
+                    </a:lnTo>
+                    <a:lnTo>
+                      <a:pt x="273443" y="1195006"/>
+                    </a:lnTo>
+                    <a:lnTo>
+                      <a:pt x="226060" y="1190904"/>
+                    </a:lnTo>
+                    <a:lnTo>
+                      <a:pt x="178650" y="1186942"/>
+                    </a:lnTo>
+                    <a:lnTo>
+                      <a:pt x="131241" y="1182954"/>
+                    </a:lnTo>
+                    <a:lnTo>
+                      <a:pt x="83883" y="1178775"/>
+                    </a:lnTo>
+                    <a:lnTo>
+                      <a:pt x="36576" y="1174242"/>
+                    </a:lnTo>
+                    <a:lnTo>
+                      <a:pt x="18288" y="1171956"/>
+                    </a:lnTo>
+                    <a:lnTo>
+                      <a:pt x="14478" y="1172718"/>
+                    </a:lnTo>
+                    <a:lnTo>
+                      <a:pt x="12954" y="1176528"/>
+                    </a:lnTo>
+                    <a:lnTo>
+                      <a:pt x="13716" y="1179576"/>
+                    </a:lnTo>
+                    <a:lnTo>
+                      <a:pt x="16764" y="1181862"/>
+                    </a:lnTo>
+                    <a:lnTo>
+                      <a:pt x="72110" y="1187640"/>
+                    </a:lnTo>
+                    <a:lnTo>
+                      <a:pt x="127584" y="1192428"/>
+                    </a:lnTo>
+                    <a:lnTo>
+                      <a:pt x="183121" y="1196759"/>
+                    </a:lnTo>
+                    <a:lnTo>
+                      <a:pt x="238658" y="1201178"/>
+                    </a:lnTo>
+                    <a:lnTo>
+                      <a:pt x="294132" y="1206246"/>
+                    </a:lnTo>
+                    <a:lnTo>
+                      <a:pt x="345948" y="1210818"/>
+                    </a:lnTo>
+                    <a:lnTo>
+                      <a:pt x="392938" y="1216317"/>
+                    </a:lnTo>
+                    <a:lnTo>
+                      <a:pt x="442925" y="1221968"/>
+                    </a:lnTo>
+                    <a:lnTo>
+                      <a:pt x="494957" y="1228217"/>
+                    </a:lnTo>
+                    <a:lnTo>
+                      <a:pt x="548030" y="1235494"/>
+                    </a:lnTo>
+                    <a:lnTo>
+                      <a:pt x="601167" y="1244219"/>
+                    </a:lnTo>
+                    <a:lnTo>
+                      <a:pt x="653389" y="1254823"/>
+                    </a:lnTo>
+                    <a:lnTo>
+                      <a:pt x="703707" y="1267739"/>
+                    </a:lnTo>
+                    <a:lnTo>
+                      <a:pt x="751166" y="1283411"/>
+                    </a:lnTo>
+                    <a:lnTo>
+                      <a:pt x="794766" y="1302258"/>
+                    </a:lnTo>
+                    <a:lnTo>
+                      <a:pt x="838962" y="1327404"/>
+                    </a:lnTo>
+                    <a:lnTo>
+                      <a:pt x="894918" y="1367536"/>
+                    </a:lnTo>
+                    <a:lnTo>
+                      <a:pt x="934707" y="1399933"/>
+                    </a:lnTo>
+                    <a:lnTo>
+                      <a:pt x="973264" y="1432661"/>
+                    </a:lnTo>
+                    <a:lnTo>
+                      <a:pt x="1011809" y="1464602"/>
+                    </a:lnTo>
+                    <a:lnTo>
+                      <a:pt x="1051560" y="1494688"/>
+                    </a:lnTo>
+                    <a:lnTo>
+                      <a:pt x="1093736" y="1521815"/>
+                    </a:lnTo>
+                    <a:lnTo>
+                      <a:pt x="1139545" y="1544904"/>
+                    </a:lnTo>
+                    <a:lnTo>
+                      <a:pt x="1190244" y="1562862"/>
+                    </a:lnTo>
+                    <a:lnTo>
+                      <a:pt x="1228344" y="1573530"/>
+                    </a:lnTo>
+                    <a:lnTo>
+                      <a:pt x="1276870" y="1583817"/>
+                    </a:lnTo>
+                    <a:lnTo>
+                      <a:pt x="1325943" y="1592567"/>
+                    </a:lnTo>
+                    <a:lnTo>
+                      <a:pt x="1375448" y="1599958"/>
+                    </a:lnTo>
+                    <a:lnTo>
+                      <a:pt x="1425282" y="1606194"/>
+                    </a:lnTo>
+                    <a:lnTo>
+                      <a:pt x="1475333" y="1611490"/>
+                    </a:lnTo>
+                    <a:lnTo>
+                      <a:pt x="1525485" y="1616036"/>
+                    </a:lnTo>
+                    <a:lnTo>
+                      <a:pt x="1575663" y="1620024"/>
+                    </a:lnTo>
+                    <a:lnTo>
+                      <a:pt x="1625739" y="1623656"/>
+                    </a:lnTo>
+                    <a:lnTo>
+                      <a:pt x="1675599" y="1627136"/>
+                    </a:lnTo>
+                    <a:lnTo>
+                      <a:pt x="1725168" y="1630680"/>
+                    </a:lnTo>
+                    <a:lnTo>
+                      <a:pt x="1742605" y="1631988"/>
+                    </a:lnTo>
+                    <a:lnTo>
+                      <a:pt x="1739646" y="1664970"/>
+                    </a:lnTo>
+                    <a:lnTo>
+                      <a:pt x="1760982" y="1656549"/>
+                    </a:lnTo>
+                    <a:lnTo>
+                      <a:pt x="1818894" y="1633728"/>
+                    </a:lnTo>
+                    <a:close/>
+                  </a:path>
+                  <a:path w="1833879" h="1664970">
+                    <a:moveTo>
+                      <a:pt x="1818894" y="800862"/>
+                    </a:moveTo>
+                    <a:lnTo>
+                      <a:pt x="1743456" y="762000"/>
+                    </a:lnTo>
+                    <a:lnTo>
+                      <a:pt x="1743125" y="794766"/>
+                    </a:lnTo>
+                    <a:lnTo>
+                      <a:pt x="1755648" y="794766"/>
+                    </a:lnTo>
+                    <a:lnTo>
+                      <a:pt x="1743125" y="794804"/>
+                    </a:lnTo>
+                    <a:lnTo>
+                      <a:pt x="1743024" y="804557"/>
+                    </a:lnTo>
+                    <a:lnTo>
+                      <a:pt x="1743024" y="805180"/>
+                    </a:lnTo>
+                    <a:lnTo>
+                      <a:pt x="1742694" y="838200"/>
+                    </a:lnTo>
+                    <a:lnTo>
+                      <a:pt x="1743024" y="838034"/>
+                    </a:lnTo>
+                    <a:lnTo>
+                      <a:pt x="1760220" y="829602"/>
+                    </a:lnTo>
+                    <a:lnTo>
+                      <a:pt x="1818894" y="800862"/>
+                    </a:lnTo>
+                    <a:close/>
+                  </a:path>
+                  <a:path w="1833879" h="1664970">
+                    <a:moveTo>
+                      <a:pt x="1833372" y="33528"/>
+                    </a:moveTo>
+                    <a:lnTo>
+                      <a:pt x="1754886" y="0"/>
+                    </a:lnTo>
+                    <a:lnTo>
+                      <a:pt x="1756905" y="33743"/>
+                    </a:lnTo>
+                    <a:lnTo>
+                      <a:pt x="1720189" y="36474"/>
+                    </a:lnTo>
+                    <a:lnTo>
+                      <a:pt x="1670278" y="41452"/>
+                    </a:lnTo>
+                    <a:lnTo>
+                      <a:pt x="1620507" y="47828"/>
+                    </a:lnTo>
+                    <a:lnTo>
+                      <a:pt x="1570926" y="55702"/>
+                    </a:lnTo>
+                    <a:lnTo>
+                      <a:pt x="1521675" y="65189"/>
+                    </a:lnTo>
+                    <a:lnTo>
+                      <a:pt x="1472806" y="76415"/>
+                    </a:lnTo>
+                    <a:lnTo>
+                      <a:pt x="1424432" y="89496"/>
+                    </a:lnTo>
+                    <a:lnTo>
+                      <a:pt x="1376654" y="104533"/>
+                    </a:lnTo>
+                    <a:lnTo>
+                      <a:pt x="1329537" y="121653"/>
+                    </a:lnTo>
+                    <a:lnTo>
+                      <a:pt x="1283208" y="140970"/>
+                    </a:lnTo>
+                    <a:lnTo>
+                      <a:pt x="1247394" y="158496"/>
+                    </a:lnTo>
+                    <a:lnTo>
+                      <a:pt x="1203147" y="181813"/>
+                    </a:lnTo>
+                    <a:lnTo>
+                      <a:pt x="1161757" y="209727"/>
+                    </a:lnTo>
+                    <a:lnTo>
+                      <a:pt x="1122845" y="241490"/>
+                    </a:lnTo>
+                    <a:lnTo>
+                      <a:pt x="1086002" y="276326"/>
+                    </a:lnTo>
+                    <a:lnTo>
+                      <a:pt x="1050848" y="313461"/>
+                    </a:lnTo>
+                    <a:lnTo>
+                      <a:pt x="1017003" y="352132"/>
+                    </a:lnTo>
+                    <a:lnTo>
+                      <a:pt x="984084" y="391553"/>
+                    </a:lnTo>
+                    <a:lnTo>
+                      <a:pt x="951687" y="430974"/>
+                    </a:lnTo>
+                    <a:lnTo>
+                      <a:pt x="919441" y="469620"/>
+                    </a:lnTo>
+                    <a:lnTo>
+                      <a:pt x="886968" y="506730"/>
+                    </a:lnTo>
+                    <a:lnTo>
+                      <a:pt x="871728" y="523494"/>
+                    </a:lnTo>
+                    <a:lnTo>
+                      <a:pt x="855726" y="539496"/>
+                    </a:lnTo>
+                    <a:lnTo>
+                      <a:pt x="840486" y="555498"/>
+                    </a:lnTo>
+                    <a:lnTo>
+                      <a:pt x="785317" y="606564"/>
+                    </a:lnTo>
+                    <a:lnTo>
+                      <a:pt x="745451" y="636143"/>
+                    </a:lnTo>
+                    <a:lnTo>
+                      <a:pt x="704697" y="660984"/>
+                    </a:lnTo>
+                    <a:lnTo>
+                      <a:pt x="662838" y="681850"/>
+                    </a:lnTo>
+                    <a:lnTo>
+                      <a:pt x="619696" y="699503"/>
+                    </a:lnTo>
+                    <a:lnTo>
+                      <a:pt x="575094" y="714667"/>
+                    </a:lnTo>
+                    <a:lnTo>
+                      <a:pt x="528815" y="728116"/>
+                    </a:lnTo>
+                    <a:lnTo>
+                      <a:pt x="480695" y="740587"/>
+                    </a:lnTo>
+                    <a:lnTo>
+                      <a:pt x="430530" y="752856"/>
+                    </a:lnTo>
+                    <a:lnTo>
+                      <a:pt x="379476" y="762762"/>
+                    </a:lnTo>
+                    <a:lnTo>
+                      <a:pt x="330250" y="772121"/>
+                    </a:lnTo>
+                    <a:lnTo>
+                      <a:pt x="280924" y="780491"/>
+                    </a:lnTo>
+                    <a:lnTo>
+                      <a:pt x="231533" y="788212"/>
+                    </a:lnTo>
+                    <a:lnTo>
+                      <a:pt x="132740" y="803008"/>
+                    </a:lnTo>
+                    <a:lnTo>
+                      <a:pt x="83439" y="810742"/>
+                    </a:lnTo>
+                    <a:lnTo>
+                      <a:pt x="34290" y="819150"/>
+                    </a:lnTo>
+                    <a:lnTo>
+                      <a:pt x="28194" y="820674"/>
+                    </a:lnTo>
+                    <a:lnTo>
+                      <a:pt x="22098" y="821436"/>
+                    </a:lnTo>
+                    <a:lnTo>
+                      <a:pt x="16002" y="822960"/>
+                    </a:lnTo>
+                    <a:lnTo>
+                      <a:pt x="12954" y="825246"/>
+                    </a:lnTo>
+                    <a:lnTo>
+                      <a:pt x="12954" y="828294"/>
+                    </a:lnTo>
+                    <a:lnTo>
+                      <a:pt x="14478" y="831342"/>
+                    </a:lnTo>
+                    <a:lnTo>
+                      <a:pt x="18288" y="832104"/>
+                    </a:lnTo>
+                    <a:lnTo>
+                      <a:pt x="65684" y="823163"/>
+                    </a:lnTo>
+                    <a:lnTo>
+                      <a:pt x="113703" y="815428"/>
+                    </a:lnTo>
+                    <a:lnTo>
+                      <a:pt x="162052" y="808355"/>
+                    </a:lnTo>
+                    <a:lnTo>
+                      <a:pt x="210451" y="801395"/>
+                    </a:lnTo>
+                    <a:lnTo>
+                      <a:pt x="258635" y="793991"/>
+                    </a:lnTo>
+                    <a:lnTo>
+                      <a:pt x="306324" y="785622"/>
+                    </a:lnTo>
+                    <a:lnTo>
+                      <a:pt x="331470" y="781812"/>
+                    </a:lnTo>
+                    <a:lnTo>
+                      <a:pt x="381762" y="771906"/>
+                    </a:lnTo>
+                    <a:lnTo>
+                      <a:pt x="429450" y="762012"/>
+                    </a:lnTo>
+                    <a:lnTo>
+                      <a:pt x="478320" y="751014"/>
+                    </a:lnTo>
+                    <a:lnTo>
+                      <a:pt x="527710" y="738492"/>
+                    </a:lnTo>
+                    <a:lnTo>
+                      <a:pt x="576948" y="724027"/>
+                    </a:lnTo>
+                    <a:lnTo>
+                      <a:pt x="625386" y="707199"/>
+                    </a:lnTo>
+                    <a:lnTo>
+                      <a:pt x="672338" y="687616"/>
+                    </a:lnTo>
+                    <a:lnTo>
+                      <a:pt x="717181" y="664832"/>
+                    </a:lnTo>
+                    <a:lnTo>
+                      <a:pt x="759218" y="638467"/>
+                    </a:lnTo>
+                    <a:lnTo>
+                      <a:pt x="797814" y="608076"/>
+                    </a:lnTo>
+                    <a:lnTo>
+                      <a:pt x="831342" y="578358"/>
+                    </a:lnTo>
+                    <a:lnTo>
+                      <a:pt x="862584" y="546354"/>
+                    </a:lnTo>
+                    <a:lnTo>
+                      <a:pt x="896213" y="510514"/>
+                    </a:lnTo>
+                    <a:lnTo>
+                      <a:pt x="929246" y="472516"/>
+                    </a:lnTo>
+                    <a:lnTo>
+                      <a:pt x="994981" y="393217"/>
+                    </a:lnTo>
+                    <a:lnTo>
+                      <a:pt x="1028420" y="353466"/>
+                    </a:lnTo>
+                    <a:lnTo>
+                      <a:pt x="1062736" y="314706"/>
+                    </a:lnTo>
+                    <a:lnTo>
+                      <a:pt x="1098296" y="277710"/>
+                    </a:lnTo>
+                    <a:lnTo>
+                      <a:pt x="1135468" y="243268"/>
+                    </a:lnTo>
+                    <a:lnTo>
+                      <a:pt x="1174635" y="212153"/>
+                    </a:lnTo>
+                    <a:lnTo>
+                      <a:pt x="1216152" y="185166"/>
+                    </a:lnTo>
+                    <a:lnTo>
+                      <a:pt x="1251204" y="166878"/>
+                    </a:lnTo>
+                    <a:lnTo>
+                      <a:pt x="1294498" y="146392"/>
+                    </a:lnTo>
+                    <a:lnTo>
+                      <a:pt x="1338795" y="128104"/>
+                    </a:lnTo>
+                    <a:lnTo>
+                      <a:pt x="1383957" y="111899"/>
+                    </a:lnTo>
+                    <a:lnTo>
+                      <a:pt x="1429842" y="97637"/>
+                    </a:lnTo>
+                    <a:lnTo>
+                      <a:pt x="1476311" y="85229"/>
+                    </a:lnTo>
+                    <a:lnTo>
+                      <a:pt x="1523250" y="74523"/>
+                    </a:lnTo>
+                    <a:lnTo>
+                      <a:pt x="1570520" y="65417"/>
+                    </a:lnTo>
+                    <a:lnTo>
+                      <a:pt x="1617980" y="57785"/>
+                    </a:lnTo>
+                    <a:lnTo>
+                      <a:pt x="1665516" y="51511"/>
+                    </a:lnTo>
+                    <a:lnTo>
+                      <a:pt x="1712976" y="46482"/>
+                    </a:lnTo>
+                    <a:lnTo>
+                      <a:pt x="1752600" y="43434"/>
+                    </a:lnTo>
+                    <a:lnTo>
+                      <a:pt x="1756905" y="43053"/>
+                    </a:lnTo>
+                    <a:lnTo>
+                      <a:pt x="1757464" y="43002"/>
+                    </a:lnTo>
+                    <a:lnTo>
+                      <a:pt x="1759458" y="76200"/>
+                    </a:lnTo>
+                    <a:lnTo>
+                      <a:pt x="1774698" y="67398"/>
+                    </a:lnTo>
+                    <a:lnTo>
+                      <a:pt x="1833372" y="33528"/>
+                    </a:lnTo>
+                    <a:close/>
+                  </a:path>
+                </a:pathLst>
+              </a:custGeom>
+              <a:solidFill>
+                <a:srgbClr val="FF0066"/>
+              </a:solidFill>
+            </p:spPr>
+            <p:txBody>
+              <a:bodyPr wrap="square" lIns="0" tIns="0" rIns="0" bIns="0" rtlCol="0"/>
+              <a:lstStyle/>
+              <a:p>
+                <a:endParaRPr/>
+              </a:p>
+            </p:txBody>
+          </p:sp>
+        </p:grpSp>
+        <p:sp>
+          <p:nvSpPr>
+            <p:cNvPr id="15" name="object 13">
+              <a:extLst>
+                <a:ext uri="{FF2B5EF4-FFF2-40B4-BE49-F238E27FC236}">
+                  <a16:creationId xmlns:a16="http://schemas.microsoft.com/office/drawing/2014/main" id="{C888AF9B-167E-F0A2-1FA8-FAE8F3991282}"/>
+                </a:ext>
+              </a:extLst>
+            </p:cNvPr>
+            <p:cNvSpPr txBox="1"/>
+            <p:nvPr/>
+          </p:nvSpPr>
+          <p:spPr>
+            <a:xfrm>
+              <a:off x="2008003" y="6337806"/>
+              <a:ext cx="1953895" cy="269875"/>
+            </a:xfrm>
+            <a:prstGeom prst="rect">
+              <a:avLst/>
+            </a:prstGeom>
+          </p:spPr>
+          <p:txBody>
+            <a:bodyPr vert="horz" wrap="square" lIns="0" tIns="12700" rIns="0" bIns="0" rtlCol="0">
+              <a:spAutoFit/>
+            </a:bodyPr>
+            <a:lstStyle/>
+            <a:p>
+              <a:pPr marL="12700">
+                <a:lnSpc>
+                  <a:spcPct val="100000"/>
+                </a:lnSpc>
+                <a:spcBef>
+                  <a:spcPts val="100"/>
+                </a:spcBef>
+                <a:tabLst>
+                  <a:tab pos="1330325" algn="l"/>
+                </a:tabLst>
+              </a:pPr>
+              <a:r>
+                <a:rPr sz="1600" b="1" spc="-10" dirty="0">
+                  <a:latin typeface="Lantinghei SC Heavy"/>
+                  <a:cs typeface="Lantinghei SC Heavy"/>
+                </a:rPr>
+                <a:t>块锚主码</a:t>
+              </a:r>
+              <a:r>
+                <a:rPr sz="1600" b="1" spc="-60" dirty="0">
+                  <a:latin typeface="Lantinghei SC Heavy"/>
+                  <a:cs typeface="Lantinghei SC Heavy"/>
+                </a:rPr>
+                <a:t>值</a:t>
+              </a:r>
+              <a:r>
+                <a:rPr sz="1600" b="1" dirty="0">
+                  <a:latin typeface="Lantinghei SC Heavy"/>
+                  <a:cs typeface="Lantinghei SC Heavy"/>
+                </a:rPr>
+                <a:t>	</a:t>
+              </a:r>
+              <a:r>
+                <a:rPr sz="1600" b="1" spc="-10" dirty="0">
+                  <a:latin typeface="Lantinghei SC Heavy"/>
+                  <a:cs typeface="Lantinghei SC Heavy"/>
+                </a:rPr>
+                <a:t>块指</a:t>
+              </a:r>
+              <a:r>
+                <a:rPr sz="1600" b="1" spc="-50" dirty="0">
+                  <a:latin typeface="Lantinghei SC Heavy"/>
+                  <a:cs typeface="Lantinghei SC Heavy"/>
+                </a:rPr>
+                <a:t>针</a:t>
+              </a:r>
+              <a:endParaRPr sz="1600">
+                <a:latin typeface="Lantinghei SC Heavy"/>
+                <a:cs typeface="Lantinghei SC Heavy"/>
+              </a:endParaRPr>
+            </a:p>
+          </p:txBody>
+        </p:sp>
+        <p:sp>
+          <p:nvSpPr>
+            <p:cNvPr id="19" name="文本框 18">
+              <a:extLst>
+                <a:ext uri="{FF2B5EF4-FFF2-40B4-BE49-F238E27FC236}">
+                  <a16:creationId xmlns:a16="http://schemas.microsoft.com/office/drawing/2014/main" id="{DEBAE271-739C-C726-9895-621989876937}"/>
+                </a:ext>
+              </a:extLst>
+            </p:cNvPr>
+            <p:cNvSpPr txBox="1"/>
+            <p:nvPr/>
+          </p:nvSpPr>
+          <p:spPr>
+            <a:xfrm>
+              <a:off x="2518397" y="4704331"/>
+              <a:ext cx="1717137" cy="461665"/>
+            </a:xfrm>
+            <a:prstGeom prst="rect">
+              <a:avLst/>
+            </a:prstGeom>
+            <a:noFill/>
+          </p:spPr>
+          <p:txBody>
+            <a:bodyPr wrap="none" rtlCol="0">
+              <a:spAutoFit/>
+            </a:bodyPr>
+            <a:lstStyle/>
+            <a:p>
+              <a:r>
+                <a:rPr lang="zh-CN" altLang="en-US" sz="2400" b="1" spc="-10" dirty="0">
+                  <a:solidFill>
+                    <a:srgbClr val="3333CC"/>
+                  </a:solidFill>
+                  <a:latin typeface="SimHei" panose="02010609060101010101" pitchFamily="49" charset="-122"/>
+                  <a:ea typeface="SimHei" panose="02010609060101010101" pitchFamily="49" charset="-122"/>
+                  <a:cs typeface="Lantinghei SC Heavy"/>
+                </a:rPr>
+                <a:t>主索引文件</a:t>
+              </a:r>
+              <a:endParaRPr lang="zh-CN" altLang="en-US" sz="2400" dirty="0">
+                <a:latin typeface="SimHei" panose="02010609060101010101" pitchFamily="49" charset="-122"/>
+                <a:ea typeface="SimHei" panose="02010609060101010101" pitchFamily="49" charset="-122"/>
+                <a:cs typeface="Lantinghei SC Heavy"/>
+              </a:endParaRPr>
+            </a:p>
+          </p:txBody>
+        </p:sp>
+        <p:sp>
+          <p:nvSpPr>
+            <p:cNvPr id="20" name="文本框 19">
+              <a:extLst>
+                <a:ext uri="{FF2B5EF4-FFF2-40B4-BE49-F238E27FC236}">
+                  <a16:creationId xmlns:a16="http://schemas.microsoft.com/office/drawing/2014/main" id="{549D9FBB-4224-9297-E7EC-9F6FBF2EE344}"/>
+                </a:ext>
+              </a:extLst>
+            </p:cNvPr>
+            <p:cNvSpPr txBox="1"/>
+            <p:nvPr/>
+          </p:nvSpPr>
+          <p:spPr>
+            <a:xfrm>
+              <a:off x="6256301" y="3994509"/>
+              <a:ext cx="1108958" cy="461665"/>
+            </a:xfrm>
+            <a:prstGeom prst="rect">
+              <a:avLst/>
+            </a:prstGeom>
+            <a:noFill/>
+          </p:spPr>
+          <p:txBody>
+            <a:bodyPr wrap="none" rtlCol="0">
+              <a:spAutoFit/>
+            </a:bodyPr>
+            <a:lstStyle/>
+            <a:p>
+              <a:r>
+                <a:rPr lang="zh-CN" altLang="en-US" sz="2400" b="1" spc="-10" dirty="0">
+                  <a:solidFill>
+                    <a:srgbClr val="3333CC"/>
+                  </a:solidFill>
+                  <a:latin typeface="SimHei" panose="02010609060101010101" pitchFamily="49" charset="-122"/>
+                  <a:ea typeface="SimHei" panose="02010609060101010101" pitchFamily="49" charset="-122"/>
+                  <a:cs typeface="Lantinghei SC Heavy"/>
+                </a:rPr>
+                <a:t>主文件</a:t>
+              </a:r>
+              <a:endParaRPr lang="zh-CN" altLang="en-US" sz="2400" dirty="0">
+                <a:latin typeface="SimHei" panose="02010609060101010101" pitchFamily="49" charset="-122"/>
+                <a:ea typeface="SimHei" panose="02010609060101010101" pitchFamily="49" charset="-122"/>
+                <a:cs typeface="Lantinghei SC Heavy"/>
+              </a:endParaRPr>
+            </a:p>
+          </p:txBody>
+        </p:sp>
+      </p:grpSp>
+      <p:pic>
+        <p:nvPicPr>
+          <p:cNvPr id="22" name="object 5">
+            <a:extLst>
+              <a:ext uri="{FF2B5EF4-FFF2-40B4-BE49-F238E27FC236}">
+                <a16:creationId xmlns:a16="http://schemas.microsoft.com/office/drawing/2014/main" id="{7DB73C3C-07FA-C243-D076-2B4544915E4D}"/>
+              </a:ext>
+            </a:extLst>
+          </p:cNvPr>
+          <p:cNvPicPr/>
+          <p:nvPr/>
+        </p:nvPicPr>
+        <p:blipFill>
+          <a:blip r:embed="rId8" cstate="print"/>
+          <a:stretch>
+            <a:fillRect/>
+          </a:stretch>
+        </p:blipFill>
+        <p:spPr>
+          <a:xfrm>
+            <a:off x="812307" y="4217621"/>
+            <a:ext cx="5943600" cy="2466594"/>
+          </a:xfrm>
+          <a:prstGeom prst="rect">
+            <a:avLst/>
+          </a:prstGeom>
+        </p:spPr>
+      </p:pic>
+      <p:sp>
+        <p:nvSpPr>
+          <p:cNvPr id="23" name="object 6">
+            <a:extLst>
+              <a:ext uri="{FF2B5EF4-FFF2-40B4-BE49-F238E27FC236}">
+                <a16:creationId xmlns:a16="http://schemas.microsoft.com/office/drawing/2014/main" id="{797E4EE7-80E7-3119-6531-EBD3B3900942}"/>
+              </a:ext>
+            </a:extLst>
+          </p:cNvPr>
+          <p:cNvSpPr txBox="1"/>
+          <p:nvPr/>
+        </p:nvSpPr>
+        <p:spPr>
+          <a:xfrm>
+            <a:off x="353253" y="4404162"/>
+            <a:ext cx="330200" cy="1854200"/>
+          </a:xfrm>
+          <a:prstGeom prst="rect">
+            <a:avLst/>
+          </a:prstGeom>
+        </p:spPr>
+        <p:txBody>
+          <a:bodyPr vert="eaVert" wrap="square" lIns="0" tIns="0" rIns="0" bIns="0" rtlCol="0">
+            <a:spAutoFit/>
+          </a:bodyPr>
+          <a:lstStyle/>
+          <a:p>
+            <a:pPr marL="12700">
+              <a:lnSpc>
+                <a:spcPct val="60000"/>
+              </a:lnSpc>
+            </a:pPr>
+            <a:r>
+              <a:rPr sz="2400" b="1" spc="-5" dirty="0">
+                <a:solidFill>
+                  <a:srgbClr val="3333CC"/>
+                </a:solidFill>
+                <a:latin typeface="Lantinghei SC Heavy"/>
+                <a:cs typeface="Lantinghei SC Heavy"/>
+              </a:rPr>
+              <a:t>辅助索引文</a:t>
+            </a:r>
+            <a:r>
+              <a:rPr sz="2400" b="1" dirty="0">
+                <a:solidFill>
+                  <a:srgbClr val="3333CC"/>
+                </a:solidFill>
+                <a:latin typeface="Lantinghei SC Heavy"/>
+                <a:cs typeface="Lantinghei SC Heavy"/>
+              </a:rPr>
+              <a:t>件</a:t>
+            </a:r>
+            <a:endParaRPr sz="2400">
+              <a:latin typeface="Lantinghei SC Heavy"/>
+              <a:cs typeface="Lantinghei SC Heavy"/>
+            </a:endParaRPr>
+          </a:p>
+        </p:txBody>
+      </p:sp>
+      <p:sp>
+        <p:nvSpPr>
+          <p:cNvPr id="24" name="object 7">
+            <a:extLst>
+              <a:ext uri="{FF2B5EF4-FFF2-40B4-BE49-F238E27FC236}">
+                <a16:creationId xmlns:a16="http://schemas.microsoft.com/office/drawing/2014/main" id="{4F72D743-9646-88AC-082E-2130EB8C4E47}"/>
+              </a:ext>
+            </a:extLst>
+          </p:cNvPr>
+          <p:cNvSpPr txBox="1"/>
+          <p:nvPr/>
+        </p:nvSpPr>
+        <p:spPr>
+          <a:xfrm>
+            <a:off x="7033707" y="4950851"/>
+            <a:ext cx="330200" cy="939800"/>
+          </a:xfrm>
+          <a:prstGeom prst="rect">
+            <a:avLst/>
+          </a:prstGeom>
+        </p:spPr>
+        <p:txBody>
+          <a:bodyPr vert="eaVert" wrap="square" lIns="0" tIns="0" rIns="0" bIns="0" rtlCol="0">
+            <a:spAutoFit/>
+          </a:bodyPr>
+          <a:lstStyle/>
+          <a:p>
+            <a:pPr marL="12700">
+              <a:lnSpc>
+                <a:spcPct val="60000"/>
+              </a:lnSpc>
+            </a:pPr>
+            <a:r>
+              <a:rPr sz="2400" b="1" spc="-5" dirty="0">
+                <a:solidFill>
+                  <a:srgbClr val="3333CC"/>
+                </a:solidFill>
+                <a:latin typeface="Lantinghei SC Heavy"/>
+                <a:cs typeface="Lantinghei SC Heavy"/>
+              </a:rPr>
+              <a:t>主文</a:t>
+            </a:r>
+            <a:r>
+              <a:rPr sz="2400" b="1" dirty="0">
+                <a:solidFill>
+                  <a:srgbClr val="3333CC"/>
+                </a:solidFill>
+                <a:latin typeface="Lantinghei SC Heavy"/>
+                <a:cs typeface="Lantinghei SC Heavy"/>
+              </a:rPr>
+              <a:t>件</a:t>
+            </a:r>
+            <a:endParaRPr sz="2400">
+              <a:latin typeface="Lantinghei SC Heavy"/>
+              <a:cs typeface="Lantinghei SC Heavy"/>
+            </a:endParaRPr>
+          </a:p>
+        </p:txBody>
+      </p:sp>
     </p:spTree>
     <p:extLst>
       <p:ext uri="{BB962C8B-B14F-4D97-AF65-F5344CB8AC3E}">
-        <p14:creationId xmlns:p14="http://schemas.microsoft.com/office/powerpoint/2010/main" val="4179245825"/>
+        <p14:creationId xmlns:p14="http://schemas.microsoft.com/office/powerpoint/2010/main" val="4085221575"/>
       </p:ext>
     </p:extLst>
   </p:cSld>
